--- a/IEP/t2-lesson2-vertical-horizontal-transformations-IEP.pptx
+++ b/IEP/t2-lesson2-vertical-horizontal-transformations-IEP.pptx
@@ -1809,6 +1809,40 @@
           </a:p>
         </p:txBody>
       </p:sp>
+      <p:sp>
+        <p:nvSpPr>
+          <p:cNvPr id="11" name="Slide Number 11"/>
+          <p:cNvSpPr txBox="1"/>
+          <p:nvPr/>
+        </p:nvSpPr>
+        <p:spPr>
+          <a:xfrm>
+            <a:off x="11277295" y="6611112"/>
+            <a:ext cx="685800" cy="201168"/>
+          </a:xfrm>
+          <a:prstGeom prst="rect">
+            <a:avLst/>
+          </a:prstGeom>
+          <a:noFill/>
+        </p:spPr>
+        <p:txBody>
+          <a:bodyPr wrap="none" lIns="0" tIns="0" rIns="0" bIns="0" anchor="b">
+            <a:noAutofit/>
+          </a:bodyPr>
+          <a:lstStyle/>
+          <a:p>
+            <a:pPr algn="r"/>
+            <a:fld id="{5C1A6E0B-3B1F-4D5E-9C7A-2F4B8D6E1A90}" type="slidenum">
+              <a:rPr lang="en-US" sz="1200" dirty="0">
+                <a:solidFill>
+                  <a:srgbClr val="5F6272"/>
+                </a:solidFill>
+              </a:rPr>
+              <a:t>1</a:t>
+            </a:fld>
+          </a:p>
+        </p:txBody>
+      </p:sp>
     </p:spTree>
   </p:cSld>
   <p:clrMapOvr>
@@ -3944,6 +3978,40 @@
               <a:t xml:space="preserve">y = 2x</a:t>
             </a:r>
             <a:endParaRPr lang="en-US" sz="1275" dirty="0"/>
+          </a:p>
+        </p:txBody>
+      </p:sp>
+      <p:sp>
+        <p:nvSpPr>
+          <p:cNvPr id="55" name="Slide Number 55"/>
+          <p:cNvSpPr txBox="1"/>
+          <p:nvPr/>
+        </p:nvSpPr>
+        <p:spPr>
+          <a:xfrm>
+            <a:off x="11277295" y="6611112"/>
+            <a:ext cx="685800" cy="201168"/>
+          </a:xfrm>
+          <a:prstGeom prst="rect">
+            <a:avLst/>
+          </a:prstGeom>
+          <a:noFill/>
+        </p:spPr>
+        <p:txBody>
+          <a:bodyPr wrap="none" lIns="0" tIns="0" rIns="0" bIns="0" anchor="b">
+            <a:noAutofit/>
+          </a:bodyPr>
+          <a:lstStyle/>
+          <a:p>
+            <a:pPr algn="r"/>
+            <a:fld id="{5C1A6E0B-3B1F-4D5E-9C7A-2F4B8D6E1A90}" type="slidenum">
+              <a:rPr lang="en-US" sz="1200" dirty="0">
+                <a:solidFill>
+                  <a:srgbClr val="5F6272"/>
+                </a:solidFill>
+              </a:rPr>
+              <a:t>10</a:t>
+            </a:fld>
           </a:p>
         </p:txBody>
       </p:sp>
@@ -4983,6 +5051,40 @@
               <a:t xml:space="preserve"> + 3</a:t>
             </a:r>
             <a:endParaRPr lang="en-US" sz="2325" dirty="0"/>
+          </a:p>
+        </p:txBody>
+      </p:sp>
+      <p:sp>
+        <p:nvSpPr>
+          <p:cNvPr id="13" name="Slide Number 13"/>
+          <p:cNvSpPr txBox="1"/>
+          <p:nvPr/>
+        </p:nvSpPr>
+        <p:spPr>
+          <a:xfrm>
+            <a:off x="11277295" y="6611112"/>
+            <a:ext cx="685800" cy="201168"/>
+          </a:xfrm>
+          <a:prstGeom prst="rect">
+            <a:avLst/>
+          </a:prstGeom>
+          <a:noFill/>
+        </p:spPr>
+        <p:txBody>
+          <a:bodyPr wrap="none" lIns="0" tIns="0" rIns="0" bIns="0" anchor="b">
+            <a:noAutofit/>
+          </a:bodyPr>
+          <a:lstStyle/>
+          <a:p>
+            <a:pPr algn="r"/>
+            <a:fld id="{5C1A6E0B-3B1F-4D5E-9C7A-2F4B8D6E1A90}" type="slidenum">
+              <a:rPr lang="en-US" sz="1200" dirty="0">
+                <a:solidFill>
+                  <a:srgbClr val="5F6272"/>
+                </a:solidFill>
+              </a:rPr>
+              <a:t>11</a:t>
+            </a:fld>
           </a:p>
         </p:txBody>
       </p:sp>
@@ -5591,6 +5693,40 @@
           </a:p>
         </p:txBody>
       </p:sp>
+      <p:sp>
+        <p:nvSpPr>
+          <p:cNvPr id="6" name="Slide Number 6"/>
+          <p:cNvSpPr txBox="1"/>
+          <p:nvPr/>
+        </p:nvSpPr>
+        <p:spPr>
+          <a:xfrm>
+            <a:off x="11277295" y="6611112"/>
+            <a:ext cx="685800" cy="201168"/>
+          </a:xfrm>
+          <a:prstGeom prst="rect">
+            <a:avLst/>
+          </a:prstGeom>
+          <a:noFill/>
+        </p:spPr>
+        <p:txBody>
+          <a:bodyPr wrap="none" lIns="0" tIns="0" rIns="0" bIns="0" anchor="b">
+            <a:noAutofit/>
+          </a:bodyPr>
+          <a:lstStyle/>
+          <a:p>
+            <a:pPr algn="r"/>
+            <a:fld id="{5C1A6E0B-3B1F-4D5E-9C7A-2F4B8D6E1A90}" type="slidenum">
+              <a:rPr lang="en-US" sz="1200" dirty="0">
+                <a:solidFill>
+                  <a:srgbClr val="5F6272"/>
+                </a:solidFill>
+              </a:rPr>
+              <a:t>12</a:t>
+            </a:fld>
+          </a:p>
+        </p:txBody>
+      </p:sp>
     </p:spTree>
   </p:cSld>
   <p:clrMapOvr>
@@ -6522,6 +6658,40 @@
               <a:t xml:space="preserve">Decreasing</a:t>
             </a:r>
             <a:endParaRPr lang="en-US" sz="2325" dirty="0"/>
+          </a:p>
+        </p:txBody>
+      </p:sp>
+      <p:sp>
+        <p:nvSpPr>
+          <p:cNvPr id="12" name="Slide Number 12"/>
+          <p:cNvSpPr txBox="1"/>
+          <p:nvPr/>
+        </p:nvSpPr>
+        <p:spPr>
+          <a:xfrm>
+            <a:off x="11277295" y="6611112"/>
+            <a:ext cx="685800" cy="201168"/>
+          </a:xfrm>
+          <a:prstGeom prst="rect">
+            <a:avLst/>
+          </a:prstGeom>
+          <a:noFill/>
+        </p:spPr>
+        <p:txBody>
+          <a:bodyPr wrap="none" lIns="0" tIns="0" rIns="0" bIns="0" anchor="b">
+            <a:noAutofit/>
+          </a:bodyPr>
+          <a:lstStyle/>
+          <a:p>
+            <a:pPr algn="r"/>
+            <a:fld id="{5C1A6E0B-3B1F-4D5E-9C7A-2F4B8D6E1A90}" type="slidenum">
+              <a:rPr lang="en-US" sz="1200" dirty="0">
+                <a:solidFill>
+                  <a:srgbClr val="5F6272"/>
+                </a:solidFill>
+              </a:rPr>
+              <a:t>2</a:t>
+            </a:fld>
           </a:p>
         </p:txBody>
       </p:sp>
@@ -8185,6 +8355,40 @@
           </a:p>
         </p:txBody>
       </p:sp>
+      <p:sp>
+        <p:nvSpPr>
+          <p:cNvPr id="12" name="Slide Number 12"/>
+          <p:cNvSpPr txBox="1"/>
+          <p:nvPr/>
+        </p:nvSpPr>
+        <p:spPr>
+          <a:xfrm>
+            <a:off x="11277295" y="6611112"/>
+            <a:ext cx="685800" cy="201168"/>
+          </a:xfrm>
+          <a:prstGeom prst="rect">
+            <a:avLst/>
+          </a:prstGeom>
+          <a:noFill/>
+        </p:spPr>
+        <p:txBody>
+          <a:bodyPr wrap="none" lIns="0" tIns="0" rIns="0" bIns="0" anchor="b">
+            <a:noAutofit/>
+          </a:bodyPr>
+          <a:lstStyle/>
+          <a:p>
+            <a:pPr algn="r"/>
+            <a:fld id="{5C1A6E0B-3B1F-4D5E-9C7A-2F4B8D6E1A90}" type="slidenum">
+              <a:rPr lang="en-US" sz="1200" dirty="0">
+                <a:solidFill>
+                  <a:srgbClr val="5F6272"/>
+                </a:solidFill>
+              </a:rPr>
+              <a:t>3</a:t>
+            </a:fld>
+          </a:p>
+        </p:txBody>
+      </p:sp>
     </p:spTree>
   </p:cSld>
   <p:clrMapOvr>
@@ -9403,6 +9607,40 @@
           </a:p>
         </p:txBody>
       </p:sp>
+      <p:sp>
+        <p:nvSpPr>
+          <p:cNvPr id="16" name="Slide Number 16"/>
+          <p:cNvSpPr txBox="1"/>
+          <p:nvPr/>
+        </p:nvSpPr>
+        <p:spPr>
+          <a:xfrm>
+            <a:off x="11277295" y="6611112"/>
+            <a:ext cx="685800" cy="201168"/>
+          </a:xfrm>
+          <a:prstGeom prst="rect">
+            <a:avLst/>
+          </a:prstGeom>
+          <a:noFill/>
+        </p:spPr>
+        <p:txBody>
+          <a:bodyPr wrap="none" lIns="0" tIns="0" rIns="0" bIns="0" anchor="b">
+            <a:noAutofit/>
+          </a:bodyPr>
+          <a:lstStyle/>
+          <a:p>
+            <a:pPr algn="r"/>
+            <a:fld id="{5C1A6E0B-3B1F-4D5E-9C7A-2F4B8D6E1A90}" type="slidenum">
+              <a:rPr lang="en-US" sz="1200" dirty="0">
+                <a:solidFill>
+                  <a:srgbClr val="5F6272"/>
+                </a:solidFill>
+              </a:rPr>
+              <a:t>4</a:t>
+            </a:fld>
+          </a:p>
+        </p:txBody>
+      </p:sp>
     </p:spTree>
   </p:cSld>
   <p:clrMapOvr>
@@ -9795,6 +10033,40 @@
           </a:p>
         </p:txBody>
       </p:sp>
+      <p:sp>
+        <p:nvSpPr>
+          <p:cNvPr id="8" name="Slide Number 8"/>
+          <p:cNvSpPr txBox="1"/>
+          <p:nvPr/>
+        </p:nvSpPr>
+        <p:spPr>
+          <a:xfrm>
+            <a:off x="11277295" y="6611112"/>
+            <a:ext cx="685800" cy="201168"/>
+          </a:xfrm>
+          <a:prstGeom prst="rect">
+            <a:avLst/>
+          </a:prstGeom>
+          <a:noFill/>
+        </p:spPr>
+        <p:txBody>
+          <a:bodyPr wrap="none" lIns="0" tIns="0" rIns="0" bIns="0" anchor="b">
+            <a:noAutofit/>
+          </a:bodyPr>
+          <a:lstStyle/>
+          <a:p>
+            <a:pPr algn="r"/>
+            <a:fld id="{5C1A6E0B-3B1F-4D5E-9C7A-2F4B8D6E1A90}" type="slidenum">
+              <a:rPr lang="en-US" sz="1200" dirty="0">
+                <a:solidFill>
+                  <a:srgbClr val="5F6272"/>
+                </a:solidFill>
+              </a:rPr>
+              <a:t>5</a:t>
+            </a:fld>
+          </a:p>
+        </p:txBody>
+      </p:sp>
     </p:spTree>
   </p:cSld>
   <p:clrMapOvr>
@@ -10550,6 +10822,40 @@
               <a:t xml:space="preserve"> − 4</a:t>
             </a:r>
             <a:endParaRPr lang="en-US" sz="2325" dirty="0"/>
+          </a:p>
+        </p:txBody>
+      </p:sp>
+      <p:sp>
+        <p:nvSpPr>
+          <p:cNvPr id="12" name="Slide Number 12"/>
+          <p:cNvSpPr txBox="1"/>
+          <p:nvPr/>
+        </p:nvSpPr>
+        <p:spPr>
+          <a:xfrm>
+            <a:off x="11277295" y="6611112"/>
+            <a:ext cx="685800" cy="201168"/>
+          </a:xfrm>
+          <a:prstGeom prst="rect">
+            <a:avLst/>
+          </a:prstGeom>
+          <a:noFill/>
+        </p:spPr>
+        <p:txBody>
+          <a:bodyPr wrap="none" lIns="0" tIns="0" rIns="0" bIns="0" anchor="b">
+            <a:noAutofit/>
+          </a:bodyPr>
+          <a:lstStyle/>
+          <a:p>
+            <a:pPr algn="r"/>
+            <a:fld id="{5C1A6E0B-3B1F-4D5E-9C7A-2F4B8D6E1A90}" type="slidenum">
+              <a:rPr lang="en-US" sz="1200" dirty="0">
+                <a:solidFill>
+                  <a:srgbClr val="5F6272"/>
+                </a:solidFill>
+              </a:rPr>
+              <a:t>6</a:t>
+            </a:fld>
           </a:p>
         </p:txBody>
       </p:sp>
@@ -11440,6 +11746,40 @@
               <a:t xml:space="preserve">right 3</a:t>
             </a:r>
             <a:endParaRPr lang="en-US" sz="2325" dirty="0"/>
+          </a:p>
+        </p:txBody>
+      </p:sp>
+      <p:sp>
+        <p:nvSpPr>
+          <p:cNvPr id="13" name="Slide Number 13"/>
+          <p:cNvSpPr txBox="1"/>
+          <p:nvPr/>
+        </p:nvSpPr>
+        <p:spPr>
+          <a:xfrm>
+            <a:off x="11277295" y="6611112"/>
+            <a:ext cx="685800" cy="201168"/>
+          </a:xfrm>
+          <a:prstGeom prst="rect">
+            <a:avLst/>
+          </a:prstGeom>
+          <a:noFill/>
+        </p:spPr>
+        <p:txBody>
+          <a:bodyPr wrap="none" lIns="0" tIns="0" rIns="0" bIns="0" anchor="b">
+            <a:noAutofit/>
+          </a:bodyPr>
+          <a:lstStyle/>
+          <a:p>
+            <a:pPr algn="r"/>
+            <a:fld id="{5C1A6E0B-3B1F-4D5E-9C7A-2F4B8D6E1A90}" type="slidenum">
+              <a:rPr lang="en-US" sz="1200" dirty="0">
+                <a:solidFill>
+                  <a:srgbClr val="5F6272"/>
+                </a:solidFill>
+              </a:rPr>
+              <a:t>7</a:t>
+            </a:fld>
           </a:p>
         </p:txBody>
       </p:sp>
@@ -12382,6 +12722,40 @@
           </a:p>
         </p:txBody>
       </p:sp>
+      <p:sp>
+        <p:nvSpPr>
+          <p:cNvPr id="10" name="Slide Number 10"/>
+          <p:cNvSpPr txBox="1"/>
+          <p:nvPr/>
+        </p:nvSpPr>
+        <p:spPr>
+          <a:xfrm>
+            <a:off x="11277295" y="6611112"/>
+            <a:ext cx="685800" cy="201168"/>
+          </a:xfrm>
+          <a:prstGeom prst="rect">
+            <a:avLst/>
+          </a:prstGeom>
+          <a:noFill/>
+        </p:spPr>
+        <p:txBody>
+          <a:bodyPr wrap="none" lIns="0" tIns="0" rIns="0" bIns="0" anchor="b">
+            <a:noAutofit/>
+          </a:bodyPr>
+          <a:lstStyle/>
+          <a:p>
+            <a:pPr algn="r"/>
+            <a:fld id="{5C1A6E0B-3B1F-4D5E-9C7A-2F4B8D6E1A90}" type="slidenum">
+              <a:rPr lang="en-US" sz="1200" dirty="0">
+                <a:solidFill>
+                  <a:srgbClr val="5F6272"/>
+                </a:solidFill>
+              </a:rPr>
+              <a:t>8</a:t>
+            </a:fld>
+          </a:p>
+        </p:txBody>
+      </p:sp>
     </p:spTree>
   </p:cSld>
   <p:clrMapOvr>
@@ -13378,6 +13752,40 @@
               <a:t xml:space="preserve">No</a:t>
             </a:r>
             <a:endParaRPr lang="en-US" sz="2325" dirty="0"/>
+          </a:p>
+        </p:txBody>
+      </p:sp>
+      <p:sp>
+        <p:nvSpPr>
+          <p:cNvPr id="12" name="Slide Number 12"/>
+          <p:cNvSpPr txBox="1"/>
+          <p:nvPr/>
+        </p:nvSpPr>
+        <p:spPr>
+          <a:xfrm>
+            <a:off x="11277295" y="6611112"/>
+            <a:ext cx="685800" cy="201168"/>
+          </a:xfrm>
+          <a:prstGeom prst="rect">
+            <a:avLst/>
+          </a:prstGeom>
+          <a:noFill/>
+        </p:spPr>
+        <p:txBody>
+          <a:bodyPr wrap="none" lIns="0" tIns="0" rIns="0" bIns="0" anchor="b">
+            <a:noAutofit/>
+          </a:bodyPr>
+          <a:lstStyle/>
+          <a:p>
+            <a:pPr algn="r"/>
+            <a:fld id="{5C1A6E0B-3B1F-4D5E-9C7A-2F4B8D6E1A90}" type="slidenum">
+              <a:rPr lang="en-US" sz="1200" dirty="0">
+                <a:solidFill>
+                  <a:srgbClr val="5F6272"/>
+                </a:solidFill>
+              </a:rPr>
+              <a:t>9</a:t>
+            </a:fld>
           </a:p>
         </p:txBody>
       </p:sp>

--- a/IEP/t2-lesson2-vertical-horizontal-transformations-IEP.pptx
+++ b/IEP/t2-lesson2-vertical-horizontal-transformations-IEP.pptx
@@ -20,6 +20,8 @@
     <p:sldId id="265" r:id="rId20"/>
     <p:sldId id="266" r:id="rId21"/>
     <p:sldId id="267" r:id="rId22"/>
+    <p:sldId id="268" r:id="rId23"/>
+    <p:sldId id="269" r:id="rId24"/>
   </p:sldIdLst>
   <p:sldSz cx="12192000" cy="6858000"/>
   <p:notesSz cx="6858000" cy="9144000"/>
@@ -284,7 +286,7 @@
           <a:p>
             <a:r>
               <a:rPr lang="en-US" dirty="0"/>
-              <a:t>Give students time to try all items before revealing. Students may use the steps slide and their notes.</a:t>
+              <a:t>For the teacher or assistant: click once for each step. Read the step aloud, and before each click ask the student what to do next. Students check their own paper and fix any mistake in a different color.</a:t>
             </a:r>
           </a:p>
         </p:txBody>
@@ -353,6 +355,121 @@
 </p:notes>
 </file>
 
+<file path=ppt/notesSlides/notesSlide13.xml><?xml version="1.0" encoding="utf-8"?>
+<p:notes xmlns:a="http://schemas.openxmlformats.org/drawingml/2006/main" xmlns:r="http://schemas.openxmlformats.org/officeDocument/2006/relationships" xmlns:p="http://schemas.openxmlformats.org/presentationml/2006/main">
+  <p:cSld>
+    <p:spTree>
+      <p:nvGrpSpPr>
+        <p:cNvPr id="1" name=""/>
+        <p:cNvGrpSpPr/>
+        <p:nvPr/>
+      </p:nvGrpSpPr>
+      <p:grpSpPr>
+        <a:xfrm>
+          <a:off x="0" y="0"/>
+          <a:ext cx="0" cy="0"/>
+          <a:chOff x="0" y="0"/>
+          <a:chExt cx="0" cy="0"/>
+        </a:xfrm>
+      </p:grpSpPr>
+      <p:sp>
+        <p:nvSpPr>
+          <p:cNvPr id="2" name="Slide Image Placeholder 1"/>
+          <p:cNvSpPr>
+            <a:spLocks noGrp="1" noRot="1" noChangeAspect="1"/>
+          </p:cNvSpPr>
+          <p:nvPr>
+            <p:ph type="sldImg"/>
+          </p:nvPr>
+        </p:nvSpPr>
+        <p:spPr/>
+      </p:sp>
+      <p:sp>
+        <p:nvSpPr>
+          <p:cNvPr id="3" name="Notes Placeholder 2"/>
+          <p:cNvSpPr>
+            <a:spLocks noGrp="1"/>
+          </p:cNvSpPr>
+          <p:nvPr>
+            <p:ph type="body" idx="1"/>
+          </p:nvPr>
+        </p:nvSpPr>
+        <p:spPr/>
+        <p:txBody>
+          <a:bodyPr/>
+          <a:lstStyle/>
+          <a:p>
+            <a:r>
+              <a:rPr lang="en-US" dirty="0"/>
+              <a:t>Give students time to try all items before revealing. Students may use the steps slide and their notes.</a:t>
+            </a:r>
+          </a:p>
+        </p:txBody>
+      </p:sp>
+    </p:spTree>
+  </p:cSld>
+  <p:clrMapOvr>
+    <a:masterClrMapping/>
+  </p:clrMapOvr>
+</p:notes>
+</file>
+
+<file path=ppt/notesSlides/notesSlide14.xml><?xml version="1.0" encoding="utf-8"?>
+<p:notes xmlns:a="http://schemas.openxmlformats.org/drawingml/2006/main" xmlns:r="http://schemas.openxmlformats.org/officeDocument/2006/relationships" xmlns:p="http://schemas.openxmlformats.org/presentationml/2006/main">
+  <p:cSld>
+    <p:spTree>
+      <p:nvGrpSpPr>
+        <p:cNvPr id="1" name=""/>
+        <p:cNvGrpSpPr/>
+        <p:nvPr/>
+      </p:nvGrpSpPr>
+      <p:grpSpPr>
+        <a:xfrm>
+          <a:off x="0" y="0"/>
+          <a:ext cx="0" cy="0"/>
+          <a:chOff x="0" y="0"/>
+          <a:chExt cx="0" cy="0"/>
+        </a:xfrm>
+      </p:grpSpPr>
+      <p:sp>
+        <p:nvSpPr>
+          <p:cNvPr id="2" name="Slide Image Placeholder 1"/>
+          <p:cNvSpPr>
+            <a:spLocks noGrp="1" noRot="1" noChangeAspect="1"/>
+          </p:cNvSpPr>
+          <p:nvPr>
+            <p:ph type="sldImg"/>
+          </p:nvPr>
+        </p:nvSpPr>
+        <p:spPr/>
+      </p:sp>
+      <p:sp>
+        <p:nvSpPr>
+          <p:cNvPr id="3" name="Notes Placeholder 2"/>
+          <p:cNvSpPr>
+            <a:spLocks noGrp="1"/>
+          </p:cNvSpPr>
+          <p:nvPr>
+            <p:ph type="body" idx="1"/>
+          </p:nvPr>
+        </p:nvSpPr>
+        <p:spPr/>
+        <p:txBody>
+          <a:bodyPr/>
+          <a:lstStyle/>
+          <a:p>
+            <a:endParaRPr lang="en-US"/>
+          </a:p>
+        </p:txBody>
+      </p:sp>
+    </p:spTree>
+  </p:cSld>
+  <p:clrMapOvr>
+    <a:masterClrMapping/>
+  </p:clrMapOvr>
+</p:notes>
+</file>
+
 <file path=ppt/notesSlides/notesSlide2.xml><?xml version="1.0" encoding="utf-8"?>
 <p:notes xmlns:a="http://schemas.openxmlformats.org/drawingml/2006/main" xmlns:r="http://schemas.openxmlformats.org/officeDocument/2006/relationships" xmlns:p="http://schemas.openxmlformats.org/presentationml/2006/main">
   <p:cSld>
@@ -747,7 +864,7 @@
           <a:p>
             <a:r>
               <a:rPr lang="en-US" dirty="0"/>
-              <a:t>Compare with j(x) + 4 = 2x + 3: left 4 and up 4 are not the same for this line.</a:t>
+              <a:t>For the teacher or assistant: click once for each step. Read the step aloud, and before each click ask the student what to do next. Students check their own paper and fix any mistake in a different color.</a:t>
             </a:r>
           </a:p>
         </p:txBody>
@@ -804,7 +921,10 @@
           <a:bodyPr/>
           <a:lstStyle/>
           <a:p>
-            <a:endParaRPr lang="en-US"/>
+            <a:r>
+              <a:rPr lang="en-US" dirty="0"/>
+              <a:t>Compare with j(x) + 4 = 2x + 3: left 4 and up 4 are not the same for this line.</a:t>
+            </a:r>
           </a:p>
         </p:txBody>
       </p:sp>
@@ -1909,7 +2029,7 @@
                 <a:latin typeface="Segoe UI"/>
                 <a:cs typeface="Segoe UI"/>
               </a:rPr>
-              <a:t xml:space="preserve">I do · Stretch inside</a:t>
+              <a:t xml:space="preserve">You do · Try it</a:t>
             </a:r>
             <a:endParaRPr lang="en-US" sz="1200" dirty="0"/>
           </a:p>
@@ -1946,6 +2066,16 @@
               </a:lnSpc>
             </a:pPr>
             <a:r>
+              <a:rPr lang="en-US" sz="3450" dirty="0" b="1" i="1">
+                <a:solidFill>
+                  <a:srgbClr val="16171D"/>
+                </a:solidFill>
+                <a:latin typeface="Segoe UI"/>
+                <a:cs typeface="Segoe UI"/>
+              </a:rPr>
+              <a:t xml:space="preserve">j</a:t>
+            </a:r>
+            <a:r>
               <a:rPr lang="en-US" sz="3450" dirty="0" b="1">
                 <a:solidFill>
                   <a:srgbClr val="16171D"/>
@@ -1953,7 +2083,7 @@
                 <a:latin typeface="Segoe UI"/>
                 <a:cs typeface="Segoe UI"/>
               </a:rPr>
-              <a:t xml:space="preserve">For </a:t>
+              <a:t xml:space="preserve">(</a:t>
             </a:r>
             <a:r>
               <a:rPr lang="en-US" sz="3450" dirty="0" b="1" i="1">
@@ -1963,7 +2093,7 @@
                 <a:latin typeface="Segoe UI"/>
                 <a:cs typeface="Segoe UI"/>
               </a:rPr>
-              <a:t xml:space="preserve">f</a:t>
+              <a:t xml:space="preserve">x</a:t>
             </a:r>
             <a:r>
               <a:rPr lang="en-US" sz="3450" dirty="0" b="1">
@@ -1973,7 +2103,7 @@
                 <a:latin typeface="Segoe UI"/>
                 <a:cs typeface="Segoe UI"/>
               </a:rPr>
-              <a:t xml:space="preserve">(</a:t>
+              <a:t xml:space="preserve">) = 2</a:t>
             </a:r>
             <a:r>
               <a:rPr lang="en-US" sz="3450" dirty="0" b="1" i="1">
@@ -1993,287 +2123,9 @@
                 <a:latin typeface="Segoe UI"/>
                 <a:cs typeface="Segoe UI"/>
               </a:rPr>
-              <a:t xml:space="preserve">) = </a:t>
-            </a:r>
-            <a:r>
-              <a:rPr lang="en-US" sz="3450" dirty="0" b="1" i="1">
-                <a:solidFill>
-                  <a:srgbClr val="16171D"/>
-                </a:solidFill>
-                <a:latin typeface="Segoe UI"/>
-                <a:cs typeface="Segoe UI"/>
-              </a:rPr>
-              <a:t xml:space="preserve">x</a:t>
-            </a:r>
-            <a:r>
-              <a:rPr lang="en-US" sz="3450" dirty="0" b="1">
-                <a:solidFill>
-                  <a:srgbClr val="16171D"/>
-                </a:solidFill>
-                <a:latin typeface="Segoe UI"/>
-                <a:cs typeface="Segoe UI"/>
-              </a:rPr>
-              <a:t xml:space="preserve">: </a:t>
-            </a:r>
-            <a:r>
-              <a:rPr lang="en-US" sz="3450" dirty="0" b="1" i="1">
-                <a:solidFill>
-                  <a:srgbClr val="16171D"/>
-                </a:solidFill>
-                <a:latin typeface="Segoe UI"/>
-                <a:cs typeface="Segoe UI"/>
-              </a:rPr>
-              <a:t xml:space="preserve">f</a:t>
-            </a:r>
-            <a:r>
-              <a:rPr lang="en-US" sz="3450" dirty="0" b="1">
-                <a:solidFill>
-                  <a:srgbClr val="16171D"/>
-                </a:solidFill>
-                <a:latin typeface="Segoe UI"/>
-                <a:cs typeface="Segoe UI"/>
-              </a:rPr>
-              <a:t xml:space="preserve">(2</a:t>
-            </a:r>
-            <a:r>
-              <a:rPr lang="en-US" sz="3450" dirty="0" b="1" i="1">
-                <a:solidFill>
-                  <a:srgbClr val="16171D"/>
-                </a:solidFill>
-                <a:latin typeface="Segoe UI"/>
-                <a:cs typeface="Segoe UI"/>
-              </a:rPr>
-              <a:t xml:space="preserve">x</a:t>
-            </a:r>
-            <a:r>
-              <a:rPr lang="en-US" sz="3450" dirty="0" b="1">
-                <a:solidFill>
-                  <a:srgbClr val="16171D"/>
-                </a:solidFill>
-                <a:latin typeface="Segoe UI"/>
-                <a:cs typeface="Segoe UI"/>
-              </a:rPr>
-              <a:t xml:space="preserve">) and 2</a:t>
-            </a:r>
-            <a:r>
-              <a:rPr lang="en-US" sz="3450" dirty="0" b="1" i="1">
-                <a:solidFill>
-                  <a:srgbClr val="16171D"/>
-                </a:solidFill>
-                <a:latin typeface="Segoe UI"/>
-                <a:cs typeface="Segoe UI"/>
-              </a:rPr>
-              <a:t xml:space="preserve">f</a:t>
-            </a:r>
-            <a:r>
-              <a:rPr lang="en-US" sz="3450" dirty="0" b="1">
-                <a:solidFill>
-                  <a:srgbClr val="16171D"/>
-                </a:solidFill>
-                <a:latin typeface="Segoe UI"/>
-                <a:cs typeface="Segoe UI"/>
-              </a:rPr>
-              <a:t xml:space="preserve">(</a:t>
-            </a:r>
-            <a:r>
-              <a:rPr lang="en-US" sz="3450" dirty="0" b="1" i="1">
-                <a:solidFill>
-                  <a:srgbClr val="16171D"/>
-                </a:solidFill>
-                <a:latin typeface="Segoe UI"/>
-                <a:cs typeface="Segoe UI"/>
-              </a:rPr>
-              <a:t xml:space="preserve">x</a:t>
-            </a:r>
-            <a:r>
-              <a:rPr lang="en-US" sz="3450" dirty="0" b="1">
-                <a:solidFill>
-                  <a:srgbClr val="16171D"/>
-                </a:solidFill>
-                <a:latin typeface="Segoe UI"/>
-                <a:cs typeface="Segoe UI"/>
-              </a:rPr>
-              <a:t xml:space="preserve">)</a:t>
+              <a:t xml:space="preserve"> − 1</a:t>
             </a:r>
             <a:endParaRPr lang="en-US" sz="3450" dirty="0"/>
-          </a:p>
-        </p:txBody>
-      </p:sp>
-      <p:sp>
-        <p:nvSpPr>
-          <p:cNvPr id="4" name="Shape 4"/>
-          <p:cNvSpPr txBox="1"/>
-          <p:nvPr/>
-        </p:nvSpPr>
-        <p:spPr>
-          <a:xfrm>
-            <a:off x="685800" y="1618488"/>
-            <a:ext cx="5219548" cy="352044"/>
-          </a:xfrm>
-          <a:prstGeom prst="rect">
-            <a:avLst/>
-          </a:prstGeom>
-          <a:noFill/>
-          <a:ln>
-            <a:noFill/>
-          </a:ln>
-        </p:spPr>
-        <p:txBody>
-          <a:bodyPr wrap="square" lIns="36576" tIns="27432" rIns="36576" bIns="27432" anchor="t">
-            <a:noAutofit/>
-          </a:bodyPr>
-          <a:lstStyle/>
-          <a:p>
-            <a:pPr algn="l">
-              <a:lnSpc>
-                <a:spcPct val="100000"/>
-              </a:lnSpc>
-            </a:pPr>
-            <a:r>
-              <a:rPr lang="en-US" sz="1950" dirty="0" i="1">
-                <a:solidFill>
-                  <a:srgbClr val="16171D"/>
-                </a:solidFill>
-                <a:latin typeface="Segoe UI"/>
-                <a:cs typeface="Segoe UI"/>
-              </a:rPr>
-              <a:t xml:space="preserve">f</a:t>
-            </a:r>
-            <a:r>
-              <a:rPr lang="en-US" sz="1950" dirty="0">
-                <a:solidFill>
-                  <a:srgbClr val="16171D"/>
-                </a:solidFill>
-                <a:latin typeface="Segoe UI"/>
-                <a:cs typeface="Segoe UI"/>
-              </a:rPr>
-              <a:t xml:space="preserve">(2</a:t>
-            </a:r>
-            <a:r>
-              <a:rPr lang="en-US" sz="1950" dirty="0" i="1">
-                <a:solidFill>
-                  <a:srgbClr val="16171D"/>
-                </a:solidFill>
-                <a:latin typeface="Segoe UI"/>
-                <a:cs typeface="Segoe UI"/>
-              </a:rPr>
-              <a:t xml:space="preserve">x</a:t>
-            </a:r>
-            <a:r>
-              <a:rPr lang="en-US" sz="1950" dirty="0">
-                <a:solidFill>
-                  <a:srgbClr val="16171D"/>
-                </a:solidFill>
-                <a:latin typeface="Segoe UI"/>
-                <a:cs typeface="Segoe UI"/>
-              </a:rPr>
-              <a:t xml:space="preserve">) = 2</a:t>
-            </a:r>
-            <a:r>
-              <a:rPr lang="en-US" sz="1950" dirty="0" i="1">
-                <a:solidFill>
-                  <a:srgbClr val="16171D"/>
-                </a:solidFill>
-                <a:latin typeface="Segoe UI"/>
-                <a:cs typeface="Segoe UI"/>
-              </a:rPr>
-              <a:t xml:space="preserve">x</a:t>
-            </a:r>
-            <a:endParaRPr lang="en-US" sz="1950" dirty="0"/>
-          </a:p>
-        </p:txBody>
-      </p:sp>
-      <p:sp>
-        <p:nvSpPr>
-          <p:cNvPr id="5" name="Shape 5"/>
-          <p:cNvSpPr txBox="1"/>
-          <p:nvPr/>
-        </p:nvSpPr>
-        <p:spPr>
-          <a:xfrm>
-            <a:off x="685800" y="2103882"/>
-            <a:ext cx="5219548" cy="352044"/>
-          </a:xfrm>
-          <a:prstGeom prst="rect">
-            <a:avLst/>
-          </a:prstGeom>
-          <a:noFill/>
-          <a:ln>
-            <a:noFill/>
-          </a:ln>
-        </p:spPr>
-        <p:txBody>
-          <a:bodyPr wrap="square" lIns="36576" tIns="27432" rIns="36576" bIns="27432" anchor="t">
-            <a:noAutofit/>
-          </a:bodyPr>
-          <a:lstStyle/>
-          <a:p>
-            <a:pPr algn="l">
-              <a:lnSpc>
-                <a:spcPct val="100000"/>
-              </a:lnSpc>
-            </a:pPr>
-            <a:r>
-              <a:rPr lang="en-US" sz="1950" dirty="0">
-                <a:solidFill>
-                  <a:srgbClr val="16171D"/>
-                </a:solidFill>
-                <a:latin typeface="Segoe UI"/>
-                <a:cs typeface="Segoe UI"/>
-              </a:rPr>
-              <a:t xml:space="preserve">2 · </a:t>
-            </a:r>
-            <a:r>
-              <a:rPr lang="en-US" sz="1950" dirty="0" i="1">
-                <a:solidFill>
-                  <a:srgbClr val="16171D"/>
-                </a:solidFill>
-                <a:latin typeface="Segoe UI"/>
-                <a:cs typeface="Segoe UI"/>
-              </a:rPr>
-              <a:t xml:space="preserve">f</a:t>
-            </a:r>
-            <a:r>
-              <a:rPr lang="en-US" sz="1950" dirty="0">
-                <a:solidFill>
-                  <a:srgbClr val="16171D"/>
-                </a:solidFill>
-                <a:latin typeface="Segoe UI"/>
-                <a:cs typeface="Segoe UI"/>
-              </a:rPr>
-              <a:t xml:space="preserve">(</a:t>
-            </a:r>
-            <a:r>
-              <a:rPr lang="en-US" sz="1950" dirty="0" i="1">
-                <a:solidFill>
-                  <a:srgbClr val="16171D"/>
-                </a:solidFill>
-                <a:latin typeface="Segoe UI"/>
-                <a:cs typeface="Segoe UI"/>
-              </a:rPr>
-              <a:t xml:space="preserve">x</a:t>
-            </a:r>
-            <a:r>
-              <a:rPr lang="en-US" sz="1950" dirty="0">
-                <a:solidFill>
-                  <a:srgbClr val="16171D"/>
-                </a:solidFill>
-                <a:latin typeface="Segoe UI"/>
-                <a:cs typeface="Segoe UI"/>
-              </a:rPr>
-              <a:t xml:space="preserve">) = 2</a:t>
-            </a:r>
-            <a:r>
-              <a:rPr lang="en-US" sz="1950" dirty="0" i="1">
-                <a:solidFill>
-                  <a:srgbClr val="16171D"/>
-                </a:solidFill>
-                <a:latin typeface="Segoe UI"/>
-                <a:cs typeface="Segoe UI"/>
-              </a:rPr>
-              <a:t xml:space="preserve">x</a:t>
-            </a:r>
-            <a:endParaRPr lang="en-US" sz="1950" dirty="0"/>
           </a:p>
         </p:txBody>
       </p:sp>
@@ -2285,200 +2137,8 @@
         </p:nvSpPr>
         <p:spPr>
           <a:xfrm>
-            <a:off x="685800" y="2589276"/>
-            <a:ext cx="5219548" cy="518922"/>
-          </a:xfrm>
-          <a:prstGeom prst="roundRect">
-            <a:avLst>
-              <a:gd name="adj" fmla="val 8000"/>
-            </a:avLst>
-          </a:prstGeom>
-          <a:solidFill>
-            <a:srgbClr val="EDF5E9"/>
-          </a:solidFill>
-          <a:ln>
-            <a:noFill/>
-          </a:ln>
-        </p:spPr>
-        <p:txBody>
-          <a:bodyPr wrap="square" lIns="164592" tIns="64008" rIns="164592" bIns="64008" anchor="ctr">
-            <a:noAutofit/>
-          </a:bodyPr>
-          <a:lstStyle/>
-          <a:p>
-            <a:pPr algn="l">
-              <a:lnSpc>
-                <a:spcPct val="100000"/>
-              </a:lnSpc>
-            </a:pPr>
-            <a:r>
-              <a:rPr lang="en-US" sz="1125" dirty="0" b="1" spc="100">
-                <a:solidFill>
-                  <a:srgbClr val="4F8A3C"/>
-                </a:solidFill>
-                <a:latin typeface="Segoe UI"/>
-                <a:cs typeface="Segoe UI"/>
-              </a:rPr>
-              <a:t xml:space="preserve">ANSWER   </a:t>
-            </a:r>
-            <a:r>
-              <a:rPr lang="en-US" sz="2325" dirty="0">
-                <a:solidFill>
-                  <a:srgbClr val="16171D"/>
-                </a:solidFill>
-                <a:latin typeface="Cambria"/>
-                <a:cs typeface="Cambria"/>
-              </a:rPr>
-              <a:t xml:space="preserve">The same line: </a:t>
-            </a:r>
-            <a:r>
-              <a:rPr lang="en-US" sz="2325" dirty="0" i="1">
-                <a:solidFill>
-                  <a:srgbClr val="16171D"/>
-                </a:solidFill>
-                <a:latin typeface="Cambria"/>
-                <a:cs typeface="Cambria"/>
-              </a:rPr>
-              <a:t xml:space="preserve">y</a:t>
-            </a:r>
-            <a:r>
-              <a:rPr lang="en-US" sz="2325" dirty="0">
-                <a:solidFill>
-                  <a:srgbClr val="16171D"/>
-                </a:solidFill>
-                <a:latin typeface="Cambria"/>
-                <a:cs typeface="Cambria"/>
-              </a:rPr>
-              <a:t xml:space="preserve"> = 2</a:t>
-            </a:r>
-            <a:r>
-              <a:rPr lang="en-US" sz="2325" dirty="0" i="1">
-                <a:solidFill>
-                  <a:srgbClr val="16171D"/>
-                </a:solidFill>
-                <a:latin typeface="Cambria"/>
-                <a:cs typeface="Cambria"/>
-              </a:rPr>
-              <a:t xml:space="preserve">x</a:t>
-            </a:r>
-            <a:endParaRPr lang="en-US" sz="2325" dirty="0"/>
-          </a:p>
-        </p:txBody>
-      </p:sp>
-      <p:sp>
-        <p:nvSpPr>
-          <p:cNvPr id="7" name="Shape 7"/>
-          <p:cNvSpPr txBox="1"/>
-          <p:nvPr/>
-        </p:nvSpPr>
-        <p:spPr>
-          <a:xfrm>
-            <a:off x="685800" y="3241548"/>
-            <a:ext cx="5219548" cy="294894"/>
-          </a:xfrm>
-          <a:prstGeom prst="rect">
-            <a:avLst/>
-          </a:prstGeom>
-          <a:noFill/>
-          <a:ln>
-            <a:noFill/>
-          </a:ln>
-        </p:spPr>
-        <p:txBody>
-          <a:bodyPr wrap="square" lIns="36576" tIns="27432" rIns="36576" bIns="27432" anchor="t">
-            <a:noAutofit/>
-          </a:bodyPr>
-          <a:lstStyle/>
-          <a:p>
-            <a:pPr algn="l">
-              <a:lnSpc>
-                <a:spcPct val="100000"/>
-              </a:lnSpc>
-            </a:pPr>
-            <a:r>
-              <a:rPr lang="en-US" sz="1575" dirty="0">
-                <a:solidFill>
-                  <a:srgbClr val="16171D"/>
-                </a:solidFill>
-                <a:latin typeface="Segoe UI"/>
-                <a:cs typeface="Segoe UI"/>
-              </a:rPr>
-              <a:t xml:space="preserve">This only works for </a:t>
-            </a:r>
-            <a:r>
-              <a:rPr lang="en-US" sz="1575" dirty="0" i="1">
-                <a:solidFill>
-                  <a:srgbClr val="16171D"/>
-                </a:solidFill>
-                <a:latin typeface="Segoe UI"/>
-                <a:cs typeface="Segoe UI"/>
-              </a:rPr>
-              <a:t xml:space="preserve">f</a:t>
-            </a:r>
-            <a:r>
-              <a:rPr lang="en-US" sz="1575" dirty="0">
-                <a:solidFill>
-                  <a:srgbClr val="16171D"/>
-                </a:solidFill>
-                <a:latin typeface="Segoe UI"/>
-                <a:cs typeface="Segoe UI"/>
-              </a:rPr>
-              <a:t xml:space="preserve">(</a:t>
-            </a:r>
-            <a:r>
-              <a:rPr lang="en-US" sz="1575" dirty="0" i="1">
-                <a:solidFill>
-                  <a:srgbClr val="16171D"/>
-                </a:solidFill>
-                <a:latin typeface="Segoe UI"/>
-                <a:cs typeface="Segoe UI"/>
-              </a:rPr>
-              <a:t xml:space="preserve">x</a:t>
-            </a:r>
-            <a:r>
-              <a:rPr lang="en-US" sz="1575" dirty="0">
-                <a:solidFill>
-                  <a:srgbClr val="16171D"/>
-                </a:solidFill>
-                <a:latin typeface="Segoe UI"/>
-                <a:cs typeface="Segoe UI"/>
-              </a:rPr>
-              <a:t xml:space="preserve">) = </a:t>
-            </a:r>
-            <a:r>
-              <a:rPr lang="en-US" sz="1575" dirty="0" i="1">
-                <a:solidFill>
-                  <a:srgbClr val="16171D"/>
-                </a:solidFill>
-                <a:latin typeface="Segoe UI"/>
-                <a:cs typeface="Segoe UI"/>
-              </a:rPr>
-              <a:t xml:space="preserve">x</a:t>
-            </a:r>
-            <a:r>
-              <a:rPr lang="en-US" sz="1575" dirty="0">
-                <a:solidFill>
-                  <a:srgbClr val="16171D"/>
-                </a:solidFill>
-                <a:latin typeface="Segoe UI"/>
-                <a:cs typeface="Segoe UI"/>
-              </a:rPr>
-              <a:t xml:space="preserve">.</a:t>
-            </a:r>
-            <a:endParaRPr lang="en-US" sz="1575" dirty="0"/>
-          </a:p>
-        </p:txBody>
-      </p:sp>
-      <p:sp>
-        <p:nvSpPr>
-          <p:cNvPr id="8" name="Shape 8"/>
-          <p:cNvSpPr/>
-          <p:nvPr/>
-        </p:nvSpPr>
-        <p:spPr>
-          <a:xfrm>
-            <a:off x="6286348" y="1618488"/>
-            <a:ext cx="3048000" cy="3048000"/>
+            <a:off x="685800" y="1618488"/>
+            <a:ext cx="5219548" cy="1309116"/>
           </a:xfrm>
           <a:prstGeom prst="roundRect">
             <a:avLst>
@@ -2509,6 +2169,3469 @@
           </a:p>
         </p:txBody>
       </p:sp>
+      <p:sp>
+        <p:nvSpPr>
+          <p:cNvPr id="4" name="Shape 4"/>
+          <p:cNvSpPr txBox="1"/>
+          <p:nvPr/>
+        </p:nvSpPr>
+        <p:spPr>
+          <a:xfrm>
+            <a:off x="895350" y="1789938"/>
+            <a:ext cx="4800448" cy="352044"/>
+          </a:xfrm>
+          <a:prstGeom prst="rect">
+            <a:avLst/>
+          </a:prstGeom>
+          <a:noFill/>
+          <a:ln>
+            <a:noFill/>
+          </a:ln>
+        </p:spPr>
+        <p:txBody>
+          <a:bodyPr wrap="square" lIns="36576" tIns="27432" rIns="36576" bIns="27432" anchor="t">
+            <a:noAutofit/>
+          </a:bodyPr>
+          <a:lstStyle/>
+          <a:p>
+            <a:pPr algn="l">
+              <a:lnSpc>
+                <a:spcPct val="100000"/>
+              </a:lnSpc>
+            </a:pPr>
+            <a:r>
+              <a:rPr lang="en-US" sz="1950" dirty="0">
+                <a:solidFill>
+                  <a:srgbClr val="16171D"/>
+                </a:solidFill>
+                <a:latin typeface="Segoe UI"/>
+                <a:cs typeface="Segoe UI"/>
+              </a:rPr>
+              <a:t xml:space="preserve">1. Simplify </a:t>
+            </a:r>
+            <a:r>
+              <a:rPr lang="en-US" sz="1950" dirty="0" i="1">
+                <a:solidFill>
+                  <a:srgbClr val="16171D"/>
+                </a:solidFill>
+                <a:latin typeface="Segoe UI"/>
+                <a:cs typeface="Segoe UI"/>
+              </a:rPr>
+              <a:t xml:space="preserve">j</a:t>
+            </a:r>
+            <a:r>
+              <a:rPr lang="en-US" sz="1950" dirty="0">
+                <a:solidFill>
+                  <a:srgbClr val="16171D"/>
+                </a:solidFill>
+                <a:latin typeface="Segoe UI"/>
+                <a:cs typeface="Segoe UI"/>
+              </a:rPr>
+              <a:t xml:space="preserve">(</a:t>
+            </a:r>
+            <a:r>
+              <a:rPr lang="en-US" sz="1950" dirty="0" i="1">
+                <a:solidFill>
+                  <a:srgbClr val="16171D"/>
+                </a:solidFill>
+                <a:latin typeface="Segoe UI"/>
+                <a:cs typeface="Segoe UI"/>
+              </a:rPr>
+              <a:t xml:space="preserve">x</a:t>
+            </a:r>
+            <a:r>
+              <a:rPr lang="en-US" sz="1950" dirty="0">
+                <a:solidFill>
+                  <a:srgbClr val="16171D"/>
+                </a:solidFill>
+                <a:latin typeface="Segoe UI"/>
+                <a:cs typeface="Segoe UI"/>
+              </a:rPr>
+              <a:t xml:space="preserve"> − 2).</a:t>
+            </a:r>
+            <a:endParaRPr lang="en-US" sz="1950" dirty="0"/>
+          </a:p>
+        </p:txBody>
+      </p:sp>
+      <p:sp>
+        <p:nvSpPr>
+          <p:cNvPr id="5" name="Shape 5"/>
+          <p:cNvSpPr txBox="1"/>
+          <p:nvPr/>
+        </p:nvSpPr>
+        <p:spPr>
+          <a:xfrm>
+            <a:off x="895350" y="2237232"/>
+            <a:ext cx="2908021" cy="518922"/>
+          </a:xfrm>
+          <a:prstGeom prst="roundRect">
+            <a:avLst>
+              <a:gd name="adj" fmla="val 8000"/>
+            </a:avLst>
+          </a:prstGeom>
+          <a:solidFill>
+            <a:srgbClr val="EDF5E9"/>
+          </a:solidFill>
+          <a:ln>
+            <a:noFill/>
+          </a:ln>
+        </p:spPr>
+        <p:txBody>
+          <a:bodyPr wrap="square" lIns="164592" tIns="64008" rIns="164592" bIns="64008" anchor="ctr">
+            <a:noAutofit/>
+          </a:bodyPr>
+          <a:lstStyle/>
+          <a:p>
+            <a:pPr algn="l">
+              <a:lnSpc>
+                <a:spcPct val="100000"/>
+              </a:lnSpc>
+            </a:pPr>
+            <a:r>
+              <a:rPr lang="en-US" sz="1125" dirty="0" b="1" spc="100">
+                <a:solidFill>
+                  <a:srgbClr val="4F8A3C"/>
+                </a:solidFill>
+                <a:latin typeface="Segoe UI"/>
+                <a:cs typeface="Segoe UI"/>
+              </a:rPr>
+              <a:t xml:space="preserve">ANSWER   </a:t>
+            </a:r>
+            <a:r>
+              <a:rPr lang="en-US" sz="2325" dirty="0">
+                <a:solidFill>
+                  <a:srgbClr val="16171D"/>
+                </a:solidFill>
+                <a:latin typeface="Cambria"/>
+                <a:cs typeface="Cambria"/>
+              </a:rPr>
+              <a:t xml:space="preserve">2</a:t>
+            </a:r>
+            <a:r>
+              <a:rPr lang="en-US" sz="2325" dirty="0" i="1">
+                <a:solidFill>
+                  <a:srgbClr val="16171D"/>
+                </a:solidFill>
+                <a:latin typeface="Cambria"/>
+                <a:cs typeface="Cambria"/>
+              </a:rPr>
+              <a:t xml:space="preserve">x</a:t>
+            </a:r>
+            <a:r>
+              <a:rPr lang="en-US" sz="2325" dirty="0">
+                <a:solidFill>
+                  <a:srgbClr val="16171D"/>
+                </a:solidFill>
+                <a:latin typeface="Cambria"/>
+                <a:cs typeface="Cambria"/>
+              </a:rPr>
+              <a:t xml:space="preserve"> − 5</a:t>
+            </a:r>
+            <a:endParaRPr lang="en-US" sz="2325" dirty="0"/>
+          </a:p>
+        </p:txBody>
+      </p:sp>
+      <p:sp>
+        <p:nvSpPr>
+          <p:cNvPr id="11" name="Shape 11"/>
+          <p:cNvSpPr txBox="1"/>
+          <p:nvPr/>
+        </p:nvSpPr>
+        <p:spPr>
+          <a:xfrm>
+            <a:off x="6286348" y="1618488"/>
+            <a:ext cx="5219548" cy="2313432"/>
+          </a:xfrm>
+          <a:prstGeom prst="roundRect">
+            <a:avLst>
+              <a:gd name="adj" fmla="val 8000"/>
+            </a:avLst>
+          </a:prstGeom>
+          <a:solidFill>
+            <a:srgbClr val="FFFFFF"/>
+          </a:solidFill>
+          <a:ln w="12700">
+            <a:solidFill>
+              <a:srgbClr val="E3E4EC"/>
+            </a:solidFill>
+          </a:ln>
+        </p:spPr>
+        <p:txBody>
+          <a:bodyPr wrap="square" lIns="36576" tIns="27432" rIns="36576" bIns="27432" anchor="t">
+            <a:noAutofit/>
+          </a:bodyPr>
+          <a:lstStyle/>
+          <a:p>
+            <a:pPr algn="l">
+              <a:lnSpc>
+                <a:spcPct val="100000"/>
+              </a:lnSpc>
+            </a:pPr>
+            <a:endParaRPr lang="en-US" sz="1950" dirty="0"/>
+          </a:p>
+        </p:txBody>
+      </p:sp>
+      <p:sp>
+        <p:nvSpPr>
+          <p:cNvPr id="7" name="Shape 7"/>
+          <p:cNvSpPr txBox="1"/>
+          <p:nvPr/>
+        </p:nvSpPr>
+        <p:spPr>
+          <a:xfrm>
+            <a:off x="6495898" y="1789938"/>
+            <a:ext cx="4800448" cy="352044"/>
+          </a:xfrm>
+          <a:prstGeom prst="rect">
+            <a:avLst/>
+          </a:prstGeom>
+          <a:noFill/>
+          <a:ln>
+            <a:noFill/>
+          </a:ln>
+        </p:spPr>
+        <p:txBody>
+          <a:bodyPr wrap="square" lIns="36576" tIns="27432" rIns="36576" bIns="27432" anchor="t">
+            <a:noAutofit/>
+          </a:bodyPr>
+          <a:lstStyle/>
+          <a:p>
+            <a:pPr algn="l">
+              <a:lnSpc>
+                <a:spcPct val="100000"/>
+              </a:lnSpc>
+            </a:pPr>
+            <a:r>
+              <a:rPr lang="en-US" sz="1950" dirty="0">
+                <a:solidFill>
+                  <a:srgbClr val="16171D"/>
+                </a:solidFill>
+                <a:latin typeface="Segoe UI"/>
+                <a:cs typeface="Segoe UI"/>
+              </a:rPr>
+              <a:t xml:space="preserve">2. Simplify </a:t>
+            </a:r>
+            <a:r>
+              <a:rPr lang="en-US" sz="1950" dirty="0" i="1">
+                <a:solidFill>
+                  <a:srgbClr val="16171D"/>
+                </a:solidFill>
+                <a:latin typeface="Segoe UI"/>
+                <a:cs typeface="Segoe UI"/>
+              </a:rPr>
+              <a:t xml:space="preserve">j</a:t>
+            </a:r>
+            <a:r>
+              <a:rPr lang="en-US" sz="1950" dirty="0">
+                <a:solidFill>
+                  <a:srgbClr val="16171D"/>
+                </a:solidFill>
+                <a:latin typeface="Segoe UI"/>
+                <a:cs typeface="Segoe UI"/>
+              </a:rPr>
+              <a:t xml:space="preserve">(</a:t>
+            </a:r>
+            <a:r>
+              <a:rPr lang="en-US" sz="1950" dirty="0" i="1">
+                <a:solidFill>
+                  <a:srgbClr val="16171D"/>
+                </a:solidFill>
+                <a:latin typeface="Segoe UI"/>
+                <a:cs typeface="Segoe UI"/>
+              </a:rPr>
+              <a:t xml:space="preserve">x</a:t>
+            </a:r>
+            <a:r>
+              <a:rPr lang="en-US" sz="1950" dirty="0">
+                <a:solidFill>
+                  <a:srgbClr val="16171D"/>
+                </a:solidFill>
+                <a:latin typeface="Segoe UI"/>
+                <a:cs typeface="Segoe UI"/>
+              </a:rPr>
+              <a:t xml:space="preserve">) − 2.</a:t>
+            </a:r>
+            <a:endParaRPr lang="en-US" sz="1950" dirty="0"/>
+          </a:p>
+        </p:txBody>
+      </p:sp>
+      <p:sp>
+        <p:nvSpPr>
+          <p:cNvPr id="8" name="Shape 8"/>
+          <p:cNvSpPr txBox="1"/>
+          <p:nvPr/>
+        </p:nvSpPr>
+        <p:spPr>
+          <a:xfrm>
+            <a:off x="6495898" y="2237232"/>
+            <a:ext cx="2908021" cy="518922"/>
+          </a:xfrm>
+          <a:prstGeom prst="roundRect">
+            <a:avLst>
+              <a:gd name="adj" fmla="val 8000"/>
+            </a:avLst>
+          </a:prstGeom>
+          <a:solidFill>
+            <a:srgbClr val="EDF5E9"/>
+          </a:solidFill>
+          <a:ln>
+            <a:noFill/>
+          </a:ln>
+        </p:spPr>
+        <p:txBody>
+          <a:bodyPr wrap="square" lIns="164592" tIns="64008" rIns="164592" bIns="64008" anchor="ctr">
+            <a:noAutofit/>
+          </a:bodyPr>
+          <a:lstStyle/>
+          <a:p>
+            <a:pPr algn="l">
+              <a:lnSpc>
+                <a:spcPct val="100000"/>
+              </a:lnSpc>
+            </a:pPr>
+            <a:r>
+              <a:rPr lang="en-US" sz="1125" dirty="0" b="1" spc="100">
+                <a:solidFill>
+                  <a:srgbClr val="4F8A3C"/>
+                </a:solidFill>
+                <a:latin typeface="Segoe UI"/>
+                <a:cs typeface="Segoe UI"/>
+              </a:rPr>
+              <a:t xml:space="preserve">ANSWER   </a:t>
+            </a:r>
+            <a:r>
+              <a:rPr lang="en-US" sz="2325" dirty="0">
+                <a:solidFill>
+                  <a:srgbClr val="16171D"/>
+                </a:solidFill>
+                <a:latin typeface="Cambria"/>
+                <a:cs typeface="Cambria"/>
+              </a:rPr>
+              <a:t xml:space="preserve">2</a:t>
+            </a:r>
+            <a:r>
+              <a:rPr lang="en-US" sz="2325" dirty="0" i="1">
+                <a:solidFill>
+                  <a:srgbClr val="16171D"/>
+                </a:solidFill>
+                <a:latin typeface="Cambria"/>
+                <a:cs typeface="Cambria"/>
+              </a:rPr>
+              <a:t xml:space="preserve">x</a:t>
+            </a:r>
+            <a:r>
+              <a:rPr lang="en-US" sz="2325" dirty="0">
+                <a:solidFill>
+                  <a:srgbClr val="16171D"/>
+                </a:solidFill>
+                <a:latin typeface="Cambria"/>
+                <a:cs typeface="Cambria"/>
+              </a:rPr>
+              <a:t xml:space="preserve"> − 3</a:t>
+            </a:r>
+            <a:endParaRPr lang="en-US" sz="2325" dirty="0"/>
+          </a:p>
+        </p:txBody>
+      </p:sp>
+      <p:sp>
+        <p:nvSpPr>
+          <p:cNvPr id="9" name="Shape 9"/>
+          <p:cNvSpPr txBox="1"/>
+          <p:nvPr/>
+        </p:nvSpPr>
+        <p:spPr>
+          <a:xfrm>
+            <a:off x="6495898" y="2851404"/>
+            <a:ext cx="4800448" cy="294894"/>
+          </a:xfrm>
+          <a:prstGeom prst="rect">
+            <a:avLst/>
+          </a:prstGeom>
+          <a:noFill/>
+          <a:ln>
+            <a:noFill/>
+          </a:ln>
+        </p:spPr>
+        <p:txBody>
+          <a:bodyPr wrap="square" lIns="36576" tIns="27432" rIns="36576" bIns="27432" anchor="t">
+            <a:noAutofit/>
+          </a:bodyPr>
+          <a:lstStyle/>
+          <a:p>
+            <a:pPr algn="l">
+              <a:lnSpc>
+                <a:spcPct val="100000"/>
+              </a:lnSpc>
+            </a:pPr>
+            <a:r>
+              <a:rPr lang="en-US" sz="1575" dirty="0">
+                <a:solidFill>
+                  <a:srgbClr val="16171D"/>
+                </a:solidFill>
+                <a:latin typeface="Segoe UI"/>
+                <a:cs typeface="Segoe UI"/>
+              </a:rPr>
+              <a:t xml:space="preserve">Same graph as #1? ____</a:t>
+            </a:r>
+            <a:endParaRPr lang="en-US" sz="1575" dirty="0"/>
+          </a:p>
+        </p:txBody>
+      </p:sp>
+      <p:sp>
+        <p:nvSpPr>
+          <p:cNvPr id="10" name="Shape 10"/>
+          <p:cNvSpPr txBox="1"/>
+          <p:nvPr/>
+        </p:nvSpPr>
+        <p:spPr>
+          <a:xfrm>
+            <a:off x="6495898" y="3241548"/>
+            <a:ext cx="2244715" cy="518922"/>
+          </a:xfrm>
+          <a:prstGeom prst="roundRect">
+            <a:avLst>
+              <a:gd name="adj" fmla="val 8000"/>
+            </a:avLst>
+          </a:prstGeom>
+          <a:solidFill>
+            <a:srgbClr val="EDF5E9"/>
+          </a:solidFill>
+          <a:ln>
+            <a:noFill/>
+          </a:ln>
+        </p:spPr>
+        <p:txBody>
+          <a:bodyPr wrap="square" lIns="164592" tIns="64008" rIns="164592" bIns="64008" anchor="ctr">
+            <a:noAutofit/>
+          </a:bodyPr>
+          <a:lstStyle/>
+          <a:p>
+            <a:pPr algn="l">
+              <a:lnSpc>
+                <a:spcPct val="100000"/>
+              </a:lnSpc>
+            </a:pPr>
+            <a:r>
+              <a:rPr lang="en-US" sz="1125" dirty="0" b="1" spc="100">
+                <a:solidFill>
+                  <a:srgbClr val="4F8A3C"/>
+                </a:solidFill>
+                <a:latin typeface="Segoe UI"/>
+                <a:cs typeface="Segoe UI"/>
+              </a:rPr>
+              <a:t xml:space="preserve">ANSWER   </a:t>
+            </a:r>
+            <a:r>
+              <a:rPr lang="en-US" sz="2325" dirty="0">
+                <a:solidFill>
+                  <a:srgbClr val="16171D"/>
+                </a:solidFill>
+                <a:latin typeface="Cambria"/>
+                <a:cs typeface="Cambria"/>
+              </a:rPr>
+              <a:t xml:space="preserve">No</a:t>
+            </a:r>
+            <a:endParaRPr lang="en-US" sz="2325" dirty="0"/>
+          </a:p>
+        </p:txBody>
+      </p:sp>
+      <p:sp>
+        <p:nvSpPr>
+          <p:cNvPr id="12" name="Slide Number 12"/>
+          <p:cNvSpPr txBox="1"/>
+          <p:nvPr/>
+        </p:nvSpPr>
+        <p:spPr>
+          <a:xfrm>
+            <a:off x="11277295" y="6611112"/>
+            <a:ext cx="685800" cy="201168"/>
+          </a:xfrm>
+          <a:prstGeom prst="rect">
+            <a:avLst/>
+          </a:prstGeom>
+          <a:noFill/>
+        </p:spPr>
+        <p:txBody>
+          <a:bodyPr wrap="none" lIns="0" tIns="0" rIns="0" bIns="0" anchor="b">
+            <a:noAutofit/>
+          </a:bodyPr>
+          <a:lstStyle/>
+          <a:p>
+            <a:pPr algn="r"/>
+            <a:fld id="{5C1A6E0B-3B1F-4D5E-9C7A-2F4B8D6E1A90}" type="slidenum">
+              <a:rPr lang="en-US" sz="1200" dirty="0">
+                <a:solidFill>
+                  <a:srgbClr val="5F6272"/>
+                </a:solidFill>
+              </a:rPr>
+              <a:t>10</a:t>
+            </a:fld>
+          </a:p>
+        </p:txBody>
+      </p:sp>
+    </p:spTree>
+  </p:cSld>
+  <p:clrMapOvr>
+    <a:masterClrMapping/>
+  </p:clrMapOvr>
+  <p:transition spd="med">
+    <p:fade/>
+  </p:transition>
+  <p:timing>
+    <p:tnLst>
+      <p:par>
+        <p:cTn id="1" dur="indefinite" restart="never" nodeType="tmRoot">
+          <p:childTnLst>
+            <p:seq concurrent="1" nextAc="seek">
+              <p:cTn id="2" dur="indefinite" nodeType="mainSeq">
+                <p:childTnLst>
+                  <p:par>
+                    <p:cTn id="8" fill="hold">
+                      <p:stCondLst>
+                        <p:cond delay="indefinite"/>
+                      </p:stCondLst>
+                      <p:childTnLst>
+                        <p:par>
+                          <p:cTn id="9" fill="hold">
+                            <p:stCondLst>
+                              <p:cond delay="0"/>
+                            </p:stCondLst>
+                            <p:childTnLst>
+                              <p:par>
+                                <p:cTn id="7" presetID="53" presetClass="entr" presetSubtype="16" fill="hold" nodeType="clickEffect">
+                                  <p:stCondLst>
+                                    <p:cond delay="0"/>
+                                  </p:stCondLst>
+                                  <p:childTnLst>
+                                    <p:set>
+                                      <p:cBhvr>
+                                        <p:cTn id="3" dur="1" fill="hold">
+                                          <p:stCondLst>
+                                            <p:cond delay="0"/>
+                                          </p:stCondLst>
+                                        </p:cTn>
+                                        <p:tgtEl>
+                                          <p:spTgt spid="5"/>
+                                        </p:tgtEl>
+                                        <p:attrNameLst>
+                                          <p:attrName>style.visibility</p:attrName>
+                                        </p:attrNameLst>
+                                      </p:cBhvr>
+                                      <p:to>
+                                        <p:strVal val="visible"/>
+                                      </p:to>
+                                    </p:set>
+                                    <p:animEffect transition="in" filter="fade">
+                                      <p:cBhvr>
+                                        <p:cTn id="4" dur="500"/>
+                                        <p:tgtEl>
+                                          <p:spTgt spid="5"/>
+                                        </p:tgtEl>
+                                      </p:cBhvr>
+                                    </p:animEffect>
+                                    <p:anim calcmode="lin" valueType="num">
+                                      <p:cBhvr>
+                                        <p:cTn id="5" dur="500" fill="hold"/>
+                                        <p:tgtEl>
+                                          <p:spTgt spid="5"/>
+                                        </p:tgtEl>
+                                        <p:attrNameLst>
+                                          <p:attrName>ppt_w</p:attrName>
+                                        </p:attrNameLst>
+                                      </p:cBhvr>
+                                      <p:tavLst>
+                                        <p:tav tm="0">
+                                          <p:val>
+                                            <p:fltVal val="0"/>
+                                          </p:val>
+                                        </p:tav>
+                                        <p:tav tm="100000">
+                                          <p:val>
+                                            <p:strVal val="#ppt_w"/>
+                                          </p:val>
+                                        </p:tav>
+                                      </p:tavLst>
+                                    </p:anim>
+                                    <p:anim calcmode="lin" valueType="num">
+                                      <p:cBhvr>
+                                        <p:cTn id="6" dur="500" fill="hold"/>
+                                        <p:tgtEl>
+                                          <p:spTgt spid="5"/>
+                                        </p:tgtEl>
+                                        <p:attrNameLst>
+                                          <p:attrName>ppt_h</p:attrName>
+                                        </p:attrNameLst>
+                                      </p:cBhvr>
+                                      <p:tavLst>
+                                        <p:tav tm="0">
+                                          <p:val>
+                                            <p:fltVal val="0"/>
+                                          </p:val>
+                                        </p:tav>
+                                        <p:tav tm="100000">
+                                          <p:val>
+                                            <p:strVal val="#ppt_h"/>
+                                          </p:val>
+                                        </p:tav>
+                                      </p:tavLst>
+                                    </p:anim>
+                                  </p:childTnLst>
+                                </p:cTn>
+                              </p:par>
+                            </p:childTnLst>
+                          </p:cTn>
+                        </p:par>
+                      </p:childTnLst>
+                    </p:cTn>
+                  </p:par>
+                  <p:par>
+                    <p:cTn id="15" fill="hold">
+                      <p:stCondLst>
+                        <p:cond delay="indefinite"/>
+                      </p:stCondLst>
+                      <p:childTnLst>
+                        <p:par>
+                          <p:cTn id="16" fill="hold">
+                            <p:stCondLst>
+                              <p:cond delay="0"/>
+                            </p:stCondLst>
+                            <p:childTnLst>
+                              <p:par>
+                                <p:cTn id="14" presetID="53" presetClass="entr" presetSubtype="16" fill="hold" nodeType="clickEffect">
+                                  <p:stCondLst>
+                                    <p:cond delay="0"/>
+                                  </p:stCondLst>
+                                  <p:childTnLst>
+                                    <p:set>
+                                      <p:cBhvr>
+                                        <p:cTn id="10" dur="1" fill="hold">
+                                          <p:stCondLst>
+                                            <p:cond delay="0"/>
+                                          </p:stCondLst>
+                                        </p:cTn>
+                                        <p:tgtEl>
+                                          <p:spTgt spid="8"/>
+                                        </p:tgtEl>
+                                        <p:attrNameLst>
+                                          <p:attrName>style.visibility</p:attrName>
+                                        </p:attrNameLst>
+                                      </p:cBhvr>
+                                      <p:to>
+                                        <p:strVal val="visible"/>
+                                      </p:to>
+                                    </p:set>
+                                    <p:animEffect transition="in" filter="fade">
+                                      <p:cBhvr>
+                                        <p:cTn id="11" dur="500"/>
+                                        <p:tgtEl>
+                                          <p:spTgt spid="8"/>
+                                        </p:tgtEl>
+                                      </p:cBhvr>
+                                    </p:animEffect>
+                                    <p:anim calcmode="lin" valueType="num">
+                                      <p:cBhvr>
+                                        <p:cTn id="12" dur="500" fill="hold"/>
+                                        <p:tgtEl>
+                                          <p:spTgt spid="8"/>
+                                        </p:tgtEl>
+                                        <p:attrNameLst>
+                                          <p:attrName>ppt_w</p:attrName>
+                                        </p:attrNameLst>
+                                      </p:cBhvr>
+                                      <p:tavLst>
+                                        <p:tav tm="0">
+                                          <p:val>
+                                            <p:fltVal val="0"/>
+                                          </p:val>
+                                        </p:tav>
+                                        <p:tav tm="100000">
+                                          <p:val>
+                                            <p:strVal val="#ppt_w"/>
+                                          </p:val>
+                                        </p:tav>
+                                      </p:tavLst>
+                                    </p:anim>
+                                    <p:anim calcmode="lin" valueType="num">
+                                      <p:cBhvr>
+                                        <p:cTn id="13" dur="500" fill="hold"/>
+                                        <p:tgtEl>
+                                          <p:spTgt spid="8"/>
+                                        </p:tgtEl>
+                                        <p:attrNameLst>
+                                          <p:attrName>ppt_h</p:attrName>
+                                        </p:attrNameLst>
+                                      </p:cBhvr>
+                                      <p:tavLst>
+                                        <p:tav tm="0">
+                                          <p:val>
+                                            <p:fltVal val="0"/>
+                                          </p:val>
+                                        </p:tav>
+                                        <p:tav tm="100000">
+                                          <p:val>
+                                            <p:strVal val="#ppt_h"/>
+                                          </p:val>
+                                        </p:tav>
+                                      </p:tavLst>
+                                    </p:anim>
+                                  </p:childTnLst>
+                                </p:cTn>
+                              </p:par>
+                            </p:childTnLst>
+                          </p:cTn>
+                        </p:par>
+                      </p:childTnLst>
+                    </p:cTn>
+                  </p:par>
+                  <p:par>
+                    <p:cTn id="22" fill="hold">
+                      <p:stCondLst>
+                        <p:cond delay="indefinite"/>
+                      </p:stCondLst>
+                      <p:childTnLst>
+                        <p:par>
+                          <p:cTn id="23" fill="hold">
+                            <p:stCondLst>
+                              <p:cond delay="0"/>
+                            </p:stCondLst>
+                            <p:childTnLst>
+                              <p:par>
+                                <p:cTn id="21" presetID="53" presetClass="entr" presetSubtype="16" fill="hold" nodeType="clickEffect">
+                                  <p:stCondLst>
+                                    <p:cond delay="0"/>
+                                  </p:stCondLst>
+                                  <p:childTnLst>
+                                    <p:set>
+                                      <p:cBhvr>
+                                        <p:cTn id="17" dur="1" fill="hold">
+                                          <p:stCondLst>
+                                            <p:cond delay="0"/>
+                                          </p:stCondLst>
+                                        </p:cTn>
+                                        <p:tgtEl>
+                                          <p:spTgt spid="10"/>
+                                        </p:tgtEl>
+                                        <p:attrNameLst>
+                                          <p:attrName>style.visibility</p:attrName>
+                                        </p:attrNameLst>
+                                      </p:cBhvr>
+                                      <p:to>
+                                        <p:strVal val="visible"/>
+                                      </p:to>
+                                    </p:set>
+                                    <p:animEffect transition="in" filter="fade">
+                                      <p:cBhvr>
+                                        <p:cTn id="18" dur="500"/>
+                                        <p:tgtEl>
+                                          <p:spTgt spid="10"/>
+                                        </p:tgtEl>
+                                      </p:cBhvr>
+                                    </p:animEffect>
+                                    <p:anim calcmode="lin" valueType="num">
+                                      <p:cBhvr>
+                                        <p:cTn id="19" dur="500" fill="hold"/>
+                                        <p:tgtEl>
+                                          <p:spTgt spid="10"/>
+                                        </p:tgtEl>
+                                        <p:attrNameLst>
+                                          <p:attrName>ppt_w</p:attrName>
+                                        </p:attrNameLst>
+                                      </p:cBhvr>
+                                      <p:tavLst>
+                                        <p:tav tm="0">
+                                          <p:val>
+                                            <p:fltVal val="0"/>
+                                          </p:val>
+                                        </p:tav>
+                                        <p:tav tm="100000">
+                                          <p:val>
+                                            <p:strVal val="#ppt_w"/>
+                                          </p:val>
+                                        </p:tav>
+                                      </p:tavLst>
+                                    </p:anim>
+                                    <p:anim calcmode="lin" valueType="num">
+                                      <p:cBhvr>
+                                        <p:cTn id="20" dur="500" fill="hold"/>
+                                        <p:tgtEl>
+                                          <p:spTgt spid="10"/>
+                                        </p:tgtEl>
+                                        <p:attrNameLst>
+                                          <p:attrName>ppt_h</p:attrName>
+                                        </p:attrNameLst>
+                                      </p:cBhvr>
+                                      <p:tavLst>
+                                        <p:tav tm="0">
+                                          <p:val>
+                                            <p:fltVal val="0"/>
+                                          </p:val>
+                                        </p:tav>
+                                        <p:tav tm="100000">
+                                          <p:val>
+                                            <p:strVal val="#ppt_h"/>
+                                          </p:val>
+                                        </p:tav>
+                                      </p:tavLst>
+                                    </p:anim>
+                                  </p:childTnLst>
+                                </p:cTn>
+                              </p:par>
+                            </p:childTnLst>
+                          </p:cTn>
+                        </p:par>
+                      </p:childTnLst>
+                    </p:cTn>
+                  </p:par>
+                </p:childTnLst>
+              </p:cTn>
+              <p:prevCondLst>
+                <p:cond evt="onPrev" delay="0">
+                  <p:tgtEl>
+                    <p:sldTgt/>
+                  </p:tgtEl>
+                </p:cond>
+              </p:prevCondLst>
+              <p:nextCondLst>
+                <p:cond evt="onNext" delay="0">
+                  <p:tgtEl>
+                    <p:sldTgt/>
+                  </p:tgtEl>
+                </p:cond>
+              </p:nextCondLst>
+            </p:seq>
+          </p:childTnLst>
+        </p:cTn>
+      </p:par>
+    </p:tnLst>
+  </p:timing>
+</p:sld>
+</file>
+
+<file path=ppt/slides/slide11.xml><?xml version="1.0" encoding="utf-8"?>
+<p:sld xmlns:a="http://schemas.openxmlformats.org/drawingml/2006/main" xmlns:r="http://schemas.openxmlformats.org/officeDocument/2006/relationships" xmlns:p="http://schemas.openxmlformats.org/presentationml/2006/main">
+  <p:cSld>
+    <p:spTree>
+      <p:nvGrpSpPr>
+        <p:cNvPr id="1" name=""/>
+        <p:cNvGrpSpPr/>
+        <p:nvPr/>
+      </p:nvGrpSpPr>
+      <p:grpSpPr>
+        <a:xfrm>
+          <a:off x="0" y="0"/>
+          <a:ext cx="0" cy="0"/>
+          <a:chOff x="0" y="0"/>
+          <a:chExt cx="0" cy="0"/>
+        </a:xfrm>
+      </p:grpSpPr>
+      <p:sp>
+        <p:nvSpPr>
+          <p:cNvPr id="2" name="Shape 2"/>
+          <p:cNvSpPr txBox="1"/>
+          <p:nvPr/>
+        </p:nvSpPr>
+        <p:spPr>
+          <a:xfrm>
+            <a:off x="685800" y="457200"/>
+            <a:ext cx="10820095" cy="237744"/>
+          </a:xfrm>
+          <a:prstGeom prst="rect">
+            <a:avLst/>
+          </a:prstGeom>
+          <a:noFill/>
+          <a:ln>
+            <a:noFill/>
+          </a:ln>
+        </p:spPr>
+        <p:txBody>
+          <a:bodyPr wrap="square" lIns="36576" tIns="27432" rIns="36576" bIns="27432" anchor="t">
+            <a:noAutofit/>
+          </a:bodyPr>
+          <a:lstStyle/>
+          <a:p>
+            <a:pPr algn="l">
+              <a:lnSpc>
+                <a:spcPct val="100000"/>
+              </a:lnSpc>
+            </a:pPr>
+            <a:r>
+              <a:rPr lang="en-US" sz="1200" dirty="0" b="1" spc="150" cap="all">
+                <a:solidFill>
+                  <a:srgbClr val="5F6272"/>
+                </a:solidFill>
+                <a:latin typeface="Segoe UI"/>
+                <a:cs typeface="Segoe UI"/>
+              </a:rPr>
+              <a:t xml:space="preserve">Check it · Step by step</a:t>
+            </a:r>
+            <a:endParaRPr lang="en-US" sz="1200" dirty="0"/>
+          </a:p>
+        </p:txBody>
+      </p:sp>
+      <p:sp>
+        <p:nvSpPr>
+          <p:cNvPr id="3" name="Shape 3"/>
+          <p:cNvSpPr txBox="1"/>
+          <p:nvPr/>
+        </p:nvSpPr>
+        <p:spPr>
+          <a:xfrm>
+            <a:off x="685800" y="866394"/>
+            <a:ext cx="10820095" cy="580644"/>
+          </a:xfrm>
+          <a:prstGeom prst="rect">
+            <a:avLst/>
+          </a:prstGeom>
+          <a:noFill/>
+          <a:ln>
+            <a:noFill/>
+          </a:ln>
+        </p:spPr>
+        <p:txBody>
+          <a:bodyPr wrap="square" lIns="36576" tIns="27432" rIns="36576" bIns="27432" anchor="t">
+            <a:noAutofit/>
+          </a:bodyPr>
+          <a:lstStyle/>
+          <a:p>
+            <a:pPr algn="l">
+              <a:lnSpc>
+                <a:spcPct val="100000"/>
+              </a:lnSpc>
+            </a:pPr>
+            <a:r>
+              <a:rPr lang="en-US" sz="3450" dirty="0" b="1" i="1">
+                <a:solidFill>
+                  <a:srgbClr val="16171D"/>
+                </a:solidFill>
+                <a:latin typeface="Segoe UI"/>
+                <a:cs typeface="Segoe UI"/>
+              </a:rPr>
+              <a:t xml:space="preserve">j</a:t>
+            </a:r>
+            <a:r>
+              <a:rPr lang="en-US" sz="3450" dirty="0" b="1">
+                <a:solidFill>
+                  <a:srgbClr val="16171D"/>
+                </a:solidFill>
+                <a:latin typeface="Segoe UI"/>
+                <a:cs typeface="Segoe UI"/>
+              </a:rPr>
+              <a:t xml:space="preserve">(</a:t>
+            </a:r>
+            <a:r>
+              <a:rPr lang="en-US" sz="3450" dirty="0" b="1" i="1">
+                <a:solidFill>
+                  <a:srgbClr val="16171D"/>
+                </a:solidFill>
+                <a:latin typeface="Segoe UI"/>
+                <a:cs typeface="Segoe UI"/>
+              </a:rPr>
+              <a:t xml:space="preserve">x</a:t>
+            </a:r>
+            <a:r>
+              <a:rPr lang="en-US" sz="3450" dirty="0" b="1">
+                <a:solidFill>
+                  <a:srgbClr val="16171D"/>
+                </a:solidFill>
+                <a:latin typeface="Segoe UI"/>
+                <a:cs typeface="Segoe UI"/>
+              </a:rPr>
+              <a:t xml:space="preserve">) = 2</a:t>
+            </a:r>
+            <a:r>
+              <a:rPr lang="en-US" sz="3450" dirty="0" b="1" i="1">
+                <a:solidFill>
+                  <a:srgbClr val="16171D"/>
+                </a:solidFill>
+                <a:latin typeface="Segoe UI"/>
+                <a:cs typeface="Segoe UI"/>
+              </a:rPr>
+              <a:t xml:space="preserve">x</a:t>
+            </a:r>
+            <a:r>
+              <a:rPr lang="en-US" sz="3450" dirty="0" b="1">
+                <a:solidFill>
+                  <a:srgbClr val="16171D"/>
+                </a:solidFill>
+                <a:latin typeface="Segoe UI"/>
+                <a:cs typeface="Segoe UI"/>
+              </a:rPr>
+              <a:t xml:space="preserve"> − 1</a:t>
+            </a:r>
+            <a:endParaRPr lang="en-US" sz="3450" dirty="0"/>
+          </a:p>
+        </p:txBody>
+      </p:sp>
+      <p:sp>
+        <p:nvSpPr>
+          <p:cNvPr id="9" name="Shape 9"/>
+          <p:cNvSpPr txBox="1"/>
+          <p:nvPr/>
+        </p:nvSpPr>
+        <p:spPr>
+          <a:xfrm>
+            <a:off x="685800" y="1618488"/>
+            <a:ext cx="5295748" cy="2982468"/>
+          </a:xfrm>
+          <a:prstGeom prst="roundRect">
+            <a:avLst>
+              <a:gd name="adj" fmla="val 8000"/>
+            </a:avLst>
+          </a:prstGeom>
+          <a:solidFill>
+            <a:srgbClr val="FFFFFF"/>
+          </a:solidFill>
+          <a:ln w="12700">
+            <a:solidFill>
+              <a:srgbClr val="E3E4EC"/>
+            </a:solidFill>
+          </a:ln>
+        </p:spPr>
+        <p:txBody>
+          <a:bodyPr wrap="square" lIns="36576" tIns="27432" rIns="36576" bIns="27432" anchor="t">
+            <a:noAutofit/>
+          </a:bodyPr>
+          <a:lstStyle/>
+          <a:p>
+            <a:pPr algn="l">
+              <a:lnSpc>
+                <a:spcPct val="100000"/>
+              </a:lnSpc>
+            </a:pPr>
+            <a:endParaRPr lang="en-US" sz="1950" dirty="0"/>
+          </a:p>
+        </p:txBody>
+      </p:sp>
+      <p:sp>
+        <p:nvSpPr>
+          <p:cNvPr id="4" name="Shape 4"/>
+          <p:cNvSpPr txBox="1"/>
+          <p:nvPr/>
+        </p:nvSpPr>
+        <p:spPr>
+          <a:xfrm>
+            <a:off x="895350" y="1789938"/>
+            <a:ext cx="4876648" cy="374904"/>
+          </a:xfrm>
+          <a:prstGeom prst="rect">
+            <a:avLst/>
+          </a:prstGeom>
+          <a:noFill/>
+          <a:ln>
+            <a:noFill/>
+          </a:ln>
+        </p:spPr>
+        <p:txBody>
+          <a:bodyPr wrap="square" lIns="36576" tIns="27432" rIns="36576" bIns="27432" anchor="t">
+            <a:noAutofit/>
+          </a:bodyPr>
+          <a:lstStyle/>
+          <a:p>
+            <a:pPr algn="l">
+              <a:lnSpc>
+                <a:spcPct val="100000"/>
+              </a:lnSpc>
+            </a:pPr>
+            <a:r>
+              <a:rPr lang="en-US" sz="2100" dirty="0" b="1">
+                <a:solidFill>
+                  <a:srgbClr val="16171D"/>
+                </a:solidFill>
+                <a:latin typeface="Segoe UI"/>
+                <a:cs typeface="Segoe UI"/>
+              </a:rPr>
+              <a:t xml:space="preserve">1. Simplify </a:t>
+            </a:r>
+            <a:r>
+              <a:rPr lang="en-US" sz="2100" dirty="0" b="1" i="1">
+                <a:solidFill>
+                  <a:srgbClr val="16171D"/>
+                </a:solidFill>
+                <a:latin typeface="Segoe UI"/>
+                <a:cs typeface="Segoe UI"/>
+              </a:rPr>
+              <a:t xml:space="preserve">j</a:t>
+            </a:r>
+            <a:r>
+              <a:rPr lang="en-US" sz="2100" dirty="0" b="1">
+                <a:solidFill>
+                  <a:srgbClr val="16171D"/>
+                </a:solidFill>
+                <a:latin typeface="Segoe UI"/>
+                <a:cs typeface="Segoe UI"/>
+              </a:rPr>
+              <a:t xml:space="preserve">(</a:t>
+            </a:r>
+            <a:r>
+              <a:rPr lang="en-US" sz="2100" dirty="0" b="1" i="1">
+                <a:solidFill>
+                  <a:srgbClr val="16171D"/>
+                </a:solidFill>
+                <a:latin typeface="Segoe UI"/>
+                <a:cs typeface="Segoe UI"/>
+              </a:rPr>
+              <a:t xml:space="preserve">x</a:t>
+            </a:r>
+            <a:r>
+              <a:rPr lang="en-US" sz="2100" dirty="0" b="1">
+                <a:solidFill>
+                  <a:srgbClr val="16171D"/>
+                </a:solidFill>
+                <a:latin typeface="Segoe UI"/>
+                <a:cs typeface="Segoe UI"/>
+              </a:rPr>
+              <a:t xml:space="preserve"> − 2)</a:t>
+            </a:r>
+            <a:endParaRPr lang="en-US" sz="2100" dirty="0"/>
+          </a:p>
+        </p:txBody>
+      </p:sp>
+      <p:sp>
+        <p:nvSpPr>
+          <p:cNvPr id="5" name="Shape 5"/>
+          <p:cNvSpPr txBox="1"/>
+          <p:nvPr/>
+        </p:nvSpPr>
+        <p:spPr>
+          <a:xfrm>
+            <a:off x="895350" y="2260092"/>
+            <a:ext cx="4876648" cy="534924"/>
+          </a:xfrm>
+          <a:prstGeom prst="rect">
+            <a:avLst/>
+          </a:prstGeom>
+          <a:noFill/>
+          <a:ln>
+            <a:noFill/>
+          </a:ln>
+        </p:spPr>
+        <p:txBody>
+          <a:bodyPr wrap="square" lIns="36576" tIns="27432" rIns="36576" bIns="27432" anchor="t">
+            <a:noAutofit/>
+          </a:bodyPr>
+          <a:lstStyle/>
+          <a:p>
+            <a:pPr algn="l">
+              <a:lnSpc>
+                <a:spcPct val="100000"/>
+              </a:lnSpc>
+            </a:pPr>
+            <a:r>
+              <a:rPr lang="en-US" sz="1575" dirty="0" b="1">
+                <a:solidFill>
+                  <a:srgbClr val="16171D"/>
+                </a:solidFill>
+                <a:latin typeface="Segoe UI"/>
+                <a:cs typeface="Segoe UI"/>
+              </a:rPr>
+              <a:t xml:space="preserve">Step 1.</a:t>
+            </a:r>
+            <a:r>
+              <a:rPr lang="en-US" sz="1575" dirty="0">
+                <a:solidFill>
+                  <a:srgbClr val="16171D"/>
+                </a:solidFill>
+                <a:latin typeface="Segoe UI"/>
+                <a:cs typeface="Segoe UI"/>
+              </a:rPr>
+              <a:t xml:space="preserve"> The change is inside, so put (</a:t>
+            </a:r>
+            <a:r>
+              <a:rPr lang="en-US" sz="1575" dirty="0" i="1">
+                <a:solidFill>
+                  <a:srgbClr val="16171D"/>
+                </a:solidFill>
+                <a:latin typeface="Segoe UI"/>
+                <a:cs typeface="Segoe UI"/>
+              </a:rPr>
+              <a:t xml:space="preserve">x</a:t>
+            </a:r>
+            <a:r>
+              <a:rPr lang="en-US" sz="1575" dirty="0">
+                <a:solidFill>
+                  <a:srgbClr val="16171D"/>
+                </a:solidFill>
+                <a:latin typeface="Segoe UI"/>
+                <a:cs typeface="Segoe UI"/>
+              </a:rPr>
+              <a:t xml:space="preserve"> − 2) where </a:t>
+            </a:r>
+            <a:r>
+              <a:rPr lang="en-US" sz="1575" dirty="0" i="1">
+                <a:solidFill>
+                  <a:srgbClr val="16171D"/>
+                </a:solidFill>
+                <a:latin typeface="Segoe UI"/>
+                <a:cs typeface="Segoe UI"/>
+              </a:rPr>
+              <a:t xml:space="preserve">x</a:t>
+            </a:r>
+            <a:r>
+              <a:rPr lang="en-US" sz="1575" dirty="0">
+                <a:solidFill>
+                  <a:srgbClr val="16171D"/>
+                </a:solidFill>
+                <a:latin typeface="Segoe UI"/>
+                <a:cs typeface="Segoe UI"/>
+              </a:rPr>
+              <a:t xml:space="preserve"> was: 2(</a:t>
+            </a:r>
+            <a:r>
+              <a:rPr lang="en-US" sz="1575" dirty="0" i="1">
+                <a:solidFill>
+                  <a:srgbClr val="16171D"/>
+                </a:solidFill>
+                <a:latin typeface="Segoe UI"/>
+                <a:cs typeface="Segoe UI"/>
+              </a:rPr>
+              <a:t xml:space="preserve">x</a:t>
+            </a:r>
+            <a:r>
+              <a:rPr lang="en-US" sz="1575" dirty="0">
+                <a:solidFill>
+                  <a:srgbClr val="16171D"/>
+                </a:solidFill>
+                <a:latin typeface="Segoe UI"/>
+                <a:cs typeface="Segoe UI"/>
+              </a:rPr>
+              <a:t xml:space="preserve"> − 2) − 1.</a:t>
+            </a:r>
+            <a:endParaRPr lang="en-US" sz="1575" dirty="0"/>
+          </a:p>
+        </p:txBody>
+      </p:sp>
+      <p:sp>
+        <p:nvSpPr>
+          <p:cNvPr id="6" name="Shape 6"/>
+          <p:cNvSpPr txBox="1"/>
+          <p:nvPr/>
+        </p:nvSpPr>
+        <p:spPr>
+          <a:xfrm>
+            <a:off x="895350" y="2890266"/>
+            <a:ext cx="4876648" cy="534924"/>
+          </a:xfrm>
+          <a:prstGeom prst="rect">
+            <a:avLst/>
+          </a:prstGeom>
+          <a:noFill/>
+          <a:ln>
+            <a:noFill/>
+          </a:ln>
+        </p:spPr>
+        <p:txBody>
+          <a:bodyPr wrap="square" lIns="36576" tIns="27432" rIns="36576" bIns="27432" anchor="t">
+            <a:noAutofit/>
+          </a:bodyPr>
+          <a:lstStyle/>
+          <a:p>
+            <a:pPr algn="l">
+              <a:lnSpc>
+                <a:spcPct val="100000"/>
+              </a:lnSpc>
+            </a:pPr>
+            <a:r>
+              <a:rPr lang="en-US" sz="1575" dirty="0" b="1">
+                <a:solidFill>
+                  <a:srgbClr val="16171D"/>
+                </a:solidFill>
+                <a:latin typeface="Segoe UI"/>
+                <a:cs typeface="Segoe UI"/>
+              </a:rPr>
+              <a:t xml:space="preserve">Step 2.</a:t>
+            </a:r>
+            <a:r>
+              <a:rPr lang="en-US" sz="1575" dirty="0">
+                <a:solidFill>
+                  <a:srgbClr val="16171D"/>
+                </a:solidFill>
+                <a:latin typeface="Segoe UI"/>
+                <a:cs typeface="Segoe UI"/>
+              </a:rPr>
+              <a:t xml:space="preserve"> Distribute the 2: 2 · </a:t>
+            </a:r>
+            <a:r>
+              <a:rPr lang="en-US" sz="1575" dirty="0" i="1">
+                <a:solidFill>
+                  <a:srgbClr val="16171D"/>
+                </a:solidFill>
+                <a:latin typeface="Segoe UI"/>
+                <a:cs typeface="Segoe UI"/>
+              </a:rPr>
+              <a:t xml:space="preserve">x</a:t>
+            </a:r>
+            <a:r>
+              <a:rPr lang="en-US" sz="1575" dirty="0">
+                <a:solidFill>
+                  <a:srgbClr val="16171D"/>
+                </a:solidFill>
+                <a:latin typeface="Segoe UI"/>
+                <a:cs typeface="Segoe UI"/>
+              </a:rPr>
+              <a:t xml:space="preserve"> = 2</a:t>
+            </a:r>
+            <a:r>
+              <a:rPr lang="en-US" sz="1575" dirty="0" i="1">
+                <a:solidFill>
+                  <a:srgbClr val="16171D"/>
+                </a:solidFill>
+                <a:latin typeface="Segoe UI"/>
+                <a:cs typeface="Segoe UI"/>
+              </a:rPr>
+              <a:t xml:space="preserve">x</a:t>
+            </a:r>
+            <a:r>
+              <a:rPr lang="en-US" sz="1575" dirty="0">
+                <a:solidFill>
+                  <a:srgbClr val="16171D"/>
+                </a:solidFill>
+                <a:latin typeface="Segoe UI"/>
+                <a:cs typeface="Segoe UI"/>
+              </a:rPr>
+              <a:t xml:space="preserve"> and 2 · (−2) = −4. Now it is 2</a:t>
+            </a:r>
+            <a:r>
+              <a:rPr lang="en-US" sz="1575" dirty="0" i="1">
+                <a:solidFill>
+                  <a:srgbClr val="16171D"/>
+                </a:solidFill>
+                <a:latin typeface="Segoe UI"/>
+                <a:cs typeface="Segoe UI"/>
+              </a:rPr>
+              <a:t xml:space="preserve">x</a:t>
+            </a:r>
+            <a:r>
+              <a:rPr lang="en-US" sz="1575" dirty="0">
+                <a:solidFill>
+                  <a:srgbClr val="16171D"/>
+                </a:solidFill>
+                <a:latin typeface="Segoe UI"/>
+                <a:cs typeface="Segoe UI"/>
+              </a:rPr>
+              <a:t xml:space="preserve"> − 4 − 1.</a:t>
+            </a:r>
+            <a:endParaRPr lang="en-US" sz="1575" dirty="0"/>
+          </a:p>
+        </p:txBody>
+      </p:sp>
+      <p:sp>
+        <p:nvSpPr>
+          <p:cNvPr id="7" name="Shape 7"/>
+          <p:cNvSpPr txBox="1"/>
+          <p:nvPr/>
+        </p:nvSpPr>
+        <p:spPr>
+          <a:xfrm>
+            <a:off x="895350" y="3520440"/>
+            <a:ext cx="4876648" cy="294894"/>
+          </a:xfrm>
+          <a:prstGeom prst="rect">
+            <a:avLst/>
+          </a:prstGeom>
+          <a:noFill/>
+          <a:ln>
+            <a:noFill/>
+          </a:ln>
+        </p:spPr>
+        <p:txBody>
+          <a:bodyPr wrap="square" lIns="36576" tIns="27432" rIns="36576" bIns="27432" anchor="t">
+            <a:noAutofit/>
+          </a:bodyPr>
+          <a:lstStyle/>
+          <a:p>
+            <a:pPr algn="l">
+              <a:lnSpc>
+                <a:spcPct val="100000"/>
+              </a:lnSpc>
+            </a:pPr>
+            <a:r>
+              <a:rPr lang="en-US" sz="1575" dirty="0" b="1">
+                <a:solidFill>
+                  <a:srgbClr val="16171D"/>
+                </a:solidFill>
+                <a:latin typeface="Segoe UI"/>
+                <a:cs typeface="Segoe UI"/>
+              </a:rPr>
+              <a:t xml:space="preserve">Step 3.</a:t>
+            </a:r>
+            <a:r>
+              <a:rPr lang="en-US" sz="1575" dirty="0">
+                <a:solidFill>
+                  <a:srgbClr val="16171D"/>
+                </a:solidFill>
+                <a:latin typeface="Segoe UI"/>
+                <a:cs typeface="Segoe UI"/>
+              </a:rPr>
+              <a:t xml:space="preserve"> Combine the numbers: −4 − 1 = −5.</a:t>
+            </a:r>
+            <a:endParaRPr lang="en-US" sz="1575" dirty="0"/>
+          </a:p>
+        </p:txBody>
+      </p:sp>
+      <p:sp>
+        <p:nvSpPr>
+          <p:cNvPr id="8" name="Shape 8"/>
+          <p:cNvSpPr txBox="1"/>
+          <p:nvPr/>
+        </p:nvSpPr>
+        <p:spPr>
+          <a:xfrm>
+            <a:off x="895350" y="3910584"/>
+            <a:ext cx="2908021" cy="518922"/>
+          </a:xfrm>
+          <a:prstGeom prst="roundRect">
+            <a:avLst>
+              <a:gd name="adj" fmla="val 8000"/>
+            </a:avLst>
+          </a:prstGeom>
+          <a:solidFill>
+            <a:srgbClr val="EDF5E9"/>
+          </a:solidFill>
+          <a:ln>
+            <a:noFill/>
+          </a:ln>
+        </p:spPr>
+        <p:txBody>
+          <a:bodyPr wrap="square" lIns="164592" tIns="64008" rIns="164592" bIns="64008" anchor="ctr">
+            <a:noAutofit/>
+          </a:bodyPr>
+          <a:lstStyle/>
+          <a:p>
+            <a:pPr algn="l">
+              <a:lnSpc>
+                <a:spcPct val="100000"/>
+              </a:lnSpc>
+            </a:pPr>
+            <a:r>
+              <a:rPr lang="en-US" sz="1125" dirty="0" b="1" spc="100">
+                <a:solidFill>
+                  <a:srgbClr val="4F8A3C"/>
+                </a:solidFill>
+                <a:latin typeface="Segoe UI"/>
+                <a:cs typeface="Segoe UI"/>
+              </a:rPr>
+              <a:t xml:space="preserve">ANSWER   </a:t>
+            </a:r>
+            <a:r>
+              <a:rPr lang="en-US" sz="2325" dirty="0">
+                <a:solidFill>
+                  <a:srgbClr val="16171D"/>
+                </a:solidFill>
+                <a:latin typeface="Cambria"/>
+                <a:cs typeface="Cambria"/>
+              </a:rPr>
+              <a:t xml:space="preserve">2</a:t>
+            </a:r>
+            <a:r>
+              <a:rPr lang="en-US" sz="2325" dirty="0" i="1">
+                <a:solidFill>
+                  <a:srgbClr val="16171D"/>
+                </a:solidFill>
+                <a:latin typeface="Cambria"/>
+                <a:cs typeface="Cambria"/>
+              </a:rPr>
+              <a:t xml:space="preserve">x</a:t>
+            </a:r>
+            <a:r>
+              <a:rPr lang="en-US" sz="2325" dirty="0">
+                <a:solidFill>
+                  <a:srgbClr val="16171D"/>
+                </a:solidFill>
+                <a:latin typeface="Cambria"/>
+                <a:cs typeface="Cambria"/>
+              </a:rPr>
+              <a:t xml:space="preserve"> − 5</a:t>
+            </a:r>
+            <a:endParaRPr lang="en-US" sz="2325" dirty="0"/>
+          </a:p>
+        </p:txBody>
+      </p:sp>
+      <p:sp>
+        <p:nvSpPr>
+          <p:cNvPr id="15" name="Shape 15"/>
+          <p:cNvSpPr txBox="1"/>
+          <p:nvPr/>
+        </p:nvSpPr>
+        <p:spPr>
+          <a:xfrm>
+            <a:off x="6210148" y="1618488"/>
+            <a:ext cx="5295748" cy="3576828"/>
+          </a:xfrm>
+          <a:prstGeom prst="roundRect">
+            <a:avLst>
+              <a:gd name="adj" fmla="val 8000"/>
+            </a:avLst>
+          </a:prstGeom>
+          <a:solidFill>
+            <a:srgbClr val="FFFFFF"/>
+          </a:solidFill>
+          <a:ln w="12700">
+            <a:solidFill>
+              <a:srgbClr val="E3E4EC"/>
+            </a:solidFill>
+          </a:ln>
+        </p:spPr>
+        <p:txBody>
+          <a:bodyPr wrap="square" lIns="36576" tIns="27432" rIns="36576" bIns="27432" anchor="t">
+            <a:noAutofit/>
+          </a:bodyPr>
+          <a:lstStyle/>
+          <a:p>
+            <a:pPr algn="l">
+              <a:lnSpc>
+                <a:spcPct val="100000"/>
+              </a:lnSpc>
+            </a:pPr>
+            <a:endParaRPr lang="en-US" sz="1950" dirty="0"/>
+          </a:p>
+        </p:txBody>
+      </p:sp>
+      <p:sp>
+        <p:nvSpPr>
+          <p:cNvPr id="10" name="Shape 10"/>
+          <p:cNvSpPr txBox="1"/>
+          <p:nvPr/>
+        </p:nvSpPr>
+        <p:spPr>
+          <a:xfrm>
+            <a:off x="6419698" y="1789938"/>
+            <a:ext cx="4876648" cy="374904"/>
+          </a:xfrm>
+          <a:prstGeom prst="rect">
+            <a:avLst/>
+          </a:prstGeom>
+          <a:noFill/>
+          <a:ln>
+            <a:noFill/>
+          </a:ln>
+        </p:spPr>
+        <p:txBody>
+          <a:bodyPr wrap="square" lIns="36576" tIns="27432" rIns="36576" bIns="27432" anchor="t">
+            <a:noAutofit/>
+          </a:bodyPr>
+          <a:lstStyle/>
+          <a:p>
+            <a:pPr algn="l">
+              <a:lnSpc>
+                <a:spcPct val="100000"/>
+              </a:lnSpc>
+            </a:pPr>
+            <a:r>
+              <a:rPr lang="en-US" sz="2100" dirty="0" b="1">
+                <a:solidFill>
+                  <a:srgbClr val="16171D"/>
+                </a:solidFill>
+                <a:latin typeface="Segoe UI"/>
+                <a:cs typeface="Segoe UI"/>
+              </a:rPr>
+              <a:t xml:space="preserve">2. Simplify </a:t>
+            </a:r>
+            <a:r>
+              <a:rPr lang="en-US" sz="2100" dirty="0" b="1" i="1">
+                <a:solidFill>
+                  <a:srgbClr val="16171D"/>
+                </a:solidFill>
+                <a:latin typeface="Segoe UI"/>
+                <a:cs typeface="Segoe UI"/>
+              </a:rPr>
+              <a:t xml:space="preserve">j</a:t>
+            </a:r>
+            <a:r>
+              <a:rPr lang="en-US" sz="2100" dirty="0" b="1">
+                <a:solidFill>
+                  <a:srgbClr val="16171D"/>
+                </a:solidFill>
+                <a:latin typeface="Segoe UI"/>
+                <a:cs typeface="Segoe UI"/>
+              </a:rPr>
+              <a:t xml:space="preserve">(</a:t>
+            </a:r>
+            <a:r>
+              <a:rPr lang="en-US" sz="2100" dirty="0" b="1" i="1">
+                <a:solidFill>
+                  <a:srgbClr val="16171D"/>
+                </a:solidFill>
+                <a:latin typeface="Segoe UI"/>
+                <a:cs typeface="Segoe UI"/>
+              </a:rPr>
+              <a:t xml:space="preserve">x</a:t>
+            </a:r>
+            <a:r>
+              <a:rPr lang="en-US" sz="2100" dirty="0" b="1">
+                <a:solidFill>
+                  <a:srgbClr val="16171D"/>
+                </a:solidFill>
+                <a:latin typeface="Segoe UI"/>
+                <a:cs typeface="Segoe UI"/>
+              </a:rPr>
+              <a:t xml:space="preserve">) − 2</a:t>
+            </a:r>
+            <a:endParaRPr lang="en-US" sz="2100" dirty="0"/>
+          </a:p>
+        </p:txBody>
+      </p:sp>
+      <p:sp>
+        <p:nvSpPr>
+          <p:cNvPr id="11" name="Shape 11"/>
+          <p:cNvSpPr txBox="1"/>
+          <p:nvPr/>
+        </p:nvSpPr>
+        <p:spPr>
+          <a:xfrm>
+            <a:off x="6419698" y="2260092"/>
+            <a:ext cx="4876648" cy="534924"/>
+          </a:xfrm>
+          <a:prstGeom prst="rect">
+            <a:avLst/>
+          </a:prstGeom>
+          <a:noFill/>
+          <a:ln>
+            <a:noFill/>
+          </a:ln>
+        </p:spPr>
+        <p:txBody>
+          <a:bodyPr wrap="square" lIns="36576" tIns="27432" rIns="36576" bIns="27432" anchor="t">
+            <a:noAutofit/>
+          </a:bodyPr>
+          <a:lstStyle/>
+          <a:p>
+            <a:pPr algn="l">
+              <a:lnSpc>
+                <a:spcPct val="100000"/>
+              </a:lnSpc>
+            </a:pPr>
+            <a:r>
+              <a:rPr lang="en-US" sz="1575" dirty="0" b="1">
+                <a:solidFill>
+                  <a:srgbClr val="16171D"/>
+                </a:solidFill>
+                <a:latin typeface="Segoe UI"/>
+                <a:cs typeface="Segoe UI"/>
+              </a:rPr>
+              <a:t xml:space="preserve">Step 1.</a:t>
+            </a:r>
+            <a:r>
+              <a:rPr lang="en-US" sz="1575" dirty="0">
+                <a:solidFill>
+                  <a:srgbClr val="16171D"/>
+                </a:solidFill>
+                <a:latin typeface="Segoe UI"/>
+                <a:cs typeface="Segoe UI"/>
+              </a:rPr>
+              <a:t xml:space="preserve"> The change is outside, so write the whole rule, then subtract 2: 2</a:t>
+            </a:r>
+            <a:r>
+              <a:rPr lang="en-US" sz="1575" dirty="0" i="1">
+                <a:solidFill>
+                  <a:srgbClr val="16171D"/>
+                </a:solidFill>
+                <a:latin typeface="Segoe UI"/>
+                <a:cs typeface="Segoe UI"/>
+              </a:rPr>
+              <a:t xml:space="preserve">x</a:t>
+            </a:r>
+            <a:r>
+              <a:rPr lang="en-US" sz="1575" dirty="0">
+                <a:solidFill>
+                  <a:srgbClr val="16171D"/>
+                </a:solidFill>
+                <a:latin typeface="Segoe UI"/>
+                <a:cs typeface="Segoe UI"/>
+              </a:rPr>
+              <a:t xml:space="preserve"> − 1 − 2.</a:t>
+            </a:r>
+            <a:endParaRPr lang="en-US" sz="1575" dirty="0"/>
+          </a:p>
+        </p:txBody>
+      </p:sp>
+      <p:sp>
+        <p:nvSpPr>
+          <p:cNvPr id="12" name="Shape 12"/>
+          <p:cNvSpPr txBox="1"/>
+          <p:nvPr/>
+        </p:nvSpPr>
+        <p:spPr>
+          <a:xfrm>
+            <a:off x="6419698" y="2890266"/>
+            <a:ext cx="4876648" cy="534924"/>
+          </a:xfrm>
+          <a:prstGeom prst="rect">
+            <a:avLst/>
+          </a:prstGeom>
+          <a:noFill/>
+          <a:ln>
+            <a:noFill/>
+          </a:ln>
+        </p:spPr>
+        <p:txBody>
+          <a:bodyPr wrap="square" lIns="36576" tIns="27432" rIns="36576" bIns="27432" anchor="t">
+            <a:noAutofit/>
+          </a:bodyPr>
+          <a:lstStyle/>
+          <a:p>
+            <a:pPr algn="l">
+              <a:lnSpc>
+                <a:spcPct val="100000"/>
+              </a:lnSpc>
+            </a:pPr>
+            <a:r>
+              <a:rPr lang="en-US" sz="1575" dirty="0" b="1">
+                <a:solidFill>
+                  <a:srgbClr val="16171D"/>
+                </a:solidFill>
+                <a:latin typeface="Segoe UI"/>
+                <a:cs typeface="Segoe UI"/>
+              </a:rPr>
+              <a:t xml:space="preserve">Step 2.</a:t>
+            </a:r>
+            <a:r>
+              <a:rPr lang="en-US" sz="1575" dirty="0">
+                <a:solidFill>
+                  <a:srgbClr val="16171D"/>
+                </a:solidFill>
+                <a:latin typeface="Segoe UI"/>
+                <a:cs typeface="Segoe UI"/>
+              </a:rPr>
+              <a:t xml:space="preserve"> Combine the numbers: −1 − 2 = −3. That gives 2</a:t>
+            </a:r>
+            <a:r>
+              <a:rPr lang="en-US" sz="1575" dirty="0" i="1">
+                <a:solidFill>
+                  <a:srgbClr val="16171D"/>
+                </a:solidFill>
+                <a:latin typeface="Segoe UI"/>
+                <a:cs typeface="Segoe UI"/>
+              </a:rPr>
+              <a:t xml:space="preserve">x</a:t>
+            </a:r>
+            <a:r>
+              <a:rPr lang="en-US" sz="1575" dirty="0">
+                <a:solidFill>
+                  <a:srgbClr val="16171D"/>
+                </a:solidFill>
+                <a:latin typeface="Segoe UI"/>
+                <a:cs typeface="Segoe UI"/>
+              </a:rPr>
+              <a:t xml:space="preserve"> − 3.</a:t>
+            </a:r>
+            <a:endParaRPr lang="en-US" sz="1575" dirty="0"/>
+          </a:p>
+        </p:txBody>
+      </p:sp>
+      <p:sp>
+        <p:nvSpPr>
+          <p:cNvPr id="13" name="Shape 13"/>
+          <p:cNvSpPr txBox="1"/>
+          <p:nvPr/>
+        </p:nvSpPr>
+        <p:spPr>
+          <a:xfrm>
+            <a:off x="6419698" y="3520440"/>
+            <a:ext cx="4876648" cy="534924"/>
+          </a:xfrm>
+          <a:prstGeom prst="rect">
+            <a:avLst/>
+          </a:prstGeom>
+          <a:noFill/>
+          <a:ln>
+            <a:noFill/>
+          </a:ln>
+        </p:spPr>
+        <p:txBody>
+          <a:bodyPr wrap="square" lIns="36576" tIns="27432" rIns="36576" bIns="27432" anchor="t">
+            <a:noAutofit/>
+          </a:bodyPr>
+          <a:lstStyle/>
+          <a:p>
+            <a:pPr algn="l">
+              <a:lnSpc>
+                <a:spcPct val="100000"/>
+              </a:lnSpc>
+            </a:pPr>
+            <a:r>
+              <a:rPr lang="en-US" sz="1575" dirty="0" b="1">
+                <a:solidFill>
+                  <a:srgbClr val="16171D"/>
+                </a:solidFill>
+                <a:latin typeface="Segoe UI"/>
+                <a:cs typeface="Segoe UI"/>
+              </a:rPr>
+              <a:t xml:space="preserve">Step 3.</a:t>
+            </a:r>
+            <a:r>
+              <a:rPr lang="en-US" sz="1575" dirty="0">
+                <a:solidFill>
+                  <a:srgbClr val="16171D"/>
+                </a:solidFill>
+                <a:latin typeface="Segoe UI"/>
+                <a:cs typeface="Segoe UI"/>
+              </a:rPr>
+              <a:t xml:space="preserve"> Compare with #1: 2</a:t>
+            </a:r>
+            <a:r>
+              <a:rPr lang="en-US" sz="1575" dirty="0" i="1">
+                <a:solidFill>
+                  <a:srgbClr val="16171D"/>
+                </a:solidFill>
+                <a:latin typeface="Segoe UI"/>
+                <a:cs typeface="Segoe UI"/>
+              </a:rPr>
+              <a:t xml:space="preserve">x</a:t>
+            </a:r>
+            <a:r>
+              <a:rPr lang="en-US" sz="1575" dirty="0">
+                <a:solidFill>
+                  <a:srgbClr val="16171D"/>
+                </a:solidFill>
+                <a:latin typeface="Segoe UI"/>
+                <a:cs typeface="Segoe UI"/>
+              </a:rPr>
+              <a:t xml:space="preserve"> − 5 and 2</a:t>
+            </a:r>
+            <a:r>
+              <a:rPr lang="en-US" sz="1575" dirty="0" i="1">
+                <a:solidFill>
+                  <a:srgbClr val="16171D"/>
+                </a:solidFill>
+                <a:latin typeface="Segoe UI"/>
+                <a:cs typeface="Segoe UI"/>
+              </a:rPr>
+              <a:t xml:space="preserve">x</a:t>
+            </a:r>
+            <a:r>
+              <a:rPr lang="en-US" sz="1575" dirty="0">
+                <a:solidFill>
+                  <a:srgbClr val="16171D"/>
+                </a:solidFill>
+                <a:latin typeface="Segoe UI"/>
+                <a:cs typeface="Segoe UI"/>
+              </a:rPr>
+              <a:t xml:space="preserve"> − 3 cross the </a:t>
+            </a:r>
+            <a:r>
+              <a:rPr lang="en-US" sz="1575" dirty="0" i="1">
+                <a:solidFill>
+                  <a:srgbClr val="16171D"/>
+                </a:solidFill>
+                <a:latin typeface="Segoe UI"/>
+                <a:cs typeface="Segoe UI"/>
+              </a:rPr>
+              <a:t xml:space="preserve">y</a:t>
+            </a:r>
+            <a:r>
+              <a:rPr lang="en-US" sz="1575" dirty="0">
+                <a:solidFill>
+                  <a:srgbClr val="16171D"/>
+                </a:solidFill>
+                <a:latin typeface="Segoe UI"/>
+                <a:cs typeface="Segoe UI"/>
+              </a:rPr>
+              <a:t xml:space="preserve">-axis at different places.</a:t>
+            </a:r>
+            <a:endParaRPr lang="en-US" sz="1575" dirty="0"/>
+          </a:p>
+        </p:txBody>
+      </p:sp>
+      <p:sp>
+        <p:nvSpPr>
+          <p:cNvPr id="14" name="Shape 14"/>
+          <p:cNvSpPr txBox="1"/>
+          <p:nvPr/>
+        </p:nvSpPr>
+        <p:spPr>
+          <a:xfrm>
+            <a:off x="6419698" y="4150614"/>
+            <a:ext cx="4876648" cy="873252"/>
+          </a:xfrm>
+          <a:prstGeom prst="roundRect">
+            <a:avLst>
+              <a:gd name="adj" fmla="val 8000"/>
+            </a:avLst>
+          </a:prstGeom>
+          <a:solidFill>
+            <a:srgbClr val="EDF5E9"/>
+          </a:solidFill>
+          <a:ln>
+            <a:noFill/>
+          </a:ln>
+        </p:spPr>
+        <p:txBody>
+          <a:bodyPr wrap="square" lIns="164592" tIns="64008" rIns="164592" bIns="64008" anchor="ctr">
+            <a:noAutofit/>
+          </a:bodyPr>
+          <a:lstStyle/>
+          <a:p>
+            <a:pPr algn="l">
+              <a:lnSpc>
+                <a:spcPct val="100000"/>
+              </a:lnSpc>
+            </a:pPr>
+            <a:r>
+              <a:rPr lang="en-US" sz="1125" dirty="0" b="1" spc="100">
+                <a:solidFill>
+                  <a:srgbClr val="4F8A3C"/>
+                </a:solidFill>
+                <a:latin typeface="Segoe UI"/>
+                <a:cs typeface="Segoe UI"/>
+              </a:rPr>
+              <a:t xml:space="preserve">ANSWER   </a:t>
+            </a:r>
+            <a:r>
+              <a:rPr lang="en-US" sz="2325" dirty="0">
+                <a:solidFill>
+                  <a:srgbClr val="16171D"/>
+                </a:solidFill>
+                <a:latin typeface="Cambria"/>
+                <a:cs typeface="Cambria"/>
+              </a:rPr>
+              <a:t xml:space="preserve">2</a:t>
+            </a:r>
+            <a:r>
+              <a:rPr lang="en-US" sz="2325" dirty="0" i="1">
+                <a:solidFill>
+                  <a:srgbClr val="16171D"/>
+                </a:solidFill>
+                <a:latin typeface="Cambria"/>
+                <a:cs typeface="Cambria"/>
+              </a:rPr>
+              <a:t xml:space="preserve">x</a:t>
+            </a:r>
+            <a:r>
+              <a:rPr lang="en-US" sz="2325" dirty="0">
+                <a:solidFill>
+                  <a:srgbClr val="16171D"/>
+                </a:solidFill>
+                <a:latin typeface="Cambria"/>
+                <a:cs typeface="Cambria"/>
+              </a:rPr>
+              <a:t xml:space="preserve"> − 3 · not the same graph as #1</a:t>
+            </a:r>
+            <a:endParaRPr lang="en-US" sz="2325" dirty="0"/>
+          </a:p>
+        </p:txBody>
+      </p:sp>
+      <p:sp>
+        <p:nvSpPr>
+          <p:cNvPr id="16" name="Slide Number 16"/>
+          <p:cNvSpPr txBox="1"/>
+          <p:nvPr/>
+        </p:nvSpPr>
+        <p:spPr>
+          <a:xfrm>
+            <a:off x="11277295" y="6611112"/>
+            <a:ext cx="685800" cy="201168"/>
+          </a:xfrm>
+          <a:prstGeom prst="rect">
+            <a:avLst/>
+          </a:prstGeom>
+          <a:noFill/>
+        </p:spPr>
+        <p:txBody>
+          <a:bodyPr wrap="none" lIns="0" tIns="0" rIns="0" bIns="0" anchor="b">
+            <a:noAutofit/>
+          </a:bodyPr>
+          <a:lstStyle/>
+          <a:p>
+            <a:pPr algn="r"/>
+            <a:fld id="{5C1A6E0B-3B1F-4D5E-9C7A-2F4B8D6E1A90}" type="slidenum">
+              <a:rPr lang="en-US" sz="1200" dirty="0">
+                <a:solidFill>
+                  <a:srgbClr val="5F6272"/>
+                </a:solidFill>
+              </a:rPr>
+              <a:t>11</a:t>
+            </a:fld>
+          </a:p>
+        </p:txBody>
+      </p:sp>
+    </p:spTree>
+  </p:cSld>
+  <p:clrMapOvr>
+    <a:masterClrMapping/>
+  </p:clrMapOvr>
+  <p:transition spd="med">
+    <p:fade/>
+  </p:transition>
+  <p:timing>
+    <p:tnLst>
+      <p:par>
+        <p:cTn id="1" dur="indefinite" restart="never" nodeType="tmRoot">
+          <p:childTnLst>
+            <p:seq concurrent="1" nextAc="seek">
+              <p:cTn id="2" dur="indefinite" nodeType="mainSeq">
+                <p:childTnLst>
+                  <p:par>
+                    <p:cTn id="8" fill="hold">
+                      <p:stCondLst>
+                        <p:cond delay="indefinite"/>
+                      </p:stCondLst>
+                      <p:childTnLst>
+                        <p:par>
+                          <p:cTn id="9" fill="hold">
+                            <p:stCondLst>
+                              <p:cond delay="0"/>
+                            </p:stCondLst>
+                            <p:childTnLst>
+                              <p:par>
+                                <p:cTn id="7" presetID="42" presetClass="entr" presetSubtype="0" fill="hold" nodeType="clickEffect">
+                                  <p:stCondLst>
+                                    <p:cond delay="0"/>
+                                  </p:stCondLst>
+                                  <p:childTnLst>
+                                    <p:set>
+                                      <p:cBhvr>
+                                        <p:cTn id="3" dur="1" fill="hold">
+                                          <p:stCondLst>
+                                            <p:cond delay="0"/>
+                                          </p:stCondLst>
+                                        </p:cTn>
+                                        <p:tgtEl>
+                                          <p:spTgt spid="5"/>
+                                        </p:tgtEl>
+                                        <p:attrNameLst>
+                                          <p:attrName>style.visibility</p:attrName>
+                                        </p:attrNameLst>
+                                      </p:cBhvr>
+                                      <p:to>
+                                        <p:strVal val="visible"/>
+                                      </p:to>
+                                    </p:set>
+                                    <p:animEffect transition="in" filter="fade">
+                                      <p:cBhvr>
+                                        <p:cTn id="4" dur="500"/>
+                                        <p:tgtEl>
+                                          <p:spTgt spid="5"/>
+                                        </p:tgtEl>
+                                      </p:cBhvr>
+                                    </p:animEffect>
+                                    <p:anim calcmode="lin" valueType="num">
+                                      <p:cBhvr>
+                                        <p:cTn id="5" dur="500" fill="hold"/>
+                                        <p:tgtEl>
+                                          <p:spTgt spid="5"/>
+                                        </p:tgtEl>
+                                        <p:attrNameLst>
+                                          <p:attrName>ppt_x</p:attrName>
+                                        </p:attrNameLst>
+                                      </p:cBhvr>
+                                      <p:tavLst>
+                                        <p:tav tm="0">
+                                          <p:val>
+                                            <p:strVal val="#ppt_x"/>
+                                          </p:val>
+                                        </p:tav>
+                                        <p:tav tm="100000">
+                                          <p:val>
+                                            <p:strVal val="#ppt_x"/>
+                                          </p:val>
+                                        </p:tav>
+                                      </p:tavLst>
+                                    </p:anim>
+                                    <p:anim calcmode="lin" valueType="num">
+                                      <p:cBhvr>
+                                        <p:cTn id="6" dur="500" fill="hold"/>
+                                        <p:tgtEl>
+                                          <p:spTgt spid="5"/>
+                                        </p:tgtEl>
+                                        <p:attrNameLst>
+                                          <p:attrName>ppt_y</p:attrName>
+                                        </p:attrNameLst>
+                                      </p:cBhvr>
+                                      <p:tavLst>
+                                        <p:tav tm="0">
+                                          <p:val>
+                                            <p:strVal val="#ppt_y+.1"/>
+                                          </p:val>
+                                        </p:tav>
+                                        <p:tav tm="100000">
+                                          <p:val>
+                                            <p:strVal val="#ppt_y"/>
+                                          </p:val>
+                                        </p:tav>
+                                      </p:tavLst>
+                                    </p:anim>
+                                  </p:childTnLst>
+                                </p:cTn>
+                              </p:par>
+                            </p:childTnLst>
+                          </p:cTn>
+                        </p:par>
+                      </p:childTnLst>
+                    </p:cTn>
+                  </p:par>
+                  <p:par>
+                    <p:cTn id="15" fill="hold">
+                      <p:stCondLst>
+                        <p:cond delay="indefinite"/>
+                      </p:stCondLst>
+                      <p:childTnLst>
+                        <p:par>
+                          <p:cTn id="16" fill="hold">
+                            <p:stCondLst>
+                              <p:cond delay="0"/>
+                            </p:stCondLst>
+                            <p:childTnLst>
+                              <p:par>
+                                <p:cTn id="14" presetID="42" presetClass="entr" presetSubtype="0" fill="hold" nodeType="clickEffect">
+                                  <p:stCondLst>
+                                    <p:cond delay="0"/>
+                                  </p:stCondLst>
+                                  <p:childTnLst>
+                                    <p:set>
+                                      <p:cBhvr>
+                                        <p:cTn id="10" dur="1" fill="hold">
+                                          <p:stCondLst>
+                                            <p:cond delay="0"/>
+                                          </p:stCondLst>
+                                        </p:cTn>
+                                        <p:tgtEl>
+                                          <p:spTgt spid="6"/>
+                                        </p:tgtEl>
+                                        <p:attrNameLst>
+                                          <p:attrName>style.visibility</p:attrName>
+                                        </p:attrNameLst>
+                                      </p:cBhvr>
+                                      <p:to>
+                                        <p:strVal val="visible"/>
+                                      </p:to>
+                                    </p:set>
+                                    <p:animEffect transition="in" filter="fade">
+                                      <p:cBhvr>
+                                        <p:cTn id="11" dur="500"/>
+                                        <p:tgtEl>
+                                          <p:spTgt spid="6"/>
+                                        </p:tgtEl>
+                                      </p:cBhvr>
+                                    </p:animEffect>
+                                    <p:anim calcmode="lin" valueType="num">
+                                      <p:cBhvr>
+                                        <p:cTn id="12" dur="500" fill="hold"/>
+                                        <p:tgtEl>
+                                          <p:spTgt spid="6"/>
+                                        </p:tgtEl>
+                                        <p:attrNameLst>
+                                          <p:attrName>ppt_x</p:attrName>
+                                        </p:attrNameLst>
+                                      </p:cBhvr>
+                                      <p:tavLst>
+                                        <p:tav tm="0">
+                                          <p:val>
+                                            <p:strVal val="#ppt_x"/>
+                                          </p:val>
+                                        </p:tav>
+                                        <p:tav tm="100000">
+                                          <p:val>
+                                            <p:strVal val="#ppt_x"/>
+                                          </p:val>
+                                        </p:tav>
+                                      </p:tavLst>
+                                    </p:anim>
+                                    <p:anim calcmode="lin" valueType="num">
+                                      <p:cBhvr>
+                                        <p:cTn id="13" dur="500" fill="hold"/>
+                                        <p:tgtEl>
+                                          <p:spTgt spid="6"/>
+                                        </p:tgtEl>
+                                        <p:attrNameLst>
+                                          <p:attrName>ppt_y</p:attrName>
+                                        </p:attrNameLst>
+                                      </p:cBhvr>
+                                      <p:tavLst>
+                                        <p:tav tm="0">
+                                          <p:val>
+                                            <p:strVal val="#ppt_y+.1"/>
+                                          </p:val>
+                                        </p:tav>
+                                        <p:tav tm="100000">
+                                          <p:val>
+                                            <p:strVal val="#ppt_y"/>
+                                          </p:val>
+                                        </p:tav>
+                                      </p:tavLst>
+                                    </p:anim>
+                                  </p:childTnLst>
+                                </p:cTn>
+                              </p:par>
+                            </p:childTnLst>
+                          </p:cTn>
+                        </p:par>
+                      </p:childTnLst>
+                    </p:cTn>
+                  </p:par>
+                  <p:par>
+                    <p:cTn id="22" fill="hold">
+                      <p:stCondLst>
+                        <p:cond delay="indefinite"/>
+                      </p:stCondLst>
+                      <p:childTnLst>
+                        <p:par>
+                          <p:cTn id="23" fill="hold">
+                            <p:stCondLst>
+                              <p:cond delay="0"/>
+                            </p:stCondLst>
+                            <p:childTnLst>
+                              <p:par>
+                                <p:cTn id="21" presetID="42" presetClass="entr" presetSubtype="0" fill="hold" nodeType="clickEffect">
+                                  <p:stCondLst>
+                                    <p:cond delay="0"/>
+                                  </p:stCondLst>
+                                  <p:childTnLst>
+                                    <p:set>
+                                      <p:cBhvr>
+                                        <p:cTn id="17" dur="1" fill="hold">
+                                          <p:stCondLst>
+                                            <p:cond delay="0"/>
+                                          </p:stCondLst>
+                                        </p:cTn>
+                                        <p:tgtEl>
+                                          <p:spTgt spid="7"/>
+                                        </p:tgtEl>
+                                        <p:attrNameLst>
+                                          <p:attrName>style.visibility</p:attrName>
+                                        </p:attrNameLst>
+                                      </p:cBhvr>
+                                      <p:to>
+                                        <p:strVal val="visible"/>
+                                      </p:to>
+                                    </p:set>
+                                    <p:animEffect transition="in" filter="fade">
+                                      <p:cBhvr>
+                                        <p:cTn id="18" dur="500"/>
+                                        <p:tgtEl>
+                                          <p:spTgt spid="7"/>
+                                        </p:tgtEl>
+                                      </p:cBhvr>
+                                    </p:animEffect>
+                                    <p:anim calcmode="lin" valueType="num">
+                                      <p:cBhvr>
+                                        <p:cTn id="19" dur="500" fill="hold"/>
+                                        <p:tgtEl>
+                                          <p:spTgt spid="7"/>
+                                        </p:tgtEl>
+                                        <p:attrNameLst>
+                                          <p:attrName>ppt_x</p:attrName>
+                                        </p:attrNameLst>
+                                      </p:cBhvr>
+                                      <p:tavLst>
+                                        <p:tav tm="0">
+                                          <p:val>
+                                            <p:strVal val="#ppt_x"/>
+                                          </p:val>
+                                        </p:tav>
+                                        <p:tav tm="100000">
+                                          <p:val>
+                                            <p:strVal val="#ppt_x"/>
+                                          </p:val>
+                                        </p:tav>
+                                      </p:tavLst>
+                                    </p:anim>
+                                    <p:anim calcmode="lin" valueType="num">
+                                      <p:cBhvr>
+                                        <p:cTn id="20" dur="500" fill="hold"/>
+                                        <p:tgtEl>
+                                          <p:spTgt spid="7"/>
+                                        </p:tgtEl>
+                                        <p:attrNameLst>
+                                          <p:attrName>ppt_y</p:attrName>
+                                        </p:attrNameLst>
+                                      </p:cBhvr>
+                                      <p:tavLst>
+                                        <p:tav tm="0">
+                                          <p:val>
+                                            <p:strVal val="#ppt_y+.1"/>
+                                          </p:val>
+                                        </p:tav>
+                                        <p:tav tm="100000">
+                                          <p:val>
+                                            <p:strVal val="#ppt_y"/>
+                                          </p:val>
+                                        </p:tav>
+                                      </p:tavLst>
+                                    </p:anim>
+                                  </p:childTnLst>
+                                </p:cTn>
+                              </p:par>
+                            </p:childTnLst>
+                          </p:cTn>
+                        </p:par>
+                      </p:childTnLst>
+                    </p:cTn>
+                  </p:par>
+                  <p:par>
+                    <p:cTn id="29" fill="hold">
+                      <p:stCondLst>
+                        <p:cond delay="indefinite"/>
+                      </p:stCondLst>
+                      <p:childTnLst>
+                        <p:par>
+                          <p:cTn id="30" fill="hold">
+                            <p:stCondLst>
+                              <p:cond delay="0"/>
+                            </p:stCondLst>
+                            <p:childTnLst>
+                              <p:par>
+                                <p:cTn id="28" presetID="53" presetClass="entr" presetSubtype="16" fill="hold" nodeType="clickEffect">
+                                  <p:stCondLst>
+                                    <p:cond delay="0"/>
+                                  </p:stCondLst>
+                                  <p:childTnLst>
+                                    <p:set>
+                                      <p:cBhvr>
+                                        <p:cTn id="24" dur="1" fill="hold">
+                                          <p:stCondLst>
+                                            <p:cond delay="0"/>
+                                          </p:stCondLst>
+                                        </p:cTn>
+                                        <p:tgtEl>
+                                          <p:spTgt spid="8"/>
+                                        </p:tgtEl>
+                                        <p:attrNameLst>
+                                          <p:attrName>style.visibility</p:attrName>
+                                        </p:attrNameLst>
+                                      </p:cBhvr>
+                                      <p:to>
+                                        <p:strVal val="visible"/>
+                                      </p:to>
+                                    </p:set>
+                                    <p:animEffect transition="in" filter="fade">
+                                      <p:cBhvr>
+                                        <p:cTn id="25" dur="500"/>
+                                        <p:tgtEl>
+                                          <p:spTgt spid="8"/>
+                                        </p:tgtEl>
+                                      </p:cBhvr>
+                                    </p:animEffect>
+                                    <p:anim calcmode="lin" valueType="num">
+                                      <p:cBhvr>
+                                        <p:cTn id="26" dur="500" fill="hold"/>
+                                        <p:tgtEl>
+                                          <p:spTgt spid="8"/>
+                                        </p:tgtEl>
+                                        <p:attrNameLst>
+                                          <p:attrName>ppt_w</p:attrName>
+                                        </p:attrNameLst>
+                                      </p:cBhvr>
+                                      <p:tavLst>
+                                        <p:tav tm="0">
+                                          <p:val>
+                                            <p:fltVal val="0"/>
+                                          </p:val>
+                                        </p:tav>
+                                        <p:tav tm="100000">
+                                          <p:val>
+                                            <p:strVal val="#ppt_w"/>
+                                          </p:val>
+                                        </p:tav>
+                                      </p:tavLst>
+                                    </p:anim>
+                                    <p:anim calcmode="lin" valueType="num">
+                                      <p:cBhvr>
+                                        <p:cTn id="27" dur="500" fill="hold"/>
+                                        <p:tgtEl>
+                                          <p:spTgt spid="8"/>
+                                        </p:tgtEl>
+                                        <p:attrNameLst>
+                                          <p:attrName>ppt_h</p:attrName>
+                                        </p:attrNameLst>
+                                      </p:cBhvr>
+                                      <p:tavLst>
+                                        <p:tav tm="0">
+                                          <p:val>
+                                            <p:fltVal val="0"/>
+                                          </p:val>
+                                        </p:tav>
+                                        <p:tav tm="100000">
+                                          <p:val>
+                                            <p:strVal val="#ppt_h"/>
+                                          </p:val>
+                                        </p:tav>
+                                      </p:tavLst>
+                                    </p:anim>
+                                  </p:childTnLst>
+                                </p:cTn>
+                              </p:par>
+                            </p:childTnLst>
+                          </p:cTn>
+                        </p:par>
+                      </p:childTnLst>
+                    </p:cTn>
+                  </p:par>
+                  <p:par>
+                    <p:cTn id="36" fill="hold">
+                      <p:stCondLst>
+                        <p:cond delay="indefinite"/>
+                      </p:stCondLst>
+                      <p:childTnLst>
+                        <p:par>
+                          <p:cTn id="37" fill="hold">
+                            <p:stCondLst>
+                              <p:cond delay="0"/>
+                            </p:stCondLst>
+                            <p:childTnLst>
+                              <p:par>
+                                <p:cTn id="35" presetID="42" presetClass="entr" presetSubtype="0" fill="hold" nodeType="clickEffect">
+                                  <p:stCondLst>
+                                    <p:cond delay="0"/>
+                                  </p:stCondLst>
+                                  <p:childTnLst>
+                                    <p:set>
+                                      <p:cBhvr>
+                                        <p:cTn id="31" dur="1" fill="hold">
+                                          <p:stCondLst>
+                                            <p:cond delay="0"/>
+                                          </p:stCondLst>
+                                        </p:cTn>
+                                        <p:tgtEl>
+                                          <p:spTgt spid="11"/>
+                                        </p:tgtEl>
+                                        <p:attrNameLst>
+                                          <p:attrName>style.visibility</p:attrName>
+                                        </p:attrNameLst>
+                                      </p:cBhvr>
+                                      <p:to>
+                                        <p:strVal val="visible"/>
+                                      </p:to>
+                                    </p:set>
+                                    <p:animEffect transition="in" filter="fade">
+                                      <p:cBhvr>
+                                        <p:cTn id="32" dur="500"/>
+                                        <p:tgtEl>
+                                          <p:spTgt spid="11"/>
+                                        </p:tgtEl>
+                                      </p:cBhvr>
+                                    </p:animEffect>
+                                    <p:anim calcmode="lin" valueType="num">
+                                      <p:cBhvr>
+                                        <p:cTn id="33" dur="500" fill="hold"/>
+                                        <p:tgtEl>
+                                          <p:spTgt spid="11"/>
+                                        </p:tgtEl>
+                                        <p:attrNameLst>
+                                          <p:attrName>ppt_x</p:attrName>
+                                        </p:attrNameLst>
+                                      </p:cBhvr>
+                                      <p:tavLst>
+                                        <p:tav tm="0">
+                                          <p:val>
+                                            <p:strVal val="#ppt_x"/>
+                                          </p:val>
+                                        </p:tav>
+                                        <p:tav tm="100000">
+                                          <p:val>
+                                            <p:strVal val="#ppt_x"/>
+                                          </p:val>
+                                        </p:tav>
+                                      </p:tavLst>
+                                    </p:anim>
+                                    <p:anim calcmode="lin" valueType="num">
+                                      <p:cBhvr>
+                                        <p:cTn id="34" dur="500" fill="hold"/>
+                                        <p:tgtEl>
+                                          <p:spTgt spid="11"/>
+                                        </p:tgtEl>
+                                        <p:attrNameLst>
+                                          <p:attrName>ppt_y</p:attrName>
+                                        </p:attrNameLst>
+                                      </p:cBhvr>
+                                      <p:tavLst>
+                                        <p:tav tm="0">
+                                          <p:val>
+                                            <p:strVal val="#ppt_y+.1"/>
+                                          </p:val>
+                                        </p:tav>
+                                        <p:tav tm="100000">
+                                          <p:val>
+                                            <p:strVal val="#ppt_y"/>
+                                          </p:val>
+                                        </p:tav>
+                                      </p:tavLst>
+                                    </p:anim>
+                                  </p:childTnLst>
+                                </p:cTn>
+                              </p:par>
+                            </p:childTnLst>
+                          </p:cTn>
+                        </p:par>
+                      </p:childTnLst>
+                    </p:cTn>
+                  </p:par>
+                  <p:par>
+                    <p:cTn id="43" fill="hold">
+                      <p:stCondLst>
+                        <p:cond delay="indefinite"/>
+                      </p:stCondLst>
+                      <p:childTnLst>
+                        <p:par>
+                          <p:cTn id="44" fill="hold">
+                            <p:stCondLst>
+                              <p:cond delay="0"/>
+                            </p:stCondLst>
+                            <p:childTnLst>
+                              <p:par>
+                                <p:cTn id="42" presetID="42" presetClass="entr" presetSubtype="0" fill="hold" nodeType="clickEffect">
+                                  <p:stCondLst>
+                                    <p:cond delay="0"/>
+                                  </p:stCondLst>
+                                  <p:childTnLst>
+                                    <p:set>
+                                      <p:cBhvr>
+                                        <p:cTn id="38" dur="1" fill="hold">
+                                          <p:stCondLst>
+                                            <p:cond delay="0"/>
+                                          </p:stCondLst>
+                                        </p:cTn>
+                                        <p:tgtEl>
+                                          <p:spTgt spid="12"/>
+                                        </p:tgtEl>
+                                        <p:attrNameLst>
+                                          <p:attrName>style.visibility</p:attrName>
+                                        </p:attrNameLst>
+                                      </p:cBhvr>
+                                      <p:to>
+                                        <p:strVal val="visible"/>
+                                      </p:to>
+                                    </p:set>
+                                    <p:animEffect transition="in" filter="fade">
+                                      <p:cBhvr>
+                                        <p:cTn id="39" dur="500"/>
+                                        <p:tgtEl>
+                                          <p:spTgt spid="12"/>
+                                        </p:tgtEl>
+                                      </p:cBhvr>
+                                    </p:animEffect>
+                                    <p:anim calcmode="lin" valueType="num">
+                                      <p:cBhvr>
+                                        <p:cTn id="40" dur="500" fill="hold"/>
+                                        <p:tgtEl>
+                                          <p:spTgt spid="12"/>
+                                        </p:tgtEl>
+                                        <p:attrNameLst>
+                                          <p:attrName>ppt_x</p:attrName>
+                                        </p:attrNameLst>
+                                      </p:cBhvr>
+                                      <p:tavLst>
+                                        <p:tav tm="0">
+                                          <p:val>
+                                            <p:strVal val="#ppt_x"/>
+                                          </p:val>
+                                        </p:tav>
+                                        <p:tav tm="100000">
+                                          <p:val>
+                                            <p:strVal val="#ppt_x"/>
+                                          </p:val>
+                                        </p:tav>
+                                      </p:tavLst>
+                                    </p:anim>
+                                    <p:anim calcmode="lin" valueType="num">
+                                      <p:cBhvr>
+                                        <p:cTn id="41" dur="500" fill="hold"/>
+                                        <p:tgtEl>
+                                          <p:spTgt spid="12"/>
+                                        </p:tgtEl>
+                                        <p:attrNameLst>
+                                          <p:attrName>ppt_y</p:attrName>
+                                        </p:attrNameLst>
+                                      </p:cBhvr>
+                                      <p:tavLst>
+                                        <p:tav tm="0">
+                                          <p:val>
+                                            <p:strVal val="#ppt_y+.1"/>
+                                          </p:val>
+                                        </p:tav>
+                                        <p:tav tm="100000">
+                                          <p:val>
+                                            <p:strVal val="#ppt_y"/>
+                                          </p:val>
+                                        </p:tav>
+                                      </p:tavLst>
+                                    </p:anim>
+                                  </p:childTnLst>
+                                </p:cTn>
+                              </p:par>
+                            </p:childTnLst>
+                          </p:cTn>
+                        </p:par>
+                      </p:childTnLst>
+                    </p:cTn>
+                  </p:par>
+                  <p:par>
+                    <p:cTn id="50" fill="hold">
+                      <p:stCondLst>
+                        <p:cond delay="indefinite"/>
+                      </p:stCondLst>
+                      <p:childTnLst>
+                        <p:par>
+                          <p:cTn id="51" fill="hold">
+                            <p:stCondLst>
+                              <p:cond delay="0"/>
+                            </p:stCondLst>
+                            <p:childTnLst>
+                              <p:par>
+                                <p:cTn id="49" presetID="42" presetClass="entr" presetSubtype="0" fill="hold" nodeType="clickEffect">
+                                  <p:stCondLst>
+                                    <p:cond delay="0"/>
+                                  </p:stCondLst>
+                                  <p:childTnLst>
+                                    <p:set>
+                                      <p:cBhvr>
+                                        <p:cTn id="45" dur="1" fill="hold">
+                                          <p:stCondLst>
+                                            <p:cond delay="0"/>
+                                          </p:stCondLst>
+                                        </p:cTn>
+                                        <p:tgtEl>
+                                          <p:spTgt spid="13"/>
+                                        </p:tgtEl>
+                                        <p:attrNameLst>
+                                          <p:attrName>style.visibility</p:attrName>
+                                        </p:attrNameLst>
+                                      </p:cBhvr>
+                                      <p:to>
+                                        <p:strVal val="visible"/>
+                                      </p:to>
+                                    </p:set>
+                                    <p:animEffect transition="in" filter="fade">
+                                      <p:cBhvr>
+                                        <p:cTn id="46" dur="500"/>
+                                        <p:tgtEl>
+                                          <p:spTgt spid="13"/>
+                                        </p:tgtEl>
+                                      </p:cBhvr>
+                                    </p:animEffect>
+                                    <p:anim calcmode="lin" valueType="num">
+                                      <p:cBhvr>
+                                        <p:cTn id="47" dur="500" fill="hold"/>
+                                        <p:tgtEl>
+                                          <p:spTgt spid="13"/>
+                                        </p:tgtEl>
+                                        <p:attrNameLst>
+                                          <p:attrName>ppt_x</p:attrName>
+                                        </p:attrNameLst>
+                                      </p:cBhvr>
+                                      <p:tavLst>
+                                        <p:tav tm="0">
+                                          <p:val>
+                                            <p:strVal val="#ppt_x"/>
+                                          </p:val>
+                                        </p:tav>
+                                        <p:tav tm="100000">
+                                          <p:val>
+                                            <p:strVal val="#ppt_x"/>
+                                          </p:val>
+                                        </p:tav>
+                                      </p:tavLst>
+                                    </p:anim>
+                                    <p:anim calcmode="lin" valueType="num">
+                                      <p:cBhvr>
+                                        <p:cTn id="48" dur="500" fill="hold"/>
+                                        <p:tgtEl>
+                                          <p:spTgt spid="13"/>
+                                        </p:tgtEl>
+                                        <p:attrNameLst>
+                                          <p:attrName>ppt_y</p:attrName>
+                                        </p:attrNameLst>
+                                      </p:cBhvr>
+                                      <p:tavLst>
+                                        <p:tav tm="0">
+                                          <p:val>
+                                            <p:strVal val="#ppt_y+.1"/>
+                                          </p:val>
+                                        </p:tav>
+                                        <p:tav tm="100000">
+                                          <p:val>
+                                            <p:strVal val="#ppt_y"/>
+                                          </p:val>
+                                        </p:tav>
+                                      </p:tavLst>
+                                    </p:anim>
+                                  </p:childTnLst>
+                                </p:cTn>
+                              </p:par>
+                            </p:childTnLst>
+                          </p:cTn>
+                        </p:par>
+                      </p:childTnLst>
+                    </p:cTn>
+                  </p:par>
+                  <p:par>
+                    <p:cTn id="57" fill="hold">
+                      <p:stCondLst>
+                        <p:cond delay="indefinite"/>
+                      </p:stCondLst>
+                      <p:childTnLst>
+                        <p:par>
+                          <p:cTn id="58" fill="hold">
+                            <p:stCondLst>
+                              <p:cond delay="0"/>
+                            </p:stCondLst>
+                            <p:childTnLst>
+                              <p:par>
+                                <p:cTn id="56" presetID="53" presetClass="entr" presetSubtype="16" fill="hold" nodeType="clickEffect">
+                                  <p:stCondLst>
+                                    <p:cond delay="0"/>
+                                  </p:stCondLst>
+                                  <p:childTnLst>
+                                    <p:set>
+                                      <p:cBhvr>
+                                        <p:cTn id="52" dur="1" fill="hold">
+                                          <p:stCondLst>
+                                            <p:cond delay="0"/>
+                                          </p:stCondLst>
+                                        </p:cTn>
+                                        <p:tgtEl>
+                                          <p:spTgt spid="14"/>
+                                        </p:tgtEl>
+                                        <p:attrNameLst>
+                                          <p:attrName>style.visibility</p:attrName>
+                                        </p:attrNameLst>
+                                      </p:cBhvr>
+                                      <p:to>
+                                        <p:strVal val="visible"/>
+                                      </p:to>
+                                    </p:set>
+                                    <p:animEffect transition="in" filter="fade">
+                                      <p:cBhvr>
+                                        <p:cTn id="53" dur="500"/>
+                                        <p:tgtEl>
+                                          <p:spTgt spid="14"/>
+                                        </p:tgtEl>
+                                      </p:cBhvr>
+                                    </p:animEffect>
+                                    <p:anim calcmode="lin" valueType="num">
+                                      <p:cBhvr>
+                                        <p:cTn id="54" dur="500" fill="hold"/>
+                                        <p:tgtEl>
+                                          <p:spTgt spid="14"/>
+                                        </p:tgtEl>
+                                        <p:attrNameLst>
+                                          <p:attrName>ppt_w</p:attrName>
+                                        </p:attrNameLst>
+                                      </p:cBhvr>
+                                      <p:tavLst>
+                                        <p:tav tm="0">
+                                          <p:val>
+                                            <p:fltVal val="0"/>
+                                          </p:val>
+                                        </p:tav>
+                                        <p:tav tm="100000">
+                                          <p:val>
+                                            <p:strVal val="#ppt_w"/>
+                                          </p:val>
+                                        </p:tav>
+                                      </p:tavLst>
+                                    </p:anim>
+                                    <p:anim calcmode="lin" valueType="num">
+                                      <p:cBhvr>
+                                        <p:cTn id="55" dur="500" fill="hold"/>
+                                        <p:tgtEl>
+                                          <p:spTgt spid="14"/>
+                                        </p:tgtEl>
+                                        <p:attrNameLst>
+                                          <p:attrName>ppt_h</p:attrName>
+                                        </p:attrNameLst>
+                                      </p:cBhvr>
+                                      <p:tavLst>
+                                        <p:tav tm="0">
+                                          <p:val>
+                                            <p:fltVal val="0"/>
+                                          </p:val>
+                                        </p:tav>
+                                        <p:tav tm="100000">
+                                          <p:val>
+                                            <p:strVal val="#ppt_h"/>
+                                          </p:val>
+                                        </p:tav>
+                                      </p:tavLst>
+                                    </p:anim>
+                                  </p:childTnLst>
+                                </p:cTn>
+                              </p:par>
+                            </p:childTnLst>
+                          </p:cTn>
+                        </p:par>
+                      </p:childTnLst>
+                    </p:cTn>
+                  </p:par>
+                </p:childTnLst>
+              </p:cTn>
+              <p:prevCondLst>
+                <p:cond evt="onPrev" delay="0">
+                  <p:tgtEl>
+                    <p:sldTgt/>
+                  </p:tgtEl>
+                </p:cond>
+              </p:prevCondLst>
+              <p:nextCondLst>
+                <p:cond evt="onNext" delay="0">
+                  <p:tgtEl>
+                    <p:sldTgt/>
+                  </p:tgtEl>
+                </p:cond>
+              </p:nextCondLst>
+            </p:seq>
+          </p:childTnLst>
+        </p:cTn>
+      </p:par>
+    </p:tnLst>
+  </p:timing>
+</p:sld>
+</file>
+
+<file path=ppt/slides/slide12.xml><?xml version="1.0" encoding="utf-8"?>
+<p:sld xmlns:a="http://schemas.openxmlformats.org/drawingml/2006/main" xmlns:r="http://schemas.openxmlformats.org/officeDocument/2006/relationships" xmlns:p="http://schemas.openxmlformats.org/presentationml/2006/main">
+  <p:cSld>
+    <p:spTree>
+      <p:nvGrpSpPr>
+        <p:cNvPr id="1" name=""/>
+        <p:cNvGrpSpPr/>
+        <p:nvPr/>
+      </p:nvGrpSpPr>
+      <p:grpSpPr>
+        <a:xfrm>
+          <a:off x="0" y="0"/>
+          <a:ext cx="0" cy="0"/>
+          <a:chOff x="0" y="0"/>
+          <a:chExt cx="0" cy="0"/>
+        </a:xfrm>
+      </p:grpSpPr>
+      <p:sp>
+        <p:nvSpPr>
+          <p:cNvPr id="2" name="Shape 2"/>
+          <p:cNvSpPr txBox="1"/>
+          <p:nvPr/>
+        </p:nvSpPr>
+        <p:spPr>
+          <a:xfrm>
+            <a:off x="685800" y="457200"/>
+            <a:ext cx="10820095" cy="237744"/>
+          </a:xfrm>
+          <a:prstGeom prst="rect">
+            <a:avLst/>
+          </a:prstGeom>
+          <a:noFill/>
+          <a:ln>
+            <a:noFill/>
+          </a:ln>
+        </p:spPr>
+        <p:txBody>
+          <a:bodyPr wrap="square" lIns="36576" tIns="27432" rIns="36576" bIns="27432" anchor="t">
+            <a:noAutofit/>
+          </a:bodyPr>
+          <a:lstStyle/>
+          <a:p>
+            <a:pPr algn="l">
+              <a:lnSpc>
+                <a:spcPct val="100000"/>
+              </a:lnSpc>
+            </a:pPr>
+            <a:r>
+              <a:rPr lang="en-US" sz="1200" dirty="0" b="1" spc="150" cap="all">
+                <a:solidFill>
+                  <a:srgbClr val="5F6272"/>
+                </a:solidFill>
+                <a:latin typeface="Segoe UI"/>
+                <a:cs typeface="Segoe UI"/>
+              </a:rPr>
+              <a:t xml:space="preserve">I do · Stretch inside</a:t>
+            </a:r>
+            <a:endParaRPr lang="en-US" sz="1200" dirty="0"/>
+          </a:p>
+        </p:txBody>
+      </p:sp>
+      <p:sp>
+        <p:nvSpPr>
+          <p:cNvPr id="3" name="Shape 3"/>
+          <p:cNvSpPr txBox="1"/>
+          <p:nvPr/>
+        </p:nvSpPr>
+        <p:spPr>
+          <a:xfrm>
+            <a:off x="685800" y="866394"/>
+            <a:ext cx="10820095" cy="580644"/>
+          </a:xfrm>
+          <a:prstGeom prst="rect">
+            <a:avLst/>
+          </a:prstGeom>
+          <a:noFill/>
+          <a:ln>
+            <a:noFill/>
+          </a:ln>
+        </p:spPr>
+        <p:txBody>
+          <a:bodyPr wrap="square" lIns="36576" tIns="27432" rIns="36576" bIns="27432" anchor="t">
+            <a:noAutofit/>
+          </a:bodyPr>
+          <a:lstStyle/>
+          <a:p>
+            <a:pPr algn="l">
+              <a:lnSpc>
+                <a:spcPct val="100000"/>
+              </a:lnSpc>
+            </a:pPr>
+            <a:r>
+              <a:rPr lang="en-US" sz="3450" dirty="0" b="1">
+                <a:solidFill>
+                  <a:srgbClr val="16171D"/>
+                </a:solidFill>
+                <a:latin typeface="Segoe UI"/>
+                <a:cs typeface="Segoe UI"/>
+              </a:rPr>
+              <a:t xml:space="preserve">For </a:t>
+            </a:r>
+            <a:r>
+              <a:rPr lang="en-US" sz="3450" dirty="0" b="1" i="1">
+                <a:solidFill>
+                  <a:srgbClr val="16171D"/>
+                </a:solidFill>
+                <a:latin typeface="Segoe UI"/>
+                <a:cs typeface="Segoe UI"/>
+              </a:rPr>
+              <a:t xml:space="preserve">f</a:t>
+            </a:r>
+            <a:r>
+              <a:rPr lang="en-US" sz="3450" dirty="0" b="1">
+                <a:solidFill>
+                  <a:srgbClr val="16171D"/>
+                </a:solidFill>
+                <a:latin typeface="Segoe UI"/>
+                <a:cs typeface="Segoe UI"/>
+              </a:rPr>
+              <a:t xml:space="preserve">(</a:t>
+            </a:r>
+            <a:r>
+              <a:rPr lang="en-US" sz="3450" dirty="0" b="1" i="1">
+                <a:solidFill>
+                  <a:srgbClr val="16171D"/>
+                </a:solidFill>
+                <a:latin typeface="Segoe UI"/>
+                <a:cs typeface="Segoe UI"/>
+              </a:rPr>
+              <a:t xml:space="preserve">x</a:t>
+            </a:r>
+            <a:r>
+              <a:rPr lang="en-US" sz="3450" dirty="0" b="1">
+                <a:solidFill>
+                  <a:srgbClr val="16171D"/>
+                </a:solidFill>
+                <a:latin typeface="Segoe UI"/>
+                <a:cs typeface="Segoe UI"/>
+              </a:rPr>
+              <a:t xml:space="preserve">) = </a:t>
+            </a:r>
+            <a:r>
+              <a:rPr lang="en-US" sz="3450" dirty="0" b="1" i="1">
+                <a:solidFill>
+                  <a:srgbClr val="16171D"/>
+                </a:solidFill>
+                <a:latin typeface="Segoe UI"/>
+                <a:cs typeface="Segoe UI"/>
+              </a:rPr>
+              <a:t xml:space="preserve">x</a:t>
+            </a:r>
+            <a:r>
+              <a:rPr lang="en-US" sz="3450" dirty="0" b="1">
+                <a:solidFill>
+                  <a:srgbClr val="16171D"/>
+                </a:solidFill>
+                <a:latin typeface="Segoe UI"/>
+                <a:cs typeface="Segoe UI"/>
+              </a:rPr>
+              <a:t xml:space="preserve">: </a:t>
+            </a:r>
+            <a:r>
+              <a:rPr lang="en-US" sz="3450" dirty="0" b="1" i="1">
+                <a:solidFill>
+                  <a:srgbClr val="16171D"/>
+                </a:solidFill>
+                <a:latin typeface="Segoe UI"/>
+                <a:cs typeface="Segoe UI"/>
+              </a:rPr>
+              <a:t xml:space="preserve">f</a:t>
+            </a:r>
+            <a:r>
+              <a:rPr lang="en-US" sz="3450" dirty="0" b="1">
+                <a:solidFill>
+                  <a:srgbClr val="16171D"/>
+                </a:solidFill>
+                <a:latin typeface="Segoe UI"/>
+                <a:cs typeface="Segoe UI"/>
+              </a:rPr>
+              <a:t xml:space="preserve">(2</a:t>
+            </a:r>
+            <a:r>
+              <a:rPr lang="en-US" sz="3450" dirty="0" b="1" i="1">
+                <a:solidFill>
+                  <a:srgbClr val="16171D"/>
+                </a:solidFill>
+                <a:latin typeface="Segoe UI"/>
+                <a:cs typeface="Segoe UI"/>
+              </a:rPr>
+              <a:t xml:space="preserve">x</a:t>
+            </a:r>
+            <a:r>
+              <a:rPr lang="en-US" sz="3450" dirty="0" b="1">
+                <a:solidFill>
+                  <a:srgbClr val="16171D"/>
+                </a:solidFill>
+                <a:latin typeface="Segoe UI"/>
+                <a:cs typeface="Segoe UI"/>
+              </a:rPr>
+              <a:t xml:space="preserve">) and 2</a:t>
+            </a:r>
+            <a:r>
+              <a:rPr lang="en-US" sz="3450" dirty="0" b="1" i="1">
+                <a:solidFill>
+                  <a:srgbClr val="16171D"/>
+                </a:solidFill>
+                <a:latin typeface="Segoe UI"/>
+                <a:cs typeface="Segoe UI"/>
+              </a:rPr>
+              <a:t xml:space="preserve">f</a:t>
+            </a:r>
+            <a:r>
+              <a:rPr lang="en-US" sz="3450" dirty="0" b="1">
+                <a:solidFill>
+                  <a:srgbClr val="16171D"/>
+                </a:solidFill>
+                <a:latin typeface="Segoe UI"/>
+                <a:cs typeface="Segoe UI"/>
+              </a:rPr>
+              <a:t xml:space="preserve">(</a:t>
+            </a:r>
+            <a:r>
+              <a:rPr lang="en-US" sz="3450" dirty="0" b="1" i="1">
+                <a:solidFill>
+                  <a:srgbClr val="16171D"/>
+                </a:solidFill>
+                <a:latin typeface="Segoe UI"/>
+                <a:cs typeface="Segoe UI"/>
+              </a:rPr>
+              <a:t xml:space="preserve">x</a:t>
+            </a:r>
+            <a:r>
+              <a:rPr lang="en-US" sz="3450" dirty="0" b="1">
+                <a:solidFill>
+                  <a:srgbClr val="16171D"/>
+                </a:solidFill>
+                <a:latin typeface="Segoe UI"/>
+                <a:cs typeface="Segoe UI"/>
+              </a:rPr>
+              <a:t xml:space="preserve">)</a:t>
+            </a:r>
+            <a:endParaRPr lang="en-US" sz="3450" dirty="0"/>
+          </a:p>
+        </p:txBody>
+      </p:sp>
+      <p:sp>
+        <p:nvSpPr>
+          <p:cNvPr id="4" name="Shape 4"/>
+          <p:cNvSpPr txBox="1"/>
+          <p:nvPr/>
+        </p:nvSpPr>
+        <p:spPr>
+          <a:xfrm>
+            <a:off x="685800" y="1618488"/>
+            <a:ext cx="5219548" cy="352044"/>
+          </a:xfrm>
+          <a:prstGeom prst="rect">
+            <a:avLst/>
+          </a:prstGeom>
+          <a:noFill/>
+          <a:ln>
+            <a:noFill/>
+          </a:ln>
+        </p:spPr>
+        <p:txBody>
+          <a:bodyPr wrap="square" lIns="36576" tIns="27432" rIns="36576" bIns="27432" anchor="t">
+            <a:noAutofit/>
+          </a:bodyPr>
+          <a:lstStyle/>
+          <a:p>
+            <a:pPr algn="l">
+              <a:lnSpc>
+                <a:spcPct val="100000"/>
+              </a:lnSpc>
+            </a:pPr>
+            <a:r>
+              <a:rPr lang="en-US" sz="1950" dirty="0" i="1">
+                <a:solidFill>
+                  <a:srgbClr val="16171D"/>
+                </a:solidFill>
+                <a:latin typeface="Segoe UI"/>
+                <a:cs typeface="Segoe UI"/>
+              </a:rPr>
+              <a:t xml:space="preserve">f</a:t>
+            </a:r>
+            <a:r>
+              <a:rPr lang="en-US" sz="1950" dirty="0">
+                <a:solidFill>
+                  <a:srgbClr val="16171D"/>
+                </a:solidFill>
+                <a:latin typeface="Segoe UI"/>
+                <a:cs typeface="Segoe UI"/>
+              </a:rPr>
+              <a:t xml:space="preserve">(2</a:t>
+            </a:r>
+            <a:r>
+              <a:rPr lang="en-US" sz="1950" dirty="0" i="1">
+                <a:solidFill>
+                  <a:srgbClr val="16171D"/>
+                </a:solidFill>
+                <a:latin typeface="Segoe UI"/>
+                <a:cs typeface="Segoe UI"/>
+              </a:rPr>
+              <a:t xml:space="preserve">x</a:t>
+            </a:r>
+            <a:r>
+              <a:rPr lang="en-US" sz="1950" dirty="0">
+                <a:solidFill>
+                  <a:srgbClr val="16171D"/>
+                </a:solidFill>
+                <a:latin typeface="Segoe UI"/>
+                <a:cs typeface="Segoe UI"/>
+              </a:rPr>
+              <a:t xml:space="preserve">) = 2</a:t>
+            </a:r>
+            <a:r>
+              <a:rPr lang="en-US" sz="1950" dirty="0" i="1">
+                <a:solidFill>
+                  <a:srgbClr val="16171D"/>
+                </a:solidFill>
+                <a:latin typeface="Segoe UI"/>
+                <a:cs typeface="Segoe UI"/>
+              </a:rPr>
+              <a:t xml:space="preserve">x</a:t>
+            </a:r>
+            <a:endParaRPr lang="en-US" sz="1950" dirty="0"/>
+          </a:p>
+        </p:txBody>
+      </p:sp>
+      <p:sp>
+        <p:nvSpPr>
+          <p:cNvPr id="5" name="Shape 5"/>
+          <p:cNvSpPr txBox="1"/>
+          <p:nvPr/>
+        </p:nvSpPr>
+        <p:spPr>
+          <a:xfrm>
+            <a:off x="685800" y="2103882"/>
+            <a:ext cx="5219548" cy="352044"/>
+          </a:xfrm>
+          <a:prstGeom prst="rect">
+            <a:avLst/>
+          </a:prstGeom>
+          <a:noFill/>
+          <a:ln>
+            <a:noFill/>
+          </a:ln>
+        </p:spPr>
+        <p:txBody>
+          <a:bodyPr wrap="square" lIns="36576" tIns="27432" rIns="36576" bIns="27432" anchor="t">
+            <a:noAutofit/>
+          </a:bodyPr>
+          <a:lstStyle/>
+          <a:p>
+            <a:pPr algn="l">
+              <a:lnSpc>
+                <a:spcPct val="100000"/>
+              </a:lnSpc>
+            </a:pPr>
+            <a:r>
+              <a:rPr lang="en-US" sz="1950" dirty="0">
+                <a:solidFill>
+                  <a:srgbClr val="16171D"/>
+                </a:solidFill>
+                <a:latin typeface="Segoe UI"/>
+                <a:cs typeface="Segoe UI"/>
+              </a:rPr>
+              <a:t xml:space="preserve">2 · </a:t>
+            </a:r>
+            <a:r>
+              <a:rPr lang="en-US" sz="1950" dirty="0" i="1">
+                <a:solidFill>
+                  <a:srgbClr val="16171D"/>
+                </a:solidFill>
+                <a:latin typeface="Segoe UI"/>
+                <a:cs typeface="Segoe UI"/>
+              </a:rPr>
+              <a:t xml:space="preserve">f</a:t>
+            </a:r>
+            <a:r>
+              <a:rPr lang="en-US" sz="1950" dirty="0">
+                <a:solidFill>
+                  <a:srgbClr val="16171D"/>
+                </a:solidFill>
+                <a:latin typeface="Segoe UI"/>
+                <a:cs typeface="Segoe UI"/>
+              </a:rPr>
+              <a:t xml:space="preserve">(</a:t>
+            </a:r>
+            <a:r>
+              <a:rPr lang="en-US" sz="1950" dirty="0" i="1">
+                <a:solidFill>
+                  <a:srgbClr val="16171D"/>
+                </a:solidFill>
+                <a:latin typeface="Segoe UI"/>
+                <a:cs typeface="Segoe UI"/>
+              </a:rPr>
+              <a:t xml:space="preserve">x</a:t>
+            </a:r>
+            <a:r>
+              <a:rPr lang="en-US" sz="1950" dirty="0">
+                <a:solidFill>
+                  <a:srgbClr val="16171D"/>
+                </a:solidFill>
+                <a:latin typeface="Segoe UI"/>
+                <a:cs typeface="Segoe UI"/>
+              </a:rPr>
+              <a:t xml:space="preserve">) = 2</a:t>
+            </a:r>
+            <a:r>
+              <a:rPr lang="en-US" sz="1950" dirty="0" i="1">
+                <a:solidFill>
+                  <a:srgbClr val="16171D"/>
+                </a:solidFill>
+                <a:latin typeface="Segoe UI"/>
+                <a:cs typeface="Segoe UI"/>
+              </a:rPr>
+              <a:t xml:space="preserve">x</a:t>
+            </a:r>
+            <a:endParaRPr lang="en-US" sz="1950" dirty="0"/>
+          </a:p>
+        </p:txBody>
+      </p:sp>
+      <p:sp>
+        <p:nvSpPr>
+          <p:cNvPr id="6" name="Shape 6"/>
+          <p:cNvSpPr txBox="1"/>
+          <p:nvPr/>
+        </p:nvSpPr>
+        <p:spPr>
+          <a:xfrm>
+            <a:off x="685800" y="2589276"/>
+            <a:ext cx="5219548" cy="518922"/>
+          </a:xfrm>
+          <a:prstGeom prst="roundRect">
+            <a:avLst>
+              <a:gd name="adj" fmla="val 8000"/>
+            </a:avLst>
+          </a:prstGeom>
+          <a:solidFill>
+            <a:srgbClr val="EDF5E9"/>
+          </a:solidFill>
+          <a:ln>
+            <a:noFill/>
+          </a:ln>
+        </p:spPr>
+        <p:txBody>
+          <a:bodyPr wrap="square" lIns="164592" tIns="64008" rIns="164592" bIns="64008" anchor="ctr">
+            <a:noAutofit/>
+          </a:bodyPr>
+          <a:lstStyle/>
+          <a:p>
+            <a:pPr algn="l">
+              <a:lnSpc>
+                <a:spcPct val="100000"/>
+              </a:lnSpc>
+            </a:pPr>
+            <a:r>
+              <a:rPr lang="en-US" sz="1125" dirty="0" b="1" spc="100">
+                <a:solidFill>
+                  <a:srgbClr val="4F8A3C"/>
+                </a:solidFill>
+                <a:latin typeface="Segoe UI"/>
+                <a:cs typeface="Segoe UI"/>
+              </a:rPr>
+              <a:t xml:space="preserve">ANSWER   </a:t>
+            </a:r>
+            <a:r>
+              <a:rPr lang="en-US" sz="2325" dirty="0">
+                <a:solidFill>
+                  <a:srgbClr val="16171D"/>
+                </a:solidFill>
+                <a:latin typeface="Cambria"/>
+                <a:cs typeface="Cambria"/>
+              </a:rPr>
+              <a:t xml:space="preserve">The same line: </a:t>
+            </a:r>
+            <a:r>
+              <a:rPr lang="en-US" sz="2325" dirty="0" i="1">
+                <a:solidFill>
+                  <a:srgbClr val="16171D"/>
+                </a:solidFill>
+                <a:latin typeface="Cambria"/>
+                <a:cs typeface="Cambria"/>
+              </a:rPr>
+              <a:t xml:space="preserve">y</a:t>
+            </a:r>
+            <a:r>
+              <a:rPr lang="en-US" sz="2325" dirty="0">
+                <a:solidFill>
+                  <a:srgbClr val="16171D"/>
+                </a:solidFill>
+                <a:latin typeface="Cambria"/>
+                <a:cs typeface="Cambria"/>
+              </a:rPr>
+              <a:t xml:space="preserve"> = 2</a:t>
+            </a:r>
+            <a:r>
+              <a:rPr lang="en-US" sz="2325" dirty="0" i="1">
+                <a:solidFill>
+                  <a:srgbClr val="16171D"/>
+                </a:solidFill>
+                <a:latin typeface="Cambria"/>
+                <a:cs typeface="Cambria"/>
+              </a:rPr>
+              <a:t xml:space="preserve">x</a:t>
+            </a:r>
+            <a:endParaRPr lang="en-US" sz="2325" dirty="0"/>
+          </a:p>
+        </p:txBody>
+      </p:sp>
+      <p:sp>
+        <p:nvSpPr>
+          <p:cNvPr id="7" name="Shape 7"/>
+          <p:cNvSpPr txBox="1"/>
+          <p:nvPr/>
+        </p:nvSpPr>
+        <p:spPr>
+          <a:xfrm>
+            <a:off x="685800" y="3241548"/>
+            <a:ext cx="5219548" cy="294894"/>
+          </a:xfrm>
+          <a:prstGeom prst="rect">
+            <a:avLst/>
+          </a:prstGeom>
+          <a:noFill/>
+          <a:ln>
+            <a:noFill/>
+          </a:ln>
+        </p:spPr>
+        <p:txBody>
+          <a:bodyPr wrap="square" lIns="36576" tIns="27432" rIns="36576" bIns="27432" anchor="t">
+            <a:noAutofit/>
+          </a:bodyPr>
+          <a:lstStyle/>
+          <a:p>
+            <a:pPr algn="l">
+              <a:lnSpc>
+                <a:spcPct val="100000"/>
+              </a:lnSpc>
+            </a:pPr>
+            <a:r>
+              <a:rPr lang="en-US" sz="1575" dirty="0">
+                <a:solidFill>
+                  <a:srgbClr val="16171D"/>
+                </a:solidFill>
+                <a:latin typeface="Segoe UI"/>
+                <a:cs typeface="Segoe UI"/>
+              </a:rPr>
+              <a:t xml:space="preserve">This only works for </a:t>
+            </a:r>
+            <a:r>
+              <a:rPr lang="en-US" sz="1575" dirty="0" i="1">
+                <a:solidFill>
+                  <a:srgbClr val="16171D"/>
+                </a:solidFill>
+                <a:latin typeface="Segoe UI"/>
+                <a:cs typeface="Segoe UI"/>
+              </a:rPr>
+              <a:t xml:space="preserve">f</a:t>
+            </a:r>
+            <a:r>
+              <a:rPr lang="en-US" sz="1575" dirty="0">
+                <a:solidFill>
+                  <a:srgbClr val="16171D"/>
+                </a:solidFill>
+                <a:latin typeface="Segoe UI"/>
+                <a:cs typeface="Segoe UI"/>
+              </a:rPr>
+              <a:t xml:space="preserve">(</a:t>
+            </a:r>
+            <a:r>
+              <a:rPr lang="en-US" sz="1575" dirty="0" i="1">
+                <a:solidFill>
+                  <a:srgbClr val="16171D"/>
+                </a:solidFill>
+                <a:latin typeface="Segoe UI"/>
+                <a:cs typeface="Segoe UI"/>
+              </a:rPr>
+              <a:t xml:space="preserve">x</a:t>
+            </a:r>
+            <a:r>
+              <a:rPr lang="en-US" sz="1575" dirty="0">
+                <a:solidFill>
+                  <a:srgbClr val="16171D"/>
+                </a:solidFill>
+                <a:latin typeface="Segoe UI"/>
+                <a:cs typeface="Segoe UI"/>
+              </a:rPr>
+              <a:t xml:space="preserve">) = </a:t>
+            </a:r>
+            <a:r>
+              <a:rPr lang="en-US" sz="1575" dirty="0" i="1">
+                <a:solidFill>
+                  <a:srgbClr val="16171D"/>
+                </a:solidFill>
+                <a:latin typeface="Segoe UI"/>
+                <a:cs typeface="Segoe UI"/>
+              </a:rPr>
+              <a:t xml:space="preserve">x</a:t>
+            </a:r>
+            <a:r>
+              <a:rPr lang="en-US" sz="1575" dirty="0">
+                <a:solidFill>
+                  <a:srgbClr val="16171D"/>
+                </a:solidFill>
+                <a:latin typeface="Segoe UI"/>
+                <a:cs typeface="Segoe UI"/>
+              </a:rPr>
+              <a:t xml:space="preserve">.</a:t>
+            </a:r>
+            <a:endParaRPr lang="en-US" sz="1575" dirty="0"/>
+          </a:p>
+        </p:txBody>
+      </p:sp>
+      <p:sp>
+        <p:nvSpPr>
+          <p:cNvPr id="8" name="Shape 8"/>
+          <p:cNvSpPr/>
+          <p:nvPr/>
+        </p:nvSpPr>
+        <p:spPr>
+          <a:xfrm>
+            <a:off x="6286348" y="1618488"/>
+            <a:ext cx="3048000" cy="3048000"/>
+          </a:xfrm>
+          <a:prstGeom prst="roundRect">
+            <a:avLst>
+              <a:gd name="adj" fmla="val 8000"/>
+            </a:avLst>
+          </a:prstGeom>
+          <a:solidFill>
+            <a:srgbClr val="FFFFFF"/>
+          </a:solidFill>
+          <a:ln w="12700">
+            <a:solidFill>
+              <a:srgbClr val="E3E4EC"/>
+            </a:solidFill>
+          </a:ln>
+        </p:spPr>
+        <p:txBody>
+          <a:bodyPr wrap="square" lIns="36576" tIns="27432" rIns="36576" bIns="27432" anchor="t">
+            <a:noAutofit/>
+          </a:bodyPr>
+          <a:lstStyle/>
+          <a:p>
+            <a:pPr algn="l">
+              <a:lnSpc>
+                <a:spcPct val="100000"/>
+              </a:lnSpc>
+            </a:pPr>
+            <a:endParaRPr lang="en-US" sz="1950" dirty="0"/>
+          </a:p>
+        </p:txBody>
+      </p:sp>
       <p:cxnSp>
         <p:nvCxnSpPr>
           <p:cNvPr id="9" name="Line 9"/>
@@ -4010,7 +7133,7 @@
                   <a:srgbClr val="5F6272"/>
                 </a:solidFill>
               </a:rPr>
-              <a:t>10</a:t>
+              <a:t>12</a:t>
             </a:fld>
           </a:p>
         </p:txBody>
@@ -4243,7 +7366,7 @@
 </p:sld>
 </file>
 
-<file path=ppt/slides/slide11.xml><?xml version="1.0" encoding="utf-8"?>
+<file path=ppt/slides/slide13.xml><?xml version="1.0" encoding="utf-8"?>
 <p:sld xmlns:a="http://schemas.openxmlformats.org/drawingml/2006/main" xmlns:r="http://schemas.openxmlformats.org/officeDocument/2006/relationships" xmlns:p="http://schemas.openxmlformats.org/presentationml/2006/main">
   <p:cSld>
     <p:spTree>
@@ -5083,7 +8206,7 @@
                   <a:srgbClr val="5F6272"/>
                 </a:solidFill>
               </a:rPr>
-              <a:t>11</a:t>
+              <a:t>13</a:t>
             </a:fld>
           </a:p>
         </p:txBody>
@@ -5426,7 +8549,7 @@
 </p:sld>
 </file>
 
-<file path=ppt/slides/slide12.xml><?xml version="1.0" encoding="utf-8"?>
+<file path=ppt/slides/slide14.xml><?xml version="1.0" encoding="utf-8"?>
 <p:sld xmlns:a="http://schemas.openxmlformats.org/drawingml/2006/main" xmlns:r="http://schemas.openxmlformats.org/officeDocument/2006/relationships" xmlns:p="http://schemas.openxmlformats.org/presentationml/2006/main">
   <p:cSld>
     <p:spTree>
@@ -5722,7 +8845,7 @@
                   <a:srgbClr val="5F6272"/>
                 </a:solidFill>
               </a:rPr>
-              <a:t>12</a:t>
+              <a:t>14</a:t>
             </a:fld>
           </a:p>
         </p:txBody>
@@ -12176,7 +15299,7 @@
                 <a:latin typeface="Segoe UI"/>
                 <a:cs typeface="Segoe UI"/>
               </a:rPr>
-              <a:t xml:space="preserve">We do · Simplify</a:t>
+              <a:t xml:space="preserve">Check it · Step by step</a:t>
             </a:r>
             <a:endParaRPr lang="en-US" sz="1200" dirty="0"/>
           </a:p>
@@ -12213,16 +15336,6 @@
               </a:lnSpc>
             </a:pPr>
             <a:r>
-              <a:rPr lang="en-US" sz="3450" dirty="0" b="1" i="1">
-                <a:solidFill>
-                  <a:srgbClr val="16171D"/>
-                </a:solidFill>
-                <a:latin typeface="Segoe UI"/>
-                <a:cs typeface="Segoe UI"/>
-              </a:rPr>
-              <a:t xml:space="preserve">j</a:t>
-            </a:r>
-            <a:r>
               <a:rPr lang="en-US" sz="3450" dirty="0" b="1">
                 <a:solidFill>
                   <a:srgbClr val="16171D"/>
@@ -12230,87 +15343,7 @@
                 <a:latin typeface="Segoe UI"/>
                 <a:cs typeface="Segoe UI"/>
               </a:rPr>
-              <a:t xml:space="preserve">(</a:t>
-            </a:r>
-            <a:r>
-              <a:rPr lang="en-US" sz="3450" dirty="0" b="1" i="1">
-                <a:solidFill>
-                  <a:srgbClr val="16171D"/>
-                </a:solidFill>
-                <a:latin typeface="Segoe UI"/>
-                <a:cs typeface="Segoe UI"/>
-              </a:rPr>
-              <a:t xml:space="preserve">x</a:t>
-            </a:r>
-            <a:r>
-              <a:rPr lang="en-US" sz="3450" dirty="0" b="1">
-                <a:solidFill>
-                  <a:srgbClr val="16171D"/>
-                </a:solidFill>
-                <a:latin typeface="Segoe UI"/>
-                <a:cs typeface="Segoe UI"/>
-              </a:rPr>
-              <a:t xml:space="preserve">) = 2</a:t>
-            </a:r>
-            <a:r>
-              <a:rPr lang="en-US" sz="3450" dirty="0" b="1" i="1">
-                <a:solidFill>
-                  <a:srgbClr val="16171D"/>
-                </a:solidFill>
-                <a:latin typeface="Segoe UI"/>
-                <a:cs typeface="Segoe UI"/>
-              </a:rPr>
-              <a:t xml:space="preserve">x</a:t>
-            </a:r>
-            <a:r>
-              <a:rPr lang="en-US" sz="3450" dirty="0" b="1">
-                <a:solidFill>
-                  <a:srgbClr val="16171D"/>
-                </a:solidFill>
-                <a:latin typeface="Segoe UI"/>
-                <a:cs typeface="Segoe UI"/>
-              </a:rPr>
-              <a:t xml:space="preserve"> − 1. Simplify </a:t>
-            </a:r>
-            <a:r>
-              <a:rPr lang="en-US" sz="3450" dirty="0" b="1" i="1">
-                <a:solidFill>
-                  <a:srgbClr val="16171D"/>
-                </a:solidFill>
-                <a:latin typeface="Segoe UI"/>
-                <a:cs typeface="Segoe UI"/>
-              </a:rPr>
-              <a:t xml:space="preserve">j</a:t>
-            </a:r>
-            <a:r>
-              <a:rPr lang="en-US" sz="3450" dirty="0" b="1">
-                <a:solidFill>
-                  <a:srgbClr val="16171D"/>
-                </a:solidFill>
-                <a:latin typeface="Segoe UI"/>
-                <a:cs typeface="Segoe UI"/>
-              </a:rPr>
-              <a:t xml:space="preserve">(</a:t>
-            </a:r>
-            <a:r>
-              <a:rPr lang="en-US" sz="3450" dirty="0" b="1" i="1">
-                <a:solidFill>
-                  <a:srgbClr val="16171D"/>
-                </a:solidFill>
-                <a:latin typeface="Segoe UI"/>
-                <a:cs typeface="Segoe UI"/>
-              </a:rPr>
-              <a:t xml:space="preserve">x</a:t>
-            </a:r>
-            <a:r>
-              <a:rPr lang="en-US" sz="3450" dirty="0" b="1">
-                <a:solidFill>
-                  <a:srgbClr val="16171D"/>
-                </a:solidFill>
-                <a:latin typeface="Segoe UI"/>
-                <a:cs typeface="Segoe UI"/>
-              </a:rPr>
-              <a:t xml:space="preserve"> + 4).</a:t>
+              <a:t xml:space="preserve">Which way, and how far?</a:t>
             </a:r>
             <a:endParaRPr lang="en-US" sz="3450" dirty="0"/>
           </a:p>
@@ -12318,21 +15351,27 @@
       </p:sp>
       <p:sp>
         <p:nvSpPr>
-          <p:cNvPr id="4" name="Shape 4"/>
+          <p:cNvPr id="8" name="Shape 8"/>
           <p:cNvSpPr txBox="1"/>
           <p:nvPr/>
         </p:nvSpPr>
         <p:spPr>
           <a:xfrm>
             <a:off x="685800" y="1618488"/>
-            <a:ext cx="10820095" cy="352044"/>
-          </a:xfrm>
-          <a:prstGeom prst="rect">
-            <a:avLst/>
-          </a:prstGeom>
-          <a:noFill/>
-          <a:ln>
-            <a:noFill/>
+            <a:ext cx="3454298" cy="2832354"/>
+          </a:xfrm>
+          <a:prstGeom prst="roundRect">
+            <a:avLst>
+              <a:gd name="adj" fmla="val 8000"/>
+            </a:avLst>
+          </a:prstGeom>
+          <a:solidFill>
+            <a:srgbClr val="FFFFFF"/>
+          </a:solidFill>
+          <a:ln w="12700">
+            <a:solidFill>
+              <a:srgbClr val="E3E4EC"/>
+            </a:solidFill>
           </a:ln>
         </p:spPr>
         <p:txBody>
@@ -12346,18 +15385,72 @@
                 <a:spcPct val="100000"/>
               </a:lnSpc>
             </a:pPr>
-            <a:r>
-              <a:rPr lang="en-US" sz="1950" dirty="0">
-                <a:solidFill>
-                  <a:srgbClr val="16171D"/>
-                </a:solidFill>
-                <a:latin typeface="Segoe UI"/>
-                <a:cs typeface="Segoe UI"/>
-              </a:rPr>
-              <a:t xml:space="preserve">Put (</a:t>
-            </a:r>
-            <a:r>
-              <a:rPr lang="en-US" sz="1950" dirty="0" i="1">
+            <a:endParaRPr lang="en-US" sz="1950" dirty="0"/>
+          </a:p>
+        </p:txBody>
+      </p:sp>
+      <p:sp>
+        <p:nvSpPr>
+          <p:cNvPr id="4" name="Shape 4"/>
+          <p:cNvSpPr txBox="1"/>
+          <p:nvPr/>
+        </p:nvSpPr>
+        <p:spPr>
+          <a:xfrm>
+            <a:off x="895350" y="1789938"/>
+            <a:ext cx="3035198" cy="374904"/>
+          </a:xfrm>
+          <a:prstGeom prst="rect">
+            <a:avLst/>
+          </a:prstGeom>
+          <a:noFill/>
+          <a:ln>
+            <a:noFill/>
+          </a:ln>
+        </p:spPr>
+        <p:txBody>
+          <a:bodyPr wrap="square" lIns="36576" tIns="27432" rIns="36576" bIns="27432" anchor="t">
+            <a:noAutofit/>
+          </a:bodyPr>
+          <a:lstStyle/>
+          <a:p>
+            <a:pPr algn="l">
+              <a:lnSpc>
+                <a:spcPct val="100000"/>
+              </a:lnSpc>
+            </a:pPr>
+            <a:r>
+              <a:rPr lang="en-US" sz="2100" dirty="0" b="1">
+                <a:solidFill>
+                  <a:srgbClr val="16171D"/>
+                </a:solidFill>
+                <a:latin typeface="Segoe UI"/>
+                <a:cs typeface="Segoe UI"/>
+              </a:rPr>
+              <a:t xml:space="preserve">1. </a:t>
+            </a:r>
+            <a:r>
+              <a:rPr lang="en-US" sz="2100" dirty="0" b="1" i="1">
+                <a:solidFill>
+                  <a:srgbClr val="16171D"/>
+                </a:solidFill>
+                <a:latin typeface="Segoe UI"/>
+                <a:cs typeface="Segoe UI"/>
+              </a:rPr>
+              <a:t xml:space="preserve">f</a:t>
+            </a:r>
+            <a:r>
+              <a:rPr lang="en-US" sz="2100" dirty="0" b="1">
+                <a:solidFill>
+                  <a:srgbClr val="16171D"/>
+                </a:solidFill>
+                <a:latin typeface="Segoe UI"/>
+                <a:cs typeface="Segoe UI"/>
+              </a:rPr>
+              <a:t xml:space="preserve">(</a:t>
+            </a:r>
+            <a:r>
+              <a:rPr lang="en-US" sz="2100" dirty="0" b="1" i="1">
                 <a:solidFill>
                   <a:srgbClr val="16171D"/>
                 </a:solidFill>
@@ -12367,36 +15460,16 @@
               <a:t xml:space="preserve">x</a:t>
             </a:r>
             <a:r>
-              <a:rPr lang="en-US" sz="1950" dirty="0">
-                <a:solidFill>
-                  <a:srgbClr val="16171D"/>
-                </a:solidFill>
-                <a:latin typeface="Segoe UI"/>
-                <a:cs typeface="Segoe UI"/>
-              </a:rPr>
-              <a:t xml:space="preserve"> + 4) in for </a:t>
-            </a:r>
-            <a:r>
-              <a:rPr lang="en-US" sz="1950" dirty="0" i="1">
-                <a:solidFill>
-                  <a:srgbClr val="16171D"/>
-                </a:solidFill>
-                <a:latin typeface="Segoe UI"/>
-                <a:cs typeface="Segoe UI"/>
-              </a:rPr>
-              <a:t xml:space="preserve">x</a:t>
-            </a:r>
-            <a:r>
-              <a:rPr lang="en-US" sz="1950" dirty="0">
-                <a:solidFill>
-                  <a:srgbClr val="16171D"/>
-                </a:solidFill>
-                <a:latin typeface="Segoe UI"/>
-                <a:cs typeface="Segoe UI"/>
-              </a:rPr>
-              <a:t xml:space="preserve">: 2(____) − 1</a:t>
-            </a:r>
-            <a:endParaRPr lang="en-US" sz="1950" dirty="0"/>
+              <a:rPr lang="en-US" sz="2100" dirty="0" b="1">
+                <a:solidFill>
+                  <a:srgbClr val="16171D"/>
+                </a:solidFill>
+                <a:latin typeface="Segoe UI"/>
+                <a:cs typeface="Segoe UI"/>
+              </a:rPr>
+              <a:t xml:space="preserve"> + 5)</a:t>
+            </a:r>
+            <a:endParaRPr lang="en-US" sz="2100" dirty="0"/>
           </a:p>
         </p:txBody>
       </p:sp>
@@ -12408,8 +15481,196 @@
         </p:nvSpPr>
         <p:spPr>
           <a:xfrm>
-            <a:off x="685800" y="2141982"/>
-            <a:ext cx="3902979" cy="518922"/>
+            <a:off x="895350" y="2260092"/>
+            <a:ext cx="3035198" cy="774954"/>
+          </a:xfrm>
+          <a:prstGeom prst="rect">
+            <a:avLst/>
+          </a:prstGeom>
+          <a:noFill/>
+          <a:ln>
+            <a:noFill/>
+          </a:ln>
+        </p:spPr>
+        <p:txBody>
+          <a:bodyPr wrap="square" lIns="36576" tIns="27432" rIns="36576" bIns="27432" anchor="t">
+            <a:noAutofit/>
+          </a:bodyPr>
+          <a:lstStyle/>
+          <a:p>
+            <a:pPr algn="l">
+              <a:lnSpc>
+                <a:spcPct val="100000"/>
+              </a:lnSpc>
+            </a:pPr>
+            <a:r>
+              <a:rPr lang="en-US" sz="1575" dirty="0" b="1">
+                <a:solidFill>
+                  <a:srgbClr val="16171D"/>
+                </a:solidFill>
+                <a:latin typeface="Segoe UI"/>
+                <a:cs typeface="Segoe UI"/>
+              </a:rPr>
+              <a:t xml:space="preserve">Step 1.</a:t>
+            </a:r>
+            <a:r>
+              <a:rPr lang="en-US" sz="1575" dirty="0">
+                <a:solidFill>
+                  <a:srgbClr val="16171D"/>
+                </a:solidFill>
+                <a:latin typeface="Segoe UI"/>
+                <a:cs typeface="Segoe UI"/>
+              </a:rPr>
+              <a:t xml:space="preserve"> The 5 is </a:t>
+            </a:r>
+            <a:r>
+              <a:rPr lang="en-US" sz="1575" dirty="0" b="1">
+                <a:solidFill>
+                  <a:srgbClr val="16171D"/>
+                </a:solidFill>
+                <a:latin typeface="Segoe UI"/>
+                <a:cs typeface="Segoe UI"/>
+              </a:rPr>
+              <a:t xml:space="preserve">inside</a:t>
+            </a:r>
+            <a:r>
+              <a:rPr lang="en-US" sz="1575" dirty="0">
+                <a:solidFill>
+                  <a:srgbClr val="16171D"/>
+                </a:solidFill>
+                <a:latin typeface="Segoe UI"/>
+                <a:cs typeface="Segoe UI"/>
+              </a:rPr>
+              <a:t xml:space="preserve"> the parentheses with </a:t>
+            </a:r>
+            <a:r>
+              <a:rPr lang="en-US" sz="1575" dirty="0" i="1">
+                <a:solidFill>
+                  <a:srgbClr val="16171D"/>
+                </a:solidFill>
+                <a:latin typeface="Segoe UI"/>
+                <a:cs typeface="Segoe UI"/>
+              </a:rPr>
+              <a:t xml:space="preserve">x</a:t>
+            </a:r>
+            <a:r>
+              <a:rPr lang="en-US" sz="1575" dirty="0">
+                <a:solidFill>
+                  <a:srgbClr val="16171D"/>
+                </a:solidFill>
+                <a:latin typeface="Segoe UI"/>
+                <a:cs typeface="Segoe UI"/>
+              </a:rPr>
+              <a:t xml:space="preserve">, so the graph moves left or right.</a:t>
+            </a:r>
+            <a:endParaRPr lang="en-US" sz="1575" dirty="0"/>
+          </a:p>
+        </p:txBody>
+      </p:sp>
+      <p:sp>
+        <p:nvSpPr>
+          <p:cNvPr id="6" name="Shape 6"/>
+          <p:cNvSpPr txBox="1"/>
+          <p:nvPr/>
+        </p:nvSpPr>
+        <p:spPr>
+          <a:xfrm>
+            <a:off x="895350" y="3130296"/>
+            <a:ext cx="3035198" cy="534924"/>
+          </a:xfrm>
+          <a:prstGeom prst="rect">
+            <a:avLst/>
+          </a:prstGeom>
+          <a:noFill/>
+          <a:ln>
+            <a:noFill/>
+          </a:ln>
+        </p:spPr>
+        <p:txBody>
+          <a:bodyPr wrap="square" lIns="36576" tIns="27432" rIns="36576" bIns="27432" anchor="t">
+            <a:noAutofit/>
+          </a:bodyPr>
+          <a:lstStyle/>
+          <a:p>
+            <a:pPr algn="l">
+              <a:lnSpc>
+                <a:spcPct val="100000"/>
+              </a:lnSpc>
+            </a:pPr>
+            <a:r>
+              <a:rPr lang="en-US" sz="1575" dirty="0" b="1">
+                <a:solidFill>
+                  <a:srgbClr val="16171D"/>
+                </a:solidFill>
+                <a:latin typeface="Segoe UI"/>
+                <a:cs typeface="Segoe UI"/>
+              </a:rPr>
+              <a:t xml:space="preserve">Step 2.</a:t>
+            </a:r>
+            <a:r>
+              <a:rPr lang="en-US" sz="1575" dirty="0">
+                <a:solidFill>
+                  <a:srgbClr val="16171D"/>
+                </a:solidFill>
+                <a:latin typeface="Segoe UI"/>
+                <a:cs typeface="Segoe UI"/>
+              </a:rPr>
+              <a:t xml:space="preserve"> Inside, the sign flips: </a:t>
+            </a:r>
+            <a:r>
+              <a:rPr lang="en-US" sz="1575" dirty="0" b="1">
+                <a:solidFill>
+                  <a:srgbClr val="16171D"/>
+                </a:solidFill>
+                <a:latin typeface="Segoe UI"/>
+                <a:cs typeface="Segoe UI"/>
+              </a:rPr>
+              <a:t xml:space="preserve">plus</a:t>
+            </a:r>
+            <a:r>
+              <a:rPr lang="en-US" sz="1575" dirty="0">
+                <a:solidFill>
+                  <a:srgbClr val="16171D"/>
+                </a:solidFill>
+                <a:latin typeface="Segoe UI"/>
+                <a:cs typeface="Segoe UI"/>
+              </a:rPr>
+              <a:t xml:space="preserve"> means </a:t>
+            </a:r>
+            <a:r>
+              <a:rPr lang="en-US" sz="1575" dirty="0" b="1">
+                <a:solidFill>
+                  <a:srgbClr val="16171D"/>
+                </a:solidFill>
+                <a:latin typeface="Segoe UI"/>
+                <a:cs typeface="Segoe UI"/>
+              </a:rPr>
+              <a:t xml:space="preserve">left</a:t>
+            </a:r>
+            <a:r>
+              <a:rPr lang="en-US" sz="1575" dirty="0">
+                <a:solidFill>
+                  <a:srgbClr val="16171D"/>
+                </a:solidFill>
+                <a:latin typeface="Segoe UI"/>
+                <a:cs typeface="Segoe UI"/>
+              </a:rPr>
+              <a:t xml:space="preserve">.</a:t>
+            </a:r>
+            <a:endParaRPr lang="en-US" sz="1575" dirty="0"/>
+          </a:p>
+        </p:txBody>
+      </p:sp>
+      <p:sp>
+        <p:nvSpPr>
+          <p:cNvPr id="7" name="Shape 7"/>
+          <p:cNvSpPr txBox="1"/>
+          <p:nvPr/>
+        </p:nvSpPr>
+        <p:spPr>
+          <a:xfrm>
+            <a:off x="895350" y="3760470"/>
+            <a:ext cx="2908021" cy="518922"/>
           </a:xfrm>
           <a:prstGeom prst="roundRect">
             <a:avLst>
@@ -12452,27 +15713,7 @@
                 <a:latin typeface="Cambria"/>
                 <a:cs typeface="Cambria"/>
               </a:rPr>
-              <a:t xml:space="preserve">2(</a:t>
-            </a:r>
-            <a:r>
-              <a:rPr lang="en-US" sz="2325" dirty="0" i="1">
-                <a:solidFill>
-                  <a:srgbClr val="16171D"/>
-                </a:solidFill>
-                <a:latin typeface="Cambria"/>
-                <a:cs typeface="Cambria"/>
-              </a:rPr>
-              <a:t xml:space="preserve">x</a:t>
-            </a:r>
-            <a:r>
-              <a:rPr lang="en-US" sz="2325" dirty="0">
-                <a:solidFill>
-                  <a:srgbClr val="16171D"/>
-                </a:solidFill>
-                <a:latin typeface="Cambria"/>
-                <a:cs typeface="Cambria"/>
-              </a:rPr>
-              <a:t xml:space="preserve"> + 4) − 1</a:t>
+              <a:t xml:space="preserve">left 5</a:t>
             </a:r>
             <a:endParaRPr lang="en-US" sz="2325" dirty="0"/>
           </a:p>
@@ -12480,21 +15721,27 @@
       </p:sp>
       <p:sp>
         <p:nvSpPr>
-          <p:cNvPr id="6" name="Shape 6"/>
+          <p:cNvPr id="13" name="Shape 13"/>
           <p:cNvSpPr txBox="1"/>
           <p:nvPr/>
         </p:nvSpPr>
         <p:spPr>
           <a:xfrm>
-            <a:off x="685800" y="2832354"/>
-            <a:ext cx="10820095" cy="352044"/>
-          </a:xfrm>
-          <a:prstGeom prst="rect">
-            <a:avLst/>
-          </a:prstGeom>
-          <a:noFill/>
-          <a:ln>
-            <a:noFill/>
+            <a:off x="4368698" y="1618488"/>
+            <a:ext cx="3454298" cy="2832354"/>
+          </a:xfrm>
+          <a:prstGeom prst="roundRect">
+            <a:avLst>
+              <a:gd name="adj" fmla="val 8000"/>
+            </a:avLst>
+          </a:prstGeom>
+          <a:solidFill>
+            <a:srgbClr val="FFFFFF"/>
+          </a:solidFill>
+          <a:ln w="12700">
+            <a:solidFill>
+              <a:srgbClr val="E3E4EC"/>
+            </a:solidFill>
           </a:ln>
         </p:spPr>
         <p:txBody>
@@ -12508,30 +15755,272 @@
                 <a:spcPct val="100000"/>
               </a:lnSpc>
             </a:pPr>
-            <a:r>
-              <a:rPr lang="en-US" sz="1950" dirty="0">
-                <a:solidFill>
-                  <a:srgbClr val="16171D"/>
-                </a:solidFill>
-                <a:latin typeface="Segoe UI"/>
-                <a:cs typeface="Segoe UI"/>
-              </a:rPr>
-              <a:t xml:space="preserve">Distribute: ____ − 1</a:t>
-            </a:r>
             <a:endParaRPr lang="en-US" sz="1950" dirty="0"/>
           </a:p>
         </p:txBody>
       </p:sp>
       <p:sp>
         <p:nvSpPr>
-          <p:cNvPr id="7" name="Shape 7"/>
+          <p:cNvPr id="9" name="Shape 9"/>
           <p:cNvSpPr txBox="1"/>
           <p:nvPr/>
         </p:nvSpPr>
         <p:spPr>
           <a:xfrm>
-            <a:off x="685800" y="3355848"/>
-            <a:ext cx="3571326" cy="518922"/>
+            <a:off x="4578248" y="1789938"/>
+            <a:ext cx="3035198" cy="374904"/>
+          </a:xfrm>
+          <a:prstGeom prst="rect">
+            <a:avLst/>
+          </a:prstGeom>
+          <a:noFill/>
+          <a:ln>
+            <a:noFill/>
+          </a:ln>
+        </p:spPr>
+        <p:txBody>
+          <a:bodyPr wrap="square" lIns="36576" tIns="27432" rIns="36576" bIns="27432" anchor="t">
+            <a:noAutofit/>
+          </a:bodyPr>
+          <a:lstStyle/>
+          <a:p>
+            <a:pPr algn="l">
+              <a:lnSpc>
+                <a:spcPct val="100000"/>
+              </a:lnSpc>
+            </a:pPr>
+            <a:r>
+              <a:rPr lang="en-US" sz="2100" dirty="0" b="1">
+                <a:solidFill>
+                  <a:srgbClr val="16171D"/>
+                </a:solidFill>
+                <a:latin typeface="Segoe UI"/>
+                <a:cs typeface="Segoe UI"/>
+              </a:rPr>
+              <a:t xml:space="preserve">2. </a:t>
+            </a:r>
+            <a:r>
+              <a:rPr lang="en-US" sz="2100" dirty="0" b="1" i="1">
+                <a:solidFill>
+                  <a:srgbClr val="16171D"/>
+                </a:solidFill>
+                <a:latin typeface="Segoe UI"/>
+                <a:cs typeface="Segoe UI"/>
+              </a:rPr>
+              <a:t xml:space="preserve">f</a:t>
+            </a:r>
+            <a:r>
+              <a:rPr lang="en-US" sz="2100" dirty="0" b="1">
+                <a:solidFill>
+                  <a:srgbClr val="16171D"/>
+                </a:solidFill>
+                <a:latin typeface="Segoe UI"/>
+                <a:cs typeface="Segoe UI"/>
+              </a:rPr>
+              <a:t xml:space="preserve">(</a:t>
+            </a:r>
+            <a:r>
+              <a:rPr lang="en-US" sz="2100" dirty="0" b="1" i="1">
+                <a:solidFill>
+                  <a:srgbClr val="16171D"/>
+                </a:solidFill>
+                <a:latin typeface="Segoe UI"/>
+                <a:cs typeface="Segoe UI"/>
+              </a:rPr>
+              <a:t xml:space="preserve">x</a:t>
+            </a:r>
+            <a:r>
+              <a:rPr lang="en-US" sz="2100" dirty="0" b="1">
+                <a:solidFill>
+                  <a:srgbClr val="16171D"/>
+                </a:solidFill>
+                <a:latin typeface="Segoe UI"/>
+                <a:cs typeface="Segoe UI"/>
+              </a:rPr>
+              <a:t xml:space="preserve">) + 2</a:t>
+            </a:r>
+            <a:endParaRPr lang="en-US" sz="2100" dirty="0"/>
+          </a:p>
+        </p:txBody>
+      </p:sp>
+      <p:sp>
+        <p:nvSpPr>
+          <p:cNvPr id="10" name="Shape 10"/>
+          <p:cNvSpPr txBox="1"/>
+          <p:nvPr/>
+        </p:nvSpPr>
+        <p:spPr>
+          <a:xfrm>
+            <a:off x="4578248" y="2260092"/>
+            <a:ext cx="3035198" cy="774954"/>
+          </a:xfrm>
+          <a:prstGeom prst="rect">
+            <a:avLst/>
+          </a:prstGeom>
+          <a:noFill/>
+          <a:ln>
+            <a:noFill/>
+          </a:ln>
+        </p:spPr>
+        <p:txBody>
+          <a:bodyPr wrap="square" lIns="36576" tIns="27432" rIns="36576" bIns="27432" anchor="t">
+            <a:noAutofit/>
+          </a:bodyPr>
+          <a:lstStyle/>
+          <a:p>
+            <a:pPr algn="l">
+              <a:lnSpc>
+                <a:spcPct val="100000"/>
+              </a:lnSpc>
+            </a:pPr>
+            <a:r>
+              <a:rPr lang="en-US" sz="1575" dirty="0" b="1">
+                <a:solidFill>
+                  <a:srgbClr val="16171D"/>
+                </a:solidFill>
+                <a:latin typeface="Segoe UI"/>
+                <a:cs typeface="Segoe UI"/>
+              </a:rPr>
+              <a:t xml:space="preserve">Step 1.</a:t>
+            </a:r>
+            <a:r>
+              <a:rPr lang="en-US" sz="1575" dirty="0">
+                <a:solidFill>
+                  <a:srgbClr val="16171D"/>
+                </a:solidFill>
+                <a:latin typeface="Segoe UI"/>
+                <a:cs typeface="Segoe UI"/>
+              </a:rPr>
+              <a:t xml:space="preserve"> The 2 is </a:t>
+            </a:r>
+            <a:r>
+              <a:rPr lang="en-US" sz="1575" dirty="0" b="1">
+                <a:solidFill>
+                  <a:srgbClr val="16171D"/>
+                </a:solidFill>
+                <a:latin typeface="Segoe UI"/>
+                <a:cs typeface="Segoe UI"/>
+              </a:rPr>
+              <a:t xml:space="preserve">outside</a:t>
+            </a:r>
+            <a:r>
+              <a:rPr lang="en-US" sz="1575" dirty="0">
+                <a:solidFill>
+                  <a:srgbClr val="16171D"/>
+                </a:solidFill>
+                <a:latin typeface="Segoe UI"/>
+                <a:cs typeface="Segoe UI"/>
+              </a:rPr>
+              <a:t xml:space="preserve"> the parentheses, so the graph moves up or down.</a:t>
+            </a:r>
+            <a:endParaRPr lang="en-US" sz="1575" dirty="0"/>
+          </a:p>
+        </p:txBody>
+      </p:sp>
+      <p:sp>
+        <p:nvSpPr>
+          <p:cNvPr id="11" name="Shape 11"/>
+          <p:cNvSpPr txBox="1"/>
+          <p:nvPr/>
+        </p:nvSpPr>
+        <p:spPr>
+          <a:xfrm>
+            <a:off x="4578248" y="3130296"/>
+            <a:ext cx="3035198" cy="534924"/>
+          </a:xfrm>
+          <a:prstGeom prst="rect">
+            <a:avLst/>
+          </a:prstGeom>
+          <a:noFill/>
+          <a:ln>
+            <a:noFill/>
+          </a:ln>
+        </p:spPr>
+        <p:txBody>
+          <a:bodyPr wrap="square" lIns="36576" tIns="27432" rIns="36576" bIns="27432" anchor="t">
+            <a:noAutofit/>
+          </a:bodyPr>
+          <a:lstStyle/>
+          <a:p>
+            <a:pPr algn="l">
+              <a:lnSpc>
+                <a:spcPct val="100000"/>
+              </a:lnSpc>
+            </a:pPr>
+            <a:r>
+              <a:rPr lang="en-US" sz="1575" dirty="0" b="1">
+                <a:solidFill>
+                  <a:srgbClr val="16171D"/>
+                </a:solidFill>
+                <a:latin typeface="Segoe UI"/>
+                <a:cs typeface="Segoe UI"/>
+              </a:rPr>
+              <a:t xml:space="preserve">Step 2.</a:t>
+            </a:r>
+            <a:r>
+              <a:rPr lang="en-US" sz="1575" dirty="0">
+                <a:solidFill>
+                  <a:srgbClr val="16171D"/>
+                </a:solidFill>
+                <a:latin typeface="Segoe UI"/>
+                <a:cs typeface="Segoe UI"/>
+              </a:rPr>
+              <a:t xml:space="preserve"> Outside, no flip: </a:t>
+            </a:r>
+            <a:r>
+              <a:rPr lang="en-US" sz="1575" dirty="0" b="1">
+                <a:solidFill>
+                  <a:srgbClr val="16171D"/>
+                </a:solidFill>
+                <a:latin typeface="Segoe UI"/>
+                <a:cs typeface="Segoe UI"/>
+              </a:rPr>
+              <a:t xml:space="preserve">plus</a:t>
+            </a:r>
+            <a:r>
+              <a:rPr lang="en-US" sz="1575" dirty="0">
+                <a:solidFill>
+                  <a:srgbClr val="16171D"/>
+                </a:solidFill>
+                <a:latin typeface="Segoe UI"/>
+                <a:cs typeface="Segoe UI"/>
+              </a:rPr>
+              <a:t xml:space="preserve"> means </a:t>
+            </a:r>
+            <a:r>
+              <a:rPr lang="en-US" sz="1575" dirty="0" b="1">
+                <a:solidFill>
+                  <a:srgbClr val="16171D"/>
+                </a:solidFill>
+                <a:latin typeface="Segoe UI"/>
+                <a:cs typeface="Segoe UI"/>
+              </a:rPr>
+              <a:t xml:space="preserve">up</a:t>
+            </a:r>
+            <a:r>
+              <a:rPr lang="en-US" sz="1575" dirty="0">
+                <a:solidFill>
+                  <a:srgbClr val="16171D"/>
+                </a:solidFill>
+                <a:latin typeface="Segoe UI"/>
+                <a:cs typeface="Segoe UI"/>
+              </a:rPr>
+              <a:t xml:space="preserve">.</a:t>
+            </a:r>
+            <a:endParaRPr lang="en-US" sz="1575" dirty="0"/>
+          </a:p>
+        </p:txBody>
+      </p:sp>
+      <p:sp>
+        <p:nvSpPr>
+          <p:cNvPr id="12" name="Shape 12"/>
+          <p:cNvSpPr txBox="1"/>
+          <p:nvPr/>
+        </p:nvSpPr>
+        <p:spPr>
+          <a:xfrm>
+            <a:off x="4578248" y="3760470"/>
+            <a:ext cx="2576368" cy="518922"/>
           </a:xfrm>
           <a:prstGeom prst="roundRect">
             <a:avLst>
@@ -12574,27 +16063,7 @@
                 <a:latin typeface="Cambria"/>
                 <a:cs typeface="Cambria"/>
               </a:rPr>
-              <a:t xml:space="preserve">2</a:t>
-            </a:r>
-            <a:r>
-              <a:rPr lang="en-US" sz="2325" dirty="0" i="1">
-                <a:solidFill>
-                  <a:srgbClr val="16171D"/>
-                </a:solidFill>
-                <a:latin typeface="Cambria"/>
-                <a:cs typeface="Cambria"/>
-              </a:rPr>
-              <a:t xml:space="preserve">x</a:t>
-            </a:r>
-            <a:r>
-              <a:rPr lang="en-US" sz="2325" dirty="0">
-                <a:solidFill>
-                  <a:srgbClr val="16171D"/>
-                </a:solidFill>
-                <a:latin typeface="Cambria"/>
-                <a:cs typeface="Cambria"/>
-              </a:rPr>
-              <a:t xml:space="preserve"> + 8 − 1</a:t>
+              <a:t xml:space="preserve">up 2</a:t>
             </a:r>
             <a:endParaRPr lang="en-US" sz="2325" dirty="0"/>
           </a:p>
@@ -12602,21 +16071,27 @@
       </p:sp>
       <p:sp>
         <p:nvSpPr>
-          <p:cNvPr id="8" name="Shape 8"/>
+          <p:cNvPr id="18" name="Shape 18"/>
           <p:cNvSpPr txBox="1"/>
           <p:nvPr/>
         </p:nvSpPr>
         <p:spPr>
           <a:xfrm>
-            <a:off x="685800" y="4046220"/>
-            <a:ext cx="10820095" cy="352044"/>
-          </a:xfrm>
-          <a:prstGeom prst="rect">
-            <a:avLst/>
-          </a:prstGeom>
-          <a:noFill/>
-          <a:ln>
-            <a:noFill/>
+            <a:off x="8051597" y="1618488"/>
+            <a:ext cx="3454298" cy="2592324"/>
+          </a:xfrm>
+          <a:prstGeom prst="roundRect">
+            <a:avLst>
+              <a:gd name="adj" fmla="val 8000"/>
+            </a:avLst>
+          </a:prstGeom>
+          <a:solidFill>
+            <a:srgbClr val="FFFFFF"/>
+          </a:solidFill>
+          <a:ln w="12700">
+            <a:solidFill>
+              <a:srgbClr val="E3E4EC"/>
+            </a:solidFill>
           </a:ln>
         </p:spPr>
         <p:txBody>
@@ -12630,30 +16105,272 @@
                 <a:spcPct val="100000"/>
               </a:lnSpc>
             </a:pPr>
-            <a:r>
-              <a:rPr lang="en-US" sz="1950" dirty="0">
-                <a:solidFill>
-                  <a:srgbClr val="16171D"/>
-                </a:solidFill>
-                <a:latin typeface="Segoe UI"/>
-                <a:cs typeface="Segoe UI"/>
-              </a:rPr>
-              <a:t xml:space="preserve">Combine:</a:t>
-            </a:r>
             <a:endParaRPr lang="en-US" sz="1950" dirty="0"/>
           </a:p>
         </p:txBody>
       </p:sp>
       <p:sp>
         <p:nvSpPr>
-          <p:cNvPr id="9" name="Shape 9"/>
+          <p:cNvPr id="14" name="Shape 14"/>
           <p:cNvSpPr txBox="1"/>
           <p:nvPr/>
         </p:nvSpPr>
         <p:spPr>
           <a:xfrm>
-            <a:off x="685800" y="4569714"/>
-            <a:ext cx="2908021" cy="518922"/>
+            <a:off x="8261147" y="1789938"/>
+            <a:ext cx="3035198" cy="374904"/>
+          </a:xfrm>
+          <a:prstGeom prst="rect">
+            <a:avLst/>
+          </a:prstGeom>
+          <a:noFill/>
+          <a:ln>
+            <a:noFill/>
+          </a:ln>
+        </p:spPr>
+        <p:txBody>
+          <a:bodyPr wrap="square" lIns="36576" tIns="27432" rIns="36576" bIns="27432" anchor="t">
+            <a:noAutofit/>
+          </a:bodyPr>
+          <a:lstStyle/>
+          <a:p>
+            <a:pPr algn="l">
+              <a:lnSpc>
+                <a:spcPct val="100000"/>
+              </a:lnSpc>
+            </a:pPr>
+            <a:r>
+              <a:rPr lang="en-US" sz="2100" dirty="0" b="1">
+                <a:solidFill>
+                  <a:srgbClr val="16171D"/>
+                </a:solidFill>
+                <a:latin typeface="Segoe UI"/>
+                <a:cs typeface="Segoe UI"/>
+              </a:rPr>
+              <a:t xml:space="preserve">3. </a:t>
+            </a:r>
+            <a:r>
+              <a:rPr lang="en-US" sz="2100" dirty="0" b="1" i="1">
+                <a:solidFill>
+                  <a:srgbClr val="16171D"/>
+                </a:solidFill>
+                <a:latin typeface="Segoe UI"/>
+                <a:cs typeface="Segoe UI"/>
+              </a:rPr>
+              <a:t xml:space="preserve">f</a:t>
+            </a:r>
+            <a:r>
+              <a:rPr lang="en-US" sz="2100" dirty="0" b="1">
+                <a:solidFill>
+                  <a:srgbClr val="16171D"/>
+                </a:solidFill>
+                <a:latin typeface="Segoe UI"/>
+                <a:cs typeface="Segoe UI"/>
+              </a:rPr>
+              <a:t xml:space="preserve">(</a:t>
+            </a:r>
+            <a:r>
+              <a:rPr lang="en-US" sz="2100" dirty="0" b="1" i="1">
+                <a:solidFill>
+                  <a:srgbClr val="16171D"/>
+                </a:solidFill>
+                <a:latin typeface="Segoe UI"/>
+                <a:cs typeface="Segoe UI"/>
+              </a:rPr>
+              <a:t xml:space="preserve">x</a:t>
+            </a:r>
+            <a:r>
+              <a:rPr lang="en-US" sz="2100" dirty="0" b="1">
+                <a:solidFill>
+                  <a:srgbClr val="16171D"/>
+                </a:solidFill>
+                <a:latin typeface="Segoe UI"/>
+                <a:cs typeface="Segoe UI"/>
+              </a:rPr>
+              <a:t xml:space="preserve"> − 3)</a:t>
+            </a:r>
+            <a:endParaRPr lang="en-US" sz="2100" dirty="0"/>
+          </a:p>
+        </p:txBody>
+      </p:sp>
+      <p:sp>
+        <p:nvSpPr>
+          <p:cNvPr id="15" name="Shape 15"/>
+          <p:cNvSpPr txBox="1"/>
+          <p:nvPr/>
+        </p:nvSpPr>
+        <p:spPr>
+          <a:xfrm>
+            <a:off x="8261147" y="2260092"/>
+            <a:ext cx="3035198" cy="534924"/>
+          </a:xfrm>
+          <a:prstGeom prst="rect">
+            <a:avLst/>
+          </a:prstGeom>
+          <a:noFill/>
+          <a:ln>
+            <a:noFill/>
+          </a:ln>
+        </p:spPr>
+        <p:txBody>
+          <a:bodyPr wrap="square" lIns="36576" tIns="27432" rIns="36576" bIns="27432" anchor="t">
+            <a:noAutofit/>
+          </a:bodyPr>
+          <a:lstStyle/>
+          <a:p>
+            <a:pPr algn="l">
+              <a:lnSpc>
+                <a:spcPct val="100000"/>
+              </a:lnSpc>
+            </a:pPr>
+            <a:r>
+              <a:rPr lang="en-US" sz="1575" dirty="0" b="1">
+                <a:solidFill>
+                  <a:srgbClr val="16171D"/>
+                </a:solidFill>
+                <a:latin typeface="Segoe UI"/>
+                <a:cs typeface="Segoe UI"/>
+              </a:rPr>
+              <a:t xml:space="preserve">Step 1.</a:t>
+            </a:r>
+            <a:r>
+              <a:rPr lang="en-US" sz="1575" dirty="0">
+                <a:solidFill>
+                  <a:srgbClr val="16171D"/>
+                </a:solidFill>
+                <a:latin typeface="Segoe UI"/>
+                <a:cs typeface="Segoe UI"/>
+              </a:rPr>
+              <a:t xml:space="preserve"> The 3 is </a:t>
+            </a:r>
+            <a:r>
+              <a:rPr lang="en-US" sz="1575" dirty="0" b="1">
+                <a:solidFill>
+                  <a:srgbClr val="16171D"/>
+                </a:solidFill>
+                <a:latin typeface="Segoe UI"/>
+                <a:cs typeface="Segoe UI"/>
+              </a:rPr>
+              <a:t xml:space="preserve">inside</a:t>
+            </a:r>
+            <a:r>
+              <a:rPr lang="en-US" sz="1575" dirty="0">
+                <a:solidFill>
+                  <a:srgbClr val="16171D"/>
+                </a:solidFill>
+                <a:latin typeface="Segoe UI"/>
+                <a:cs typeface="Segoe UI"/>
+              </a:rPr>
+              <a:t xml:space="preserve">, so left or right.</a:t>
+            </a:r>
+            <a:endParaRPr lang="en-US" sz="1575" dirty="0"/>
+          </a:p>
+        </p:txBody>
+      </p:sp>
+      <p:sp>
+        <p:nvSpPr>
+          <p:cNvPr id="16" name="Shape 16"/>
+          <p:cNvSpPr txBox="1"/>
+          <p:nvPr/>
+        </p:nvSpPr>
+        <p:spPr>
+          <a:xfrm>
+            <a:off x="8261147" y="2890266"/>
+            <a:ext cx="3035198" cy="534924"/>
+          </a:xfrm>
+          <a:prstGeom prst="rect">
+            <a:avLst/>
+          </a:prstGeom>
+          <a:noFill/>
+          <a:ln>
+            <a:noFill/>
+          </a:ln>
+        </p:spPr>
+        <p:txBody>
+          <a:bodyPr wrap="square" lIns="36576" tIns="27432" rIns="36576" bIns="27432" anchor="t">
+            <a:noAutofit/>
+          </a:bodyPr>
+          <a:lstStyle/>
+          <a:p>
+            <a:pPr algn="l">
+              <a:lnSpc>
+                <a:spcPct val="100000"/>
+              </a:lnSpc>
+            </a:pPr>
+            <a:r>
+              <a:rPr lang="en-US" sz="1575" dirty="0" b="1">
+                <a:solidFill>
+                  <a:srgbClr val="16171D"/>
+                </a:solidFill>
+                <a:latin typeface="Segoe UI"/>
+                <a:cs typeface="Segoe UI"/>
+              </a:rPr>
+              <a:t xml:space="preserve">Step 2.</a:t>
+            </a:r>
+            <a:r>
+              <a:rPr lang="en-US" sz="1575" dirty="0">
+                <a:solidFill>
+                  <a:srgbClr val="16171D"/>
+                </a:solidFill>
+                <a:latin typeface="Segoe UI"/>
+                <a:cs typeface="Segoe UI"/>
+              </a:rPr>
+              <a:t xml:space="preserve"> Inside, the sign flips: </a:t>
+            </a:r>
+            <a:r>
+              <a:rPr lang="en-US" sz="1575" dirty="0" b="1">
+                <a:solidFill>
+                  <a:srgbClr val="16171D"/>
+                </a:solidFill>
+                <a:latin typeface="Segoe UI"/>
+                <a:cs typeface="Segoe UI"/>
+              </a:rPr>
+              <a:t xml:space="preserve">minus</a:t>
+            </a:r>
+            <a:r>
+              <a:rPr lang="en-US" sz="1575" dirty="0">
+                <a:solidFill>
+                  <a:srgbClr val="16171D"/>
+                </a:solidFill>
+                <a:latin typeface="Segoe UI"/>
+                <a:cs typeface="Segoe UI"/>
+              </a:rPr>
+              <a:t xml:space="preserve"> means </a:t>
+            </a:r>
+            <a:r>
+              <a:rPr lang="en-US" sz="1575" dirty="0" b="1">
+                <a:solidFill>
+                  <a:srgbClr val="16171D"/>
+                </a:solidFill>
+                <a:latin typeface="Segoe UI"/>
+                <a:cs typeface="Segoe UI"/>
+              </a:rPr>
+              <a:t xml:space="preserve">right</a:t>
+            </a:r>
+            <a:r>
+              <a:rPr lang="en-US" sz="1575" dirty="0">
+                <a:solidFill>
+                  <a:srgbClr val="16171D"/>
+                </a:solidFill>
+                <a:latin typeface="Segoe UI"/>
+                <a:cs typeface="Segoe UI"/>
+              </a:rPr>
+              <a:t xml:space="preserve">.</a:t>
+            </a:r>
+            <a:endParaRPr lang="en-US" sz="1575" dirty="0"/>
+          </a:p>
+        </p:txBody>
+      </p:sp>
+      <p:sp>
+        <p:nvSpPr>
+          <p:cNvPr id="17" name="Shape 17"/>
+          <p:cNvSpPr txBox="1"/>
+          <p:nvPr/>
+        </p:nvSpPr>
+        <p:spPr>
+          <a:xfrm>
+            <a:off x="8261147" y="3520440"/>
+            <a:ext cx="3035198" cy="518922"/>
           </a:xfrm>
           <a:prstGeom prst="roundRect">
             <a:avLst>
@@ -12696,27 +16413,7 @@
                 <a:latin typeface="Cambria"/>
                 <a:cs typeface="Cambria"/>
               </a:rPr>
-              <a:t xml:space="preserve">2</a:t>
-            </a:r>
-            <a:r>
-              <a:rPr lang="en-US" sz="2325" dirty="0" i="1">
-                <a:solidFill>
-                  <a:srgbClr val="16171D"/>
-                </a:solidFill>
-                <a:latin typeface="Cambria"/>
-                <a:cs typeface="Cambria"/>
-              </a:rPr>
-              <a:t xml:space="preserve">x</a:t>
-            </a:r>
-            <a:r>
-              <a:rPr lang="en-US" sz="2325" dirty="0">
-                <a:solidFill>
-                  <a:srgbClr val="16171D"/>
-                </a:solidFill>
-                <a:latin typeface="Cambria"/>
-                <a:cs typeface="Cambria"/>
-              </a:rPr>
-              <a:t xml:space="preserve"> + 7</a:t>
+              <a:t xml:space="preserve">right 3</a:t>
             </a:r>
             <a:endParaRPr lang="en-US" sz="2325" dirty="0"/>
           </a:p>
@@ -12724,7 +16421,7 @@
       </p:sp>
       <p:sp>
         <p:nvSpPr>
-          <p:cNvPr id="10" name="Slide Number 10"/>
+          <p:cNvPr id="19" name="Slide Number 19"/>
           <p:cNvSpPr txBox="1"/>
           <p:nvPr/>
         </p:nvSpPr>
@@ -12752,6 +16449,1573 @@
                 </a:solidFill>
               </a:rPr>
               <a:t>8</a:t>
+            </a:fld>
+          </a:p>
+        </p:txBody>
+      </p:sp>
+    </p:spTree>
+  </p:cSld>
+  <p:clrMapOvr>
+    <a:masterClrMapping/>
+  </p:clrMapOvr>
+  <p:transition spd="med">
+    <p:fade/>
+  </p:transition>
+  <p:timing>
+    <p:tnLst>
+      <p:par>
+        <p:cTn id="1" dur="indefinite" restart="never" nodeType="tmRoot">
+          <p:childTnLst>
+            <p:seq concurrent="1" nextAc="seek">
+              <p:cTn id="2" dur="indefinite" nodeType="mainSeq">
+                <p:childTnLst>
+                  <p:par>
+                    <p:cTn id="8" fill="hold">
+                      <p:stCondLst>
+                        <p:cond delay="indefinite"/>
+                      </p:stCondLst>
+                      <p:childTnLst>
+                        <p:par>
+                          <p:cTn id="9" fill="hold">
+                            <p:stCondLst>
+                              <p:cond delay="0"/>
+                            </p:stCondLst>
+                            <p:childTnLst>
+                              <p:par>
+                                <p:cTn id="7" presetID="42" presetClass="entr" presetSubtype="0" fill="hold" nodeType="clickEffect">
+                                  <p:stCondLst>
+                                    <p:cond delay="0"/>
+                                  </p:stCondLst>
+                                  <p:childTnLst>
+                                    <p:set>
+                                      <p:cBhvr>
+                                        <p:cTn id="3" dur="1" fill="hold">
+                                          <p:stCondLst>
+                                            <p:cond delay="0"/>
+                                          </p:stCondLst>
+                                        </p:cTn>
+                                        <p:tgtEl>
+                                          <p:spTgt spid="5"/>
+                                        </p:tgtEl>
+                                        <p:attrNameLst>
+                                          <p:attrName>style.visibility</p:attrName>
+                                        </p:attrNameLst>
+                                      </p:cBhvr>
+                                      <p:to>
+                                        <p:strVal val="visible"/>
+                                      </p:to>
+                                    </p:set>
+                                    <p:animEffect transition="in" filter="fade">
+                                      <p:cBhvr>
+                                        <p:cTn id="4" dur="500"/>
+                                        <p:tgtEl>
+                                          <p:spTgt spid="5"/>
+                                        </p:tgtEl>
+                                      </p:cBhvr>
+                                    </p:animEffect>
+                                    <p:anim calcmode="lin" valueType="num">
+                                      <p:cBhvr>
+                                        <p:cTn id="5" dur="500" fill="hold"/>
+                                        <p:tgtEl>
+                                          <p:spTgt spid="5"/>
+                                        </p:tgtEl>
+                                        <p:attrNameLst>
+                                          <p:attrName>ppt_x</p:attrName>
+                                        </p:attrNameLst>
+                                      </p:cBhvr>
+                                      <p:tavLst>
+                                        <p:tav tm="0">
+                                          <p:val>
+                                            <p:strVal val="#ppt_x"/>
+                                          </p:val>
+                                        </p:tav>
+                                        <p:tav tm="100000">
+                                          <p:val>
+                                            <p:strVal val="#ppt_x"/>
+                                          </p:val>
+                                        </p:tav>
+                                      </p:tavLst>
+                                    </p:anim>
+                                    <p:anim calcmode="lin" valueType="num">
+                                      <p:cBhvr>
+                                        <p:cTn id="6" dur="500" fill="hold"/>
+                                        <p:tgtEl>
+                                          <p:spTgt spid="5"/>
+                                        </p:tgtEl>
+                                        <p:attrNameLst>
+                                          <p:attrName>ppt_y</p:attrName>
+                                        </p:attrNameLst>
+                                      </p:cBhvr>
+                                      <p:tavLst>
+                                        <p:tav tm="0">
+                                          <p:val>
+                                            <p:strVal val="#ppt_y+.1"/>
+                                          </p:val>
+                                        </p:tav>
+                                        <p:tav tm="100000">
+                                          <p:val>
+                                            <p:strVal val="#ppt_y"/>
+                                          </p:val>
+                                        </p:tav>
+                                      </p:tavLst>
+                                    </p:anim>
+                                  </p:childTnLst>
+                                </p:cTn>
+                              </p:par>
+                            </p:childTnLst>
+                          </p:cTn>
+                        </p:par>
+                      </p:childTnLst>
+                    </p:cTn>
+                  </p:par>
+                  <p:par>
+                    <p:cTn id="15" fill="hold">
+                      <p:stCondLst>
+                        <p:cond delay="indefinite"/>
+                      </p:stCondLst>
+                      <p:childTnLst>
+                        <p:par>
+                          <p:cTn id="16" fill="hold">
+                            <p:stCondLst>
+                              <p:cond delay="0"/>
+                            </p:stCondLst>
+                            <p:childTnLst>
+                              <p:par>
+                                <p:cTn id="14" presetID="42" presetClass="entr" presetSubtype="0" fill="hold" nodeType="clickEffect">
+                                  <p:stCondLst>
+                                    <p:cond delay="0"/>
+                                  </p:stCondLst>
+                                  <p:childTnLst>
+                                    <p:set>
+                                      <p:cBhvr>
+                                        <p:cTn id="10" dur="1" fill="hold">
+                                          <p:stCondLst>
+                                            <p:cond delay="0"/>
+                                          </p:stCondLst>
+                                        </p:cTn>
+                                        <p:tgtEl>
+                                          <p:spTgt spid="6"/>
+                                        </p:tgtEl>
+                                        <p:attrNameLst>
+                                          <p:attrName>style.visibility</p:attrName>
+                                        </p:attrNameLst>
+                                      </p:cBhvr>
+                                      <p:to>
+                                        <p:strVal val="visible"/>
+                                      </p:to>
+                                    </p:set>
+                                    <p:animEffect transition="in" filter="fade">
+                                      <p:cBhvr>
+                                        <p:cTn id="11" dur="500"/>
+                                        <p:tgtEl>
+                                          <p:spTgt spid="6"/>
+                                        </p:tgtEl>
+                                      </p:cBhvr>
+                                    </p:animEffect>
+                                    <p:anim calcmode="lin" valueType="num">
+                                      <p:cBhvr>
+                                        <p:cTn id="12" dur="500" fill="hold"/>
+                                        <p:tgtEl>
+                                          <p:spTgt spid="6"/>
+                                        </p:tgtEl>
+                                        <p:attrNameLst>
+                                          <p:attrName>ppt_x</p:attrName>
+                                        </p:attrNameLst>
+                                      </p:cBhvr>
+                                      <p:tavLst>
+                                        <p:tav tm="0">
+                                          <p:val>
+                                            <p:strVal val="#ppt_x"/>
+                                          </p:val>
+                                        </p:tav>
+                                        <p:tav tm="100000">
+                                          <p:val>
+                                            <p:strVal val="#ppt_x"/>
+                                          </p:val>
+                                        </p:tav>
+                                      </p:tavLst>
+                                    </p:anim>
+                                    <p:anim calcmode="lin" valueType="num">
+                                      <p:cBhvr>
+                                        <p:cTn id="13" dur="500" fill="hold"/>
+                                        <p:tgtEl>
+                                          <p:spTgt spid="6"/>
+                                        </p:tgtEl>
+                                        <p:attrNameLst>
+                                          <p:attrName>ppt_y</p:attrName>
+                                        </p:attrNameLst>
+                                      </p:cBhvr>
+                                      <p:tavLst>
+                                        <p:tav tm="0">
+                                          <p:val>
+                                            <p:strVal val="#ppt_y+.1"/>
+                                          </p:val>
+                                        </p:tav>
+                                        <p:tav tm="100000">
+                                          <p:val>
+                                            <p:strVal val="#ppt_y"/>
+                                          </p:val>
+                                        </p:tav>
+                                      </p:tavLst>
+                                    </p:anim>
+                                  </p:childTnLst>
+                                </p:cTn>
+                              </p:par>
+                            </p:childTnLst>
+                          </p:cTn>
+                        </p:par>
+                      </p:childTnLst>
+                    </p:cTn>
+                  </p:par>
+                  <p:par>
+                    <p:cTn id="22" fill="hold">
+                      <p:stCondLst>
+                        <p:cond delay="indefinite"/>
+                      </p:stCondLst>
+                      <p:childTnLst>
+                        <p:par>
+                          <p:cTn id="23" fill="hold">
+                            <p:stCondLst>
+                              <p:cond delay="0"/>
+                            </p:stCondLst>
+                            <p:childTnLst>
+                              <p:par>
+                                <p:cTn id="21" presetID="53" presetClass="entr" presetSubtype="16" fill="hold" nodeType="clickEffect">
+                                  <p:stCondLst>
+                                    <p:cond delay="0"/>
+                                  </p:stCondLst>
+                                  <p:childTnLst>
+                                    <p:set>
+                                      <p:cBhvr>
+                                        <p:cTn id="17" dur="1" fill="hold">
+                                          <p:stCondLst>
+                                            <p:cond delay="0"/>
+                                          </p:stCondLst>
+                                        </p:cTn>
+                                        <p:tgtEl>
+                                          <p:spTgt spid="7"/>
+                                        </p:tgtEl>
+                                        <p:attrNameLst>
+                                          <p:attrName>style.visibility</p:attrName>
+                                        </p:attrNameLst>
+                                      </p:cBhvr>
+                                      <p:to>
+                                        <p:strVal val="visible"/>
+                                      </p:to>
+                                    </p:set>
+                                    <p:animEffect transition="in" filter="fade">
+                                      <p:cBhvr>
+                                        <p:cTn id="18" dur="500"/>
+                                        <p:tgtEl>
+                                          <p:spTgt spid="7"/>
+                                        </p:tgtEl>
+                                      </p:cBhvr>
+                                    </p:animEffect>
+                                    <p:anim calcmode="lin" valueType="num">
+                                      <p:cBhvr>
+                                        <p:cTn id="19" dur="500" fill="hold"/>
+                                        <p:tgtEl>
+                                          <p:spTgt spid="7"/>
+                                        </p:tgtEl>
+                                        <p:attrNameLst>
+                                          <p:attrName>ppt_w</p:attrName>
+                                        </p:attrNameLst>
+                                      </p:cBhvr>
+                                      <p:tavLst>
+                                        <p:tav tm="0">
+                                          <p:val>
+                                            <p:fltVal val="0"/>
+                                          </p:val>
+                                        </p:tav>
+                                        <p:tav tm="100000">
+                                          <p:val>
+                                            <p:strVal val="#ppt_w"/>
+                                          </p:val>
+                                        </p:tav>
+                                      </p:tavLst>
+                                    </p:anim>
+                                    <p:anim calcmode="lin" valueType="num">
+                                      <p:cBhvr>
+                                        <p:cTn id="20" dur="500" fill="hold"/>
+                                        <p:tgtEl>
+                                          <p:spTgt spid="7"/>
+                                        </p:tgtEl>
+                                        <p:attrNameLst>
+                                          <p:attrName>ppt_h</p:attrName>
+                                        </p:attrNameLst>
+                                      </p:cBhvr>
+                                      <p:tavLst>
+                                        <p:tav tm="0">
+                                          <p:val>
+                                            <p:fltVal val="0"/>
+                                          </p:val>
+                                        </p:tav>
+                                        <p:tav tm="100000">
+                                          <p:val>
+                                            <p:strVal val="#ppt_h"/>
+                                          </p:val>
+                                        </p:tav>
+                                      </p:tavLst>
+                                    </p:anim>
+                                  </p:childTnLst>
+                                </p:cTn>
+                              </p:par>
+                            </p:childTnLst>
+                          </p:cTn>
+                        </p:par>
+                      </p:childTnLst>
+                    </p:cTn>
+                  </p:par>
+                  <p:par>
+                    <p:cTn id="29" fill="hold">
+                      <p:stCondLst>
+                        <p:cond delay="indefinite"/>
+                      </p:stCondLst>
+                      <p:childTnLst>
+                        <p:par>
+                          <p:cTn id="30" fill="hold">
+                            <p:stCondLst>
+                              <p:cond delay="0"/>
+                            </p:stCondLst>
+                            <p:childTnLst>
+                              <p:par>
+                                <p:cTn id="28" presetID="42" presetClass="entr" presetSubtype="0" fill="hold" nodeType="clickEffect">
+                                  <p:stCondLst>
+                                    <p:cond delay="0"/>
+                                  </p:stCondLst>
+                                  <p:childTnLst>
+                                    <p:set>
+                                      <p:cBhvr>
+                                        <p:cTn id="24" dur="1" fill="hold">
+                                          <p:stCondLst>
+                                            <p:cond delay="0"/>
+                                          </p:stCondLst>
+                                        </p:cTn>
+                                        <p:tgtEl>
+                                          <p:spTgt spid="10"/>
+                                        </p:tgtEl>
+                                        <p:attrNameLst>
+                                          <p:attrName>style.visibility</p:attrName>
+                                        </p:attrNameLst>
+                                      </p:cBhvr>
+                                      <p:to>
+                                        <p:strVal val="visible"/>
+                                      </p:to>
+                                    </p:set>
+                                    <p:animEffect transition="in" filter="fade">
+                                      <p:cBhvr>
+                                        <p:cTn id="25" dur="500"/>
+                                        <p:tgtEl>
+                                          <p:spTgt spid="10"/>
+                                        </p:tgtEl>
+                                      </p:cBhvr>
+                                    </p:animEffect>
+                                    <p:anim calcmode="lin" valueType="num">
+                                      <p:cBhvr>
+                                        <p:cTn id="26" dur="500" fill="hold"/>
+                                        <p:tgtEl>
+                                          <p:spTgt spid="10"/>
+                                        </p:tgtEl>
+                                        <p:attrNameLst>
+                                          <p:attrName>ppt_x</p:attrName>
+                                        </p:attrNameLst>
+                                      </p:cBhvr>
+                                      <p:tavLst>
+                                        <p:tav tm="0">
+                                          <p:val>
+                                            <p:strVal val="#ppt_x"/>
+                                          </p:val>
+                                        </p:tav>
+                                        <p:tav tm="100000">
+                                          <p:val>
+                                            <p:strVal val="#ppt_x"/>
+                                          </p:val>
+                                        </p:tav>
+                                      </p:tavLst>
+                                    </p:anim>
+                                    <p:anim calcmode="lin" valueType="num">
+                                      <p:cBhvr>
+                                        <p:cTn id="27" dur="500" fill="hold"/>
+                                        <p:tgtEl>
+                                          <p:spTgt spid="10"/>
+                                        </p:tgtEl>
+                                        <p:attrNameLst>
+                                          <p:attrName>ppt_y</p:attrName>
+                                        </p:attrNameLst>
+                                      </p:cBhvr>
+                                      <p:tavLst>
+                                        <p:tav tm="0">
+                                          <p:val>
+                                            <p:strVal val="#ppt_y+.1"/>
+                                          </p:val>
+                                        </p:tav>
+                                        <p:tav tm="100000">
+                                          <p:val>
+                                            <p:strVal val="#ppt_y"/>
+                                          </p:val>
+                                        </p:tav>
+                                      </p:tavLst>
+                                    </p:anim>
+                                  </p:childTnLst>
+                                </p:cTn>
+                              </p:par>
+                            </p:childTnLst>
+                          </p:cTn>
+                        </p:par>
+                      </p:childTnLst>
+                    </p:cTn>
+                  </p:par>
+                  <p:par>
+                    <p:cTn id="36" fill="hold">
+                      <p:stCondLst>
+                        <p:cond delay="indefinite"/>
+                      </p:stCondLst>
+                      <p:childTnLst>
+                        <p:par>
+                          <p:cTn id="37" fill="hold">
+                            <p:stCondLst>
+                              <p:cond delay="0"/>
+                            </p:stCondLst>
+                            <p:childTnLst>
+                              <p:par>
+                                <p:cTn id="35" presetID="42" presetClass="entr" presetSubtype="0" fill="hold" nodeType="clickEffect">
+                                  <p:stCondLst>
+                                    <p:cond delay="0"/>
+                                  </p:stCondLst>
+                                  <p:childTnLst>
+                                    <p:set>
+                                      <p:cBhvr>
+                                        <p:cTn id="31" dur="1" fill="hold">
+                                          <p:stCondLst>
+                                            <p:cond delay="0"/>
+                                          </p:stCondLst>
+                                        </p:cTn>
+                                        <p:tgtEl>
+                                          <p:spTgt spid="11"/>
+                                        </p:tgtEl>
+                                        <p:attrNameLst>
+                                          <p:attrName>style.visibility</p:attrName>
+                                        </p:attrNameLst>
+                                      </p:cBhvr>
+                                      <p:to>
+                                        <p:strVal val="visible"/>
+                                      </p:to>
+                                    </p:set>
+                                    <p:animEffect transition="in" filter="fade">
+                                      <p:cBhvr>
+                                        <p:cTn id="32" dur="500"/>
+                                        <p:tgtEl>
+                                          <p:spTgt spid="11"/>
+                                        </p:tgtEl>
+                                      </p:cBhvr>
+                                    </p:animEffect>
+                                    <p:anim calcmode="lin" valueType="num">
+                                      <p:cBhvr>
+                                        <p:cTn id="33" dur="500" fill="hold"/>
+                                        <p:tgtEl>
+                                          <p:spTgt spid="11"/>
+                                        </p:tgtEl>
+                                        <p:attrNameLst>
+                                          <p:attrName>ppt_x</p:attrName>
+                                        </p:attrNameLst>
+                                      </p:cBhvr>
+                                      <p:tavLst>
+                                        <p:tav tm="0">
+                                          <p:val>
+                                            <p:strVal val="#ppt_x"/>
+                                          </p:val>
+                                        </p:tav>
+                                        <p:tav tm="100000">
+                                          <p:val>
+                                            <p:strVal val="#ppt_x"/>
+                                          </p:val>
+                                        </p:tav>
+                                      </p:tavLst>
+                                    </p:anim>
+                                    <p:anim calcmode="lin" valueType="num">
+                                      <p:cBhvr>
+                                        <p:cTn id="34" dur="500" fill="hold"/>
+                                        <p:tgtEl>
+                                          <p:spTgt spid="11"/>
+                                        </p:tgtEl>
+                                        <p:attrNameLst>
+                                          <p:attrName>ppt_y</p:attrName>
+                                        </p:attrNameLst>
+                                      </p:cBhvr>
+                                      <p:tavLst>
+                                        <p:tav tm="0">
+                                          <p:val>
+                                            <p:strVal val="#ppt_y+.1"/>
+                                          </p:val>
+                                        </p:tav>
+                                        <p:tav tm="100000">
+                                          <p:val>
+                                            <p:strVal val="#ppt_y"/>
+                                          </p:val>
+                                        </p:tav>
+                                      </p:tavLst>
+                                    </p:anim>
+                                  </p:childTnLst>
+                                </p:cTn>
+                              </p:par>
+                            </p:childTnLst>
+                          </p:cTn>
+                        </p:par>
+                      </p:childTnLst>
+                    </p:cTn>
+                  </p:par>
+                  <p:par>
+                    <p:cTn id="43" fill="hold">
+                      <p:stCondLst>
+                        <p:cond delay="indefinite"/>
+                      </p:stCondLst>
+                      <p:childTnLst>
+                        <p:par>
+                          <p:cTn id="44" fill="hold">
+                            <p:stCondLst>
+                              <p:cond delay="0"/>
+                            </p:stCondLst>
+                            <p:childTnLst>
+                              <p:par>
+                                <p:cTn id="42" presetID="53" presetClass="entr" presetSubtype="16" fill="hold" nodeType="clickEffect">
+                                  <p:stCondLst>
+                                    <p:cond delay="0"/>
+                                  </p:stCondLst>
+                                  <p:childTnLst>
+                                    <p:set>
+                                      <p:cBhvr>
+                                        <p:cTn id="38" dur="1" fill="hold">
+                                          <p:stCondLst>
+                                            <p:cond delay="0"/>
+                                          </p:stCondLst>
+                                        </p:cTn>
+                                        <p:tgtEl>
+                                          <p:spTgt spid="12"/>
+                                        </p:tgtEl>
+                                        <p:attrNameLst>
+                                          <p:attrName>style.visibility</p:attrName>
+                                        </p:attrNameLst>
+                                      </p:cBhvr>
+                                      <p:to>
+                                        <p:strVal val="visible"/>
+                                      </p:to>
+                                    </p:set>
+                                    <p:animEffect transition="in" filter="fade">
+                                      <p:cBhvr>
+                                        <p:cTn id="39" dur="500"/>
+                                        <p:tgtEl>
+                                          <p:spTgt spid="12"/>
+                                        </p:tgtEl>
+                                      </p:cBhvr>
+                                    </p:animEffect>
+                                    <p:anim calcmode="lin" valueType="num">
+                                      <p:cBhvr>
+                                        <p:cTn id="40" dur="500" fill="hold"/>
+                                        <p:tgtEl>
+                                          <p:spTgt spid="12"/>
+                                        </p:tgtEl>
+                                        <p:attrNameLst>
+                                          <p:attrName>ppt_w</p:attrName>
+                                        </p:attrNameLst>
+                                      </p:cBhvr>
+                                      <p:tavLst>
+                                        <p:tav tm="0">
+                                          <p:val>
+                                            <p:fltVal val="0"/>
+                                          </p:val>
+                                        </p:tav>
+                                        <p:tav tm="100000">
+                                          <p:val>
+                                            <p:strVal val="#ppt_w"/>
+                                          </p:val>
+                                        </p:tav>
+                                      </p:tavLst>
+                                    </p:anim>
+                                    <p:anim calcmode="lin" valueType="num">
+                                      <p:cBhvr>
+                                        <p:cTn id="41" dur="500" fill="hold"/>
+                                        <p:tgtEl>
+                                          <p:spTgt spid="12"/>
+                                        </p:tgtEl>
+                                        <p:attrNameLst>
+                                          <p:attrName>ppt_h</p:attrName>
+                                        </p:attrNameLst>
+                                      </p:cBhvr>
+                                      <p:tavLst>
+                                        <p:tav tm="0">
+                                          <p:val>
+                                            <p:fltVal val="0"/>
+                                          </p:val>
+                                        </p:tav>
+                                        <p:tav tm="100000">
+                                          <p:val>
+                                            <p:strVal val="#ppt_h"/>
+                                          </p:val>
+                                        </p:tav>
+                                      </p:tavLst>
+                                    </p:anim>
+                                  </p:childTnLst>
+                                </p:cTn>
+                              </p:par>
+                            </p:childTnLst>
+                          </p:cTn>
+                        </p:par>
+                      </p:childTnLst>
+                    </p:cTn>
+                  </p:par>
+                  <p:par>
+                    <p:cTn id="50" fill="hold">
+                      <p:stCondLst>
+                        <p:cond delay="indefinite"/>
+                      </p:stCondLst>
+                      <p:childTnLst>
+                        <p:par>
+                          <p:cTn id="51" fill="hold">
+                            <p:stCondLst>
+                              <p:cond delay="0"/>
+                            </p:stCondLst>
+                            <p:childTnLst>
+                              <p:par>
+                                <p:cTn id="49" presetID="42" presetClass="entr" presetSubtype="0" fill="hold" nodeType="clickEffect">
+                                  <p:stCondLst>
+                                    <p:cond delay="0"/>
+                                  </p:stCondLst>
+                                  <p:childTnLst>
+                                    <p:set>
+                                      <p:cBhvr>
+                                        <p:cTn id="45" dur="1" fill="hold">
+                                          <p:stCondLst>
+                                            <p:cond delay="0"/>
+                                          </p:stCondLst>
+                                        </p:cTn>
+                                        <p:tgtEl>
+                                          <p:spTgt spid="15"/>
+                                        </p:tgtEl>
+                                        <p:attrNameLst>
+                                          <p:attrName>style.visibility</p:attrName>
+                                        </p:attrNameLst>
+                                      </p:cBhvr>
+                                      <p:to>
+                                        <p:strVal val="visible"/>
+                                      </p:to>
+                                    </p:set>
+                                    <p:animEffect transition="in" filter="fade">
+                                      <p:cBhvr>
+                                        <p:cTn id="46" dur="500"/>
+                                        <p:tgtEl>
+                                          <p:spTgt spid="15"/>
+                                        </p:tgtEl>
+                                      </p:cBhvr>
+                                    </p:animEffect>
+                                    <p:anim calcmode="lin" valueType="num">
+                                      <p:cBhvr>
+                                        <p:cTn id="47" dur="500" fill="hold"/>
+                                        <p:tgtEl>
+                                          <p:spTgt spid="15"/>
+                                        </p:tgtEl>
+                                        <p:attrNameLst>
+                                          <p:attrName>ppt_x</p:attrName>
+                                        </p:attrNameLst>
+                                      </p:cBhvr>
+                                      <p:tavLst>
+                                        <p:tav tm="0">
+                                          <p:val>
+                                            <p:strVal val="#ppt_x"/>
+                                          </p:val>
+                                        </p:tav>
+                                        <p:tav tm="100000">
+                                          <p:val>
+                                            <p:strVal val="#ppt_x"/>
+                                          </p:val>
+                                        </p:tav>
+                                      </p:tavLst>
+                                    </p:anim>
+                                    <p:anim calcmode="lin" valueType="num">
+                                      <p:cBhvr>
+                                        <p:cTn id="48" dur="500" fill="hold"/>
+                                        <p:tgtEl>
+                                          <p:spTgt spid="15"/>
+                                        </p:tgtEl>
+                                        <p:attrNameLst>
+                                          <p:attrName>ppt_y</p:attrName>
+                                        </p:attrNameLst>
+                                      </p:cBhvr>
+                                      <p:tavLst>
+                                        <p:tav tm="0">
+                                          <p:val>
+                                            <p:strVal val="#ppt_y+.1"/>
+                                          </p:val>
+                                        </p:tav>
+                                        <p:tav tm="100000">
+                                          <p:val>
+                                            <p:strVal val="#ppt_y"/>
+                                          </p:val>
+                                        </p:tav>
+                                      </p:tavLst>
+                                    </p:anim>
+                                  </p:childTnLst>
+                                </p:cTn>
+                              </p:par>
+                            </p:childTnLst>
+                          </p:cTn>
+                        </p:par>
+                      </p:childTnLst>
+                    </p:cTn>
+                  </p:par>
+                  <p:par>
+                    <p:cTn id="57" fill="hold">
+                      <p:stCondLst>
+                        <p:cond delay="indefinite"/>
+                      </p:stCondLst>
+                      <p:childTnLst>
+                        <p:par>
+                          <p:cTn id="58" fill="hold">
+                            <p:stCondLst>
+                              <p:cond delay="0"/>
+                            </p:stCondLst>
+                            <p:childTnLst>
+                              <p:par>
+                                <p:cTn id="56" presetID="42" presetClass="entr" presetSubtype="0" fill="hold" nodeType="clickEffect">
+                                  <p:stCondLst>
+                                    <p:cond delay="0"/>
+                                  </p:stCondLst>
+                                  <p:childTnLst>
+                                    <p:set>
+                                      <p:cBhvr>
+                                        <p:cTn id="52" dur="1" fill="hold">
+                                          <p:stCondLst>
+                                            <p:cond delay="0"/>
+                                          </p:stCondLst>
+                                        </p:cTn>
+                                        <p:tgtEl>
+                                          <p:spTgt spid="16"/>
+                                        </p:tgtEl>
+                                        <p:attrNameLst>
+                                          <p:attrName>style.visibility</p:attrName>
+                                        </p:attrNameLst>
+                                      </p:cBhvr>
+                                      <p:to>
+                                        <p:strVal val="visible"/>
+                                      </p:to>
+                                    </p:set>
+                                    <p:animEffect transition="in" filter="fade">
+                                      <p:cBhvr>
+                                        <p:cTn id="53" dur="500"/>
+                                        <p:tgtEl>
+                                          <p:spTgt spid="16"/>
+                                        </p:tgtEl>
+                                      </p:cBhvr>
+                                    </p:animEffect>
+                                    <p:anim calcmode="lin" valueType="num">
+                                      <p:cBhvr>
+                                        <p:cTn id="54" dur="500" fill="hold"/>
+                                        <p:tgtEl>
+                                          <p:spTgt spid="16"/>
+                                        </p:tgtEl>
+                                        <p:attrNameLst>
+                                          <p:attrName>ppt_x</p:attrName>
+                                        </p:attrNameLst>
+                                      </p:cBhvr>
+                                      <p:tavLst>
+                                        <p:tav tm="0">
+                                          <p:val>
+                                            <p:strVal val="#ppt_x"/>
+                                          </p:val>
+                                        </p:tav>
+                                        <p:tav tm="100000">
+                                          <p:val>
+                                            <p:strVal val="#ppt_x"/>
+                                          </p:val>
+                                        </p:tav>
+                                      </p:tavLst>
+                                    </p:anim>
+                                    <p:anim calcmode="lin" valueType="num">
+                                      <p:cBhvr>
+                                        <p:cTn id="55" dur="500" fill="hold"/>
+                                        <p:tgtEl>
+                                          <p:spTgt spid="16"/>
+                                        </p:tgtEl>
+                                        <p:attrNameLst>
+                                          <p:attrName>ppt_y</p:attrName>
+                                        </p:attrNameLst>
+                                      </p:cBhvr>
+                                      <p:tavLst>
+                                        <p:tav tm="0">
+                                          <p:val>
+                                            <p:strVal val="#ppt_y+.1"/>
+                                          </p:val>
+                                        </p:tav>
+                                        <p:tav tm="100000">
+                                          <p:val>
+                                            <p:strVal val="#ppt_y"/>
+                                          </p:val>
+                                        </p:tav>
+                                      </p:tavLst>
+                                    </p:anim>
+                                  </p:childTnLst>
+                                </p:cTn>
+                              </p:par>
+                            </p:childTnLst>
+                          </p:cTn>
+                        </p:par>
+                      </p:childTnLst>
+                    </p:cTn>
+                  </p:par>
+                  <p:par>
+                    <p:cTn id="64" fill="hold">
+                      <p:stCondLst>
+                        <p:cond delay="indefinite"/>
+                      </p:stCondLst>
+                      <p:childTnLst>
+                        <p:par>
+                          <p:cTn id="65" fill="hold">
+                            <p:stCondLst>
+                              <p:cond delay="0"/>
+                            </p:stCondLst>
+                            <p:childTnLst>
+                              <p:par>
+                                <p:cTn id="63" presetID="53" presetClass="entr" presetSubtype="16" fill="hold" nodeType="clickEffect">
+                                  <p:stCondLst>
+                                    <p:cond delay="0"/>
+                                  </p:stCondLst>
+                                  <p:childTnLst>
+                                    <p:set>
+                                      <p:cBhvr>
+                                        <p:cTn id="59" dur="1" fill="hold">
+                                          <p:stCondLst>
+                                            <p:cond delay="0"/>
+                                          </p:stCondLst>
+                                        </p:cTn>
+                                        <p:tgtEl>
+                                          <p:spTgt spid="17"/>
+                                        </p:tgtEl>
+                                        <p:attrNameLst>
+                                          <p:attrName>style.visibility</p:attrName>
+                                        </p:attrNameLst>
+                                      </p:cBhvr>
+                                      <p:to>
+                                        <p:strVal val="visible"/>
+                                      </p:to>
+                                    </p:set>
+                                    <p:animEffect transition="in" filter="fade">
+                                      <p:cBhvr>
+                                        <p:cTn id="60" dur="500"/>
+                                        <p:tgtEl>
+                                          <p:spTgt spid="17"/>
+                                        </p:tgtEl>
+                                      </p:cBhvr>
+                                    </p:animEffect>
+                                    <p:anim calcmode="lin" valueType="num">
+                                      <p:cBhvr>
+                                        <p:cTn id="61" dur="500" fill="hold"/>
+                                        <p:tgtEl>
+                                          <p:spTgt spid="17"/>
+                                        </p:tgtEl>
+                                        <p:attrNameLst>
+                                          <p:attrName>ppt_w</p:attrName>
+                                        </p:attrNameLst>
+                                      </p:cBhvr>
+                                      <p:tavLst>
+                                        <p:tav tm="0">
+                                          <p:val>
+                                            <p:fltVal val="0"/>
+                                          </p:val>
+                                        </p:tav>
+                                        <p:tav tm="100000">
+                                          <p:val>
+                                            <p:strVal val="#ppt_w"/>
+                                          </p:val>
+                                        </p:tav>
+                                      </p:tavLst>
+                                    </p:anim>
+                                    <p:anim calcmode="lin" valueType="num">
+                                      <p:cBhvr>
+                                        <p:cTn id="62" dur="500" fill="hold"/>
+                                        <p:tgtEl>
+                                          <p:spTgt spid="17"/>
+                                        </p:tgtEl>
+                                        <p:attrNameLst>
+                                          <p:attrName>ppt_h</p:attrName>
+                                        </p:attrNameLst>
+                                      </p:cBhvr>
+                                      <p:tavLst>
+                                        <p:tav tm="0">
+                                          <p:val>
+                                            <p:fltVal val="0"/>
+                                          </p:val>
+                                        </p:tav>
+                                        <p:tav tm="100000">
+                                          <p:val>
+                                            <p:strVal val="#ppt_h"/>
+                                          </p:val>
+                                        </p:tav>
+                                      </p:tavLst>
+                                    </p:anim>
+                                  </p:childTnLst>
+                                </p:cTn>
+                              </p:par>
+                            </p:childTnLst>
+                          </p:cTn>
+                        </p:par>
+                      </p:childTnLst>
+                    </p:cTn>
+                  </p:par>
+                </p:childTnLst>
+              </p:cTn>
+              <p:prevCondLst>
+                <p:cond evt="onPrev" delay="0">
+                  <p:tgtEl>
+                    <p:sldTgt/>
+                  </p:tgtEl>
+                </p:cond>
+              </p:prevCondLst>
+              <p:nextCondLst>
+                <p:cond evt="onNext" delay="0">
+                  <p:tgtEl>
+                    <p:sldTgt/>
+                  </p:tgtEl>
+                </p:cond>
+              </p:nextCondLst>
+            </p:seq>
+          </p:childTnLst>
+        </p:cTn>
+      </p:par>
+    </p:tnLst>
+  </p:timing>
+</p:sld>
+</file>
+
+<file path=ppt/slides/slide9.xml><?xml version="1.0" encoding="utf-8"?>
+<p:sld xmlns:a="http://schemas.openxmlformats.org/drawingml/2006/main" xmlns:r="http://schemas.openxmlformats.org/officeDocument/2006/relationships" xmlns:p="http://schemas.openxmlformats.org/presentationml/2006/main">
+  <p:cSld>
+    <p:spTree>
+      <p:nvGrpSpPr>
+        <p:cNvPr id="1" name=""/>
+        <p:cNvGrpSpPr/>
+        <p:nvPr/>
+      </p:nvGrpSpPr>
+      <p:grpSpPr>
+        <a:xfrm>
+          <a:off x="0" y="0"/>
+          <a:ext cx="0" cy="0"/>
+          <a:chOff x="0" y="0"/>
+          <a:chExt cx="0" cy="0"/>
+        </a:xfrm>
+      </p:grpSpPr>
+      <p:sp>
+        <p:nvSpPr>
+          <p:cNvPr id="2" name="Shape 2"/>
+          <p:cNvSpPr txBox="1"/>
+          <p:nvPr/>
+        </p:nvSpPr>
+        <p:spPr>
+          <a:xfrm>
+            <a:off x="685800" y="457200"/>
+            <a:ext cx="10820095" cy="237744"/>
+          </a:xfrm>
+          <a:prstGeom prst="rect">
+            <a:avLst/>
+          </a:prstGeom>
+          <a:noFill/>
+          <a:ln>
+            <a:noFill/>
+          </a:ln>
+        </p:spPr>
+        <p:txBody>
+          <a:bodyPr wrap="square" lIns="36576" tIns="27432" rIns="36576" bIns="27432" anchor="t">
+            <a:noAutofit/>
+          </a:bodyPr>
+          <a:lstStyle/>
+          <a:p>
+            <a:pPr algn="l">
+              <a:lnSpc>
+                <a:spcPct val="100000"/>
+              </a:lnSpc>
+            </a:pPr>
+            <a:r>
+              <a:rPr lang="en-US" sz="1200" dirty="0" b="1" spc="150" cap="all">
+                <a:solidFill>
+                  <a:srgbClr val="5F6272"/>
+                </a:solidFill>
+                <a:latin typeface="Segoe UI"/>
+                <a:cs typeface="Segoe UI"/>
+              </a:rPr>
+              <a:t xml:space="preserve">We do · Simplify</a:t>
+            </a:r>
+            <a:endParaRPr lang="en-US" sz="1200" dirty="0"/>
+          </a:p>
+        </p:txBody>
+      </p:sp>
+      <p:sp>
+        <p:nvSpPr>
+          <p:cNvPr id="3" name="Shape 3"/>
+          <p:cNvSpPr txBox="1"/>
+          <p:nvPr/>
+        </p:nvSpPr>
+        <p:spPr>
+          <a:xfrm>
+            <a:off x="685800" y="866394"/>
+            <a:ext cx="10820095" cy="580644"/>
+          </a:xfrm>
+          <a:prstGeom prst="rect">
+            <a:avLst/>
+          </a:prstGeom>
+          <a:noFill/>
+          <a:ln>
+            <a:noFill/>
+          </a:ln>
+        </p:spPr>
+        <p:txBody>
+          <a:bodyPr wrap="square" lIns="36576" tIns="27432" rIns="36576" bIns="27432" anchor="t">
+            <a:noAutofit/>
+          </a:bodyPr>
+          <a:lstStyle/>
+          <a:p>
+            <a:pPr algn="l">
+              <a:lnSpc>
+                <a:spcPct val="100000"/>
+              </a:lnSpc>
+            </a:pPr>
+            <a:r>
+              <a:rPr lang="en-US" sz="3450" dirty="0" b="1" i="1">
+                <a:solidFill>
+                  <a:srgbClr val="16171D"/>
+                </a:solidFill>
+                <a:latin typeface="Segoe UI"/>
+                <a:cs typeface="Segoe UI"/>
+              </a:rPr>
+              <a:t xml:space="preserve">j</a:t>
+            </a:r>
+            <a:r>
+              <a:rPr lang="en-US" sz="3450" dirty="0" b="1">
+                <a:solidFill>
+                  <a:srgbClr val="16171D"/>
+                </a:solidFill>
+                <a:latin typeface="Segoe UI"/>
+                <a:cs typeface="Segoe UI"/>
+              </a:rPr>
+              <a:t xml:space="preserve">(</a:t>
+            </a:r>
+            <a:r>
+              <a:rPr lang="en-US" sz="3450" dirty="0" b="1" i="1">
+                <a:solidFill>
+                  <a:srgbClr val="16171D"/>
+                </a:solidFill>
+                <a:latin typeface="Segoe UI"/>
+                <a:cs typeface="Segoe UI"/>
+              </a:rPr>
+              <a:t xml:space="preserve">x</a:t>
+            </a:r>
+            <a:r>
+              <a:rPr lang="en-US" sz="3450" dirty="0" b="1">
+                <a:solidFill>
+                  <a:srgbClr val="16171D"/>
+                </a:solidFill>
+                <a:latin typeface="Segoe UI"/>
+                <a:cs typeface="Segoe UI"/>
+              </a:rPr>
+              <a:t xml:space="preserve">) = 2</a:t>
+            </a:r>
+            <a:r>
+              <a:rPr lang="en-US" sz="3450" dirty="0" b="1" i="1">
+                <a:solidFill>
+                  <a:srgbClr val="16171D"/>
+                </a:solidFill>
+                <a:latin typeface="Segoe UI"/>
+                <a:cs typeface="Segoe UI"/>
+              </a:rPr>
+              <a:t xml:space="preserve">x</a:t>
+            </a:r>
+            <a:r>
+              <a:rPr lang="en-US" sz="3450" dirty="0" b="1">
+                <a:solidFill>
+                  <a:srgbClr val="16171D"/>
+                </a:solidFill>
+                <a:latin typeface="Segoe UI"/>
+                <a:cs typeface="Segoe UI"/>
+              </a:rPr>
+              <a:t xml:space="preserve"> − 1. Simplify </a:t>
+            </a:r>
+            <a:r>
+              <a:rPr lang="en-US" sz="3450" dirty="0" b="1" i="1">
+                <a:solidFill>
+                  <a:srgbClr val="16171D"/>
+                </a:solidFill>
+                <a:latin typeface="Segoe UI"/>
+                <a:cs typeface="Segoe UI"/>
+              </a:rPr>
+              <a:t xml:space="preserve">j</a:t>
+            </a:r>
+            <a:r>
+              <a:rPr lang="en-US" sz="3450" dirty="0" b="1">
+                <a:solidFill>
+                  <a:srgbClr val="16171D"/>
+                </a:solidFill>
+                <a:latin typeface="Segoe UI"/>
+                <a:cs typeface="Segoe UI"/>
+              </a:rPr>
+              <a:t xml:space="preserve">(</a:t>
+            </a:r>
+            <a:r>
+              <a:rPr lang="en-US" sz="3450" dirty="0" b="1" i="1">
+                <a:solidFill>
+                  <a:srgbClr val="16171D"/>
+                </a:solidFill>
+                <a:latin typeface="Segoe UI"/>
+                <a:cs typeface="Segoe UI"/>
+              </a:rPr>
+              <a:t xml:space="preserve">x</a:t>
+            </a:r>
+            <a:r>
+              <a:rPr lang="en-US" sz="3450" dirty="0" b="1">
+                <a:solidFill>
+                  <a:srgbClr val="16171D"/>
+                </a:solidFill>
+                <a:latin typeface="Segoe UI"/>
+                <a:cs typeface="Segoe UI"/>
+              </a:rPr>
+              <a:t xml:space="preserve"> + 4).</a:t>
+            </a:r>
+            <a:endParaRPr lang="en-US" sz="3450" dirty="0"/>
+          </a:p>
+        </p:txBody>
+      </p:sp>
+      <p:sp>
+        <p:nvSpPr>
+          <p:cNvPr id="4" name="Shape 4"/>
+          <p:cNvSpPr txBox="1"/>
+          <p:nvPr/>
+        </p:nvSpPr>
+        <p:spPr>
+          <a:xfrm>
+            <a:off x="685800" y="1618488"/>
+            <a:ext cx="10820095" cy="352044"/>
+          </a:xfrm>
+          <a:prstGeom prst="rect">
+            <a:avLst/>
+          </a:prstGeom>
+          <a:noFill/>
+          <a:ln>
+            <a:noFill/>
+          </a:ln>
+        </p:spPr>
+        <p:txBody>
+          <a:bodyPr wrap="square" lIns="36576" tIns="27432" rIns="36576" bIns="27432" anchor="t">
+            <a:noAutofit/>
+          </a:bodyPr>
+          <a:lstStyle/>
+          <a:p>
+            <a:pPr algn="l">
+              <a:lnSpc>
+                <a:spcPct val="100000"/>
+              </a:lnSpc>
+            </a:pPr>
+            <a:r>
+              <a:rPr lang="en-US" sz="1950" dirty="0">
+                <a:solidFill>
+                  <a:srgbClr val="16171D"/>
+                </a:solidFill>
+                <a:latin typeface="Segoe UI"/>
+                <a:cs typeface="Segoe UI"/>
+              </a:rPr>
+              <a:t xml:space="preserve">Put (</a:t>
+            </a:r>
+            <a:r>
+              <a:rPr lang="en-US" sz="1950" dirty="0" i="1">
+                <a:solidFill>
+                  <a:srgbClr val="16171D"/>
+                </a:solidFill>
+                <a:latin typeface="Segoe UI"/>
+                <a:cs typeface="Segoe UI"/>
+              </a:rPr>
+              <a:t xml:space="preserve">x</a:t>
+            </a:r>
+            <a:r>
+              <a:rPr lang="en-US" sz="1950" dirty="0">
+                <a:solidFill>
+                  <a:srgbClr val="16171D"/>
+                </a:solidFill>
+                <a:latin typeface="Segoe UI"/>
+                <a:cs typeface="Segoe UI"/>
+              </a:rPr>
+              <a:t xml:space="preserve"> + 4) in for </a:t>
+            </a:r>
+            <a:r>
+              <a:rPr lang="en-US" sz="1950" dirty="0" i="1">
+                <a:solidFill>
+                  <a:srgbClr val="16171D"/>
+                </a:solidFill>
+                <a:latin typeface="Segoe UI"/>
+                <a:cs typeface="Segoe UI"/>
+              </a:rPr>
+              <a:t xml:space="preserve">x</a:t>
+            </a:r>
+            <a:r>
+              <a:rPr lang="en-US" sz="1950" dirty="0">
+                <a:solidFill>
+                  <a:srgbClr val="16171D"/>
+                </a:solidFill>
+                <a:latin typeface="Segoe UI"/>
+                <a:cs typeface="Segoe UI"/>
+              </a:rPr>
+              <a:t xml:space="preserve">: 2(____) − 1</a:t>
+            </a:r>
+            <a:endParaRPr lang="en-US" sz="1950" dirty="0"/>
+          </a:p>
+        </p:txBody>
+      </p:sp>
+      <p:sp>
+        <p:nvSpPr>
+          <p:cNvPr id="5" name="Shape 5"/>
+          <p:cNvSpPr txBox="1"/>
+          <p:nvPr/>
+        </p:nvSpPr>
+        <p:spPr>
+          <a:xfrm>
+            <a:off x="685800" y="2141982"/>
+            <a:ext cx="3902979" cy="518922"/>
+          </a:xfrm>
+          <a:prstGeom prst="roundRect">
+            <a:avLst>
+              <a:gd name="adj" fmla="val 8000"/>
+            </a:avLst>
+          </a:prstGeom>
+          <a:solidFill>
+            <a:srgbClr val="EDF5E9"/>
+          </a:solidFill>
+          <a:ln>
+            <a:noFill/>
+          </a:ln>
+        </p:spPr>
+        <p:txBody>
+          <a:bodyPr wrap="square" lIns="164592" tIns="64008" rIns="164592" bIns="64008" anchor="ctr">
+            <a:noAutofit/>
+          </a:bodyPr>
+          <a:lstStyle/>
+          <a:p>
+            <a:pPr algn="l">
+              <a:lnSpc>
+                <a:spcPct val="100000"/>
+              </a:lnSpc>
+            </a:pPr>
+            <a:r>
+              <a:rPr lang="en-US" sz="1125" dirty="0" b="1" spc="100">
+                <a:solidFill>
+                  <a:srgbClr val="4F8A3C"/>
+                </a:solidFill>
+                <a:latin typeface="Segoe UI"/>
+                <a:cs typeface="Segoe UI"/>
+              </a:rPr>
+              <a:t xml:space="preserve">ANSWER   </a:t>
+            </a:r>
+            <a:r>
+              <a:rPr lang="en-US" sz="2325" dirty="0">
+                <a:solidFill>
+                  <a:srgbClr val="16171D"/>
+                </a:solidFill>
+                <a:latin typeface="Cambria"/>
+                <a:cs typeface="Cambria"/>
+              </a:rPr>
+              <a:t xml:space="preserve">2(</a:t>
+            </a:r>
+            <a:r>
+              <a:rPr lang="en-US" sz="2325" dirty="0" i="1">
+                <a:solidFill>
+                  <a:srgbClr val="16171D"/>
+                </a:solidFill>
+                <a:latin typeface="Cambria"/>
+                <a:cs typeface="Cambria"/>
+              </a:rPr>
+              <a:t xml:space="preserve">x</a:t>
+            </a:r>
+            <a:r>
+              <a:rPr lang="en-US" sz="2325" dirty="0">
+                <a:solidFill>
+                  <a:srgbClr val="16171D"/>
+                </a:solidFill>
+                <a:latin typeface="Cambria"/>
+                <a:cs typeface="Cambria"/>
+              </a:rPr>
+              <a:t xml:space="preserve"> + 4) − 1</a:t>
+            </a:r>
+            <a:endParaRPr lang="en-US" sz="2325" dirty="0"/>
+          </a:p>
+        </p:txBody>
+      </p:sp>
+      <p:sp>
+        <p:nvSpPr>
+          <p:cNvPr id="6" name="Shape 6"/>
+          <p:cNvSpPr txBox="1"/>
+          <p:nvPr/>
+        </p:nvSpPr>
+        <p:spPr>
+          <a:xfrm>
+            <a:off x="685800" y="2832354"/>
+            <a:ext cx="10820095" cy="352044"/>
+          </a:xfrm>
+          <a:prstGeom prst="rect">
+            <a:avLst/>
+          </a:prstGeom>
+          <a:noFill/>
+          <a:ln>
+            <a:noFill/>
+          </a:ln>
+        </p:spPr>
+        <p:txBody>
+          <a:bodyPr wrap="square" lIns="36576" tIns="27432" rIns="36576" bIns="27432" anchor="t">
+            <a:noAutofit/>
+          </a:bodyPr>
+          <a:lstStyle/>
+          <a:p>
+            <a:pPr algn="l">
+              <a:lnSpc>
+                <a:spcPct val="100000"/>
+              </a:lnSpc>
+            </a:pPr>
+            <a:r>
+              <a:rPr lang="en-US" sz="1950" dirty="0">
+                <a:solidFill>
+                  <a:srgbClr val="16171D"/>
+                </a:solidFill>
+                <a:latin typeface="Segoe UI"/>
+                <a:cs typeface="Segoe UI"/>
+              </a:rPr>
+              <a:t xml:space="preserve">Distribute: ____ − 1</a:t>
+            </a:r>
+            <a:endParaRPr lang="en-US" sz="1950" dirty="0"/>
+          </a:p>
+        </p:txBody>
+      </p:sp>
+      <p:sp>
+        <p:nvSpPr>
+          <p:cNvPr id="7" name="Shape 7"/>
+          <p:cNvSpPr txBox="1"/>
+          <p:nvPr/>
+        </p:nvSpPr>
+        <p:spPr>
+          <a:xfrm>
+            <a:off x="685800" y="3355848"/>
+            <a:ext cx="3571326" cy="518922"/>
+          </a:xfrm>
+          <a:prstGeom prst="roundRect">
+            <a:avLst>
+              <a:gd name="adj" fmla="val 8000"/>
+            </a:avLst>
+          </a:prstGeom>
+          <a:solidFill>
+            <a:srgbClr val="EDF5E9"/>
+          </a:solidFill>
+          <a:ln>
+            <a:noFill/>
+          </a:ln>
+        </p:spPr>
+        <p:txBody>
+          <a:bodyPr wrap="square" lIns="164592" tIns="64008" rIns="164592" bIns="64008" anchor="ctr">
+            <a:noAutofit/>
+          </a:bodyPr>
+          <a:lstStyle/>
+          <a:p>
+            <a:pPr algn="l">
+              <a:lnSpc>
+                <a:spcPct val="100000"/>
+              </a:lnSpc>
+            </a:pPr>
+            <a:r>
+              <a:rPr lang="en-US" sz="1125" dirty="0" b="1" spc="100">
+                <a:solidFill>
+                  <a:srgbClr val="4F8A3C"/>
+                </a:solidFill>
+                <a:latin typeface="Segoe UI"/>
+                <a:cs typeface="Segoe UI"/>
+              </a:rPr>
+              <a:t xml:space="preserve">ANSWER   </a:t>
+            </a:r>
+            <a:r>
+              <a:rPr lang="en-US" sz="2325" dirty="0">
+                <a:solidFill>
+                  <a:srgbClr val="16171D"/>
+                </a:solidFill>
+                <a:latin typeface="Cambria"/>
+                <a:cs typeface="Cambria"/>
+              </a:rPr>
+              <a:t xml:space="preserve">2</a:t>
+            </a:r>
+            <a:r>
+              <a:rPr lang="en-US" sz="2325" dirty="0" i="1">
+                <a:solidFill>
+                  <a:srgbClr val="16171D"/>
+                </a:solidFill>
+                <a:latin typeface="Cambria"/>
+                <a:cs typeface="Cambria"/>
+              </a:rPr>
+              <a:t xml:space="preserve">x</a:t>
+            </a:r>
+            <a:r>
+              <a:rPr lang="en-US" sz="2325" dirty="0">
+                <a:solidFill>
+                  <a:srgbClr val="16171D"/>
+                </a:solidFill>
+                <a:latin typeface="Cambria"/>
+                <a:cs typeface="Cambria"/>
+              </a:rPr>
+              <a:t xml:space="preserve"> + 8 − 1</a:t>
+            </a:r>
+            <a:endParaRPr lang="en-US" sz="2325" dirty="0"/>
+          </a:p>
+        </p:txBody>
+      </p:sp>
+      <p:sp>
+        <p:nvSpPr>
+          <p:cNvPr id="8" name="Shape 8"/>
+          <p:cNvSpPr txBox="1"/>
+          <p:nvPr/>
+        </p:nvSpPr>
+        <p:spPr>
+          <a:xfrm>
+            <a:off x="685800" y="4046220"/>
+            <a:ext cx="10820095" cy="352044"/>
+          </a:xfrm>
+          <a:prstGeom prst="rect">
+            <a:avLst/>
+          </a:prstGeom>
+          <a:noFill/>
+          <a:ln>
+            <a:noFill/>
+          </a:ln>
+        </p:spPr>
+        <p:txBody>
+          <a:bodyPr wrap="square" lIns="36576" tIns="27432" rIns="36576" bIns="27432" anchor="t">
+            <a:noAutofit/>
+          </a:bodyPr>
+          <a:lstStyle/>
+          <a:p>
+            <a:pPr algn="l">
+              <a:lnSpc>
+                <a:spcPct val="100000"/>
+              </a:lnSpc>
+            </a:pPr>
+            <a:r>
+              <a:rPr lang="en-US" sz="1950" dirty="0">
+                <a:solidFill>
+                  <a:srgbClr val="16171D"/>
+                </a:solidFill>
+                <a:latin typeface="Segoe UI"/>
+                <a:cs typeface="Segoe UI"/>
+              </a:rPr>
+              <a:t xml:space="preserve">Combine:</a:t>
+            </a:r>
+            <a:endParaRPr lang="en-US" sz="1950" dirty="0"/>
+          </a:p>
+        </p:txBody>
+      </p:sp>
+      <p:sp>
+        <p:nvSpPr>
+          <p:cNvPr id="9" name="Shape 9"/>
+          <p:cNvSpPr txBox="1"/>
+          <p:nvPr/>
+        </p:nvSpPr>
+        <p:spPr>
+          <a:xfrm>
+            <a:off x="685800" y="4569714"/>
+            <a:ext cx="2908021" cy="518922"/>
+          </a:xfrm>
+          <a:prstGeom prst="roundRect">
+            <a:avLst>
+              <a:gd name="adj" fmla="val 8000"/>
+            </a:avLst>
+          </a:prstGeom>
+          <a:solidFill>
+            <a:srgbClr val="EDF5E9"/>
+          </a:solidFill>
+          <a:ln>
+            <a:noFill/>
+          </a:ln>
+        </p:spPr>
+        <p:txBody>
+          <a:bodyPr wrap="square" lIns="164592" tIns="64008" rIns="164592" bIns="64008" anchor="ctr">
+            <a:noAutofit/>
+          </a:bodyPr>
+          <a:lstStyle/>
+          <a:p>
+            <a:pPr algn="l">
+              <a:lnSpc>
+                <a:spcPct val="100000"/>
+              </a:lnSpc>
+            </a:pPr>
+            <a:r>
+              <a:rPr lang="en-US" sz="1125" dirty="0" b="1" spc="100">
+                <a:solidFill>
+                  <a:srgbClr val="4F8A3C"/>
+                </a:solidFill>
+                <a:latin typeface="Segoe UI"/>
+                <a:cs typeface="Segoe UI"/>
+              </a:rPr>
+              <a:t xml:space="preserve">ANSWER   </a:t>
+            </a:r>
+            <a:r>
+              <a:rPr lang="en-US" sz="2325" dirty="0">
+                <a:solidFill>
+                  <a:srgbClr val="16171D"/>
+                </a:solidFill>
+                <a:latin typeface="Cambria"/>
+                <a:cs typeface="Cambria"/>
+              </a:rPr>
+              <a:t xml:space="preserve">2</a:t>
+            </a:r>
+            <a:r>
+              <a:rPr lang="en-US" sz="2325" dirty="0" i="1">
+                <a:solidFill>
+                  <a:srgbClr val="16171D"/>
+                </a:solidFill>
+                <a:latin typeface="Cambria"/>
+                <a:cs typeface="Cambria"/>
+              </a:rPr>
+              <a:t xml:space="preserve">x</a:t>
+            </a:r>
+            <a:r>
+              <a:rPr lang="en-US" sz="2325" dirty="0">
+                <a:solidFill>
+                  <a:srgbClr val="16171D"/>
+                </a:solidFill>
+                <a:latin typeface="Cambria"/>
+                <a:cs typeface="Cambria"/>
+              </a:rPr>
+              <a:t xml:space="preserve"> + 7</a:t>
+            </a:r>
+            <a:endParaRPr lang="en-US" sz="2325" dirty="0"/>
+          </a:p>
+        </p:txBody>
+      </p:sp>
+      <p:sp>
+        <p:nvSpPr>
+          <p:cNvPr id="10" name="Slide Number 10"/>
+          <p:cNvSpPr txBox="1"/>
+          <p:nvPr/>
+        </p:nvSpPr>
+        <p:spPr>
+          <a:xfrm>
+            <a:off x="11277295" y="6611112"/>
+            <a:ext cx="685800" cy="201168"/>
+          </a:xfrm>
+          <a:prstGeom prst="rect">
+            <a:avLst/>
+          </a:prstGeom>
+          <a:noFill/>
+        </p:spPr>
+        <p:txBody>
+          <a:bodyPr wrap="none" lIns="0" tIns="0" rIns="0" bIns="0" anchor="b">
+            <a:noAutofit/>
+          </a:bodyPr>
+          <a:lstStyle/>
+          <a:p>
+            <a:pPr algn="r"/>
+            <a:fld id="{5C1A6E0B-3B1F-4D5E-9C7A-2F4B8D6E1A90}" type="slidenum">
+              <a:rPr lang="en-US" sz="1200" dirty="0">
+                <a:solidFill>
+                  <a:srgbClr val="5F6272"/>
+                </a:solidFill>
+              </a:rPr>
+              <a:t>9</a:t>
             </a:fld>
           </a:p>
         </p:txBody>
@@ -13094,1039 +18358,6 @@
 </p:sld>
 </file>
 
-<file path=ppt/slides/slide9.xml><?xml version="1.0" encoding="utf-8"?>
-<p:sld xmlns:a="http://schemas.openxmlformats.org/drawingml/2006/main" xmlns:r="http://schemas.openxmlformats.org/officeDocument/2006/relationships" xmlns:p="http://schemas.openxmlformats.org/presentationml/2006/main">
-  <p:cSld>
-    <p:spTree>
-      <p:nvGrpSpPr>
-        <p:cNvPr id="1" name=""/>
-        <p:cNvGrpSpPr/>
-        <p:nvPr/>
-      </p:nvGrpSpPr>
-      <p:grpSpPr>
-        <a:xfrm>
-          <a:off x="0" y="0"/>
-          <a:ext cx="0" cy="0"/>
-          <a:chOff x="0" y="0"/>
-          <a:chExt cx="0" cy="0"/>
-        </a:xfrm>
-      </p:grpSpPr>
-      <p:sp>
-        <p:nvSpPr>
-          <p:cNvPr id="2" name="Shape 2"/>
-          <p:cNvSpPr txBox="1"/>
-          <p:nvPr/>
-        </p:nvSpPr>
-        <p:spPr>
-          <a:xfrm>
-            <a:off x="685800" y="457200"/>
-            <a:ext cx="10820095" cy="237744"/>
-          </a:xfrm>
-          <a:prstGeom prst="rect">
-            <a:avLst/>
-          </a:prstGeom>
-          <a:noFill/>
-          <a:ln>
-            <a:noFill/>
-          </a:ln>
-        </p:spPr>
-        <p:txBody>
-          <a:bodyPr wrap="square" lIns="36576" tIns="27432" rIns="36576" bIns="27432" anchor="t">
-            <a:noAutofit/>
-          </a:bodyPr>
-          <a:lstStyle/>
-          <a:p>
-            <a:pPr algn="l">
-              <a:lnSpc>
-                <a:spcPct val="100000"/>
-              </a:lnSpc>
-            </a:pPr>
-            <a:r>
-              <a:rPr lang="en-US" sz="1200" dirty="0" b="1" spc="150" cap="all">
-                <a:solidFill>
-                  <a:srgbClr val="5F6272"/>
-                </a:solidFill>
-                <a:latin typeface="Segoe UI"/>
-                <a:cs typeface="Segoe UI"/>
-              </a:rPr>
-              <a:t xml:space="preserve">You do · Try it</a:t>
-            </a:r>
-            <a:endParaRPr lang="en-US" sz="1200" dirty="0"/>
-          </a:p>
-        </p:txBody>
-      </p:sp>
-      <p:sp>
-        <p:nvSpPr>
-          <p:cNvPr id="3" name="Shape 3"/>
-          <p:cNvSpPr txBox="1"/>
-          <p:nvPr/>
-        </p:nvSpPr>
-        <p:spPr>
-          <a:xfrm>
-            <a:off x="685800" y="866394"/>
-            <a:ext cx="10820095" cy="580644"/>
-          </a:xfrm>
-          <a:prstGeom prst="rect">
-            <a:avLst/>
-          </a:prstGeom>
-          <a:noFill/>
-          <a:ln>
-            <a:noFill/>
-          </a:ln>
-        </p:spPr>
-        <p:txBody>
-          <a:bodyPr wrap="square" lIns="36576" tIns="27432" rIns="36576" bIns="27432" anchor="t">
-            <a:noAutofit/>
-          </a:bodyPr>
-          <a:lstStyle/>
-          <a:p>
-            <a:pPr algn="l">
-              <a:lnSpc>
-                <a:spcPct val="100000"/>
-              </a:lnSpc>
-            </a:pPr>
-            <a:r>
-              <a:rPr lang="en-US" sz="3450" dirty="0" b="1" i="1">
-                <a:solidFill>
-                  <a:srgbClr val="16171D"/>
-                </a:solidFill>
-                <a:latin typeface="Segoe UI"/>
-                <a:cs typeface="Segoe UI"/>
-              </a:rPr>
-              <a:t xml:space="preserve">j</a:t>
-            </a:r>
-            <a:r>
-              <a:rPr lang="en-US" sz="3450" dirty="0" b="1">
-                <a:solidFill>
-                  <a:srgbClr val="16171D"/>
-                </a:solidFill>
-                <a:latin typeface="Segoe UI"/>
-                <a:cs typeface="Segoe UI"/>
-              </a:rPr>
-              <a:t xml:space="preserve">(</a:t>
-            </a:r>
-            <a:r>
-              <a:rPr lang="en-US" sz="3450" dirty="0" b="1" i="1">
-                <a:solidFill>
-                  <a:srgbClr val="16171D"/>
-                </a:solidFill>
-                <a:latin typeface="Segoe UI"/>
-                <a:cs typeface="Segoe UI"/>
-              </a:rPr>
-              <a:t xml:space="preserve">x</a:t>
-            </a:r>
-            <a:r>
-              <a:rPr lang="en-US" sz="3450" dirty="0" b="1">
-                <a:solidFill>
-                  <a:srgbClr val="16171D"/>
-                </a:solidFill>
-                <a:latin typeface="Segoe UI"/>
-                <a:cs typeface="Segoe UI"/>
-              </a:rPr>
-              <a:t xml:space="preserve">) = 2</a:t>
-            </a:r>
-            <a:r>
-              <a:rPr lang="en-US" sz="3450" dirty="0" b="1" i="1">
-                <a:solidFill>
-                  <a:srgbClr val="16171D"/>
-                </a:solidFill>
-                <a:latin typeface="Segoe UI"/>
-                <a:cs typeface="Segoe UI"/>
-              </a:rPr>
-              <a:t xml:space="preserve">x</a:t>
-            </a:r>
-            <a:r>
-              <a:rPr lang="en-US" sz="3450" dirty="0" b="1">
-                <a:solidFill>
-                  <a:srgbClr val="16171D"/>
-                </a:solidFill>
-                <a:latin typeface="Segoe UI"/>
-                <a:cs typeface="Segoe UI"/>
-              </a:rPr>
-              <a:t xml:space="preserve"> − 1</a:t>
-            </a:r>
-            <a:endParaRPr lang="en-US" sz="3450" dirty="0"/>
-          </a:p>
-        </p:txBody>
-      </p:sp>
-      <p:sp>
-        <p:nvSpPr>
-          <p:cNvPr id="6" name="Shape 6"/>
-          <p:cNvSpPr txBox="1"/>
-          <p:nvPr/>
-        </p:nvSpPr>
-        <p:spPr>
-          <a:xfrm>
-            <a:off x="685800" y="1618488"/>
-            <a:ext cx="5219548" cy="1309116"/>
-          </a:xfrm>
-          <a:prstGeom prst="roundRect">
-            <a:avLst>
-              <a:gd name="adj" fmla="val 8000"/>
-            </a:avLst>
-          </a:prstGeom>
-          <a:solidFill>
-            <a:srgbClr val="FFFFFF"/>
-          </a:solidFill>
-          <a:ln w="12700">
-            <a:solidFill>
-              <a:srgbClr val="E3E4EC"/>
-            </a:solidFill>
-          </a:ln>
-        </p:spPr>
-        <p:txBody>
-          <a:bodyPr wrap="square" lIns="36576" tIns="27432" rIns="36576" bIns="27432" anchor="t">
-            <a:noAutofit/>
-          </a:bodyPr>
-          <a:lstStyle/>
-          <a:p>
-            <a:pPr algn="l">
-              <a:lnSpc>
-                <a:spcPct val="100000"/>
-              </a:lnSpc>
-            </a:pPr>
-            <a:endParaRPr lang="en-US" sz="1950" dirty="0"/>
-          </a:p>
-        </p:txBody>
-      </p:sp>
-      <p:sp>
-        <p:nvSpPr>
-          <p:cNvPr id="4" name="Shape 4"/>
-          <p:cNvSpPr txBox="1"/>
-          <p:nvPr/>
-        </p:nvSpPr>
-        <p:spPr>
-          <a:xfrm>
-            <a:off x="895350" y="1789938"/>
-            <a:ext cx="4800448" cy="352044"/>
-          </a:xfrm>
-          <a:prstGeom prst="rect">
-            <a:avLst/>
-          </a:prstGeom>
-          <a:noFill/>
-          <a:ln>
-            <a:noFill/>
-          </a:ln>
-        </p:spPr>
-        <p:txBody>
-          <a:bodyPr wrap="square" lIns="36576" tIns="27432" rIns="36576" bIns="27432" anchor="t">
-            <a:noAutofit/>
-          </a:bodyPr>
-          <a:lstStyle/>
-          <a:p>
-            <a:pPr algn="l">
-              <a:lnSpc>
-                <a:spcPct val="100000"/>
-              </a:lnSpc>
-            </a:pPr>
-            <a:r>
-              <a:rPr lang="en-US" sz="1950" dirty="0">
-                <a:solidFill>
-                  <a:srgbClr val="16171D"/>
-                </a:solidFill>
-                <a:latin typeface="Segoe UI"/>
-                <a:cs typeface="Segoe UI"/>
-              </a:rPr>
-              <a:t xml:space="preserve">1. Simplify </a:t>
-            </a:r>
-            <a:r>
-              <a:rPr lang="en-US" sz="1950" dirty="0" i="1">
-                <a:solidFill>
-                  <a:srgbClr val="16171D"/>
-                </a:solidFill>
-                <a:latin typeface="Segoe UI"/>
-                <a:cs typeface="Segoe UI"/>
-              </a:rPr>
-              <a:t xml:space="preserve">j</a:t>
-            </a:r>
-            <a:r>
-              <a:rPr lang="en-US" sz="1950" dirty="0">
-                <a:solidFill>
-                  <a:srgbClr val="16171D"/>
-                </a:solidFill>
-                <a:latin typeface="Segoe UI"/>
-                <a:cs typeface="Segoe UI"/>
-              </a:rPr>
-              <a:t xml:space="preserve">(</a:t>
-            </a:r>
-            <a:r>
-              <a:rPr lang="en-US" sz="1950" dirty="0" i="1">
-                <a:solidFill>
-                  <a:srgbClr val="16171D"/>
-                </a:solidFill>
-                <a:latin typeface="Segoe UI"/>
-                <a:cs typeface="Segoe UI"/>
-              </a:rPr>
-              <a:t xml:space="preserve">x</a:t>
-            </a:r>
-            <a:r>
-              <a:rPr lang="en-US" sz="1950" dirty="0">
-                <a:solidFill>
-                  <a:srgbClr val="16171D"/>
-                </a:solidFill>
-                <a:latin typeface="Segoe UI"/>
-                <a:cs typeface="Segoe UI"/>
-              </a:rPr>
-              <a:t xml:space="preserve"> − 2).</a:t>
-            </a:r>
-            <a:endParaRPr lang="en-US" sz="1950" dirty="0"/>
-          </a:p>
-        </p:txBody>
-      </p:sp>
-      <p:sp>
-        <p:nvSpPr>
-          <p:cNvPr id="5" name="Shape 5"/>
-          <p:cNvSpPr txBox="1"/>
-          <p:nvPr/>
-        </p:nvSpPr>
-        <p:spPr>
-          <a:xfrm>
-            <a:off x="895350" y="2237232"/>
-            <a:ext cx="2908021" cy="518922"/>
-          </a:xfrm>
-          <a:prstGeom prst="roundRect">
-            <a:avLst>
-              <a:gd name="adj" fmla="val 8000"/>
-            </a:avLst>
-          </a:prstGeom>
-          <a:solidFill>
-            <a:srgbClr val="EDF5E9"/>
-          </a:solidFill>
-          <a:ln>
-            <a:noFill/>
-          </a:ln>
-        </p:spPr>
-        <p:txBody>
-          <a:bodyPr wrap="square" lIns="164592" tIns="64008" rIns="164592" bIns="64008" anchor="ctr">
-            <a:noAutofit/>
-          </a:bodyPr>
-          <a:lstStyle/>
-          <a:p>
-            <a:pPr algn="l">
-              <a:lnSpc>
-                <a:spcPct val="100000"/>
-              </a:lnSpc>
-            </a:pPr>
-            <a:r>
-              <a:rPr lang="en-US" sz="1125" dirty="0" b="1" spc="100">
-                <a:solidFill>
-                  <a:srgbClr val="4F8A3C"/>
-                </a:solidFill>
-                <a:latin typeface="Segoe UI"/>
-                <a:cs typeface="Segoe UI"/>
-              </a:rPr>
-              <a:t xml:space="preserve">ANSWER   </a:t>
-            </a:r>
-            <a:r>
-              <a:rPr lang="en-US" sz="2325" dirty="0">
-                <a:solidFill>
-                  <a:srgbClr val="16171D"/>
-                </a:solidFill>
-                <a:latin typeface="Cambria"/>
-                <a:cs typeface="Cambria"/>
-              </a:rPr>
-              <a:t xml:space="preserve">2</a:t>
-            </a:r>
-            <a:r>
-              <a:rPr lang="en-US" sz="2325" dirty="0" i="1">
-                <a:solidFill>
-                  <a:srgbClr val="16171D"/>
-                </a:solidFill>
-                <a:latin typeface="Cambria"/>
-                <a:cs typeface="Cambria"/>
-              </a:rPr>
-              <a:t xml:space="preserve">x</a:t>
-            </a:r>
-            <a:r>
-              <a:rPr lang="en-US" sz="2325" dirty="0">
-                <a:solidFill>
-                  <a:srgbClr val="16171D"/>
-                </a:solidFill>
-                <a:latin typeface="Cambria"/>
-                <a:cs typeface="Cambria"/>
-              </a:rPr>
-              <a:t xml:space="preserve"> − 5</a:t>
-            </a:r>
-            <a:endParaRPr lang="en-US" sz="2325" dirty="0"/>
-          </a:p>
-        </p:txBody>
-      </p:sp>
-      <p:sp>
-        <p:nvSpPr>
-          <p:cNvPr id="11" name="Shape 11"/>
-          <p:cNvSpPr txBox="1"/>
-          <p:nvPr/>
-        </p:nvSpPr>
-        <p:spPr>
-          <a:xfrm>
-            <a:off x="6286348" y="1618488"/>
-            <a:ext cx="5219548" cy="2313432"/>
-          </a:xfrm>
-          <a:prstGeom prst="roundRect">
-            <a:avLst>
-              <a:gd name="adj" fmla="val 8000"/>
-            </a:avLst>
-          </a:prstGeom>
-          <a:solidFill>
-            <a:srgbClr val="FFFFFF"/>
-          </a:solidFill>
-          <a:ln w="12700">
-            <a:solidFill>
-              <a:srgbClr val="E3E4EC"/>
-            </a:solidFill>
-          </a:ln>
-        </p:spPr>
-        <p:txBody>
-          <a:bodyPr wrap="square" lIns="36576" tIns="27432" rIns="36576" bIns="27432" anchor="t">
-            <a:noAutofit/>
-          </a:bodyPr>
-          <a:lstStyle/>
-          <a:p>
-            <a:pPr algn="l">
-              <a:lnSpc>
-                <a:spcPct val="100000"/>
-              </a:lnSpc>
-            </a:pPr>
-            <a:endParaRPr lang="en-US" sz="1950" dirty="0"/>
-          </a:p>
-        </p:txBody>
-      </p:sp>
-      <p:sp>
-        <p:nvSpPr>
-          <p:cNvPr id="7" name="Shape 7"/>
-          <p:cNvSpPr txBox="1"/>
-          <p:nvPr/>
-        </p:nvSpPr>
-        <p:spPr>
-          <a:xfrm>
-            <a:off x="6495898" y="1789938"/>
-            <a:ext cx="4800448" cy="352044"/>
-          </a:xfrm>
-          <a:prstGeom prst="rect">
-            <a:avLst/>
-          </a:prstGeom>
-          <a:noFill/>
-          <a:ln>
-            <a:noFill/>
-          </a:ln>
-        </p:spPr>
-        <p:txBody>
-          <a:bodyPr wrap="square" lIns="36576" tIns="27432" rIns="36576" bIns="27432" anchor="t">
-            <a:noAutofit/>
-          </a:bodyPr>
-          <a:lstStyle/>
-          <a:p>
-            <a:pPr algn="l">
-              <a:lnSpc>
-                <a:spcPct val="100000"/>
-              </a:lnSpc>
-            </a:pPr>
-            <a:r>
-              <a:rPr lang="en-US" sz="1950" dirty="0">
-                <a:solidFill>
-                  <a:srgbClr val="16171D"/>
-                </a:solidFill>
-                <a:latin typeface="Segoe UI"/>
-                <a:cs typeface="Segoe UI"/>
-              </a:rPr>
-              <a:t xml:space="preserve">2. Simplify </a:t>
-            </a:r>
-            <a:r>
-              <a:rPr lang="en-US" sz="1950" dirty="0" i="1">
-                <a:solidFill>
-                  <a:srgbClr val="16171D"/>
-                </a:solidFill>
-                <a:latin typeface="Segoe UI"/>
-                <a:cs typeface="Segoe UI"/>
-              </a:rPr>
-              <a:t xml:space="preserve">j</a:t>
-            </a:r>
-            <a:r>
-              <a:rPr lang="en-US" sz="1950" dirty="0">
-                <a:solidFill>
-                  <a:srgbClr val="16171D"/>
-                </a:solidFill>
-                <a:latin typeface="Segoe UI"/>
-                <a:cs typeface="Segoe UI"/>
-              </a:rPr>
-              <a:t xml:space="preserve">(</a:t>
-            </a:r>
-            <a:r>
-              <a:rPr lang="en-US" sz="1950" dirty="0" i="1">
-                <a:solidFill>
-                  <a:srgbClr val="16171D"/>
-                </a:solidFill>
-                <a:latin typeface="Segoe UI"/>
-                <a:cs typeface="Segoe UI"/>
-              </a:rPr>
-              <a:t xml:space="preserve">x</a:t>
-            </a:r>
-            <a:r>
-              <a:rPr lang="en-US" sz="1950" dirty="0">
-                <a:solidFill>
-                  <a:srgbClr val="16171D"/>
-                </a:solidFill>
-                <a:latin typeface="Segoe UI"/>
-                <a:cs typeface="Segoe UI"/>
-              </a:rPr>
-              <a:t xml:space="preserve">) − 2.</a:t>
-            </a:r>
-            <a:endParaRPr lang="en-US" sz="1950" dirty="0"/>
-          </a:p>
-        </p:txBody>
-      </p:sp>
-      <p:sp>
-        <p:nvSpPr>
-          <p:cNvPr id="8" name="Shape 8"/>
-          <p:cNvSpPr txBox="1"/>
-          <p:nvPr/>
-        </p:nvSpPr>
-        <p:spPr>
-          <a:xfrm>
-            <a:off x="6495898" y="2237232"/>
-            <a:ext cx="2908021" cy="518922"/>
-          </a:xfrm>
-          <a:prstGeom prst="roundRect">
-            <a:avLst>
-              <a:gd name="adj" fmla="val 8000"/>
-            </a:avLst>
-          </a:prstGeom>
-          <a:solidFill>
-            <a:srgbClr val="EDF5E9"/>
-          </a:solidFill>
-          <a:ln>
-            <a:noFill/>
-          </a:ln>
-        </p:spPr>
-        <p:txBody>
-          <a:bodyPr wrap="square" lIns="164592" tIns="64008" rIns="164592" bIns="64008" anchor="ctr">
-            <a:noAutofit/>
-          </a:bodyPr>
-          <a:lstStyle/>
-          <a:p>
-            <a:pPr algn="l">
-              <a:lnSpc>
-                <a:spcPct val="100000"/>
-              </a:lnSpc>
-            </a:pPr>
-            <a:r>
-              <a:rPr lang="en-US" sz="1125" dirty="0" b="1" spc="100">
-                <a:solidFill>
-                  <a:srgbClr val="4F8A3C"/>
-                </a:solidFill>
-                <a:latin typeface="Segoe UI"/>
-                <a:cs typeface="Segoe UI"/>
-              </a:rPr>
-              <a:t xml:space="preserve">ANSWER   </a:t>
-            </a:r>
-            <a:r>
-              <a:rPr lang="en-US" sz="2325" dirty="0">
-                <a:solidFill>
-                  <a:srgbClr val="16171D"/>
-                </a:solidFill>
-                <a:latin typeface="Cambria"/>
-                <a:cs typeface="Cambria"/>
-              </a:rPr>
-              <a:t xml:space="preserve">2</a:t>
-            </a:r>
-            <a:r>
-              <a:rPr lang="en-US" sz="2325" dirty="0" i="1">
-                <a:solidFill>
-                  <a:srgbClr val="16171D"/>
-                </a:solidFill>
-                <a:latin typeface="Cambria"/>
-                <a:cs typeface="Cambria"/>
-              </a:rPr>
-              <a:t xml:space="preserve">x</a:t>
-            </a:r>
-            <a:r>
-              <a:rPr lang="en-US" sz="2325" dirty="0">
-                <a:solidFill>
-                  <a:srgbClr val="16171D"/>
-                </a:solidFill>
-                <a:latin typeface="Cambria"/>
-                <a:cs typeface="Cambria"/>
-              </a:rPr>
-              <a:t xml:space="preserve"> − 3</a:t>
-            </a:r>
-            <a:endParaRPr lang="en-US" sz="2325" dirty="0"/>
-          </a:p>
-        </p:txBody>
-      </p:sp>
-      <p:sp>
-        <p:nvSpPr>
-          <p:cNvPr id="9" name="Shape 9"/>
-          <p:cNvSpPr txBox="1"/>
-          <p:nvPr/>
-        </p:nvSpPr>
-        <p:spPr>
-          <a:xfrm>
-            <a:off x="6495898" y="2851404"/>
-            <a:ext cx="4800448" cy="294894"/>
-          </a:xfrm>
-          <a:prstGeom prst="rect">
-            <a:avLst/>
-          </a:prstGeom>
-          <a:noFill/>
-          <a:ln>
-            <a:noFill/>
-          </a:ln>
-        </p:spPr>
-        <p:txBody>
-          <a:bodyPr wrap="square" lIns="36576" tIns="27432" rIns="36576" bIns="27432" anchor="t">
-            <a:noAutofit/>
-          </a:bodyPr>
-          <a:lstStyle/>
-          <a:p>
-            <a:pPr algn="l">
-              <a:lnSpc>
-                <a:spcPct val="100000"/>
-              </a:lnSpc>
-            </a:pPr>
-            <a:r>
-              <a:rPr lang="en-US" sz="1575" dirty="0">
-                <a:solidFill>
-                  <a:srgbClr val="16171D"/>
-                </a:solidFill>
-                <a:latin typeface="Segoe UI"/>
-                <a:cs typeface="Segoe UI"/>
-              </a:rPr>
-              <a:t xml:space="preserve">Same graph as #1? ____</a:t>
-            </a:r>
-            <a:endParaRPr lang="en-US" sz="1575" dirty="0"/>
-          </a:p>
-        </p:txBody>
-      </p:sp>
-      <p:sp>
-        <p:nvSpPr>
-          <p:cNvPr id="10" name="Shape 10"/>
-          <p:cNvSpPr txBox="1"/>
-          <p:nvPr/>
-        </p:nvSpPr>
-        <p:spPr>
-          <a:xfrm>
-            <a:off x="6495898" y="3241548"/>
-            <a:ext cx="2244715" cy="518922"/>
-          </a:xfrm>
-          <a:prstGeom prst="roundRect">
-            <a:avLst>
-              <a:gd name="adj" fmla="val 8000"/>
-            </a:avLst>
-          </a:prstGeom>
-          <a:solidFill>
-            <a:srgbClr val="EDF5E9"/>
-          </a:solidFill>
-          <a:ln>
-            <a:noFill/>
-          </a:ln>
-        </p:spPr>
-        <p:txBody>
-          <a:bodyPr wrap="square" lIns="164592" tIns="64008" rIns="164592" bIns="64008" anchor="ctr">
-            <a:noAutofit/>
-          </a:bodyPr>
-          <a:lstStyle/>
-          <a:p>
-            <a:pPr algn="l">
-              <a:lnSpc>
-                <a:spcPct val="100000"/>
-              </a:lnSpc>
-            </a:pPr>
-            <a:r>
-              <a:rPr lang="en-US" sz="1125" dirty="0" b="1" spc="100">
-                <a:solidFill>
-                  <a:srgbClr val="4F8A3C"/>
-                </a:solidFill>
-                <a:latin typeface="Segoe UI"/>
-                <a:cs typeface="Segoe UI"/>
-              </a:rPr>
-              <a:t xml:space="preserve">ANSWER   </a:t>
-            </a:r>
-            <a:r>
-              <a:rPr lang="en-US" sz="2325" dirty="0">
-                <a:solidFill>
-                  <a:srgbClr val="16171D"/>
-                </a:solidFill>
-                <a:latin typeface="Cambria"/>
-                <a:cs typeface="Cambria"/>
-              </a:rPr>
-              <a:t xml:space="preserve">No</a:t>
-            </a:r>
-            <a:endParaRPr lang="en-US" sz="2325" dirty="0"/>
-          </a:p>
-        </p:txBody>
-      </p:sp>
-      <p:sp>
-        <p:nvSpPr>
-          <p:cNvPr id="12" name="Slide Number 12"/>
-          <p:cNvSpPr txBox="1"/>
-          <p:nvPr/>
-        </p:nvSpPr>
-        <p:spPr>
-          <a:xfrm>
-            <a:off x="11277295" y="6611112"/>
-            <a:ext cx="685800" cy="201168"/>
-          </a:xfrm>
-          <a:prstGeom prst="rect">
-            <a:avLst/>
-          </a:prstGeom>
-          <a:noFill/>
-        </p:spPr>
-        <p:txBody>
-          <a:bodyPr wrap="none" lIns="0" tIns="0" rIns="0" bIns="0" anchor="b">
-            <a:noAutofit/>
-          </a:bodyPr>
-          <a:lstStyle/>
-          <a:p>
-            <a:pPr algn="r"/>
-            <a:fld id="{5C1A6E0B-3B1F-4D5E-9C7A-2F4B8D6E1A90}" type="slidenum">
-              <a:rPr lang="en-US" sz="1200" dirty="0">
-                <a:solidFill>
-                  <a:srgbClr val="5F6272"/>
-                </a:solidFill>
-              </a:rPr>
-              <a:t>9</a:t>
-            </a:fld>
-          </a:p>
-        </p:txBody>
-      </p:sp>
-    </p:spTree>
-  </p:cSld>
-  <p:clrMapOvr>
-    <a:masterClrMapping/>
-  </p:clrMapOvr>
-  <p:transition spd="med">
-    <p:fade/>
-  </p:transition>
-  <p:timing>
-    <p:tnLst>
-      <p:par>
-        <p:cTn id="1" dur="indefinite" restart="never" nodeType="tmRoot">
-          <p:childTnLst>
-            <p:seq concurrent="1" nextAc="seek">
-              <p:cTn id="2" dur="indefinite" nodeType="mainSeq">
-                <p:childTnLst>
-                  <p:par>
-                    <p:cTn id="8" fill="hold">
-                      <p:stCondLst>
-                        <p:cond delay="indefinite"/>
-                      </p:stCondLst>
-                      <p:childTnLst>
-                        <p:par>
-                          <p:cTn id="9" fill="hold">
-                            <p:stCondLst>
-                              <p:cond delay="0"/>
-                            </p:stCondLst>
-                            <p:childTnLst>
-                              <p:par>
-                                <p:cTn id="7" presetID="53" presetClass="entr" presetSubtype="16" fill="hold" nodeType="clickEffect">
-                                  <p:stCondLst>
-                                    <p:cond delay="0"/>
-                                  </p:stCondLst>
-                                  <p:childTnLst>
-                                    <p:set>
-                                      <p:cBhvr>
-                                        <p:cTn id="3" dur="1" fill="hold">
-                                          <p:stCondLst>
-                                            <p:cond delay="0"/>
-                                          </p:stCondLst>
-                                        </p:cTn>
-                                        <p:tgtEl>
-                                          <p:spTgt spid="5"/>
-                                        </p:tgtEl>
-                                        <p:attrNameLst>
-                                          <p:attrName>style.visibility</p:attrName>
-                                        </p:attrNameLst>
-                                      </p:cBhvr>
-                                      <p:to>
-                                        <p:strVal val="visible"/>
-                                      </p:to>
-                                    </p:set>
-                                    <p:animEffect transition="in" filter="fade">
-                                      <p:cBhvr>
-                                        <p:cTn id="4" dur="500"/>
-                                        <p:tgtEl>
-                                          <p:spTgt spid="5"/>
-                                        </p:tgtEl>
-                                      </p:cBhvr>
-                                    </p:animEffect>
-                                    <p:anim calcmode="lin" valueType="num">
-                                      <p:cBhvr>
-                                        <p:cTn id="5" dur="500" fill="hold"/>
-                                        <p:tgtEl>
-                                          <p:spTgt spid="5"/>
-                                        </p:tgtEl>
-                                        <p:attrNameLst>
-                                          <p:attrName>ppt_w</p:attrName>
-                                        </p:attrNameLst>
-                                      </p:cBhvr>
-                                      <p:tavLst>
-                                        <p:tav tm="0">
-                                          <p:val>
-                                            <p:fltVal val="0"/>
-                                          </p:val>
-                                        </p:tav>
-                                        <p:tav tm="100000">
-                                          <p:val>
-                                            <p:strVal val="#ppt_w"/>
-                                          </p:val>
-                                        </p:tav>
-                                      </p:tavLst>
-                                    </p:anim>
-                                    <p:anim calcmode="lin" valueType="num">
-                                      <p:cBhvr>
-                                        <p:cTn id="6" dur="500" fill="hold"/>
-                                        <p:tgtEl>
-                                          <p:spTgt spid="5"/>
-                                        </p:tgtEl>
-                                        <p:attrNameLst>
-                                          <p:attrName>ppt_h</p:attrName>
-                                        </p:attrNameLst>
-                                      </p:cBhvr>
-                                      <p:tavLst>
-                                        <p:tav tm="0">
-                                          <p:val>
-                                            <p:fltVal val="0"/>
-                                          </p:val>
-                                        </p:tav>
-                                        <p:tav tm="100000">
-                                          <p:val>
-                                            <p:strVal val="#ppt_h"/>
-                                          </p:val>
-                                        </p:tav>
-                                      </p:tavLst>
-                                    </p:anim>
-                                  </p:childTnLst>
-                                </p:cTn>
-                              </p:par>
-                            </p:childTnLst>
-                          </p:cTn>
-                        </p:par>
-                      </p:childTnLst>
-                    </p:cTn>
-                  </p:par>
-                  <p:par>
-                    <p:cTn id="15" fill="hold">
-                      <p:stCondLst>
-                        <p:cond delay="indefinite"/>
-                      </p:stCondLst>
-                      <p:childTnLst>
-                        <p:par>
-                          <p:cTn id="16" fill="hold">
-                            <p:stCondLst>
-                              <p:cond delay="0"/>
-                            </p:stCondLst>
-                            <p:childTnLst>
-                              <p:par>
-                                <p:cTn id="14" presetID="53" presetClass="entr" presetSubtype="16" fill="hold" nodeType="clickEffect">
-                                  <p:stCondLst>
-                                    <p:cond delay="0"/>
-                                  </p:stCondLst>
-                                  <p:childTnLst>
-                                    <p:set>
-                                      <p:cBhvr>
-                                        <p:cTn id="10" dur="1" fill="hold">
-                                          <p:stCondLst>
-                                            <p:cond delay="0"/>
-                                          </p:stCondLst>
-                                        </p:cTn>
-                                        <p:tgtEl>
-                                          <p:spTgt spid="8"/>
-                                        </p:tgtEl>
-                                        <p:attrNameLst>
-                                          <p:attrName>style.visibility</p:attrName>
-                                        </p:attrNameLst>
-                                      </p:cBhvr>
-                                      <p:to>
-                                        <p:strVal val="visible"/>
-                                      </p:to>
-                                    </p:set>
-                                    <p:animEffect transition="in" filter="fade">
-                                      <p:cBhvr>
-                                        <p:cTn id="11" dur="500"/>
-                                        <p:tgtEl>
-                                          <p:spTgt spid="8"/>
-                                        </p:tgtEl>
-                                      </p:cBhvr>
-                                    </p:animEffect>
-                                    <p:anim calcmode="lin" valueType="num">
-                                      <p:cBhvr>
-                                        <p:cTn id="12" dur="500" fill="hold"/>
-                                        <p:tgtEl>
-                                          <p:spTgt spid="8"/>
-                                        </p:tgtEl>
-                                        <p:attrNameLst>
-                                          <p:attrName>ppt_w</p:attrName>
-                                        </p:attrNameLst>
-                                      </p:cBhvr>
-                                      <p:tavLst>
-                                        <p:tav tm="0">
-                                          <p:val>
-                                            <p:fltVal val="0"/>
-                                          </p:val>
-                                        </p:tav>
-                                        <p:tav tm="100000">
-                                          <p:val>
-                                            <p:strVal val="#ppt_w"/>
-                                          </p:val>
-                                        </p:tav>
-                                      </p:tavLst>
-                                    </p:anim>
-                                    <p:anim calcmode="lin" valueType="num">
-                                      <p:cBhvr>
-                                        <p:cTn id="13" dur="500" fill="hold"/>
-                                        <p:tgtEl>
-                                          <p:spTgt spid="8"/>
-                                        </p:tgtEl>
-                                        <p:attrNameLst>
-                                          <p:attrName>ppt_h</p:attrName>
-                                        </p:attrNameLst>
-                                      </p:cBhvr>
-                                      <p:tavLst>
-                                        <p:tav tm="0">
-                                          <p:val>
-                                            <p:fltVal val="0"/>
-                                          </p:val>
-                                        </p:tav>
-                                        <p:tav tm="100000">
-                                          <p:val>
-                                            <p:strVal val="#ppt_h"/>
-                                          </p:val>
-                                        </p:tav>
-                                      </p:tavLst>
-                                    </p:anim>
-                                  </p:childTnLst>
-                                </p:cTn>
-                              </p:par>
-                            </p:childTnLst>
-                          </p:cTn>
-                        </p:par>
-                      </p:childTnLst>
-                    </p:cTn>
-                  </p:par>
-                  <p:par>
-                    <p:cTn id="22" fill="hold">
-                      <p:stCondLst>
-                        <p:cond delay="indefinite"/>
-                      </p:stCondLst>
-                      <p:childTnLst>
-                        <p:par>
-                          <p:cTn id="23" fill="hold">
-                            <p:stCondLst>
-                              <p:cond delay="0"/>
-                            </p:stCondLst>
-                            <p:childTnLst>
-                              <p:par>
-                                <p:cTn id="21" presetID="53" presetClass="entr" presetSubtype="16" fill="hold" nodeType="clickEffect">
-                                  <p:stCondLst>
-                                    <p:cond delay="0"/>
-                                  </p:stCondLst>
-                                  <p:childTnLst>
-                                    <p:set>
-                                      <p:cBhvr>
-                                        <p:cTn id="17" dur="1" fill="hold">
-                                          <p:stCondLst>
-                                            <p:cond delay="0"/>
-                                          </p:stCondLst>
-                                        </p:cTn>
-                                        <p:tgtEl>
-                                          <p:spTgt spid="10"/>
-                                        </p:tgtEl>
-                                        <p:attrNameLst>
-                                          <p:attrName>style.visibility</p:attrName>
-                                        </p:attrNameLst>
-                                      </p:cBhvr>
-                                      <p:to>
-                                        <p:strVal val="visible"/>
-                                      </p:to>
-                                    </p:set>
-                                    <p:animEffect transition="in" filter="fade">
-                                      <p:cBhvr>
-                                        <p:cTn id="18" dur="500"/>
-                                        <p:tgtEl>
-                                          <p:spTgt spid="10"/>
-                                        </p:tgtEl>
-                                      </p:cBhvr>
-                                    </p:animEffect>
-                                    <p:anim calcmode="lin" valueType="num">
-                                      <p:cBhvr>
-                                        <p:cTn id="19" dur="500" fill="hold"/>
-                                        <p:tgtEl>
-                                          <p:spTgt spid="10"/>
-                                        </p:tgtEl>
-                                        <p:attrNameLst>
-                                          <p:attrName>ppt_w</p:attrName>
-                                        </p:attrNameLst>
-                                      </p:cBhvr>
-                                      <p:tavLst>
-                                        <p:tav tm="0">
-                                          <p:val>
-                                            <p:fltVal val="0"/>
-                                          </p:val>
-                                        </p:tav>
-                                        <p:tav tm="100000">
-                                          <p:val>
-                                            <p:strVal val="#ppt_w"/>
-                                          </p:val>
-                                        </p:tav>
-                                      </p:tavLst>
-                                    </p:anim>
-                                    <p:anim calcmode="lin" valueType="num">
-                                      <p:cBhvr>
-                                        <p:cTn id="20" dur="500" fill="hold"/>
-                                        <p:tgtEl>
-                                          <p:spTgt spid="10"/>
-                                        </p:tgtEl>
-                                        <p:attrNameLst>
-                                          <p:attrName>ppt_h</p:attrName>
-                                        </p:attrNameLst>
-                                      </p:cBhvr>
-                                      <p:tavLst>
-                                        <p:tav tm="0">
-                                          <p:val>
-                                            <p:fltVal val="0"/>
-                                          </p:val>
-                                        </p:tav>
-                                        <p:tav tm="100000">
-                                          <p:val>
-                                            <p:strVal val="#ppt_h"/>
-                                          </p:val>
-                                        </p:tav>
-                                      </p:tavLst>
-                                    </p:anim>
-                                  </p:childTnLst>
-                                </p:cTn>
-                              </p:par>
-                            </p:childTnLst>
-                          </p:cTn>
-                        </p:par>
-                      </p:childTnLst>
-                    </p:cTn>
-                  </p:par>
-                </p:childTnLst>
-              </p:cTn>
-              <p:prevCondLst>
-                <p:cond evt="onPrev" delay="0">
-                  <p:tgtEl>
-                    <p:sldTgt/>
-                  </p:tgtEl>
-                </p:cond>
-              </p:prevCondLst>
-              <p:nextCondLst>
-                <p:cond evt="onNext" delay="0">
-                  <p:tgtEl>
-                    <p:sldTgt/>
-                  </p:tgtEl>
-                </p:cond>
-              </p:nextCondLst>
-            </p:seq>
-          </p:childTnLst>
-        </p:cTn>
-      </p:par>
-    </p:tnLst>
-  </p:timing>
-</p:sld>
-</file>
-
 <file path=ppt/theme/theme1.xml><?xml version="1.0" encoding="utf-8"?>
 <a:theme xmlns:a="http://schemas.openxmlformats.org/drawingml/2006/main" name="Vertical and Horizontal Transformations of Linear Functions">
   <a:themeElements>

--- a/IEP/t2-lesson2-vertical-horizontal-transformations-IEP.pptx
+++ b/IEP/t2-lesson2-vertical-horizontal-transformations-IEP.pptx
@@ -401,7 +401,7 @@
           <a:p>
             <a:r>
               <a:rPr lang="en-US" dirty="0"/>
-              <a:t>Give students time to try all items before revealing. Students may use the steps slide and their notes.</a:t>
+              <a:t>Give students time to try all items before revealing. Students may use the steps slide and their notes. After each answer, click once per step and read it aloud so students can find where their work went wrong.</a:t>
             </a:r>
           </a:p>
         </p:txBody>
@@ -7473,14 +7473,14 @@
       </p:sp>
       <p:sp>
         <p:nvSpPr>
-          <p:cNvPr id="6" name="Shape 6"/>
+          <p:cNvPr id="8" name="Shape 8"/>
           <p:cNvSpPr txBox="1"/>
           <p:nvPr/>
         </p:nvSpPr>
         <p:spPr>
           <a:xfrm>
             <a:off x="685800" y="1618488"/>
-            <a:ext cx="10820095" cy="1309116"/>
+            <a:ext cx="3479698" cy="3106674"/>
           </a:xfrm>
           <a:prstGeom prst="roundRect">
             <a:avLst>
@@ -7520,7 +7520,7 @@
         <p:spPr>
           <a:xfrm>
             <a:off x="895350" y="1789938"/>
-            <a:ext cx="10400995" cy="352044"/>
+            <a:ext cx="3060598" cy="649224"/>
           </a:xfrm>
           <a:prstGeom prst="rect">
             <a:avLst/>
@@ -7643,8 +7643,8 @@
         </p:nvSpPr>
         <p:spPr>
           <a:xfrm>
-            <a:off x="895350" y="2237232"/>
-            <a:ext cx="3073847" cy="518922"/>
+            <a:off x="895350" y="2534412"/>
+            <a:ext cx="3060598" cy="518922"/>
           </a:xfrm>
           <a:prstGeom prst="roundRect">
             <a:avLst>
@@ -7695,14 +7695,122 @@
       </p:sp>
       <p:sp>
         <p:nvSpPr>
-          <p:cNvPr id="9" name="Shape 9"/>
+          <p:cNvPr id="6" name="Shape 6"/>
           <p:cNvSpPr txBox="1"/>
           <p:nvPr/>
         </p:nvSpPr>
         <p:spPr>
           <a:xfrm>
-            <a:off x="685800" y="3060954"/>
-            <a:ext cx="10820095" cy="1309116"/>
+            <a:off x="895350" y="3148584"/>
+            <a:ext cx="3060598" cy="774954"/>
+          </a:xfrm>
+          <a:prstGeom prst="rect">
+            <a:avLst/>
+          </a:prstGeom>
+          <a:noFill/>
+          <a:ln>
+            <a:noFill/>
+          </a:ln>
+        </p:spPr>
+        <p:txBody>
+          <a:bodyPr wrap="square" lIns="36576" tIns="27432" rIns="36576" bIns="27432" anchor="t">
+            <a:noAutofit/>
+          </a:bodyPr>
+          <a:lstStyle/>
+          <a:p>
+            <a:pPr algn="l">
+              <a:lnSpc>
+                <a:spcPct val="100000"/>
+              </a:lnSpc>
+            </a:pPr>
+            <a:r>
+              <a:rPr lang="en-US" sz="1575" dirty="0" b="1">
+                <a:solidFill>
+                  <a:srgbClr val="16171D"/>
+                </a:solidFill>
+                <a:latin typeface="Segoe UI"/>
+                <a:cs typeface="Segoe UI"/>
+              </a:rPr>
+              <a:t xml:space="preserve">1.</a:t>
+            </a:r>
+            <a:r>
+              <a:rPr lang="en-US" sz="1575" dirty="0">
+                <a:solidFill>
+                  <a:srgbClr val="16171D"/>
+                </a:solidFill>
+                <a:latin typeface="Segoe UI"/>
+                <a:cs typeface="Segoe UI"/>
+              </a:rPr>
+              <a:t xml:space="preserve"> The 6 is inside the parentheses, so the graph moves left or right.</a:t>
+            </a:r>
+            <a:endParaRPr lang="en-US" sz="1575" dirty="0"/>
+          </a:p>
+        </p:txBody>
+      </p:sp>
+      <p:sp>
+        <p:nvSpPr>
+          <p:cNvPr id="7" name="Shape 7"/>
+          <p:cNvSpPr txBox="1"/>
+          <p:nvPr/>
+        </p:nvSpPr>
+        <p:spPr>
+          <a:xfrm>
+            <a:off x="895350" y="4018788"/>
+            <a:ext cx="3060598" cy="534924"/>
+          </a:xfrm>
+          <a:prstGeom prst="rect">
+            <a:avLst/>
+          </a:prstGeom>
+          <a:noFill/>
+          <a:ln>
+            <a:noFill/>
+          </a:ln>
+        </p:spPr>
+        <p:txBody>
+          <a:bodyPr wrap="square" lIns="36576" tIns="27432" rIns="36576" bIns="27432" anchor="t">
+            <a:noAutofit/>
+          </a:bodyPr>
+          <a:lstStyle/>
+          <a:p>
+            <a:pPr algn="l">
+              <a:lnSpc>
+                <a:spcPct val="100000"/>
+              </a:lnSpc>
+            </a:pPr>
+            <a:r>
+              <a:rPr lang="en-US" sz="1575" dirty="0" b="1">
+                <a:solidFill>
+                  <a:srgbClr val="16171D"/>
+                </a:solidFill>
+                <a:latin typeface="Segoe UI"/>
+                <a:cs typeface="Segoe UI"/>
+              </a:rPr>
+              <a:t xml:space="preserve">2.</a:t>
+            </a:r>
+            <a:r>
+              <a:rPr lang="en-US" sz="1575" dirty="0">
+                <a:solidFill>
+                  <a:srgbClr val="16171D"/>
+                </a:solidFill>
+                <a:latin typeface="Segoe UI"/>
+                <a:cs typeface="Segoe UI"/>
+              </a:rPr>
+              <a:t xml:space="preserve"> Inside, the sign flips: minus means right. Right 6.</a:t>
+            </a:r>
+            <a:endParaRPr lang="en-US" sz="1575" dirty="0"/>
+          </a:p>
+        </p:txBody>
+      </p:sp>
+      <p:sp>
+        <p:nvSpPr>
+          <p:cNvPr id="13" name="Shape 13"/>
+          <p:cNvSpPr txBox="1"/>
+          <p:nvPr/>
+        </p:nvSpPr>
+        <p:spPr>
+          <a:xfrm>
+            <a:off x="4355998" y="1618488"/>
+            <a:ext cx="3479698" cy="2866644"/>
           </a:xfrm>
           <a:prstGeom prst="roundRect">
             <a:avLst>
@@ -7735,14 +7843,14 @@
       </p:sp>
       <p:sp>
         <p:nvSpPr>
-          <p:cNvPr id="7" name="Shape 7"/>
+          <p:cNvPr id="9" name="Shape 9"/>
           <p:cNvSpPr txBox="1"/>
           <p:nvPr/>
         </p:nvSpPr>
         <p:spPr>
           <a:xfrm>
-            <a:off x="895350" y="3232404"/>
-            <a:ext cx="10400995" cy="352044"/>
+            <a:off x="4565548" y="1789938"/>
+            <a:ext cx="3060598" cy="649224"/>
           </a:xfrm>
           <a:prstGeom prst="rect">
             <a:avLst/>
@@ -7859,13 +7967,13 @@
       </p:sp>
       <p:sp>
         <p:nvSpPr>
-          <p:cNvPr id="8" name="Shape 8"/>
+          <p:cNvPr id="10" name="Shape 10"/>
           <p:cNvSpPr txBox="1"/>
           <p:nvPr/>
         </p:nvSpPr>
         <p:spPr>
           <a:xfrm>
-            <a:off x="895350" y="3679698"/>
+            <a:off x="4565548" y="2534412"/>
             <a:ext cx="2576368" cy="518922"/>
           </a:xfrm>
           <a:prstGeom prst="roundRect">
@@ -7917,14 +8025,122 @@
       </p:sp>
       <p:sp>
         <p:nvSpPr>
+          <p:cNvPr id="11" name="Shape 11"/>
+          <p:cNvSpPr txBox="1"/>
+          <p:nvPr/>
+        </p:nvSpPr>
+        <p:spPr>
+          <a:xfrm>
+            <a:off x="4565548" y="3148584"/>
+            <a:ext cx="3060598" cy="534924"/>
+          </a:xfrm>
+          <a:prstGeom prst="rect">
+            <a:avLst/>
+          </a:prstGeom>
+          <a:noFill/>
+          <a:ln>
+            <a:noFill/>
+          </a:ln>
+        </p:spPr>
+        <p:txBody>
+          <a:bodyPr wrap="square" lIns="36576" tIns="27432" rIns="36576" bIns="27432" anchor="t">
+            <a:noAutofit/>
+          </a:bodyPr>
+          <a:lstStyle/>
+          <a:p>
+            <a:pPr algn="l">
+              <a:lnSpc>
+                <a:spcPct val="100000"/>
+              </a:lnSpc>
+            </a:pPr>
+            <a:r>
+              <a:rPr lang="en-US" sz="1575" dirty="0" b="1">
+                <a:solidFill>
+                  <a:srgbClr val="16171D"/>
+                </a:solidFill>
+                <a:latin typeface="Segoe UI"/>
+                <a:cs typeface="Segoe UI"/>
+              </a:rPr>
+              <a:t xml:space="preserve">1.</a:t>
+            </a:r>
+            <a:r>
+              <a:rPr lang="en-US" sz="1575" dirty="0">
+                <a:solidFill>
+                  <a:srgbClr val="16171D"/>
+                </a:solidFill>
+                <a:latin typeface="Segoe UI"/>
+                <a:cs typeface="Segoe UI"/>
+              </a:rPr>
+              <a:t xml:space="preserve"> The 1 is outside, so the graph moves up or down.</a:t>
+            </a:r>
+            <a:endParaRPr lang="en-US" sz="1575" dirty="0"/>
+          </a:p>
+        </p:txBody>
+      </p:sp>
+      <p:sp>
+        <p:nvSpPr>
           <p:cNvPr id="12" name="Shape 12"/>
           <p:cNvSpPr txBox="1"/>
           <p:nvPr/>
         </p:nvSpPr>
         <p:spPr>
           <a:xfrm>
-            <a:off x="685800" y="4503420"/>
-            <a:ext cx="10820095" cy="1309116"/>
+            <a:off x="4565548" y="3778758"/>
+            <a:ext cx="3060598" cy="534924"/>
+          </a:xfrm>
+          <a:prstGeom prst="rect">
+            <a:avLst/>
+          </a:prstGeom>
+          <a:noFill/>
+          <a:ln>
+            <a:noFill/>
+          </a:ln>
+        </p:spPr>
+        <p:txBody>
+          <a:bodyPr wrap="square" lIns="36576" tIns="27432" rIns="36576" bIns="27432" anchor="t">
+            <a:noAutofit/>
+          </a:bodyPr>
+          <a:lstStyle/>
+          <a:p>
+            <a:pPr algn="l">
+              <a:lnSpc>
+                <a:spcPct val="100000"/>
+              </a:lnSpc>
+            </a:pPr>
+            <a:r>
+              <a:rPr lang="en-US" sz="1575" dirty="0" b="1">
+                <a:solidFill>
+                  <a:srgbClr val="16171D"/>
+                </a:solidFill>
+                <a:latin typeface="Segoe UI"/>
+                <a:cs typeface="Segoe UI"/>
+              </a:rPr>
+              <a:t xml:space="preserve">2.</a:t>
+            </a:r>
+            <a:r>
+              <a:rPr lang="en-US" sz="1575" dirty="0">
+                <a:solidFill>
+                  <a:srgbClr val="16171D"/>
+                </a:solidFill>
+                <a:latin typeface="Segoe UI"/>
+                <a:cs typeface="Segoe UI"/>
+              </a:rPr>
+              <a:t xml:space="preserve"> Outside, no flip: plus means up. Up 1.</a:t>
+            </a:r>
+            <a:endParaRPr lang="en-US" sz="1575" dirty="0"/>
+          </a:p>
+        </p:txBody>
+      </p:sp>
+      <p:sp>
+        <p:nvSpPr>
+          <p:cNvPr id="18" name="Shape 18"/>
+          <p:cNvSpPr txBox="1"/>
+          <p:nvPr/>
+        </p:nvSpPr>
+        <p:spPr>
+          <a:xfrm>
+            <a:off x="8026197" y="1618488"/>
+            <a:ext cx="3479698" cy="2866644"/>
           </a:xfrm>
           <a:prstGeom prst="roundRect">
             <a:avLst>
@@ -7957,14 +8173,14 @@
       </p:sp>
       <p:sp>
         <p:nvSpPr>
-          <p:cNvPr id="10" name="Shape 10"/>
+          <p:cNvPr id="14" name="Shape 14"/>
           <p:cNvSpPr txBox="1"/>
           <p:nvPr/>
         </p:nvSpPr>
         <p:spPr>
           <a:xfrm>
-            <a:off x="895350" y="4674870"/>
-            <a:ext cx="10400995" cy="352044"/>
+            <a:off x="8235747" y="1789938"/>
+            <a:ext cx="3060598" cy="649224"/>
           </a:xfrm>
           <a:prstGeom prst="rect">
             <a:avLst/>
@@ -8101,13 +8317,13 @@
       </p:sp>
       <p:sp>
         <p:nvSpPr>
-          <p:cNvPr id="11" name="Shape 11"/>
+          <p:cNvPr id="15" name="Shape 15"/>
           <p:cNvSpPr txBox="1"/>
           <p:nvPr/>
         </p:nvSpPr>
         <p:spPr>
           <a:xfrm>
-            <a:off x="895350" y="5122164"/>
+            <a:off x="8235747" y="2534412"/>
             <a:ext cx="2908021" cy="518922"/>
           </a:xfrm>
           <a:prstGeom prst="roundRect">
@@ -8179,7 +8395,115 @@
       </p:sp>
       <p:sp>
         <p:nvSpPr>
-          <p:cNvPr id="13" name="Slide Number 13"/>
+          <p:cNvPr id="16" name="Shape 16"/>
+          <p:cNvSpPr txBox="1"/>
+          <p:nvPr/>
+        </p:nvSpPr>
+        <p:spPr>
+          <a:xfrm>
+            <a:off x="8235747" y="3148584"/>
+            <a:ext cx="3060598" cy="534924"/>
+          </a:xfrm>
+          <a:prstGeom prst="rect">
+            <a:avLst/>
+          </a:prstGeom>
+          <a:noFill/>
+          <a:ln>
+            <a:noFill/>
+          </a:ln>
+        </p:spPr>
+        <p:txBody>
+          <a:bodyPr wrap="square" lIns="36576" tIns="27432" rIns="36576" bIns="27432" anchor="t">
+            <a:noAutofit/>
+          </a:bodyPr>
+          <a:lstStyle/>
+          <a:p>
+            <a:pPr algn="l">
+              <a:lnSpc>
+                <a:spcPct val="100000"/>
+              </a:lnSpc>
+            </a:pPr>
+            <a:r>
+              <a:rPr lang="en-US" sz="1575" dirty="0" b="1">
+                <a:solidFill>
+                  <a:srgbClr val="16171D"/>
+                </a:solidFill>
+                <a:latin typeface="Segoe UI"/>
+                <a:cs typeface="Segoe UI"/>
+              </a:rPr>
+              <a:t xml:space="preserve">1.</a:t>
+            </a:r>
+            <a:r>
+              <a:rPr lang="en-US" sz="1575" dirty="0">
+                <a:solidFill>
+                  <a:srgbClr val="16171D"/>
+                </a:solidFill>
+                <a:latin typeface="Segoe UI"/>
+                <a:cs typeface="Segoe UI"/>
+              </a:rPr>
+              <a:t xml:space="preserve"> Put (x + 1) in for x: j(x + 1) = 3(x + 1).</a:t>
+            </a:r>
+            <a:endParaRPr lang="en-US" sz="1575" dirty="0"/>
+          </a:p>
+        </p:txBody>
+      </p:sp>
+      <p:sp>
+        <p:nvSpPr>
+          <p:cNvPr id="17" name="Shape 17"/>
+          <p:cNvSpPr txBox="1"/>
+          <p:nvPr/>
+        </p:nvSpPr>
+        <p:spPr>
+          <a:xfrm>
+            <a:off x="8235747" y="3778758"/>
+            <a:ext cx="3060598" cy="534924"/>
+          </a:xfrm>
+          <a:prstGeom prst="rect">
+            <a:avLst/>
+          </a:prstGeom>
+          <a:noFill/>
+          <a:ln>
+            <a:noFill/>
+          </a:ln>
+        </p:spPr>
+        <p:txBody>
+          <a:bodyPr wrap="square" lIns="36576" tIns="27432" rIns="36576" bIns="27432" anchor="t">
+            <a:noAutofit/>
+          </a:bodyPr>
+          <a:lstStyle/>
+          <a:p>
+            <a:pPr algn="l">
+              <a:lnSpc>
+                <a:spcPct val="100000"/>
+              </a:lnSpc>
+            </a:pPr>
+            <a:r>
+              <a:rPr lang="en-US" sz="1575" dirty="0" b="1">
+                <a:solidFill>
+                  <a:srgbClr val="16171D"/>
+                </a:solidFill>
+                <a:latin typeface="Segoe UI"/>
+                <a:cs typeface="Segoe UI"/>
+              </a:rPr>
+              <a:t xml:space="preserve">2.</a:t>
+            </a:r>
+            <a:r>
+              <a:rPr lang="en-US" sz="1575" dirty="0">
+                <a:solidFill>
+                  <a:srgbClr val="16171D"/>
+                </a:solidFill>
+                <a:latin typeface="Segoe UI"/>
+                <a:cs typeface="Segoe UI"/>
+              </a:rPr>
+              <a:t xml:space="preserve"> Distribute: 3 · x + 3 · 1 = 3x + 3.</a:t>
+            </a:r>
+            <a:endParaRPr lang="en-US" sz="1575" dirty="0"/>
+          </a:p>
+        </p:txBody>
+      </p:sp>
+      <p:sp>
+        <p:nvSpPr>
+          <p:cNvPr id="19" name="Slide Number 19"/>
           <p:cNvSpPr txBox="1"/>
           <p:nvPr/>
         </p:nvSpPr>
@@ -8339,7 +8663,7 @@
                             </p:stCondLst>
                             <p:childTnLst>
                               <p:par>
-                                <p:cTn id="14" presetID="53" presetClass="entr" presetSubtype="16" fill="hold" nodeType="clickEffect">
+                                <p:cTn id="14" presetID="42" presetClass="entr" presetSubtype="0" fill="hold" nodeType="clickEffect">
                                   <p:stCondLst>
                                     <p:cond delay="0"/>
                                   </p:stCondLst>
@@ -8352,7 +8676,7 @@
                                           </p:stCondLst>
                                         </p:cTn>
                                         <p:tgtEl>
-                                          <p:spTgt spid="8"/>
+                                          <p:spTgt spid="6"/>
                                         </p:tgtEl>
                                         <p:attrNameLst>
                                           <p:attrName>style.visibility</p:attrName>
@@ -8366,7 +8690,7 @@
                                       <p:cBhvr>
                                         <p:cTn id="11" dur="500"/>
                                         <p:tgtEl>
-                                          <p:spTgt spid="8"/>
+                                          <p:spTgt spid="6"/>
                                         </p:tgtEl>
                                       </p:cBhvr>
                                     </p:animEffect>
@@ -8374,7 +8698,205 @@
                                       <p:cBhvr>
                                         <p:cTn id="12" dur="500" fill="hold"/>
                                         <p:tgtEl>
-                                          <p:spTgt spid="8"/>
+                                          <p:spTgt spid="6"/>
+                                        </p:tgtEl>
+                                        <p:attrNameLst>
+                                          <p:attrName>ppt_x</p:attrName>
+                                        </p:attrNameLst>
+                                      </p:cBhvr>
+                                      <p:tavLst>
+                                        <p:tav tm="0">
+                                          <p:val>
+                                            <p:strVal val="#ppt_x"/>
+                                          </p:val>
+                                        </p:tav>
+                                        <p:tav tm="100000">
+                                          <p:val>
+                                            <p:strVal val="#ppt_x"/>
+                                          </p:val>
+                                        </p:tav>
+                                      </p:tavLst>
+                                    </p:anim>
+                                    <p:anim calcmode="lin" valueType="num">
+                                      <p:cBhvr>
+                                        <p:cTn id="13" dur="500" fill="hold"/>
+                                        <p:tgtEl>
+                                          <p:spTgt spid="6"/>
+                                        </p:tgtEl>
+                                        <p:attrNameLst>
+                                          <p:attrName>ppt_y</p:attrName>
+                                        </p:attrNameLst>
+                                      </p:cBhvr>
+                                      <p:tavLst>
+                                        <p:tav tm="0">
+                                          <p:val>
+                                            <p:strVal val="#ppt_y+.1"/>
+                                          </p:val>
+                                        </p:tav>
+                                        <p:tav tm="100000">
+                                          <p:val>
+                                            <p:strVal val="#ppt_y"/>
+                                          </p:val>
+                                        </p:tav>
+                                      </p:tavLst>
+                                    </p:anim>
+                                  </p:childTnLst>
+                                </p:cTn>
+                              </p:par>
+                            </p:childTnLst>
+                          </p:cTn>
+                        </p:par>
+                      </p:childTnLst>
+                    </p:cTn>
+                  </p:par>
+                  <p:par>
+                    <p:cTn id="22" fill="hold">
+                      <p:stCondLst>
+                        <p:cond delay="indefinite"/>
+                      </p:stCondLst>
+                      <p:childTnLst>
+                        <p:par>
+                          <p:cTn id="23" fill="hold">
+                            <p:stCondLst>
+                              <p:cond delay="0"/>
+                            </p:stCondLst>
+                            <p:childTnLst>
+                              <p:par>
+                                <p:cTn id="21" presetID="42" presetClass="entr" presetSubtype="0" fill="hold" nodeType="clickEffect">
+                                  <p:stCondLst>
+                                    <p:cond delay="0"/>
+                                  </p:stCondLst>
+                                  <p:childTnLst>
+                                    <p:set>
+                                      <p:cBhvr>
+                                        <p:cTn id="17" dur="1" fill="hold">
+                                          <p:stCondLst>
+                                            <p:cond delay="0"/>
+                                          </p:stCondLst>
+                                        </p:cTn>
+                                        <p:tgtEl>
+                                          <p:spTgt spid="7"/>
+                                        </p:tgtEl>
+                                        <p:attrNameLst>
+                                          <p:attrName>style.visibility</p:attrName>
+                                        </p:attrNameLst>
+                                      </p:cBhvr>
+                                      <p:to>
+                                        <p:strVal val="visible"/>
+                                      </p:to>
+                                    </p:set>
+                                    <p:animEffect transition="in" filter="fade">
+                                      <p:cBhvr>
+                                        <p:cTn id="18" dur="500"/>
+                                        <p:tgtEl>
+                                          <p:spTgt spid="7"/>
+                                        </p:tgtEl>
+                                      </p:cBhvr>
+                                    </p:animEffect>
+                                    <p:anim calcmode="lin" valueType="num">
+                                      <p:cBhvr>
+                                        <p:cTn id="19" dur="500" fill="hold"/>
+                                        <p:tgtEl>
+                                          <p:spTgt spid="7"/>
+                                        </p:tgtEl>
+                                        <p:attrNameLst>
+                                          <p:attrName>ppt_x</p:attrName>
+                                        </p:attrNameLst>
+                                      </p:cBhvr>
+                                      <p:tavLst>
+                                        <p:tav tm="0">
+                                          <p:val>
+                                            <p:strVal val="#ppt_x"/>
+                                          </p:val>
+                                        </p:tav>
+                                        <p:tav tm="100000">
+                                          <p:val>
+                                            <p:strVal val="#ppt_x"/>
+                                          </p:val>
+                                        </p:tav>
+                                      </p:tavLst>
+                                    </p:anim>
+                                    <p:anim calcmode="lin" valueType="num">
+                                      <p:cBhvr>
+                                        <p:cTn id="20" dur="500" fill="hold"/>
+                                        <p:tgtEl>
+                                          <p:spTgt spid="7"/>
+                                        </p:tgtEl>
+                                        <p:attrNameLst>
+                                          <p:attrName>ppt_y</p:attrName>
+                                        </p:attrNameLst>
+                                      </p:cBhvr>
+                                      <p:tavLst>
+                                        <p:tav tm="0">
+                                          <p:val>
+                                            <p:strVal val="#ppt_y+.1"/>
+                                          </p:val>
+                                        </p:tav>
+                                        <p:tav tm="100000">
+                                          <p:val>
+                                            <p:strVal val="#ppt_y"/>
+                                          </p:val>
+                                        </p:tav>
+                                      </p:tavLst>
+                                    </p:anim>
+                                  </p:childTnLst>
+                                </p:cTn>
+                              </p:par>
+                            </p:childTnLst>
+                          </p:cTn>
+                        </p:par>
+                      </p:childTnLst>
+                    </p:cTn>
+                  </p:par>
+                  <p:par>
+                    <p:cTn id="29" fill="hold">
+                      <p:stCondLst>
+                        <p:cond delay="indefinite"/>
+                      </p:stCondLst>
+                      <p:childTnLst>
+                        <p:par>
+                          <p:cTn id="30" fill="hold">
+                            <p:stCondLst>
+                              <p:cond delay="0"/>
+                            </p:stCondLst>
+                            <p:childTnLst>
+                              <p:par>
+                                <p:cTn id="28" presetID="53" presetClass="entr" presetSubtype="16" fill="hold" nodeType="clickEffect">
+                                  <p:stCondLst>
+                                    <p:cond delay="0"/>
+                                  </p:stCondLst>
+                                  <p:childTnLst>
+                                    <p:set>
+                                      <p:cBhvr>
+                                        <p:cTn id="24" dur="1" fill="hold">
+                                          <p:stCondLst>
+                                            <p:cond delay="0"/>
+                                          </p:stCondLst>
+                                        </p:cTn>
+                                        <p:tgtEl>
+                                          <p:spTgt spid="10"/>
+                                        </p:tgtEl>
+                                        <p:attrNameLst>
+                                          <p:attrName>style.visibility</p:attrName>
+                                        </p:attrNameLst>
+                                      </p:cBhvr>
+                                      <p:to>
+                                        <p:strVal val="visible"/>
+                                      </p:to>
+                                    </p:set>
+                                    <p:animEffect transition="in" filter="fade">
+                                      <p:cBhvr>
+                                        <p:cTn id="25" dur="500"/>
+                                        <p:tgtEl>
+                                          <p:spTgt spid="10"/>
+                                        </p:tgtEl>
+                                      </p:cBhvr>
+                                    </p:animEffect>
+                                    <p:anim calcmode="lin" valueType="num">
+                                      <p:cBhvr>
+                                        <p:cTn id="26" dur="500" fill="hold"/>
+                                        <p:tgtEl>
+                                          <p:spTgt spid="10"/>
                                         </p:tgtEl>
                                         <p:attrNameLst>
                                           <p:attrName>ppt_w</p:attrName>
@@ -8395,9 +8917,9 @@
                                     </p:anim>
                                     <p:anim calcmode="lin" valueType="num">
                                       <p:cBhvr>
-                                        <p:cTn id="13" dur="500" fill="hold"/>
+                                        <p:cTn id="27" dur="500" fill="hold"/>
                                         <p:tgtEl>
-                                          <p:spTgt spid="8"/>
+                                          <p:spTgt spid="10"/>
                                         </p:tgtEl>
                                         <p:attrNameLst>
                                           <p:attrName>ppt_h</p:attrName>
@@ -8426,26 +8948,26 @@
                     </p:cTn>
                   </p:par>
                   <p:par>
-                    <p:cTn id="22" fill="hold">
+                    <p:cTn id="36" fill="hold">
                       <p:stCondLst>
                         <p:cond delay="indefinite"/>
                       </p:stCondLst>
                       <p:childTnLst>
                         <p:par>
-                          <p:cTn id="23" fill="hold">
+                          <p:cTn id="37" fill="hold">
                             <p:stCondLst>
                               <p:cond delay="0"/>
                             </p:stCondLst>
                             <p:childTnLst>
                               <p:par>
-                                <p:cTn id="21" presetID="53" presetClass="entr" presetSubtype="16" fill="hold" nodeType="clickEffect">
+                                <p:cTn id="35" presetID="42" presetClass="entr" presetSubtype="0" fill="hold" nodeType="clickEffect">
                                   <p:stCondLst>
                                     <p:cond delay="0"/>
                                   </p:stCondLst>
                                   <p:childTnLst>
                                     <p:set>
                                       <p:cBhvr>
-                                        <p:cTn id="17" dur="1" fill="hold">
+                                        <p:cTn id="31" dur="1" fill="hold">
                                           <p:stCondLst>
                                             <p:cond delay="0"/>
                                           </p:stCondLst>
@@ -8463,7 +8985,7 @@
                                     </p:set>
                                     <p:animEffect transition="in" filter="fade">
                                       <p:cBhvr>
-                                        <p:cTn id="18" dur="500"/>
+                                        <p:cTn id="32" dur="500"/>
                                         <p:tgtEl>
                                           <p:spTgt spid="11"/>
                                         </p:tgtEl>
@@ -8471,9 +8993,207 @@
                                     </p:animEffect>
                                     <p:anim calcmode="lin" valueType="num">
                                       <p:cBhvr>
-                                        <p:cTn id="19" dur="500" fill="hold"/>
+                                        <p:cTn id="33" dur="500" fill="hold"/>
                                         <p:tgtEl>
                                           <p:spTgt spid="11"/>
+                                        </p:tgtEl>
+                                        <p:attrNameLst>
+                                          <p:attrName>ppt_x</p:attrName>
+                                        </p:attrNameLst>
+                                      </p:cBhvr>
+                                      <p:tavLst>
+                                        <p:tav tm="0">
+                                          <p:val>
+                                            <p:strVal val="#ppt_x"/>
+                                          </p:val>
+                                        </p:tav>
+                                        <p:tav tm="100000">
+                                          <p:val>
+                                            <p:strVal val="#ppt_x"/>
+                                          </p:val>
+                                        </p:tav>
+                                      </p:tavLst>
+                                    </p:anim>
+                                    <p:anim calcmode="lin" valueType="num">
+                                      <p:cBhvr>
+                                        <p:cTn id="34" dur="500" fill="hold"/>
+                                        <p:tgtEl>
+                                          <p:spTgt spid="11"/>
+                                        </p:tgtEl>
+                                        <p:attrNameLst>
+                                          <p:attrName>ppt_y</p:attrName>
+                                        </p:attrNameLst>
+                                      </p:cBhvr>
+                                      <p:tavLst>
+                                        <p:tav tm="0">
+                                          <p:val>
+                                            <p:strVal val="#ppt_y+.1"/>
+                                          </p:val>
+                                        </p:tav>
+                                        <p:tav tm="100000">
+                                          <p:val>
+                                            <p:strVal val="#ppt_y"/>
+                                          </p:val>
+                                        </p:tav>
+                                      </p:tavLst>
+                                    </p:anim>
+                                  </p:childTnLst>
+                                </p:cTn>
+                              </p:par>
+                            </p:childTnLst>
+                          </p:cTn>
+                        </p:par>
+                      </p:childTnLst>
+                    </p:cTn>
+                  </p:par>
+                  <p:par>
+                    <p:cTn id="43" fill="hold">
+                      <p:stCondLst>
+                        <p:cond delay="indefinite"/>
+                      </p:stCondLst>
+                      <p:childTnLst>
+                        <p:par>
+                          <p:cTn id="44" fill="hold">
+                            <p:stCondLst>
+                              <p:cond delay="0"/>
+                            </p:stCondLst>
+                            <p:childTnLst>
+                              <p:par>
+                                <p:cTn id="42" presetID="42" presetClass="entr" presetSubtype="0" fill="hold" nodeType="clickEffect">
+                                  <p:stCondLst>
+                                    <p:cond delay="0"/>
+                                  </p:stCondLst>
+                                  <p:childTnLst>
+                                    <p:set>
+                                      <p:cBhvr>
+                                        <p:cTn id="38" dur="1" fill="hold">
+                                          <p:stCondLst>
+                                            <p:cond delay="0"/>
+                                          </p:stCondLst>
+                                        </p:cTn>
+                                        <p:tgtEl>
+                                          <p:spTgt spid="12"/>
+                                        </p:tgtEl>
+                                        <p:attrNameLst>
+                                          <p:attrName>style.visibility</p:attrName>
+                                        </p:attrNameLst>
+                                      </p:cBhvr>
+                                      <p:to>
+                                        <p:strVal val="visible"/>
+                                      </p:to>
+                                    </p:set>
+                                    <p:animEffect transition="in" filter="fade">
+                                      <p:cBhvr>
+                                        <p:cTn id="39" dur="500"/>
+                                        <p:tgtEl>
+                                          <p:spTgt spid="12"/>
+                                        </p:tgtEl>
+                                      </p:cBhvr>
+                                    </p:animEffect>
+                                    <p:anim calcmode="lin" valueType="num">
+                                      <p:cBhvr>
+                                        <p:cTn id="40" dur="500" fill="hold"/>
+                                        <p:tgtEl>
+                                          <p:spTgt spid="12"/>
+                                        </p:tgtEl>
+                                        <p:attrNameLst>
+                                          <p:attrName>ppt_x</p:attrName>
+                                        </p:attrNameLst>
+                                      </p:cBhvr>
+                                      <p:tavLst>
+                                        <p:tav tm="0">
+                                          <p:val>
+                                            <p:strVal val="#ppt_x"/>
+                                          </p:val>
+                                        </p:tav>
+                                        <p:tav tm="100000">
+                                          <p:val>
+                                            <p:strVal val="#ppt_x"/>
+                                          </p:val>
+                                        </p:tav>
+                                      </p:tavLst>
+                                    </p:anim>
+                                    <p:anim calcmode="lin" valueType="num">
+                                      <p:cBhvr>
+                                        <p:cTn id="41" dur="500" fill="hold"/>
+                                        <p:tgtEl>
+                                          <p:spTgt spid="12"/>
+                                        </p:tgtEl>
+                                        <p:attrNameLst>
+                                          <p:attrName>ppt_y</p:attrName>
+                                        </p:attrNameLst>
+                                      </p:cBhvr>
+                                      <p:tavLst>
+                                        <p:tav tm="0">
+                                          <p:val>
+                                            <p:strVal val="#ppt_y+.1"/>
+                                          </p:val>
+                                        </p:tav>
+                                        <p:tav tm="100000">
+                                          <p:val>
+                                            <p:strVal val="#ppt_y"/>
+                                          </p:val>
+                                        </p:tav>
+                                      </p:tavLst>
+                                    </p:anim>
+                                  </p:childTnLst>
+                                </p:cTn>
+                              </p:par>
+                            </p:childTnLst>
+                          </p:cTn>
+                        </p:par>
+                      </p:childTnLst>
+                    </p:cTn>
+                  </p:par>
+                  <p:par>
+                    <p:cTn id="50" fill="hold">
+                      <p:stCondLst>
+                        <p:cond delay="indefinite"/>
+                      </p:stCondLst>
+                      <p:childTnLst>
+                        <p:par>
+                          <p:cTn id="51" fill="hold">
+                            <p:stCondLst>
+                              <p:cond delay="0"/>
+                            </p:stCondLst>
+                            <p:childTnLst>
+                              <p:par>
+                                <p:cTn id="49" presetID="53" presetClass="entr" presetSubtype="16" fill="hold" nodeType="clickEffect">
+                                  <p:stCondLst>
+                                    <p:cond delay="0"/>
+                                  </p:stCondLst>
+                                  <p:childTnLst>
+                                    <p:set>
+                                      <p:cBhvr>
+                                        <p:cTn id="45" dur="1" fill="hold">
+                                          <p:stCondLst>
+                                            <p:cond delay="0"/>
+                                          </p:stCondLst>
+                                        </p:cTn>
+                                        <p:tgtEl>
+                                          <p:spTgt spid="15"/>
+                                        </p:tgtEl>
+                                        <p:attrNameLst>
+                                          <p:attrName>style.visibility</p:attrName>
+                                        </p:attrNameLst>
+                                      </p:cBhvr>
+                                      <p:to>
+                                        <p:strVal val="visible"/>
+                                      </p:to>
+                                    </p:set>
+                                    <p:animEffect transition="in" filter="fade">
+                                      <p:cBhvr>
+                                        <p:cTn id="46" dur="500"/>
+                                        <p:tgtEl>
+                                          <p:spTgt spid="15"/>
+                                        </p:tgtEl>
+                                      </p:cBhvr>
+                                    </p:animEffect>
+                                    <p:anim calcmode="lin" valueType="num">
+                                      <p:cBhvr>
+                                        <p:cTn id="47" dur="500" fill="hold"/>
+                                        <p:tgtEl>
+                                          <p:spTgt spid="15"/>
                                         </p:tgtEl>
                                         <p:attrNameLst>
                                           <p:attrName>ppt_w</p:attrName>
@@ -8494,9 +9214,9 @@
                                     </p:anim>
                                     <p:anim calcmode="lin" valueType="num">
                                       <p:cBhvr>
-                                        <p:cTn id="20" dur="500" fill="hold"/>
+                                        <p:cTn id="48" dur="500" fill="hold"/>
                                         <p:tgtEl>
-                                          <p:spTgt spid="11"/>
+                                          <p:spTgt spid="15"/>
                                         </p:tgtEl>
                                         <p:attrNameLst>
                                           <p:attrName>ppt_h</p:attrName>
@@ -8511,6 +9231,204 @@
                                         <p:tav tm="100000">
                                           <p:val>
                                             <p:strVal val="#ppt_h"/>
+                                          </p:val>
+                                        </p:tav>
+                                      </p:tavLst>
+                                    </p:anim>
+                                  </p:childTnLst>
+                                </p:cTn>
+                              </p:par>
+                            </p:childTnLst>
+                          </p:cTn>
+                        </p:par>
+                      </p:childTnLst>
+                    </p:cTn>
+                  </p:par>
+                  <p:par>
+                    <p:cTn id="57" fill="hold">
+                      <p:stCondLst>
+                        <p:cond delay="indefinite"/>
+                      </p:stCondLst>
+                      <p:childTnLst>
+                        <p:par>
+                          <p:cTn id="58" fill="hold">
+                            <p:stCondLst>
+                              <p:cond delay="0"/>
+                            </p:stCondLst>
+                            <p:childTnLst>
+                              <p:par>
+                                <p:cTn id="56" presetID="42" presetClass="entr" presetSubtype="0" fill="hold" nodeType="clickEffect">
+                                  <p:stCondLst>
+                                    <p:cond delay="0"/>
+                                  </p:stCondLst>
+                                  <p:childTnLst>
+                                    <p:set>
+                                      <p:cBhvr>
+                                        <p:cTn id="52" dur="1" fill="hold">
+                                          <p:stCondLst>
+                                            <p:cond delay="0"/>
+                                          </p:stCondLst>
+                                        </p:cTn>
+                                        <p:tgtEl>
+                                          <p:spTgt spid="16"/>
+                                        </p:tgtEl>
+                                        <p:attrNameLst>
+                                          <p:attrName>style.visibility</p:attrName>
+                                        </p:attrNameLst>
+                                      </p:cBhvr>
+                                      <p:to>
+                                        <p:strVal val="visible"/>
+                                      </p:to>
+                                    </p:set>
+                                    <p:animEffect transition="in" filter="fade">
+                                      <p:cBhvr>
+                                        <p:cTn id="53" dur="500"/>
+                                        <p:tgtEl>
+                                          <p:spTgt spid="16"/>
+                                        </p:tgtEl>
+                                      </p:cBhvr>
+                                    </p:animEffect>
+                                    <p:anim calcmode="lin" valueType="num">
+                                      <p:cBhvr>
+                                        <p:cTn id="54" dur="500" fill="hold"/>
+                                        <p:tgtEl>
+                                          <p:spTgt spid="16"/>
+                                        </p:tgtEl>
+                                        <p:attrNameLst>
+                                          <p:attrName>ppt_x</p:attrName>
+                                        </p:attrNameLst>
+                                      </p:cBhvr>
+                                      <p:tavLst>
+                                        <p:tav tm="0">
+                                          <p:val>
+                                            <p:strVal val="#ppt_x"/>
+                                          </p:val>
+                                        </p:tav>
+                                        <p:tav tm="100000">
+                                          <p:val>
+                                            <p:strVal val="#ppt_x"/>
+                                          </p:val>
+                                        </p:tav>
+                                      </p:tavLst>
+                                    </p:anim>
+                                    <p:anim calcmode="lin" valueType="num">
+                                      <p:cBhvr>
+                                        <p:cTn id="55" dur="500" fill="hold"/>
+                                        <p:tgtEl>
+                                          <p:spTgt spid="16"/>
+                                        </p:tgtEl>
+                                        <p:attrNameLst>
+                                          <p:attrName>ppt_y</p:attrName>
+                                        </p:attrNameLst>
+                                      </p:cBhvr>
+                                      <p:tavLst>
+                                        <p:tav tm="0">
+                                          <p:val>
+                                            <p:strVal val="#ppt_y+.1"/>
+                                          </p:val>
+                                        </p:tav>
+                                        <p:tav tm="100000">
+                                          <p:val>
+                                            <p:strVal val="#ppt_y"/>
+                                          </p:val>
+                                        </p:tav>
+                                      </p:tavLst>
+                                    </p:anim>
+                                  </p:childTnLst>
+                                </p:cTn>
+                              </p:par>
+                            </p:childTnLst>
+                          </p:cTn>
+                        </p:par>
+                      </p:childTnLst>
+                    </p:cTn>
+                  </p:par>
+                  <p:par>
+                    <p:cTn id="64" fill="hold">
+                      <p:stCondLst>
+                        <p:cond delay="indefinite"/>
+                      </p:stCondLst>
+                      <p:childTnLst>
+                        <p:par>
+                          <p:cTn id="65" fill="hold">
+                            <p:stCondLst>
+                              <p:cond delay="0"/>
+                            </p:stCondLst>
+                            <p:childTnLst>
+                              <p:par>
+                                <p:cTn id="63" presetID="42" presetClass="entr" presetSubtype="0" fill="hold" nodeType="clickEffect">
+                                  <p:stCondLst>
+                                    <p:cond delay="0"/>
+                                  </p:stCondLst>
+                                  <p:childTnLst>
+                                    <p:set>
+                                      <p:cBhvr>
+                                        <p:cTn id="59" dur="1" fill="hold">
+                                          <p:stCondLst>
+                                            <p:cond delay="0"/>
+                                          </p:stCondLst>
+                                        </p:cTn>
+                                        <p:tgtEl>
+                                          <p:spTgt spid="17"/>
+                                        </p:tgtEl>
+                                        <p:attrNameLst>
+                                          <p:attrName>style.visibility</p:attrName>
+                                        </p:attrNameLst>
+                                      </p:cBhvr>
+                                      <p:to>
+                                        <p:strVal val="visible"/>
+                                      </p:to>
+                                    </p:set>
+                                    <p:animEffect transition="in" filter="fade">
+                                      <p:cBhvr>
+                                        <p:cTn id="60" dur="500"/>
+                                        <p:tgtEl>
+                                          <p:spTgt spid="17"/>
+                                        </p:tgtEl>
+                                      </p:cBhvr>
+                                    </p:animEffect>
+                                    <p:anim calcmode="lin" valueType="num">
+                                      <p:cBhvr>
+                                        <p:cTn id="61" dur="500" fill="hold"/>
+                                        <p:tgtEl>
+                                          <p:spTgt spid="17"/>
+                                        </p:tgtEl>
+                                        <p:attrNameLst>
+                                          <p:attrName>ppt_x</p:attrName>
+                                        </p:attrNameLst>
+                                      </p:cBhvr>
+                                      <p:tavLst>
+                                        <p:tav tm="0">
+                                          <p:val>
+                                            <p:strVal val="#ppt_x"/>
+                                          </p:val>
+                                        </p:tav>
+                                        <p:tav tm="100000">
+                                          <p:val>
+                                            <p:strVal val="#ppt_x"/>
+                                          </p:val>
+                                        </p:tav>
+                                      </p:tavLst>
+                                    </p:anim>
+                                    <p:anim calcmode="lin" valueType="num">
+                                      <p:cBhvr>
+                                        <p:cTn id="62" dur="500" fill="hold"/>
+                                        <p:tgtEl>
+                                          <p:spTgt spid="17"/>
+                                        </p:tgtEl>
+                                        <p:attrNameLst>
+                                          <p:attrName>ppt_y</p:attrName>
+                                        </p:attrNameLst>
+                                      </p:cBhvr>
+                                      <p:tavLst>
+                                        <p:tav tm="0">
+                                          <p:val>
+                                            <p:strVal val="#ppt_y+.1"/>
+                                          </p:val>
+                                        </p:tav>
+                                        <p:tav tm="100000">
+                                          <p:val>
+                                            <p:strVal val="#ppt_y"/>
                                           </p:val>
                                         </p:tav>
                                       </p:tavLst>

--- a/IEP/t2-lesson2-vertical-horizontal-transformations-IEP.pptx
+++ b/IEP/t2-lesson2-vertical-horizontal-transformations-IEP.pptx
@@ -11544,7 +11544,7 @@
         <p:spPr>
           <a:xfrm>
             <a:off x="6210148" y="4011168"/>
-            <a:ext cx="5295748" cy="2042160"/>
+            <a:ext cx="5295748" cy="2499360"/>
           </a:xfrm>
           <a:prstGeom prst="roundRect">
             <a:avLst>
@@ -11584,7 +11584,7 @@
         <p:spPr>
           <a:xfrm>
             <a:off x="6419698" y="4182618"/>
-            <a:ext cx="4876648" cy="294894"/>
+            <a:ext cx="4876648" cy="534924"/>
           </a:xfrm>
           <a:prstGeom prst="rect">
             <a:avLst/>
@@ -11623,7 +11623,7 @@
                 <a:latin typeface="Segoe UI"/>
                 <a:cs typeface="Segoe UI"/>
               </a:rPr>
-              <a:t xml:space="preserve"> Is </a:t>
+              <a:t xml:space="preserve"> Let </a:t>
             </a:r>
             <a:r>
               <a:rPr lang="en-US" sz="1575" dirty="0" i="1">
@@ -11633,7 +11633,7 @@
                 <a:latin typeface="Cambria"/>
                 <a:cs typeface="Cambria"/>
               </a:rPr>
-              <a:t xml:space="preserve">h</a:t>
+              <a:t xml:space="preserve">f</a:t>
             </a:r>
             <a:r>
               <a:rPr lang="en-US" sz="1575" dirty="0">
@@ -11663,7 +11663,7 @@
                 <a:latin typeface="Cambria"/>
                 <a:cs typeface="Cambria"/>
               </a:rPr>
-              <a:t xml:space="preserve">) = −⅔</a:t>
+              <a:t xml:space="preserve">) = </a:t>
             </a:r>
             <a:r>
               <a:rPr lang="en-US" sz="1575" dirty="0" i="1">
@@ -11680,20 +11680,150 @@
                 <a:solidFill>
                   <a:srgbClr val="16171D"/>
                 </a:solidFill>
-                <a:latin typeface="Cambria"/>
-                <a:cs typeface="Cambria"/>
-              </a:rPr>
-              <a:t xml:space="preserve"> + 5</a:t>
+                <a:latin typeface="Segoe UI"/>
+                <a:cs typeface="Segoe UI"/>
+              </a:rPr>
+              <a:t xml:space="preserve"> and </a:t>
+            </a:r>
+            <a:r>
+              <a:rPr lang="en-US" sz="1575" dirty="0" i="1">
+                <a:solidFill>
+                  <a:srgbClr val="16171D"/>
+                </a:solidFill>
+                <a:latin typeface="Cambria"/>
+                <a:cs typeface="Cambria"/>
+              </a:rPr>
+              <a:t xml:space="preserve">g</a:t>
             </a:r>
             <a:r>
               <a:rPr lang="en-US" sz="1575" dirty="0">
                 <a:solidFill>
                   <a:srgbClr val="16171D"/>
                 </a:solidFill>
-                <a:latin typeface="Segoe UI"/>
-                <a:cs typeface="Segoe UI"/>
-              </a:rPr>
-              <a:t xml:space="preserve"> increasing or decreasing?</a:t>
+                <a:latin typeface="Cambria"/>
+                <a:cs typeface="Cambria"/>
+              </a:rPr>
+              <a:t xml:space="preserve">(</a:t>
+            </a:r>
+            <a:r>
+              <a:rPr lang="en-US" sz="1575" dirty="0" i="1">
+                <a:solidFill>
+                  <a:srgbClr val="16171D"/>
+                </a:solidFill>
+                <a:latin typeface="Cambria"/>
+                <a:cs typeface="Cambria"/>
+              </a:rPr>
+              <a:t xml:space="preserve">x</a:t>
+            </a:r>
+            <a:r>
+              <a:rPr lang="en-US" sz="1575" dirty="0">
+                <a:solidFill>
+                  <a:srgbClr val="16171D"/>
+                </a:solidFill>
+                <a:latin typeface="Cambria"/>
+                <a:cs typeface="Cambria"/>
+              </a:rPr>
+              <a:t xml:space="preserve">) = 2</a:t>
+            </a:r>
+            <a:r>
+              <a:rPr lang="en-US" sz="1575" dirty="0" i="1">
+                <a:solidFill>
+                  <a:srgbClr val="16171D"/>
+                </a:solidFill>
+                <a:latin typeface="Cambria"/>
+                <a:cs typeface="Cambria"/>
+              </a:rPr>
+              <a:t xml:space="preserve">f</a:t>
+            </a:r>
+            <a:r>
+              <a:rPr lang="en-US" sz="1575" dirty="0">
+                <a:solidFill>
+                  <a:srgbClr val="16171D"/>
+                </a:solidFill>
+                <a:latin typeface="Cambria"/>
+                <a:cs typeface="Cambria"/>
+              </a:rPr>
+              <a:t xml:space="preserve">(</a:t>
+            </a:r>
+            <a:r>
+              <a:rPr lang="en-US" sz="1575" dirty="0" i="1">
+                <a:solidFill>
+                  <a:srgbClr val="16171D"/>
+                </a:solidFill>
+                <a:latin typeface="Cambria"/>
+                <a:cs typeface="Cambria"/>
+              </a:rPr>
+              <a:t xml:space="preserve">x</a:t>
+            </a:r>
+            <a:r>
+              <a:rPr lang="en-US" sz="1575" dirty="0">
+                <a:solidFill>
+                  <a:srgbClr val="16171D"/>
+                </a:solidFill>
+                <a:latin typeface="Cambria"/>
+                <a:cs typeface="Cambria"/>
+              </a:rPr>
+              <a:t xml:space="preserve">) − 3</a:t>
+            </a:r>
+            <a:r>
+              <a:rPr lang="en-US" sz="1575" dirty="0">
+                <a:solidFill>
+                  <a:srgbClr val="16171D"/>
+                </a:solidFill>
+                <a:latin typeface="Segoe UI"/>
+                <a:cs typeface="Segoe UI"/>
+              </a:rPr>
+              <a:t xml:space="preserve">. Which is </a:t>
+            </a:r>
+            <a:r>
+              <a:rPr lang="en-US" sz="1575" dirty="0" i="1">
+                <a:solidFill>
+                  <a:srgbClr val="16171D"/>
+                </a:solidFill>
+                <a:latin typeface="Cambria"/>
+                <a:cs typeface="Cambria"/>
+              </a:rPr>
+              <a:t xml:space="preserve">g</a:t>
+            </a:r>
+            <a:r>
+              <a:rPr lang="en-US" sz="1575" dirty="0">
+                <a:solidFill>
+                  <a:srgbClr val="16171D"/>
+                </a:solidFill>
+                <a:latin typeface="Cambria"/>
+                <a:cs typeface="Cambria"/>
+              </a:rPr>
+              <a:t xml:space="preserve">(</a:t>
+            </a:r>
+            <a:r>
+              <a:rPr lang="en-US" sz="1575" dirty="0" i="1">
+                <a:solidFill>
+                  <a:srgbClr val="16171D"/>
+                </a:solidFill>
+                <a:latin typeface="Cambria"/>
+                <a:cs typeface="Cambria"/>
+              </a:rPr>
+              <a:t xml:space="preserve">x</a:t>
+            </a:r>
+            <a:r>
+              <a:rPr lang="en-US" sz="1575" dirty="0">
+                <a:solidFill>
+                  <a:srgbClr val="16171D"/>
+                </a:solidFill>
+                <a:latin typeface="Cambria"/>
+                <a:cs typeface="Cambria"/>
+              </a:rPr>
+              <a:t xml:space="preserve">)</a:t>
+            </a:r>
+            <a:r>
+              <a:rPr lang="en-US" sz="1575" dirty="0">
+                <a:solidFill>
+                  <a:srgbClr val="16171D"/>
+                </a:solidFill>
+                <a:latin typeface="Segoe UI"/>
+                <a:cs typeface="Segoe UI"/>
+              </a:rPr>
+              <a:t xml:space="preserve"> in slope-intercept form?</a:t>
             </a:r>
             <a:endParaRPr lang="en-US" sz="1575" dirty="0"/>
           </a:p>
@@ -11707,7 +11837,7 @@
         </p:nvSpPr>
         <p:spPr>
           <a:xfrm>
-            <a:off x="6419698" y="4515612"/>
+            <a:off x="6419698" y="4755642"/>
             <a:ext cx="4876648" cy="294894"/>
           </a:xfrm>
           <a:prstGeom prst="rect">
@@ -11747,7 +11877,67 @@
                 <a:latin typeface="Segoe UI"/>
                 <a:cs typeface="Segoe UI"/>
               </a:rPr>
-              <a:t xml:space="preserve"> slope + rises, slope − falls</a:t>
+              <a:t xml:space="preserve"> replace </a:t>
+            </a:r>
+            <a:r>
+              <a:rPr lang="en-US" sz="1575" dirty="0" i="1">
+                <a:solidFill>
+                  <a:srgbClr val="16171D"/>
+                </a:solidFill>
+                <a:latin typeface="Cambria"/>
+                <a:cs typeface="Cambria"/>
+              </a:rPr>
+              <a:t xml:space="preserve">f</a:t>
+            </a:r>
+            <a:r>
+              <a:rPr lang="en-US" sz="1575" dirty="0">
+                <a:solidFill>
+                  <a:srgbClr val="16171D"/>
+                </a:solidFill>
+                <a:latin typeface="Cambria"/>
+                <a:cs typeface="Cambria"/>
+              </a:rPr>
+              <a:t xml:space="preserve">(</a:t>
+            </a:r>
+            <a:r>
+              <a:rPr lang="en-US" sz="1575" dirty="0" i="1">
+                <a:solidFill>
+                  <a:srgbClr val="16171D"/>
+                </a:solidFill>
+                <a:latin typeface="Cambria"/>
+                <a:cs typeface="Cambria"/>
+              </a:rPr>
+              <a:t xml:space="preserve">x</a:t>
+            </a:r>
+            <a:r>
+              <a:rPr lang="en-US" sz="1575" dirty="0">
+                <a:solidFill>
+                  <a:srgbClr val="16171D"/>
+                </a:solidFill>
+                <a:latin typeface="Cambria"/>
+                <a:cs typeface="Cambria"/>
+              </a:rPr>
+              <a:t xml:space="preserve">)</a:t>
+            </a:r>
+            <a:r>
+              <a:rPr lang="en-US" sz="1575" dirty="0">
+                <a:solidFill>
+                  <a:srgbClr val="16171D"/>
+                </a:solidFill>
+                <a:latin typeface="Segoe UI"/>
+                <a:cs typeface="Segoe UI"/>
+              </a:rPr>
+              <a:t xml:space="preserve"> with </a:t>
+            </a:r>
+            <a:r>
+              <a:rPr lang="en-US" sz="1575" dirty="0" i="1">
+                <a:solidFill>
+                  <a:srgbClr val="16171D"/>
+                </a:solidFill>
+                <a:latin typeface="Cambria"/>
+                <a:cs typeface="Cambria"/>
+              </a:rPr>
+              <a:t xml:space="preserve">x</a:t>
             </a:r>
             <a:endParaRPr lang="en-US" sz="1575" dirty="0"/>
           </a:p>
@@ -11761,8 +11951,8 @@
         </p:nvSpPr>
         <p:spPr>
           <a:xfrm>
-            <a:off x="6419698" y="4848606"/>
-            <a:ext cx="4876648" cy="1033272"/>
+            <a:off x="6419698" y="5088636"/>
+            <a:ext cx="4876648" cy="1250442"/>
           </a:xfrm>
           <a:prstGeom prst="roundRect">
             <a:avLst>
@@ -11798,14 +11988,64 @@
               <a:t xml:space="preserve">ANSWER   </a:t>
             </a:r>
             <a:r>
+              <a:rPr lang="en-US" sz="1425" dirty="0" b="1" i="1">
+                <a:solidFill>
+                  <a:srgbClr val="16171D"/>
+                </a:solidFill>
+                <a:latin typeface="Cambria"/>
+                <a:cs typeface="Cambria"/>
+              </a:rPr>
+              <a:t xml:space="preserve">g</a:t>
+            </a:r>
+            <a:r>
               <a:rPr lang="en-US" sz="1425" dirty="0" b="1">
                 <a:solidFill>
                   <a:srgbClr val="16171D"/>
                 </a:solidFill>
-                <a:latin typeface="Segoe UI"/>
-                <a:cs typeface="Segoe UI"/>
-              </a:rPr>
-              <a:t xml:space="preserve">Decreasing</a:t>
+                <a:latin typeface="Cambria"/>
+                <a:cs typeface="Cambria"/>
+              </a:rPr>
+              <a:t xml:space="preserve">(</a:t>
+            </a:r>
+            <a:r>
+              <a:rPr lang="en-US" sz="1425" dirty="0" b="1" i="1">
+                <a:solidFill>
+                  <a:srgbClr val="16171D"/>
+                </a:solidFill>
+                <a:latin typeface="Cambria"/>
+                <a:cs typeface="Cambria"/>
+              </a:rPr>
+              <a:t xml:space="preserve">x</a:t>
+            </a:r>
+            <a:r>
+              <a:rPr lang="en-US" sz="1425" dirty="0" b="1">
+                <a:solidFill>
+                  <a:srgbClr val="16171D"/>
+                </a:solidFill>
+                <a:latin typeface="Cambria"/>
+                <a:cs typeface="Cambria"/>
+              </a:rPr>
+              <a:t xml:space="preserve">) = 2</a:t>
+            </a:r>
+            <a:r>
+              <a:rPr lang="en-US" sz="1425" dirty="0" b="1" i="1">
+                <a:solidFill>
+                  <a:srgbClr val="16171D"/>
+                </a:solidFill>
+                <a:latin typeface="Cambria"/>
+                <a:cs typeface="Cambria"/>
+              </a:rPr>
+              <a:t xml:space="preserve">x</a:t>
+            </a:r>
+            <a:r>
+              <a:rPr lang="en-US" sz="1425" dirty="0" b="1">
+                <a:solidFill>
+                  <a:srgbClr val="16171D"/>
+                </a:solidFill>
+                <a:latin typeface="Cambria"/>
+                <a:cs typeface="Cambria"/>
+              </a:rPr>
+              <a:t xml:space="preserve"> − 3</a:t>
             </a:r>
             <a:br>
               <a:rPr lang="en-US" sz="1425" dirty="0">
@@ -11834,7 +12074,17 @@
                 <a:latin typeface="Segoe UI"/>
                 <a:cs typeface="Segoe UI"/>
               </a:rPr>
-              <a:t xml:space="preserve"> The slope is </a:t>
+              <a:t xml:space="preserve"> </a:t>
+            </a:r>
+            <a:r>
+              <a:rPr lang="en-US" sz="1425" dirty="0" i="1">
+                <a:solidFill>
+                  <a:srgbClr val="16171D"/>
+                </a:solidFill>
+                <a:latin typeface="Cambria"/>
+                <a:cs typeface="Cambria"/>
+              </a:rPr>
+              <a:t xml:space="preserve">g</a:t>
             </a:r>
             <a:r>
               <a:rPr lang="en-US" sz="1425" dirty="0">
@@ -11844,17 +12094,27 @@
                 <a:latin typeface="Cambria"/>
                 <a:cs typeface="Cambria"/>
               </a:rPr>
-              <a:t xml:space="preserve">−⅔</a:t>
+              <a:t xml:space="preserve">(</a:t>
+            </a:r>
+            <a:r>
+              <a:rPr lang="en-US" sz="1425" dirty="0" i="1">
+                <a:solidFill>
+                  <a:srgbClr val="16171D"/>
+                </a:solidFill>
+                <a:latin typeface="Cambria"/>
+                <a:cs typeface="Cambria"/>
+              </a:rPr>
+              <a:t xml:space="preserve">x</a:t>
             </a:r>
             <a:r>
               <a:rPr lang="en-US" sz="1425" dirty="0">
                 <a:solidFill>
                   <a:srgbClr val="16171D"/>
                 </a:solidFill>
-                <a:latin typeface="Segoe UI"/>
-                <a:cs typeface="Segoe UI"/>
-              </a:rPr>
-              <a:t xml:space="preserve">, the number with </a:t>
+                <a:latin typeface="Cambria"/>
+                <a:cs typeface="Cambria"/>
+              </a:rPr>
+              <a:t xml:space="preserve">) = 2</a:t>
             </a:r>
             <a:r>
               <a:rPr lang="en-US" sz="1425" dirty="0" i="1">
@@ -11864,7 +12124,37 @@
                 <a:latin typeface="Cambria"/>
                 <a:cs typeface="Cambria"/>
               </a:rPr>
+              <a:t xml:space="preserve">f</a:t>
+            </a:r>
+            <a:r>
+              <a:rPr lang="en-US" sz="1425" dirty="0">
+                <a:solidFill>
+                  <a:srgbClr val="16171D"/>
+                </a:solidFill>
+                <a:latin typeface="Cambria"/>
+                <a:cs typeface="Cambria"/>
+              </a:rPr>
+              <a:t xml:space="preserve">(</a:t>
+            </a:r>
+            <a:r>
+              <a:rPr lang="en-US" sz="1425" dirty="0" i="1">
+                <a:solidFill>
+                  <a:srgbClr val="16171D"/>
+                </a:solidFill>
+                <a:latin typeface="Cambria"/>
+                <a:cs typeface="Cambria"/>
+              </a:rPr>
               <a:t xml:space="preserve">x</a:t>
+            </a:r>
+            <a:r>
+              <a:rPr lang="en-US" sz="1425" dirty="0">
+                <a:solidFill>
+                  <a:srgbClr val="16171D"/>
+                </a:solidFill>
+                <a:latin typeface="Cambria"/>
+                <a:cs typeface="Cambria"/>
+              </a:rPr>
+              <a:t xml:space="preserve">) − 3</a:t>
             </a:r>
             <a:r>
               <a:rPr lang="en-US" sz="1425" dirty="0">
@@ -11903,7 +12193,216 @@
                 <a:latin typeface="Segoe UI"/>
                 <a:cs typeface="Segoe UI"/>
               </a:rPr>
-              <a:t xml:space="preserve"> It is negative, so the line falls from left to right: decreasing.</a:t>
+              <a:t xml:space="preserve"> Put in </a:t>
+            </a:r>
+            <a:r>
+              <a:rPr lang="en-US" sz="1425" dirty="0" i="1">
+                <a:solidFill>
+                  <a:srgbClr val="16171D"/>
+                </a:solidFill>
+                <a:latin typeface="Cambria"/>
+                <a:cs typeface="Cambria"/>
+              </a:rPr>
+              <a:t xml:space="preserve">x</a:t>
+            </a:r>
+            <a:r>
+              <a:rPr lang="en-US" sz="1425" dirty="0">
+                <a:solidFill>
+                  <a:srgbClr val="16171D"/>
+                </a:solidFill>
+                <a:latin typeface="Segoe UI"/>
+                <a:cs typeface="Segoe UI"/>
+              </a:rPr>
+              <a:t xml:space="preserve"> for </a:t>
+            </a:r>
+            <a:r>
+              <a:rPr lang="en-US" sz="1425" dirty="0" i="1">
+                <a:solidFill>
+                  <a:srgbClr val="16171D"/>
+                </a:solidFill>
+                <a:latin typeface="Cambria"/>
+                <a:cs typeface="Cambria"/>
+              </a:rPr>
+              <a:t xml:space="preserve">f</a:t>
+            </a:r>
+            <a:r>
+              <a:rPr lang="en-US" sz="1425" dirty="0">
+                <a:solidFill>
+                  <a:srgbClr val="16171D"/>
+                </a:solidFill>
+                <a:latin typeface="Cambria"/>
+                <a:cs typeface="Cambria"/>
+              </a:rPr>
+              <a:t xml:space="preserve">(</a:t>
+            </a:r>
+            <a:r>
+              <a:rPr lang="en-US" sz="1425" dirty="0" i="1">
+                <a:solidFill>
+                  <a:srgbClr val="16171D"/>
+                </a:solidFill>
+                <a:latin typeface="Cambria"/>
+                <a:cs typeface="Cambria"/>
+              </a:rPr>
+              <a:t xml:space="preserve">x</a:t>
+            </a:r>
+            <a:r>
+              <a:rPr lang="en-US" sz="1425" dirty="0">
+                <a:solidFill>
+                  <a:srgbClr val="16171D"/>
+                </a:solidFill>
+                <a:latin typeface="Cambria"/>
+                <a:cs typeface="Cambria"/>
+              </a:rPr>
+              <a:t xml:space="preserve">)</a:t>
+            </a:r>
+            <a:r>
+              <a:rPr lang="en-US" sz="1425" dirty="0">
+                <a:solidFill>
+                  <a:srgbClr val="16171D"/>
+                </a:solidFill>
+                <a:latin typeface="Segoe UI"/>
+                <a:cs typeface="Segoe UI"/>
+              </a:rPr>
+              <a:t xml:space="preserve">: </a:t>
+            </a:r>
+            <a:r>
+              <a:rPr lang="en-US" sz="1425" dirty="0" i="1">
+                <a:solidFill>
+                  <a:srgbClr val="16171D"/>
+                </a:solidFill>
+                <a:latin typeface="Cambria"/>
+                <a:cs typeface="Cambria"/>
+              </a:rPr>
+              <a:t xml:space="preserve">g</a:t>
+            </a:r>
+            <a:r>
+              <a:rPr lang="en-US" sz="1425" dirty="0">
+                <a:solidFill>
+                  <a:srgbClr val="16171D"/>
+                </a:solidFill>
+                <a:latin typeface="Cambria"/>
+                <a:cs typeface="Cambria"/>
+              </a:rPr>
+              <a:t xml:space="preserve">(</a:t>
+            </a:r>
+            <a:r>
+              <a:rPr lang="en-US" sz="1425" dirty="0" i="1">
+                <a:solidFill>
+                  <a:srgbClr val="16171D"/>
+                </a:solidFill>
+                <a:latin typeface="Cambria"/>
+                <a:cs typeface="Cambria"/>
+              </a:rPr>
+              <a:t xml:space="preserve">x</a:t>
+            </a:r>
+            <a:r>
+              <a:rPr lang="en-US" sz="1425" dirty="0">
+                <a:solidFill>
+                  <a:srgbClr val="16171D"/>
+                </a:solidFill>
+                <a:latin typeface="Cambria"/>
+                <a:cs typeface="Cambria"/>
+              </a:rPr>
+              <a:t xml:space="preserve">) = 2</a:t>
+            </a:r>
+            <a:r>
+              <a:rPr lang="en-US" sz="1425" dirty="0" i="1">
+                <a:solidFill>
+                  <a:srgbClr val="16171D"/>
+                </a:solidFill>
+                <a:latin typeface="Cambria"/>
+                <a:cs typeface="Cambria"/>
+              </a:rPr>
+              <a:t xml:space="preserve">x</a:t>
+            </a:r>
+            <a:r>
+              <a:rPr lang="en-US" sz="1425" dirty="0">
+                <a:solidFill>
+                  <a:srgbClr val="16171D"/>
+                </a:solidFill>
+                <a:latin typeface="Cambria"/>
+                <a:cs typeface="Cambria"/>
+              </a:rPr>
+              <a:t xml:space="preserve"> − 3</a:t>
+            </a:r>
+            <a:r>
+              <a:rPr lang="en-US" sz="1425" dirty="0">
+                <a:solidFill>
+                  <a:srgbClr val="16171D"/>
+                </a:solidFill>
+                <a:latin typeface="Segoe UI"/>
+                <a:cs typeface="Segoe UI"/>
+              </a:rPr>
+              <a:t xml:space="preserve">.</a:t>
+            </a:r>
+            <a:br>
+              <a:rPr lang="en-US" sz="1425" dirty="0">
+                <a:solidFill>
+                  <a:srgbClr val="16171D"/>
+                </a:solidFill>
+                <a:latin typeface="Segoe UI"/>
+                <a:cs typeface="Segoe UI"/>
+              </a:rPr>
+            </a:br>
+            <a:r>
+              <a:rPr lang="en-US" sz="1425" dirty="0" b="1">
+                <a:solidFill>
+                  <a:srgbClr val="16171D"/>
+                </a:solidFill>
+                <a:latin typeface="Segoe UI"/>
+                <a:cs typeface="Segoe UI"/>
+              </a:rPr>
+              <a:t xml:space="preserve">3.</a:t>
+            </a:r>
+            <a:r>
+              <a:rPr lang="en-US" sz="1425" dirty="0">
+                <a:solidFill>
+                  <a:srgbClr val="16171D"/>
+                </a:solidFill>
+                <a:latin typeface="Segoe UI"/>
+                <a:cs typeface="Segoe UI"/>
+              </a:rPr>
+              <a:t xml:space="preserve"> Slope 2 (dilation by 2), </a:t>
+            </a:r>
+            <a:r>
+              <a:rPr lang="en-US" sz="1425" dirty="0" i="1">
+                <a:solidFill>
+                  <a:srgbClr val="16171D"/>
+                </a:solidFill>
+                <a:latin typeface="Cambria"/>
+                <a:cs typeface="Cambria"/>
+              </a:rPr>
+              <a:t xml:space="preserve">y</a:t>
+            </a:r>
+            <a:r>
+              <a:rPr lang="en-US" sz="1425" dirty="0">
+                <a:solidFill>
+                  <a:srgbClr val="16171D"/>
+                </a:solidFill>
+                <a:latin typeface="Segoe UI"/>
+                <a:cs typeface="Segoe UI"/>
+              </a:rPr>
+              <a:t xml:space="preserve">-intercept </a:t>
+            </a:r>
+            <a:r>
+              <a:rPr lang="en-US" sz="1425" dirty="0">
+                <a:solidFill>
+                  <a:srgbClr val="16171D"/>
+                </a:solidFill>
+                <a:latin typeface="Cambria"/>
+                <a:cs typeface="Cambria"/>
+              </a:rPr>
+              <a:t xml:space="preserve">−3</a:t>
+            </a:r>
+            <a:r>
+              <a:rPr lang="en-US" sz="1425" dirty="0">
+                <a:solidFill>
+                  <a:srgbClr val="16171D"/>
+                </a:solidFill>
+                <a:latin typeface="Segoe UI"/>
+                <a:cs typeface="Segoe UI"/>
+              </a:rPr>
+              <a:t xml:space="preserve"> (down 3).</a:t>
             </a:r>
             <a:endParaRPr lang="en-US" sz="1425" dirty="0"/>
           </a:p>
@@ -14673,7 +15172,7 @@
                 <a:latin typeface="Segoe UI"/>
                 <a:cs typeface="Segoe UI"/>
               </a:rPr>
-              <a:t xml:space="preserve"> For </a:t>
+              <a:t xml:space="preserve"> The graph of </a:t>
             </a:r>
             <a:r>
               <a:rPr lang="en-US" sz="1575" dirty="0" i="1">
@@ -14713,7 +15212,7 @@
                 <a:latin typeface="Cambria"/>
                 <a:cs typeface="Cambria"/>
               </a:rPr>
-              <a:t xml:space="preserve">) = </a:t>
+              <a:t xml:space="preserve">) = 3</a:t>
             </a:r>
             <a:r>
               <a:rPr lang="en-US" sz="1575" dirty="0" i="1">
@@ -14733,117 +15232,7 @@
                 <a:latin typeface="Segoe UI"/>
                 <a:cs typeface="Segoe UI"/>
               </a:rPr>
-              <a:t xml:space="preserve">, is the graph of </a:t>
-            </a:r>
-            <a:r>
-              <a:rPr lang="en-US" sz="1575" dirty="0" i="1">
-                <a:solidFill>
-                  <a:srgbClr val="16171D"/>
-                </a:solidFill>
-                <a:latin typeface="Cambria"/>
-                <a:cs typeface="Cambria"/>
-              </a:rPr>
-              <a:t xml:space="preserve">f</a:t>
-            </a:r>
-            <a:r>
-              <a:rPr lang="en-US" sz="1575" dirty="0">
-                <a:solidFill>
-                  <a:srgbClr val="16171D"/>
-                </a:solidFill>
-                <a:latin typeface="Cambria"/>
-                <a:cs typeface="Cambria"/>
-              </a:rPr>
-              <a:t xml:space="preserve">(2</a:t>
-            </a:r>
-            <a:r>
-              <a:rPr lang="en-US" sz="1575" dirty="0" i="1">
-                <a:solidFill>
-                  <a:srgbClr val="16171D"/>
-                </a:solidFill>
-                <a:latin typeface="Cambria"/>
-                <a:cs typeface="Cambria"/>
-              </a:rPr>
-              <a:t xml:space="preserve">x</a:t>
-            </a:r>
-            <a:r>
-              <a:rPr lang="en-US" sz="1575" dirty="0">
-                <a:solidFill>
-                  <a:srgbClr val="16171D"/>
-                </a:solidFill>
-                <a:latin typeface="Cambria"/>
-                <a:cs typeface="Cambria"/>
-              </a:rPr>
-              <a:t xml:space="preserve">)</a:t>
-            </a:r>
-            <a:r>
-              <a:rPr lang="en-US" sz="1575" dirty="0">
-                <a:solidFill>
-                  <a:srgbClr val="16171D"/>
-                </a:solidFill>
-                <a:latin typeface="Segoe UI"/>
-                <a:cs typeface="Segoe UI"/>
-              </a:rPr>
-              <a:t xml:space="preserve"> the same as the graph of </a:t>
-            </a:r>
-            <a:r>
-              <a:rPr lang="en-US" sz="1575" dirty="0">
-                <a:solidFill>
-                  <a:srgbClr val="16171D"/>
-                </a:solidFill>
-                <a:latin typeface="Cambria"/>
-                <a:cs typeface="Cambria"/>
-              </a:rPr>
-              <a:t xml:space="preserve">2</a:t>
-            </a:r>
-            <a:r>
-              <a:rPr lang="en-US" sz="1575" dirty="0" i="1">
-                <a:solidFill>
-                  <a:srgbClr val="16171D"/>
-                </a:solidFill>
-                <a:latin typeface="Cambria"/>
-                <a:cs typeface="Cambria"/>
-              </a:rPr>
-              <a:t xml:space="preserve">f</a:t>
-            </a:r>
-            <a:r>
-              <a:rPr lang="en-US" sz="1575" dirty="0">
-                <a:solidFill>
-                  <a:srgbClr val="16171D"/>
-                </a:solidFill>
-                <a:latin typeface="Cambria"/>
-                <a:cs typeface="Cambria"/>
-              </a:rPr>
-              <a:t xml:space="preserve">(</a:t>
-            </a:r>
-            <a:r>
-              <a:rPr lang="en-US" sz="1575" dirty="0" i="1">
-                <a:solidFill>
-                  <a:srgbClr val="16171D"/>
-                </a:solidFill>
-                <a:latin typeface="Cambria"/>
-                <a:cs typeface="Cambria"/>
-              </a:rPr>
-              <a:t xml:space="preserve">x</a:t>
-            </a:r>
-            <a:r>
-              <a:rPr lang="en-US" sz="1575" dirty="0">
-                <a:solidFill>
-                  <a:srgbClr val="16171D"/>
-                </a:solidFill>
-                <a:latin typeface="Cambria"/>
-                <a:cs typeface="Cambria"/>
-              </a:rPr>
-              <a:t xml:space="preserve">)</a:t>
-            </a:r>
-            <a:r>
-              <a:rPr lang="en-US" sz="1575" dirty="0">
-                <a:solidFill>
-                  <a:srgbClr val="16171D"/>
-                </a:solidFill>
-                <a:latin typeface="Segoe UI"/>
-                <a:cs typeface="Segoe UI"/>
-              </a:rPr>
-              <a:t xml:space="preserve">?</a:t>
+              <a:t xml:space="preserve"> is translated right 2 units. Which function represents the new graph?</a:t>
             </a:r>
             <a:endParaRPr lang="en-US" sz="1575" dirty="0"/>
           </a:p>
@@ -14897,7 +15286,7 @@
                 <a:latin typeface="Segoe UI"/>
                 <a:cs typeface="Segoe UI"/>
               </a:rPr>
-              <a:t xml:space="preserve"> inside: </a:t>
+              <a:t xml:space="preserve"> right </a:t>
             </a:r>
             <a:r>
               <a:rPr lang="en-US" sz="1575" dirty="0" i="1">
@@ -14907,6 +15296,26 @@
                 <a:latin typeface="Cambria"/>
                 <a:cs typeface="Cambria"/>
               </a:rPr>
+              <a:t xml:space="preserve">c</a:t>
+            </a:r>
+            <a:r>
+              <a:rPr lang="en-US" sz="1575" dirty="0">
+                <a:solidFill>
+                  <a:srgbClr val="16171D"/>
+                </a:solidFill>
+                <a:latin typeface="Segoe UI"/>
+                <a:cs typeface="Segoe UI"/>
+              </a:rPr>
+              <a:t xml:space="preserve">: </a:t>
+            </a:r>
+            <a:r>
+              <a:rPr lang="en-US" sz="1575" dirty="0" i="1">
+                <a:solidFill>
+                  <a:srgbClr val="16171D"/>
+                </a:solidFill>
+                <a:latin typeface="Cambria"/>
+                <a:cs typeface="Cambria"/>
+              </a:rPr>
               <a:t xml:space="preserve">f</a:t>
             </a:r>
             <a:r>
@@ -14917,7 +15326,7 @@
                 <a:latin typeface="Cambria"/>
                 <a:cs typeface="Cambria"/>
               </a:rPr>
-              <a:t xml:space="preserve">(2</a:t>
+              <a:t xml:space="preserve">(</a:t>
             </a:r>
             <a:r>
               <a:rPr lang="en-US" sz="1575" dirty="0" i="1">
@@ -14937,6 +15346,26 @@
                 <a:latin typeface="Cambria"/>
                 <a:cs typeface="Cambria"/>
               </a:rPr>
+              <a:t xml:space="preserve"> − </a:t>
+            </a:r>
+            <a:r>
+              <a:rPr lang="en-US" sz="1575" dirty="0" i="1">
+                <a:solidFill>
+                  <a:srgbClr val="16171D"/>
+                </a:solidFill>
+                <a:latin typeface="Cambria"/>
+                <a:cs typeface="Cambria"/>
+              </a:rPr>
+              <a:t xml:space="preserve">c</a:t>
+            </a:r>
+            <a:r>
+              <a:rPr lang="en-US" sz="1575" dirty="0">
+                <a:solidFill>
+                  <a:srgbClr val="16171D"/>
+                </a:solidFill>
+                <a:latin typeface="Cambria"/>
+                <a:cs typeface="Cambria"/>
+              </a:rPr>
               <a:t xml:space="preserve">)</a:t>
             </a:r>
             <a:r>
@@ -14947,57 +15376,7 @@
                 <a:latin typeface="Segoe UI"/>
                 <a:cs typeface="Segoe UI"/>
               </a:rPr>
-              <a:t xml:space="preserve"> · outside: </a:t>
-            </a:r>
-            <a:r>
-              <a:rPr lang="en-US" sz="1575" dirty="0">
-                <a:solidFill>
-                  <a:srgbClr val="16171D"/>
-                </a:solidFill>
-                <a:latin typeface="Cambria"/>
-                <a:cs typeface="Cambria"/>
-              </a:rPr>
-              <a:t xml:space="preserve">2</a:t>
-            </a:r>
-            <a:r>
-              <a:rPr lang="en-US" sz="1575" dirty="0" i="1">
-                <a:solidFill>
-                  <a:srgbClr val="16171D"/>
-                </a:solidFill>
-                <a:latin typeface="Cambria"/>
-                <a:cs typeface="Cambria"/>
-              </a:rPr>
-              <a:t xml:space="preserve">f</a:t>
-            </a:r>
-            <a:r>
-              <a:rPr lang="en-US" sz="1575" dirty="0">
-                <a:solidFill>
-                  <a:srgbClr val="16171D"/>
-                </a:solidFill>
-                <a:latin typeface="Cambria"/>
-                <a:cs typeface="Cambria"/>
-              </a:rPr>
-              <a:t xml:space="preserve">(</a:t>
-            </a:r>
-            <a:r>
-              <a:rPr lang="en-US" sz="1575" dirty="0" i="1">
-                <a:solidFill>
-                  <a:srgbClr val="16171D"/>
-                </a:solidFill>
-                <a:latin typeface="Cambria"/>
-                <a:cs typeface="Cambria"/>
-              </a:rPr>
-              <a:t xml:space="preserve">x</a:t>
-            </a:r>
-            <a:r>
-              <a:rPr lang="en-US" sz="1575" dirty="0">
-                <a:solidFill>
-                  <a:srgbClr val="16171D"/>
-                </a:solidFill>
-                <a:latin typeface="Cambria"/>
-                <a:cs typeface="Cambria"/>
-              </a:rPr>
-              <a:t xml:space="preserve">)</a:t>
+              <a:t xml:space="preserve">, then distribute</a:t>
             </a:r>
             <a:endParaRPr lang="en-US" sz="1575" dirty="0"/>
           </a:p>
@@ -15012,7 +15391,7 @@
         <p:spPr>
           <a:xfrm>
             <a:off x="6419698" y="5111496"/>
-            <a:ext cx="4251503" cy="1033272"/>
+            <a:ext cx="4155731" cy="1033272"/>
           </a:xfrm>
           <a:prstGeom prst="roundRect">
             <a:avLst>
@@ -15048,14 +15427,24 @@
               <a:t xml:space="preserve">ANSWER   </a:t>
             </a:r>
             <a:r>
+              <a:rPr lang="en-US" sz="1425" dirty="0" b="1" i="1">
+                <a:solidFill>
+                  <a:srgbClr val="16171D"/>
+                </a:solidFill>
+                <a:latin typeface="Cambria"/>
+                <a:cs typeface="Cambria"/>
+              </a:rPr>
+              <a:t xml:space="preserve">g</a:t>
+            </a:r>
+            <a:r>
               <a:rPr lang="en-US" sz="1425" dirty="0" b="1">
                 <a:solidFill>
                   <a:srgbClr val="16171D"/>
                 </a:solidFill>
-                <a:latin typeface="Segoe UI"/>
-                <a:cs typeface="Segoe UI"/>
-              </a:rPr>
-              <a:t xml:space="preserve">Yes, both are </a:t>
+                <a:latin typeface="Cambria"/>
+                <a:cs typeface="Cambria"/>
+              </a:rPr>
+              <a:t xml:space="preserve">(</a:t>
             </a:r>
             <a:r>
               <a:rPr lang="en-US" sz="1425" dirty="0" b="1" i="1">
@@ -15065,7 +15454,7 @@
                 <a:latin typeface="Cambria"/>
                 <a:cs typeface="Cambria"/>
               </a:rPr>
-              <a:t xml:space="preserve">y</a:t>
+              <a:t xml:space="preserve">x</a:t>
             </a:r>
             <a:r>
               <a:rPr lang="en-US" sz="1425" dirty="0" b="1">
@@ -15075,7 +15464,7 @@
                 <a:latin typeface="Cambria"/>
                 <a:cs typeface="Cambria"/>
               </a:rPr>
-              <a:t xml:space="preserve"> = 2</a:t>
+              <a:t xml:space="preserve">) = 3</a:t>
             </a:r>
             <a:r>
               <a:rPr lang="en-US" sz="1425" dirty="0" b="1" i="1">
@@ -15086,6 +15475,16 @@
                 <a:cs typeface="Cambria"/>
               </a:rPr>
               <a:t xml:space="preserve">x</a:t>
+            </a:r>
+            <a:r>
+              <a:rPr lang="en-US" sz="1425" dirty="0" b="1">
+                <a:solidFill>
+                  <a:srgbClr val="16171D"/>
+                </a:solidFill>
+                <a:latin typeface="Cambria"/>
+                <a:cs typeface="Cambria"/>
+              </a:rPr>
+              <a:t xml:space="preserve"> − 6</a:t>
             </a:r>
             <a:br>
               <a:rPr lang="en-US" sz="1425" dirty="0">
@@ -15114,7 +15513,7 @@
                 <a:latin typeface="Segoe UI"/>
                 <a:cs typeface="Segoe UI"/>
               </a:rPr>
-              <a:t xml:space="preserve"> </a:t>
+              <a:t xml:space="preserve"> Right 2: </a:t>
             </a:r>
             <a:r>
               <a:rPr lang="en-US" sz="1425" dirty="0" i="1">
@@ -15124,6 +15523,46 @@
                 <a:latin typeface="Cambria"/>
                 <a:cs typeface="Cambria"/>
               </a:rPr>
+              <a:t xml:space="preserve">g</a:t>
+            </a:r>
+            <a:r>
+              <a:rPr lang="en-US" sz="1425" dirty="0">
+                <a:solidFill>
+                  <a:srgbClr val="16171D"/>
+                </a:solidFill>
+                <a:latin typeface="Cambria"/>
+                <a:cs typeface="Cambria"/>
+              </a:rPr>
+              <a:t xml:space="preserve">(</a:t>
+            </a:r>
+            <a:r>
+              <a:rPr lang="en-US" sz="1425" dirty="0" i="1">
+                <a:solidFill>
+                  <a:srgbClr val="16171D"/>
+                </a:solidFill>
+                <a:latin typeface="Cambria"/>
+                <a:cs typeface="Cambria"/>
+              </a:rPr>
+              <a:t xml:space="preserve">x</a:t>
+            </a:r>
+            <a:r>
+              <a:rPr lang="en-US" sz="1425" dirty="0">
+                <a:solidFill>
+                  <a:srgbClr val="16171D"/>
+                </a:solidFill>
+                <a:latin typeface="Cambria"/>
+                <a:cs typeface="Cambria"/>
+              </a:rPr>
+              <a:t xml:space="preserve">) = </a:t>
+            </a:r>
+            <a:r>
+              <a:rPr lang="en-US" sz="1425" dirty="0" i="1">
+                <a:solidFill>
+                  <a:srgbClr val="16171D"/>
+                </a:solidFill>
+                <a:latin typeface="Cambria"/>
+                <a:cs typeface="Cambria"/>
+              </a:rPr>
               <a:t xml:space="preserve">f</a:t>
             </a:r>
             <a:r>
@@ -15134,7 +15573,7 @@
                 <a:latin typeface="Cambria"/>
                 <a:cs typeface="Cambria"/>
               </a:rPr>
-              <a:t xml:space="preserve">(2</a:t>
+              <a:t xml:space="preserve">(</a:t>
             </a:r>
             <a:r>
               <a:rPr lang="en-US" sz="1425" dirty="0" i="1">
@@ -15154,87 +15593,27 @@
                 <a:latin typeface="Cambria"/>
                 <a:cs typeface="Cambria"/>
               </a:rPr>
-              <a:t xml:space="preserve">)</a:t>
+              <a:t xml:space="preserve"> − 2) = 3(</a:t>
+            </a:r>
+            <a:r>
+              <a:rPr lang="en-US" sz="1425" dirty="0" i="1">
+                <a:solidFill>
+                  <a:srgbClr val="16171D"/>
+                </a:solidFill>
+                <a:latin typeface="Cambria"/>
+                <a:cs typeface="Cambria"/>
+              </a:rPr>
+              <a:t xml:space="preserve">x</a:t>
             </a:r>
             <a:r>
               <a:rPr lang="en-US" sz="1425" dirty="0">
                 <a:solidFill>
                   <a:srgbClr val="16171D"/>
                 </a:solidFill>
-                <a:latin typeface="Segoe UI"/>
-                <a:cs typeface="Segoe UI"/>
-              </a:rPr>
-              <a:t xml:space="preserve">: put </a:t>
-            </a:r>
-            <a:r>
-              <a:rPr lang="en-US" sz="1425" dirty="0">
-                <a:solidFill>
-                  <a:srgbClr val="16171D"/>
-                </a:solidFill>
-                <a:latin typeface="Cambria"/>
-                <a:cs typeface="Cambria"/>
-              </a:rPr>
-              <a:t xml:space="preserve">2</a:t>
-            </a:r>
-            <a:r>
-              <a:rPr lang="en-US" sz="1425" dirty="0" i="1">
-                <a:solidFill>
-                  <a:srgbClr val="16171D"/>
-                </a:solidFill>
-                <a:latin typeface="Cambria"/>
-                <a:cs typeface="Cambria"/>
-              </a:rPr>
-              <a:t xml:space="preserve">x</a:t>
-            </a:r>
-            <a:r>
-              <a:rPr lang="en-US" sz="1425" dirty="0">
-                <a:solidFill>
-                  <a:srgbClr val="16171D"/>
-                </a:solidFill>
-                <a:latin typeface="Segoe UI"/>
-                <a:cs typeface="Segoe UI"/>
-              </a:rPr>
-              <a:t xml:space="preserve"> in for </a:t>
-            </a:r>
-            <a:r>
-              <a:rPr lang="en-US" sz="1425" dirty="0" i="1">
-                <a:solidFill>
-                  <a:srgbClr val="16171D"/>
-                </a:solidFill>
-                <a:latin typeface="Cambria"/>
-                <a:cs typeface="Cambria"/>
-              </a:rPr>
-              <a:t xml:space="preserve">x</a:t>
-            </a:r>
-            <a:r>
-              <a:rPr lang="en-US" sz="1425" dirty="0">
-                <a:solidFill>
-                  <a:srgbClr val="16171D"/>
-                </a:solidFill>
-                <a:latin typeface="Segoe UI"/>
-                <a:cs typeface="Segoe UI"/>
-              </a:rPr>
-              <a:t xml:space="preserve">, so </a:t>
-            </a:r>
-            <a:r>
-              <a:rPr lang="en-US" sz="1425" dirty="0">
-                <a:solidFill>
-                  <a:srgbClr val="16171D"/>
-                </a:solidFill>
-                <a:latin typeface="Cambria"/>
-                <a:cs typeface="Cambria"/>
-              </a:rPr>
-              <a:t xml:space="preserve">2</a:t>
-            </a:r>
-            <a:r>
-              <a:rPr lang="en-US" sz="1425" dirty="0" i="1">
-                <a:solidFill>
-                  <a:srgbClr val="16171D"/>
-                </a:solidFill>
-                <a:latin typeface="Cambria"/>
-                <a:cs typeface="Cambria"/>
-              </a:rPr>
-              <a:t xml:space="preserve">x</a:t>
+                <a:latin typeface="Cambria"/>
+                <a:cs typeface="Cambria"/>
+              </a:rPr>
+              <a:t xml:space="preserve"> − 2)</a:t>
             </a:r>
             <a:r>
               <a:rPr lang="en-US" sz="1425" dirty="0">
@@ -15273,7 +15652,7 @@
                 <a:latin typeface="Segoe UI"/>
                 <a:cs typeface="Segoe UI"/>
               </a:rPr>
-              <a:t xml:space="preserve"> </a:t>
+              <a:t xml:space="preserve"> Distribute: </a:t>
             </a:r>
             <a:r>
               <a:rPr lang="en-US" sz="1425" dirty="0">
@@ -15283,7 +15662,7 @@
                 <a:latin typeface="Cambria"/>
                 <a:cs typeface="Cambria"/>
               </a:rPr>
-              <a:t xml:space="preserve">2</a:t>
+              <a:t xml:space="preserve">3 · </a:t>
             </a:r>
             <a:r>
               <a:rPr lang="en-US" sz="1425" dirty="0" i="1">
@@ -15293,7 +15672,7 @@
                 <a:latin typeface="Cambria"/>
                 <a:cs typeface="Cambria"/>
               </a:rPr>
-              <a:t xml:space="preserve">f</a:t>
+              <a:t xml:space="preserve">x</a:t>
             </a:r>
             <a:r>
               <a:rPr lang="en-US" sz="1425" dirty="0">
@@ -15303,7 +15682,7 @@
                 <a:latin typeface="Cambria"/>
                 <a:cs typeface="Cambria"/>
               </a:rPr>
-              <a:t xml:space="preserve">(</a:t>
+              <a:t xml:space="preserve"> − 3 · 2 = 3</a:t>
             </a:r>
             <a:r>
               <a:rPr lang="en-US" sz="1425" dirty="0" i="1">
@@ -15323,57 +15702,7 @@
                 <a:latin typeface="Cambria"/>
                 <a:cs typeface="Cambria"/>
               </a:rPr>
-              <a:t xml:space="preserve">)</a:t>
-            </a:r>
-            <a:r>
-              <a:rPr lang="en-US" sz="1425" dirty="0">
-                <a:solidFill>
-                  <a:srgbClr val="16171D"/>
-                </a:solidFill>
-                <a:latin typeface="Segoe UI"/>
-                <a:cs typeface="Segoe UI"/>
-              </a:rPr>
-              <a:t xml:space="preserve">: multiply </a:t>
-            </a:r>
-            <a:r>
-              <a:rPr lang="en-US" sz="1425" dirty="0" i="1">
-                <a:solidFill>
-                  <a:srgbClr val="16171D"/>
-                </a:solidFill>
-                <a:latin typeface="Cambria"/>
-                <a:cs typeface="Cambria"/>
-              </a:rPr>
-              <a:t xml:space="preserve">x</a:t>
-            </a:r>
-            <a:r>
-              <a:rPr lang="en-US" sz="1425" dirty="0">
-                <a:solidFill>
-                  <a:srgbClr val="16171D"/>
-                </a:solidFill>
-                <a:latin typeface="Segoe UI"/>
-                <a:cs typeface="Segoe UI"/>
-              </a:rPr>
-              <a:t xml:space="preserve"> by 2, so </a:t>
-            </a:r>
-            <a:r>
-              <a:rPr lang="en-US" sz="1425" dirty="0">
-                <a:solidFill>
-                  <a:srgbClr val="16171D"/>
-                </a:solidFill>
-                <a:latin typeface="Cambria"/>
-                <a:cs typeface="Cambria"/>
-              </a:rPr>
-              <a:t xml:space="preserve">2</a:t>
-            </a:r>
-            <a:r>
-              <a:rPr lang="en-US" sz="1425" dirty="0" i="1">
-                <a:solidFill>
-                  <a:srgbClr val="16171D"/>
-                </a:solidFill>
-                <a:latin typeface="Cambria"/>
-                <a:cs typeface="Cambria"/>
-              </a:rPr>
-              <a:t xml:space="preserve">x</a:t>
+              <a:t xml:space="preserve"> − 6</a:t>
             </a:r>
             <a:r>
               <a:rPr lang="en-US" sz="1425" dirty="0">
@@ -15412,7 +15741,7 @@
                 <a:latin typeface="Segoe UI"/>
                 <a:cs typeface="Segoe UI"/>
               </a:rPr>
-              <a:t xml:space="preserve"> Both are </a:t>
+              <a:t xml:space="preserve"> </a:t>
             </a:r>
             <a:r>
               <a:rPr lang="en-US" sz="1425" dirty="0" i="1">
@@ -15422,7 +15751,7 @@
                 <a:latin typeface="Cambria"/>
                 <a:cs typeface="Cambria"/>
               </a:rPr>
-              <a:t xml:space="preserve">y</a:t>
+              <a:t xml:space="preserve">g</a:t>
             </a:r>
             <a:r>
               <a:rPr lang="en-US" sz="1425" dirty="0">
@@ -15432,7 +15761,7 @@
                 <a:latin typeface="Cambria"/>
                 <a:cs typeface="Cambria"/>
               </a:rPr>
-              <a:t xml:space="preserve"> = 2</a:t>
+              <a:t xml:space="preserve">(</a:t>
             </a:r>
             <a:r>
               <a:rPr lang="en-US" sz="1425" dirty="0" i="1">
@@ -15449,10 +15778,40 @@
                 <a:solidFill>
                   <a:srgbClr val="16171D"/>
                 </a:solidFill>
-                <a:latin typeface="Segoe UI"/>
-                <a:cs typeface="Segoe UI"/>
-              </a:rPr>
-              <a:t xml:space="preserve">: yes, the same graph.</a:t>
+                <a:latin typeface="Cambria"/>
+                <a:cs typeface="Cambria"/>
+              </a:rPr>
+              <a:t xml:space="preserve">) = 3</a:t>
+            </a:r>
+            <a:r>
+              <a:rPr lang="en-US" sz="1425" dirty="0" i="1">
+                <a:solidFill>
+                  <a:srgbClr val="16171D"/>
+                </a:solidFill>
+                <a:latin typeface="Cambria"/>
+                <a:cs typeface="Cambria"/>
+              </a:rPr>
+              <a:t xml:space="preserve">x</a:t>
+            </a:r>
+            <a:r>
+              <a:rPr lang="en-US" sz="1425" dirty="0">
+                <a:solidFill>
+                  <a:srgbClr val="16171D"/>
+                </a:solidFill>
+                <a:latin typeface="Cambria"/>
+                <a:cs typeface="Cambria"/>
+              </a:rPr>
+              <a:t xml:space="preserve"> − 6</a:t>
+            </a:r>
+            <a:r>
+              <a:rPr lang="en-US" sz="1425" dirty="0">
+                <a:solidFill>
+                  <a:srgbClr val="16171D"/>
+                </a:solidFill>
+                <a:latin typeface="Segoe UI"/>
+                <a:cs typeface="Segoe UI"/>
+              </a:rPr>
+              <a:t xml:space="preserve">.</a:t>
             </a:r>
             <a:endParaRPr lang="en-US" sz="1425" dirty="0"/>
           </a:p>

--- a/IEP/t2-lesson2-vertical-horizontal-transformations-IEP.pptx
+++ b/IEP/t2-lesson2-vertical-horizontal-transformations-IEP.pptx
@@ -2029,7 +2029,7 @@
                 <a:latin typeface="Segoe UI"/>
                 <a:cs typeface="Segoe UI"/>
               </a:rPr>
-              <a:t xml:space="preserve">You do · Try it</a:t>
+              <a:t xml:space="preserve">You do · Try it · ★ Essential</a:t>
             </a:r>
             <a:endParaRPr lang="en-US" sz="1200" dirty="0"/>
           </a:p>
@@ -3062,7 +3062,7 @@
                 <a:latin typeface="Segoe UI"/>
                 <a:cs typeface="Segoe UI"/>
               </a:rPr>
-              <a:t xml:space="preserve">Check it · Step by step</a:t>
+              <a:t xml:space="preserve">Check it · Step by step · ★ Essential</a:t>
             </a:r>
             <a:endParaRPr lang="en-US" sz="1200" dirty="0"/>
           </a:p>
@@ -5032,7 +5032,7 @@
                 <a:latin typeface="Segoe UI"/>
                 <a:cs typeface="Segoe UI"/>
               </a:rPr>
-              <a:t xml:space="preserve">I do · Stretch inside</a:t>
+              <a:t xml:space="preserve">I do · Stretch inside · ★ Essential</a:t>
             </a:r>
             <a:endParaRPr lang="en-US" sz="1200" dirty="0"/>
           </a:p>
@@ -17595,7 +17595,7 @@
                 <a:latin typeface="Segoe UI"/>
                 <a:cs typeface="Segoe UI"/>
               </a:rPr>
-              <a:t xml:space="preserve">I do · Watch me</a:t>
+              <a:t xml:space="preserve">I do · Watch me · ★ Essential</a:t>
             </a:r>
             <a:endParaRPr lang="en-US" sz="1200" dirty="0"/>
           </a:p>
@@ -22546,7 +22546,7 @@
                 <a:latin typeface="Segoe UI"/>
                 <a:cs typeface="Segoe UI"/>
               </a:rPr>
-              <a:t xml:space="preserve">You do · Try it</a:t>
+              <a:t xml:space="preserve">You do · Try it · ★ Essential</a:t>
             </a:r>
             <a:endParaRPr lang="en-US" sz="1200" dirty="0"/>
           </a:p>
@@ -23569,7 +23569,7 @@
                 <a:latin typeface="Segoe UI"/>
                 <a:cs typeface="Segoe UI"/>
               </a:rPr>
-              <a:t xml:space="preserve">Check it · Step by step</a:t>
+              <a:t xml:space="preserve">Check it · Step by step · ★ Essential</a:t>
             </a:r>
             <a:endParaRPr lang="en-US" sz="1200" dirty="0"/>
           </a:p>
@@ -25710,7 +25710,7 @@
                 <a:latin typeface="Segoe UI"/>
                 <a:cs typeface="Segoe UI"/>
               </a:rPr>
-              <a:t xml:space="preserve">We do · Simplify</a:t>
+              <a:t xml:space="preserve">We do · Simplify · ★ Essential</a:t>
             </a:r>
             <a:endParaRPr lang="en-US" sz="1200" dirty="0"/>
           </a:p>
